--- a/LabBook_20.pptx
+++ b/LabBook_20.pptx
@@ -5,10 +5,10 @@
     <p:sldMasterId id="2147483648" r:id="rId1"/>
   </p:sldMasterIdLst>
   <p:notesMasterIdLst>
-    <p:notesMasterId r:id="rId18"/>
+    <p:notesMasterId r:id="rId19"/>
   </p:notesMasterIdLst>
   <p:handoutMasterIdLst>
-    <p:handoutMasterId r:id="rId19"/>
+    <p:handoutMasterId r:id="rId20"/>
   </p:handoutMasterIdLst>
   <p:sldIdLst>
     <p:sldId id="256" r:id="rId2"/>
@@ -16,17 +16,18 @@
     <p:sldId id="295" r:id="rId4"/>
     <p:sldId id="302" r:id="rId5"/>
     <p:sldId id="303" r:id="rId6"/>
-    <p:sldId id="291" r:id="rId7"/>
-    <p:sldId id="296" r:id="rId8"/>
-    <p:sldId id="294" r:id="rId9"/>
-    <p:sldId id="299" r:id="rId10"/>
-    <p:sldId id="300" r:id="rId11"/>
-    <p:sldId id="301" r:id="rId12"/>
-    <p:sldId id="297" r:id="rId13"/>
-    <p:sldId id="290" r:id="rId14"/>
-    <p:sldId id="292" r:id="rId15"/>
-    <p:sldId id="298" r:id="rId16"/>
-    <p:sldId id="288" r:id="rId17"/>
+    <p:sldId id="304" r:id="rId7"/>
+    <p:sldId id="291" r:id="rId8"/>
+    <p:sldId id="296" r:id="rId9"/>
+    <p:sldId id="294" r:id="rId10"/>
+    <p:sldId id="299" r:id="rId11"/>
+    <p:sldId id="300" r:id="rId12"/>
+    <p:sldId id="301" r:id="rId13"/>
+    <p:sldId id="297" r:id="rId14"/>
+    <p:sldId id="290" r:id="rId15"/>
+    <p:sldId id="292" r:id="rId16"/>
+    <p:sldId id="298" r:id="rId17"/>
+    <p:sldId id="288" r:id="rId18"/>
   </p:sldIdLst>
   <p:sldSz cx="12192000" cy="6858000"/>
   <p:notesSz cx="12192000" cy="6858000"/>
@@ -817,7 +818,7 @@
           <a:p>
             <a:fld id="{8438F8DC-35B0-48E6-A86E-42F1F08DD00F}" type="datetimeFigureOut">
               <a:rPr lang="es-ES" smtClean="0"/>
-              <a:t>01/03/2026</a:t>
+              <a:t>02/03/2026</a:t>
             </a:fld>
             <a:endParaRPr lang="es-ES"/>
           </a:p>
@@ -994,7 +995,7 @@
           <a:p>
             <a:fld id="{FACBDC12-F39B-4B97-8F4D-6734F9D366FF}" type="datetimeFigureOut">
               <a:rPr lang="es-ES" smtClean="0"/>
-              <a:t>01/03/2026</a:t>
+              <a:t>02/03/2026</a:t>
             </a:fld>
             <a:endParaRPr lang="es-ES"/>
           </a:p>
@@ -1458,7 +1459,7 @@
           <a:p>
             <a:fld id="{676223B9-C868-4436-87D9-1A3152E1157A}" type="slidenum">
               <a:rPr lang="es-ES" smtClean="0"/>
-              <a:t>14</a:t>
+              <a:t>15</a:t>
             </a:fld>
             <a:endParaRPr lang="es-ES"/>
           </a:p>
@@ -1566,7 +1567,7 @@
           <a:p>
             <a:fld id="{676223B9-C868-4436-87D9-1A3152E1157A}" type="slidenum">
               <a:rPr lang="es-ES" smtClean="0"/>
-              <a:t>15</a:t>
+              <a:t>16</a:t>
             </a:fld>
             <a:endParaRPr lang="es-ES"/>
           </a:p>
@@ -1782,7 +1783,7 @@
           <a:p>
             <a:fld id="{676223B9-C868-4436-87D9-1A3152E1157A}" type="slidenum">
               <a:rPr lang="es-ES" smtClean="0"/>
-              <a:t>6</a:t>
+              <a:t>7</a:t>
             </a:fld>
             <a:endParaRPr lang="es-ES"/>
           </a:p>
@@ -1890,7 +1891,7 @@
           <a:p>
             <a:fld id="{676223B9-C868-4436-87D9-1A3152E1157A}" type="slidenum">
               <a:rPr lang="es-ES" smtClean="0"/>
-              <a:t>8</a:t>
+              <a:t>9</a:t>
             </a:fld>
             <a:endParaRPr lang="es-ES"/>
           </a:p>
@@ -1998,7 +1999,7 @@
           <a:p>
             <a:fld id="{676223B9-C868-4436-87D9-1A3152E1157A}" type="slidenum">
               <a:rPr lang="es-ES" smtClean="0"/>
-              <a:t>9</a:t>
+              <a:t>10</a:t>
             </a:fld>
             <a:endParaRPr lang="es-ES"/>
           </a:p>
@@ -2106,7 +2107,7 @@
           <a:p>
             <a:fld id="{676223B9-C868-4436-87D9-1A3152E1157A}" type="slidenum">
               <a:rPr lang="es-ES" smtClean="0"/>
-              <a:t>10</a:t>
+              <a:t>11</a:t>
             </a:fld>
             <a:endParaRPr lang="es-ES"/>
           </a:p>
@@ -2214,7 +2215,7 @@
           <a:p>
             <a:fld id="{676223B9-C868-4436-87D9-1A3152E1157A}" type="slidenum">
               <a:rPr lang="es-ES" smtClean="0"/>
-              <a:t>11</a:t>
+              <a:t>12</a:t>
             </a:fld>
             <a:endParaRPr lang="es-ES"/>
           </a:p>
@@ -2322,7 +2323,7 @@
           <a:p>
             <a:fld id="{676223B9-C868-4436-87D9-1A3152E1157A}" type="slidenum">
               <a:rPr lang="es-ES" smtClean="0"/>
-              <a:t>12</a:t>
+              <a:t>13</a:t>
             </a:fld>
             <a:endParaRPr lang="es-ES"/>
           </a:p>
@@ -2406,7 +2407,7 @@
           <a:p>
             <a:fld id="{676223B9-C868-4436-87D9-1A3152E1157A}" type="slidenum">
               <a:rPr lang="es-ES" smtClean="0"/>
-              <a:t>13</a:t>
+              <a:t>14</a:t>
             </a:fld>
             <a:endParaRPr lang="es-ES"/>
           </a:p>
@@ -4025,7 +4026,7 @@
         <p:cNvPr id="1" name="">
           <a:extLst>
             <a:ext uri="{FF2B5EF4-FFF2-40B4-BE49-F238E27FC236}">
-              <a16:creationId xmlns:a16="http://schemas.microsoft.com/office/drawing/2014/main" id="{F32A9819-E058-DC4F-FB99-88F20442D9F4}"/>
+              <a16:creationId xmlns:a16="http://schemas.microsoft.com/office/drawing/2014/main" id="{D1F11DBE-A482-7036-60B2-70B7E2318F46}"/>
             </a:ext>
           </a:extLst>
         </p:cNvPr>
@@ -4045,7 +4046,7 @@
           <p:cNvPr id="16" name="object 16">
             <a:extLst>
               <a:ext uri="{FF2B5EF4-FFF2-40B4-BE49-F238E27FC236}">
-                <a16:creationId xmlns:a16="http://schemas.microsoft.com/office/drawing/2014/main" id="{E1662E38-DE72-ADF3-A38E-08ED40DCC2AD}"/>
+                <a16:creationId xmlns:a16="http://schemas.microsoft.com/office/drawing/2014/main" id="{C096193E-AB86-E3CD-BDAC-0F9156C1A3F0}"/>
               </a:ext>
             </a:extLst>
           </p:cNvPr>
@@ -4081,7 +4082,7 @@
             </a:pPr>
             <a:r>
               <a:rPr lang="en-US" sz="2500" dirty="0"/>
-              <a:t>Learning outcome #4.3 – 2x2 Multimode Interference Coupler – Optimization (II)</a:t>
+              <a:t>Learning outcome #4.2 – 2x2 Multimode Interference Coupler - Optimization</a:t>
             </a:r>
             <a:br>
               <a:rPr lang="en-US" sz="2500" dirty="0"/>
@@ -4110,7 +4111,7 @@
           <p:cNvPr id="83" name="Gráfico 82">
             <a:extLst>
               <a:ext uri="{FF2B5EF4-FFF2-40B4-BE49-F238E27FC236}">
-                <a16:creationId xmlns:a16="http://schemas.microsoft.com/office/drawing/2014/main" id="{1CD4B005-DA76-DF7C-8A51-CA16DFD2CA3A}"/>
+                <a16:creationId xmlns:a16="http://schemas.microsoft.com/office/drawing/2014/main" id="{2D17DCD6-D851-E62D-D95C-A9F9954602DE}"/>
               </a:ext>
             </a:extLst>
           </p:cNvPr>
@@ -4146,7 +4147,7 @@
           <p:cNvPr id="84" name="Marcador de número de diapositiva 83">
             <a:extLst>
               <a:ext uri="{FF2B5EF4-FFF2-40B4-BE49-F238E27FC236}">
-                <a16:creationId xmlns:a16="http://schemas.microsoft.com/office/drawing/2014/main" id="{0B06F952-20FD-3223-6AB8-83339507AFE8}"/>
+                <a16:creationId xmlns:a16="http://schemas.microsoft.com/office/drawing/2014/main" id="{4891046F-11DC-B7FC-54F7-9583E688DC0E}"/>
               </a:ext>
             </a:extLst>
           </p:cNvPr>
@@ -4175,7 +4176,7 @@
           <p:cNvPr id="3" name="Marcador de pie de página 2">
             <a:extLst>
               <a:ext uri="{FF2B5EF4-FFF2-40B4-BE49-F238E27FC236}">
-                <a16:creationId xmlns:a16="http://schemas.microsoft.com/office/drawing/2014/main" id="{8B06152F-2A2C-A19B-581F-494FDFF33752}"/>
+                <a16:creationId xmlns:a16="http://schemas.microsoft.com/office/drawing/2014/main" id="{4C9BAA39-017F-D602-6705-A6CF44830139}"/>
               </a:ext>
             </a:extLst>
           </p:cNvPr>
@@ -4209,7 +4210,7 @@
           <p:cNvPr id="2" name="CuadroTexto 1">
             <a:extLst>
               <a:ext uri="{FF2B5EF4-FFF2-40B4-BE49-F238E27FC236}">
-                <a16:creationId xmlns:a16="http://schemas.microsoft.com/office/drawing/2014/main" id="{EF5B7948-A25A-9043-7061-DD15A9023924}"/>
+                <a16:creationId xmlns:a16="http://schemas.microsoft.com/office/drawing/2014/main" id="{43D7D9E5-DAC3-2BB8-7377-826863CBAD4E}"/>
               </a:ext>
             </a:extLst>
           </p:cNvPr>
@@ -4299,7 +4300,7 @@
           <p:cNvPr id="7" name="Rectángulo 6">
             <a:extLst>
               <a:ext uri="{FF2B5EF4-FFF2-40B4-BE49-F238E27FC236}">
-                <a16:creationId xmlns:a16="http://schemas.microsoft.com/office/drawing/2014/main" id="{C8036B97-F577-1F3C-3CE2-BD45F7D1FFC2}"/>
+                <a16:creationId xmlns:a16="http://schemas.microsoft.com/office/drawing/2014/main" id="{9772491E-4FFB-FFC3-C855-72A4B15F3E73}"/>
               </a:ext>
             </a:extLst>
           </p:cNvPr>
@@ -4351,7 +4352,7 @@
           <p:cNvPr id="8" name="CuadroTexto 7">
             <a:extLst>
               <a:ext uri="{FF2B5EF4-FFF2-40B4-BE49-F238E27FC236}">
-                <a16:creationId xmlns:a16="http://schemas.microsoft.com/office/drawing/2014/main" id="{B0CFB20A-64F3-A296-71E8-F4FA17D35314}"/>
+                <a16:creationId xmlns:a16="http://schemas.microsoft.com/office/drawing/2014/main" id="{643565A9-7DB6-D6EE-152F-2852C8BA7986}"/>
               </a:ext>
             </a:extLst>
           </p:cNvPr>
@@ -4411,33 +4412,39 @@
             </a:r>
             <a:r>
               <a:rPr lang="en-US" sz="1600" dirty="0"/>
-              <a:t>: make ratio over outputs 0.5 + excess loss &lt; 0.1 dB</a:t>
+              <a:t>: make equal ratio over outputs (even if not 0.5) and minimize excess loss (even if not 0.0 dB)</a:t>
             </a:r>
           </a:p>
           <a:p>
             <a:pPr algn="r"/>
             <a:r>
               <a:rPr lang="en-US" sz="1600" dirty="0"/>
-              <a:t>With same settings of previous LO, now modify the notebook so I/O waveguides have a different width. </a:t>
+              <a:t>With same settings of previous LO, now adjust try to manually optimize the MMI by changing iteratively:</a:t>
             </a:r>
           </a:p>
           <a:p>
             <a:pPr algn="r"/>
             <a:r>
-              <a:rPr lang="en-US" sz="1600" u="sng" dirty="0"/>
-              <a:t>- The nominal I/O waveguide width you have been using is 1.0 µm, increase it.</a:t>
-            </a:r>
+              <a:rPr lang="en-US" sz="1600" dirty="0"/>
+              <a:t>- Change </a:t>
+            </a:r>
+            <a:r>
+              <a:rPr lang="en-US" sz="1600" dirty="0" err="1"/>
+              <a:t>dL_MMI</a:t>
+            </a:r>
+            <a:endParaRPr lang="en-US" sz="1600" dirty="0"/>
           </a:p>
           <a:p>
             <a:pPr algn="r"/>
             <a:r>
-              <a:rPr lang="en-US" sz="1600" b="1" dirty="0"/>
-              <a:t>(Warning</a:t>
-            </a:r>
-            <a:r>
               <a:rPr lang="en-US" sz="1600" dirty="0"/>
-              <a:t>! Every time you change the I/O waveguide width you have to re-run modes calculation)</a:t>
-            </a:r>
+              <a:t>- Change I/O waveguide position +/- </a:t>
+            </a:r>
+            <a:r>
+              <a:rPr lang="en-US" sz="1600" dirty="0" err="1"/>
+              <a:t>dy</a:t>
+            </a:r>
+            <a:endParaRPr lang="en-US" sz="1600" dirty="0"/>
           </a:p>
           <a:p>
             <a:pPr algn="r"/>
@@ -4455,7 +4462,7 @@
     </p:spTree>
     <p:extLst>
       <p:ext uri="{BB962C8B-B14F-4D97-AF65-F5344CB8AC3E}">
-        <p14:creationId xmlns:p14="http://schemas.microsoft.com/office/powerpoint/2010/main" val="1023731220"/>
+        <p14:creationId xmlns:p14="http://schemas.microsoft.com/office/powerpoint/2010/main" val="2685215753"/>
       </p:ext>
     </p:extLst>
   </p:cSld>
@@ -4473,7 +4480,7 @@
         <p:cNvPr id="1" name="">
           <a:extLst>
             <a:ext uri="{FF2B5EF4-FFF2-40B4-BE49-F238E27FC236}">
-              <a16:creationId xmlns:a16="http://schemas.microsoft.com/office/drawing/2014/main" id="{200A1363-C83E-82B6-7BDE-AD2801F8B66D}"/>
+              <a16:creationId xmlns:a16="http://schemas.microsoft.com/office/drawing/2014/main" id="{F32A9819-E058-DC4F-FB99-88F20442D9F4}"/>
             </a:ext>
           </a:extLst>
         </p:cNvPr>
@@ -4493,7 +4500,7 @@
           <p:cNvPr id="16" name="object 16">
             <a:extLst>
               <a:ext uri="{FF2B5EF4-FFF2-40B4-BE49-F238E27FC236}">
-                <a16:creationId xmlns:a16="http://schemas.microsoft.com/office/drawing/2014/main" id="{1E256546-3103-104D-A87F-78AEBE5D595E}"/>
+                <a16:creationId xmlns:a16="http://schemas.microsoft.com/office/drawing/2014/main" id="{E1662E38-DE72-ADF3-A38E-08ED40DCC2AD}"/>
               </a:ext>
             </a:extLst>
           </p:cNvPr>
@@ -4529,15 +4536,7 @@
             </a:pPr>
             <a:r>
               <a:rPr lang="en-US" sz="2500" dirty="0"/>
-              <a:t>Learning </a:t>
-            </a:r>
-            <a:r>
-              <a:rPr lang="en-US" sz="2500"/>
-              <a:t>outcome #5 </a:t>
-            </a:r>
-            <a:r>
-              <a:rPr lang="en-US" sz="2500" dirty="0"/>
-              <a:t>– 1x4 Multimode Interference Coupler </a:t>
+              <a:t>Learning outcome #4.3 – 2x2 Multimode Interference Coupler – Optimization (II)</a:t>
             </a:r>
             <a:br>
               <a:rPr lang="en-US" sz="2500" dirty="0"/>
@@ -4552,7 +4551,7 @@
             </a:r>
             <a:r>
               <a:rPr lang="en-US" b="0" dirty="0"/>
-              <a:t> = ? µm</a:t>
+              <a:t> = 6.6 µm</a:t>
             </a:r>
             <a:endParaRPr lang="en-US" sz="2500" b="0" dirty="0">
               <a:latin typeface="+mj-lt"/>
@@ -4566,7 +4565,7 @@
           <p:cNvPr id="83" name="Gráfico 82">
             <a:extLst>
               <a:ext uri="{FF2B5EF4-FFF2-40B4-BE49-F238E27FC236}">
-                <a16:creationId xmlns:a16="http://schemas.microsoft.com/office/drawing/2014/main" id="{4BFCA3D8-29F6-7091-7099-77888A9F863B}"/>
+                <a16:creationId xmlns:a16="http://schemas.microsoft.com/office/drawing/2014/main" id="{1CD4B005-DA76-DF7C-8A51-CA16DFD2CA3A}"/>
               </a:ext>
             </a:extLst>
           </p:cNvPr>
@@ -4602,7 +4601,7 @@
           <p:cNvPr id="84" name="Marcador de número de diapositiva 83">
             <a:extLst>
               <a:ext uri="{FF2B5EF4-FFF2-40B4-BE49-F238E27FC236}">
-                <a16:creationId xmlns:a16="http://schemas.microsoft.com/office/drawing/2014/main" id="{42E75535-0FBC-4C5F-9AC5-7008914FCF56}"/>
+                <a16:creationId xmlns:a16="http://schemas.microsoft.com/office/drawing/2014/main" id="{0B06F952-20FD-3223-6AB8-83339507AFE8}"/>
               </a:ext>
             </a:extLst>
           </p:cNvPr>
@@ -4631,7 +4630,7 @@
           <p:cNvPr id="3" name="Marcador de pie de página 2">
             <a:extLst>
               <a:ext uri="{FF2B5EF4-FFF2-40B4-BE49-F238E27FC236}">
-                <a16:creationId xmlns:a16="http://schemas.microsoft.com/office/drawing/2014/main" id="{07AC2AFF-A7D9-EBCD-7C5A-6CDF61B69366}"/>
+                <a16:creationId xmlns:a16="http://schemas.microsoft.com/office/drawing/2014/main" id="{8B06152F-2A2C-A19B-581F-494FDFF33752}"/>
               </a:ext>
             </a:extLst>
           </p:cNvPr>
@@ -4665,7 +4664,7 @@
           <p:cNvPr id="2" name="CuadroTexto 1">
             <a:extLst>
               <a:ext uri="{FF2B5EF4-FFF2-40B4-BE49-F238E27FC236}">
-                <a16:creationId xmlns:a16="http://schemas.microsoft.com/office/drawing/2014/main" id="{42D73A2E-0E5A-8A39-6B70-F9E94D6DBB70}"/>
+                <a16:creationId xmlns:a16="http://schemas.microsoft.com/office/drawing/2014/main" id="{EF5B7948-A25A-9043-7061-DD15A9023924}"/>
               </a:ext>
             </a:extLst>
           </p:cNvPr>
@@ -4675,7 +4674,7 @@
         <p:spPr>
           <a:xfrm>
             <a:off x="609441" y="4819471"/>
-            <a:ext cx="11199971" cy="1200329"/>
+            <a:ext cx="11199971" cy="1384995"/>
           </a:xfrm>
           <a:prstGeom prst="rect">
             <a:avLst/>
@@ -4703,21 +4702,7 @@
                 <a:latin typeface="Arial" panose="020B0604020202020204" pitchFamily="34" charset="0"/>
                 <a:cs typeface="Arial" panose="020B0604020202020204" pitchFamily="34" charset="0"/>
               </a:rPr>
-              <a:t>Repeat all the design </a:t>
-            </a:r>
-            <a:r>
-              <a:rPr lang="en-US" sz="1200">
-                <a:latin typeface="Arial" panose="020B0604020202020204" pitchFamily="34" charset="0"/>
-                <a:cs typeface="Arial" panose="020B0604020202020204" pitchFamily="34" charset="0"/>
-              </a:rPr>
-              <a:t>process for a </a:t>
-            </a:r>
-            <a:r>
-              <a:rPr lang="en-US" sz="1200" dirty="0">
-                <a:latin typeface="Arial" panose="020B0604020202020204" pitchFamily="34" charset="0"/>
-                <a:cs typeface="Arial" panose="020B0604020202020204" pitchFamily="34" charset="0"/>
-              </a:rPr>
-              <a:t>1x4 MMI Coupler.  </a:t>
+              <a:t>Comment results</a:t>
             </a:r>
           </a:p>
           <a:p>
@@ -4755,6 +4740,13 @@
               <a:cs typeface="Arial" panose="020B0604020202020204" pitchFamily="34" charset="0"/>
             </a:endParaRPr>
           </a:p>
+          <a:p>
+            <a:pPr algn="just"/>
+            <a:endParaRPr lang="en-US" sz="1200" dirty="0">
+              <a:latin typeface="Arial" panose="020B0604020202020204" pitchFamily="34" charset="0"/>
+              <a:cs typeface="Arial" panose="020B0604020202020204" pitchFamily="34" charset="0"/>
+            </a:endParaRPr>
+          </a:p>
         </p:txBody>
       </p:sp>
       <p:sp>
@@ -4762,7 +4754,7 @@
           <p:cNvPr id="7" name="Rectángulo 6">
             <a:extLst>
               <a:ext uri="{FF2B5EF4-FFF2-40B4-BE49-F238E27FC236}">
-                <a16:creationId xmlns:a16="http://schemas.microsoft.com/office/drawing/2014/main" id="{AFB86587-21D4-5A33-7D00-DDF170C919BA}"/>
+                <a16:creationId xmlns:a16="http://schemas.microsoft.com/office/drawing/2014/main" id="{C8036B97-F577-1F3C-3CE2-BD45F7D1FFC2}"/>
               </a:ext>
             </a:extLst>
           </p:cNvPr>
@@ -4814,6 +4806,469 @@
           <p:cNvPr id="8" name="CuadroTexto 7">
             <a:extLst>
               <a:ext uri="{FF2B5EF4-FFF2-40B4-BE49-F238E27FC236}">
+                <a16:creationId xmlns:a16="http://schemas.microsoft.com/office/drawing/2014/main" id="{B0CFB20A-64F3-A296-71E8-F4FA17D35314}"/>
+              </a:ext>
+            </a:extLst>
+          </p:cNvPr>
+          <p:cNvSpPr txBox="1"/>
+          <p:nvPr/>
+        </p:nvSpPr>
+        <p:spPr>
+          <a:xfrm>
+            <a:off x="640245" y="1942909"/>
+            <a:ext cx="11199972" cy="2708434"/>
+          </a:xfrm>
+          <a:prstGeom prst="rect">
+            <a:avLst/>
+          </a:prstGeom>
+          <a:noFill/>
+        </p:spPr>
+        <p:txBody>
+          <a:bodyPr wrap="square" rtlCol="0">
+            <a:spAutoFit/>
+          </a:bodyPr>
+          <a:lstStyle/>
+          <a:p>
+            <a:pPr algn="ctr"/>
+            <a:r>
+              <a:rPr lang="en-US" b="1" dirty="0"/>
+              <a:t>deep</a:t>
+            </a:r>
+            <a:r>
+              <a:rPr lang="en-US" dirty="0"/>
+              <a:t> waveguide</a:t>
+            </a:r>
+          </a:p>
+          <a:p>
+            <a:pPr algn="ctr"/>
+            <a:endParaRPr lang="en-US" dirty="0"/>
+          </a:p>
+          <a:p>
+            <a:pPr algn="ctr"/>
+            <a:r>
+              <a:rPr lang="en-US" dirty="0"/>
+              <a:t>Paste propagation plot and console results</a:t>
+            </a:r>
+          </a:p>
+          <a:p>
+            <a:pPr algn="ctr"/>
+            <a:endParaRPr lang="en-US" dirty="0"/>
+          </a:p>
+          <a:p>
+            <a:pPr algn="ctr"/>
+            <a:endParaRPr lang="en-US" dirty="0"/>
+          </a:p>
+          <a:p>
+            <a:pPr algn="r"/>
+            <a:r>
+              <a:rPr lang="en-US" sz="1600" b="1" dirty="0"/>
+              <a:t>Target</a:t>
+            </a:r>
+            <a:r>
+              <a:rPr lang="en-US" sz="1600" dirty="0"/>
+              <a:t>: make ratio over outputs 0.5 + excess loss &lt; 0.1 dB</a:t>
+            </a:r>
+          </a:p>
+          <a:p>
+            <a:pPr algn="r"/>
+            <a:r>
+              <a:rPr lang="en-US" sz="1600" dirty="0"/>
+              <a:t>With same settings of previous LO, now modify the notebook so I/O waveguides have a different width. </a:t>
+            </a:r>
+          </a:p>
+          <a:p>
+            <a:pPr algn="r"/>
+            <a:r>
+              <a:rPr lang="en-US" sz="1600" u="sng" dirty="0"/>
+              <a:t>- The nominal I/O waveguide width you have been using is 1.0 µm, increase it.</a:t>
+            </a:r>
+          </a:p>
+          <a:p>
+            <a:pPr algn="r"/>
+            <a:r>
+              <a:rPr lang="en-US" sz="1600" b="1" dirty="0"/>
+              <a:t>(Warning</a:t>
+            </a:r>
+            <a:r>
+              <a:rPr lang="en-US" sz="1600" dirty="0"/>
+              <a:t>! Every time you change the I/O waveguide width you have to re-run modes calculation)</a:t>
+            </a:r>
+          </a:p>
+          <a:p>
+            <a:pPr algn="r"/>
+            <a:r>
+              <a:rPr lang="en-US" sz="1600" b="1" dirty="0"/>
+              <a:t>Hints</a:t>
+            </a:r>
+            <a:r>
+              <a:rPr lang="en-US" sz="1600" dirty="0"/>
+              <a:t>: observe the 2D EME propagation results to guide you to the best settings of a) and b).</a:t>
+            </a:r>
+          </a:p>
+        </p:txBody>
+      </p:sp>
+    </p:spTree>
+    <p:extLst>
+      <p:ext uri="{BB962C8B-B14F-4D97-AF65-F5344CB8AC3E}">
+        <p14:creationId xmlns:p14="http://schemas.microsoft.com/office/powerpoint/2010/main" val="1023731220"/>
+      </p:ext>
+    </p:extLst>
+  </p:cSld>
+  <p:clrMapOvr>
+    <a:masterClrMapping/>
+  </p:clrMapOvr>
+</p:sld>
+</file>
+
+<file path=ppt/slides/slide12.xml><?xml version="1.0" encoding="utf-8"?>
+<p:sld xmlns:a="http://schemas.openxmlformats.org/drawingml/2006/main" xmlns:r="http://schemas.openxmlformats.org/officeDocument/2006/relationships" xmlns:p="http://schemas.openxmlformats.org/presentationml/2006/main">
+  <p:cSld>
+    <p:spTree>
+      <p:nvGrpSpPr>
+        <p:cNvPr id="1" name="">
+          <a:extLst>
+            <a:ext uri="{FF2B5EF4-FFF2-40B4-BE49-F238E27FC236}">
+              <a16:creationId xmlns:a16="http://schemas.microsoft.com/office/drawing/2014/main" id="{200A1363-C83E-82B6-7BDE-AD2801F8B66D}"/>
+            </a:ext>
+          </a:extLst>
+        </p:cNvPr>
+        <p:cNvGrpSpPr/>
+        <p:nvPr/>
+      </p:nvGrpSpPr>
+      <p:grpSpPr>
+        <a:xfrm>
+          <a:off x="0" y="0"/>
+          <a:ext cx="0" cy="0"/>
+          <a:chOff x="0" y="0"/>
+          <a:chExt cx="0" cy="0"/>
+        </a:xfrm>
+      </p:grpSpPr>
+      <p:sp>
+        <p:nvSpPr>
+          <p:cNvPr id="16" name="object 16">
+            <a:extLst>
+              <a:ext uri="{FF2B5EF4-FFF2-40B4-BE49-F238E27FC236}">
+                <a16:creationId xmlns:a16="http://schemas.microsoft.com/office/drawing/2014/main" id="{1E256546-3103-104D-A87F-78AEBE5D595E}"/>
+              </a:ext>
+            </a:extLst>
+          </p:cNvPr>
+          <p:cNvSpPr txBox="1">
+            <a:spLocks noGrp="1"/>
+          </p:cNvSpPr>
+          <p:nvPr>
+            <p:ph type="title"/>
+          </p:nvPr>
+        </p:nvSpPr>
+        <p:spPr>
+          <a:xfrm>
+            <a:off x="685800" y="408883"/>
+            <a:ext cx="10994410" cy="705321"/>
+          </a:xfrm>
+          <a:prstGeom prst="rect">
+            <a:avLst/>
+          </a:prstGeom>
+        </p:spPr>
+        <p:txBody>
+          <a:bodyPr vert="horz" wrap="square" lIns="0" tIns="12700" rIns="0" bIns="0" rtlCol="0">
+            <a:spAutoFit/>
+          </a:bodyPr>
+          <a:lstStyle/>
+          <a:p>
+            <a:pPr marL="12700">
+              <a:lnSpc>
+                <a:spcPct val="100000"/>
+              </a:lnSpc>
+              <a:spcBef>
+                <a:spcPts val="100"/>
+              </a:spcBef>
+            </a:pPr>
+            <a:r>
+              <a:rPr lang="en-US" sz="2500" dirty="0"/>
+              <a:t>Learning </a:t>
+            </a:r>
+            <a:r>
+              <a:rPr lang="en-US" sz="2500"/>
+              <a:t>outcome #5 </a:t>
+            </a:r>
+            <a:r>
+              <a:rPr lang="en-US" sz="2500" dirty="0"/>
+              <a:t>– 1x4 Multimode Interference Coupler </a:t>
+            </a:r>
+            <a:br>
+              <a:rPr lang="en-US" sz="2500" dirty="0"/>
+            </a:br>
+            <a:r>
+              <a:rPr lang="en-US" b="0" dirty="0"/>
+              <a:t>Wavelength 1.55 µm, </a:t>
+            </a:r>
+            <a:r>
+              <a:rPr lang="en-US" b="0" dirty="0" err="1"/>
+              <a:t>wMMI</a:t>
+            </a:r>
+            <a:r>
+              <a:rPr lang="en-US" b="0" dirty="0"/>
+              <a:t> = ? µm</a:t>
+            </a:r>
+            <a:endParaRPr lang="en-US" sz="2500" b="0" dirty="0">
+              <a:latin typeface="+mj-lt"/>
+              <a:cs typeface="Lucida Sans"/>
+            </a:endParaRPr>
+          </a:p>
+        </p:txBody>
+      </p:sp>
+      <p:pic>
+        <p:nvPicPr>
+          <p:cNvPr id="83" name="Gráfico 82">
+            <a:extLst>
+              <a:ext uri="{FF2B5EF4-FFF2-40B4-BE49-F238E27FC236}">
+                <a16:creationId xmlns:a16="http://schemas.microsoft.com/office/drawing/2014/main" id="{4BFCA3D8-29F6-7091-7099-77888A9F863B}"/>
+              </a:ext>
+            </a:extLst>
+          </p:cNvPr>
+          <p:cNvPicPr>
+            <a:picLocks noChangeAspect="1"/>
+          </p:cNvPicPr>
+          <p:nvPr/>
+        </p:nvPicPr>
+        <p:blipFill>
+          <a:blip r:embed="rId3">
+            <a:extLst>
+              <a:ext uri="{96DAC541-7B7A-43D3-8B79-37D633B846F1}">
+                <asvg:svgBlip xmlns:asvg="http://schemas.microsoft.com/office/drawing/2016/SVG/main" r:embed="rId4"/>
+              </a:ext>
+            </a:extLst>
+          </a:blip>
+          <a:stretch>
+            <a:fillRect/>
+          </a:stretch>
+        </p:blipFill>
+        <p:spPr>
+          <a:xfrm>
+            <a:off x="5045006" y="6356057"/>
+            <a:ext cx="6409575" cy="363174"/>
+          </a:xfrm>
+          <a:prstGeom prst="rect">
+            <a:avLst/>
+          </a:prstGeom>
+        </p:spPr>
+      </p:pic>
+      <p:sp>
+        <p:nvSpPr>
+          <p:cNvPr id="84" name="Marcador de número de diapositiva 83">
+            <a:extLst>
+              <a:ext uri="{FF2B5EF4-FFF2-40B4-BE49-F238E27FC236}">
+                <a16:creationId xmlns:a16="http://schemas.microsoft.com/office/drawing/2014/main" id="{42E75535-0FBC-4C5F-9AC5-7008914FCF56}"/>
+              </a:ext>
+            </a:extLst>
+          </p:cNvPr>
+          <p:cNvSpPr>
+            <a:spLocks noGrp="1"/>
+          </p:cNvSpPr>
+          <p:nvPr>
+            <p:ph type="sldNum" sz="quarter" idx="7"/>
+          </p:nvPr>
+        </p:nvSpPr>
+        <p:spPr/>
+        <p:txBody>
+          <a:bodyPr/>
+          <a:lstStyle/>
+          <a:p>
+            <a:fld id="{B6F15528-21DE-4FAA-801E-634DDDAF4B2B}" type="slidenum">
+              <a:rPr lang="es-ES" smtClean="0"/>
+              <a:t>12</a:t>
+            </a:fld>
+            <a:endParaRPr lang="es-ES"/>
+          </a:p>
+        </p:txBody>
+      </p:sp>
+      <p:sp>
+        <p:nvSpPr>
+          <p:cNvPr id="3" name="Marcador de pie de página 2">
+            <a:extLst>
+              <a:ext uri="{FF2B5EF4-FFF2-40B4-BE49-F238E27FC236}">
+                <a16:creationId xmlns:a16="http://schemas.microsoft.com/office/drawing/2014/main" id="{07AC2AFF-A7D9-EBCD-7C5A-6CDF61B69366}"/>
+              </a:ext>
+            </a:extLst>
+          </p:cNvPr>
+          <p:cNvSpPr>
+            <a:spLocks noGrp="1"/>
+          </p:cNvSpPr>
+          <p:nvPr>
+            <p:ph type="ftr" sz="quarter" idx="5"/>
+          </p:nvPr>
+        </p:nvSpPr>
+        <p:spPr/>
+        <p:txBody>
+          <a:bodyPr/>
+          <a:lstStyle/>
+          <a:p>
+            <a:pPr marL="12700">
+              <a:spcBef>
+                <a:spcPts val="15"/>
+              </a:spcBef>
+            </a:pPr>
+            <a:r>
+              <a:rPr lang="es-ES" spc="-5"/>
+              <a:t>LAB 2.0. COUPLERS</a:t>
+            </a:r>
+            <a:endParaRPr lang="es-ES" spc="-5" dirty="0"/>
+          </a:p>
+        </p:txBody>
+      </p:sp>
+      <p:sp>
+        <p:nvSpPr>
+          <p:cNvPr id="2" name="CuadroTexto 1">
+            <a:extLst>
+              <a:ext uri="{FF2B5EF4-FFF2-40B4-BE49-F238E27FC236}">
+                <a16:creationId xmlns:a16="http://schemas.microsoft.com/office/drawing/2014/main" id="{42D73A2E-0E5A-8A39-6B70-F9E94D6DBB70}"/>
+              </a:ext>
+            </a:extLst>
+          </p:cNvPr>
+          <p:cNvSpPr txBox="1"/>
+          <p:nvPr/>
+        </p:nvSpPr>
+        <p:spPr>
+          <a:xfrm>
+            <a:off x="609441" y="4819471"/>
+            <a:ext cx="11199971" cy="1200329"/>
+          </a:xfrm>
+          <a:prstGeom prst="rect">
+            <a:avLst/>
+          </a:prstGeom>
+          <a:solidFill>
+            <a:schemeClr val="bg1">
+              <a:lumMod val="95000"/>
+            </a:schemeClr>
+          </a:solidFill>
+          <a:ln w="28575">
+            <a:solidFill>
+              <a:srgbClr val="E0700D"/>
+            </a:solidFill>
+          </a:ln>
+        </p:spPr>
+        <p:txBody>
+          <a:bodyPr wrap="square" rtlCol="0">
+            <a:spAutoFit/>
+          </a:bodyPr>
+          <a:lstStyle/>
+          <a:p>
+            <a:pPr algn="just"/>
+            <a:r>
+              <a:rPr lang="en-US" sz="1200" dirty="0">
+                <a:latin typeface="Arial" panose="020B0604020202020204" pitchFamily="34" charset="0"/>
+                <a:cs typeface="Arial" panose="020B0604020202020204" pitchFamily="34" charset="0"/>
+              </a:rPr>
+              <a:t>Repeat all the design </a:t>
+            </a:r>
+            <a:r>
+              <a:rPr lang="en-US" sz="1200">
+                <a:latin typeface="Arial" panose="020B0604020202020204" pitchFamily="34" charset="0"/>
+                <a:cs typeface="Arial" panose="020B0604020202020204" pitchFamily="34" charset="0"/>
+              </a:rPr>
+              <a:t>process for a </a:t>
+            </a:r>
+            <a:r>
+              <a:rPr lang="en-US" sz="1200" dirty="0">
+                <a:latin typeface="Arial" panose="020B0604020202020204" pitchFamily="34" charset="0"/>
+                <a:cs typeface="Arial" panose="020B0604020202020204" pitchFamily="34" charset="0"/>
+              </a:rPr>
+              <a:t>1x4 MMI Coupler.  </a:t>
+            </a:r>
+          </a:p>
+          <a:p>
+            <a:pPr algn="just"/>
+            <a:endParaRPr lang="en-US" sz="1200" dirty="0">
+              <a:latin typeface="Arial" panose="020B0604020202020204" pitchFamily="34" charset="0"/>
+              <a:cs typeface="Arial" panose="020B0604020202020204" pitchFamily="34" charset="0"/>
+            </a:endParaRPr>
+          </a:p>
+          <a:p>
+            <a:pPr algn="just"/>
+            <a:endParaRPr lang="en-US" sz="1200" dirty="0">
+              <a:latin typeface="Arial" panose="020B0604020202020204" pitchFamily="34" charset="0"/>
+              <a:cs typeface="Arial" panose="020B0604020202020204" pitchFamily="34" charset="0"/>
+            </a:endParaRPr>
+          </a:p>
+          <a:p>
+            <a:pPr algn="just"/>
+            <a:endParaRPr lang="en-US" sz="1200" dirty="0">
+              <a:latin typeface="Arial" panose="020B0604020202020204" pitchFamily="34" charset="0"/>
+              <a:cs typeface="Arial" panose="020B0604020202020204" pitchFamily="34" charset="0"/>
+            </a:endParaRPr>
+          </a:p>
+          <a:p>
+            <a:pPr algn="just"/>
+            <a:endParaRPr lang="en-US" sz="1200" dirty="0">
+              <a:latin typeface="Arial" panose="020B0604020202020204" pitchFamily="34" charset="0"/>
+              <a:cs typeface="Arial" panose="020B0604020202020204" pitchFamily="34" charset="0"/>
+            </a:endParaRPr>
+          </a:p>
+          <a:p>
+            <a:pPr algn="just"/>
+            <a:endParaRPr lang="en-US" sz="1200" dirty="0">
+              <a:latin typeface="Arial" panose="020B0604020202020204" pitchFamily="34" charset="0"/>
+              <a:cs typeface="Arial" panose="020B0604020202020204" pitchFamily="34" charset="0"/>
+            </a:endParaRPr>
+          </a:p>
+        </p:txBody>
+      </p:sp>
+      <p:sp>
+        <p:nvSpPr>
+          <p:cNvPr id="7" name="Rectángulo 6">
+            <a:extLst>
+              <a:ext uri="{FF2B5EF4-FFF2-40B4-BE49-F238E27FC236}">
+                <a16:creationId xmlns:a16="http://schemas.microsoft.com/office/drawing/2014/main" id="{AFB86587-21D4-5A33-7D00-DDF170C919BA}"/>
+              </a:ext>
+            </a:extLst>
+          </p:cNvPr>
+          <p:cNvSpPr/>
+          <p:nvPr/>
+        </p:nvSpPr>
+        <p:spPr>
+          <a:xfrm>
+            <a:off x="609441" y="1377510"/>
+            <a:ext cx="11199971" cy="3306028"/>
+          </a:xfrm>
+          <a:prstGeom prst="rect">
+            <a:avLst/>
+          </a:prstGeom>
+          <a:noFill/>
+          <a:ln w="28575">
+            <a:solidFill>
+              <a:srgbClr val="E0700D"/>
+            </a:solidFill>
+          </a:ln>
+        </p:spPr>
+        <p:style>
+          <a:lnRef idx="2">
+            <a:schemeClr val="accent1">
+              <a:shade val="15000"/>
+            </a:schemeClr>
+          </a:lnRef>
+          <a:fillRef idx="1">
+            <a:schemeClr val="accent1"/>
+          </a:fillRef>
+          <a:effectRef idx="0">
+            <a:schemeClr val="accent1"/>
+          </a:effectRef>
+          <a:fontRef idx="minor">
+            <a:schemeClr val="lt1"/>
+          </a:fontRef>
+        </p:style>
+        <p:txBody>
+          <a:bodyPr rtlCol="0" anchor="ctr"/>
+          <a:lstStyle/>
+          <a:p>
+            <a:pPr algn="ctr"/>
+            <a:endParaRPr lang="en-US"/>
+          </a:p>
+        </p:txBody>
+      </p:sp>
+      <p:sp>
+        <p:nvSpPr>
+          <p:cNvPr id="8" name="CuadroTexto 7">
+            <a:extLst>
+              <a:ext uri="{FF2B5EF4-FFF2-40B4-BE49-F238E27FC236}">
                 <a16:creationId xmlns:a16="http://schemas.microsoft.com/office/drawing/2014/main" id="{C3506757-32B7-9151-DA89-AADDB7F7D093}"/>
               </a:ext>
             </a:extLst>
@@ -4873,7 +5328,7 @@
 </p:sld>
 </file>
 
-<file path=ppt/slides/slide12.xml><?xml version="1.0" encoding="utf-8"?>
+<file path=ppt/slides/slide13.xml><?xml version="1.0" encoding="utf-8"?>
 <p:sld xmlns:a="http://schemas.openxmlformats.org/drawingml/2006/main" xmlns:r="http://schemas.openxmlformats.org/officeDocument/2006/relationships" xmlns:p="http://schemas.openxmlformats.org/presentationml/2006/main">
   <p:cSld>
     <p:spTree>
@@ -5029,7 +5484,7 @@
           <a:p>
             <a:fld id="{B6F15528-21DE-4FAA-801E-634DDDAF4B2B}" type="slidenum">
               <a:rPr lang="es-ES" smtClean="0"/>
-              <a:t>12</a:t>
+              <a:t>13</a:t>
             </a:fld>
             <a:endParaRPr lang="es-ES"/>
           </a:p>
@@ -5585,7 +6040,7 @@
 </p:sld>
 </file>
 
-<file path=ppt/slides/slide13.xml><?xml version="1.0" encoding="utf-8"?>
+<file path=ppt/slides/slide14.xml><?xml version="1.0" encoding="utf-8"?>
 <p:sld xmlns:a="http://schemas.openxmlformats.org/drawingml/2006/main" xmlns:r="http://schemas.openxmlformats.org/officeDocument/2006/relationships" xmlns:p="http://schemas.openxmlformats.org/presentationml/2006/main">
   <p:cSld>
     <p:spTree>
@@ -5738,7 +6193,7 @@
           <a:p>
             <a:fld id="{B6F15528-21DE-4FAA-801E-634DDDAF4B2B}" type="slidenum">
               <a:rPr lang="es-ES" smtClean="0"/>
-              <a:t>13</a:t>
+              <a:t>14</a:t>
             </a:fld>
             <a:endParaRPr lang="es-ES"/>
           </a:p>
@@ -6271,7 +6726,7 @@
 </p:sld>
 </file>
 
-<file path=ppt/slides/slide14.xml><?xml version="1.0" encoding="utf-8"?>
+<file path=ppt/slides/slide15.xml><?xml version="1.0" encoding="utf-8"?>
 <p:sld xmlns:a="http://schemas.openxmlformats.org/drawingml/2006/main" xmlns:r="http://schemas.openxmlformats.org/officeDocument/2006/relationships" xmlns:p="http://schemas.openxmlformats.org/presentationml/2006/main">
   <p:cSld>
     <p:spTree>
@@ -6421,7 +6876,7 @@
           <a:p>
             <a:fld id="{B6F15528-21DE-4FAA-801E-634DDDAF4B2B}" type="slidenum">
               <a:rPr lang="es-ES" smtClean="0"/>
-              <a:t>14</a:t>
+              <a:t>15</a:t>
             </a:fld>
             <a:endParaRPr lang="es-ES"/>
           </a:p>
@@ -6977,7 +7432,7 @@
 </p:sld>
 </file>
 
-<file path=ppt/slides/slide15.xml><?xml version="1.0" encoding="utf-8"?>
+<file path=ppt/slides/slide16.xml><?xml version="1.0" encoding="utf-8"?>
 <p:sld xmlns:a="http://schemas.openxmlformats.org/drawingml/2006/main" xmlns:r="http://schemas.openxmlformats.org/officeDocument/2006/relationships" xmlns:p="http://schemas.openxmlformats.org/presentationml/2006/main">
   <p:cSld>
     <p:spTree>
@@ -7127,7 +7582,7 @@
           <a:p>
             <a:fld id="{B6F15528-21DE-4FAA-801E-634DDDAF4B2B}" type="slidenum">
               <a:rPr lang="es-ES" smtClean="0"/>
-              <a:t>15</a:t>
+              <a:t>16</a:t>
             </a:fld>
             <a:endParaRPr lang="es-ES"/>
           </a:p>
@@ -7674,7 +8129,7 @@
 </p:sld>
 </file>
 
-<file path=ppt/slides/slide16.xml><?xml version="1.0" encoding="utf-8"?>
+<file path=ppt/slides/slide17.xml><?xml version="1.0" encoding="utf-8"?>
 <p:sld xmlns:a="http://schemas.openxmlformats.org/drawingml/2006/main" xmlns:r="http://schemas.openxmlformats.org/officeDocument/2006/relationships" xmlns:p="http://schemas.openxmlformats.org/presentationml/2006/main">
   <p:cSld>
     <p:spTree>
@@ -7813,7 +8268,7 @@
           <a:p>
             <a:fld id="{B6F15528-21DE-4FAA-801E-634DDDAF4B2B}" type="slidenum">
               <a:rPr lang="es-ES" smtClean="0"/>
-              <a:t>16</a:t>
+              <a:t>17</a:t>
             </a:fld>
             <a:endParaRPr lang="es-ES"/>
           </a:p>
@@ -9843,6 +10298,120 @@
           </a:p>
         </p:txBody>
       </p:sp>
+      <p:sp>
+        <p:nvSpPr>
+          <p:cNvPr id="5" name="CuadroTexto 4">
+            <a:extLst>
+              <a:ext uri="{FF2B5EF4-FFF2-40B4-BE49-F238E27FC236}">
+                <a16:creationId xmlns:a16="http://schemas.microsoft.com/office/drawing/2014/main" id="{43C69CDD-218E-494A-8C3E-1431DB5F9DC7}"/>
+              </a:ext>
+            </a:extLst>
+          </p:cNvPr>
+          <p:cNvSpPr txBox="1"/>
+          <p:nvPr/>
+        </p:nvSpPr>
+        <p:spPr>
+          <a:xfrm>
+            <a:off x="8153400" y="1833699"/>
+            <a:ext cx="3709297" cy="830997"/>
+          </a:xfrm>
+          <a:prstGeom prst="rect">
+            <a:avLst/>
+          </a:prstGeom>
+          <a:noFill/>
+        </p:spPr>
+        <p:txBody>
+          <a:bodyPr wrap="square" rtlCol="0">
+            <a:spAutoFit/>
+          </a:bodyPr>
+          <a:lstStyle/>
+          <a:p>
+            <a:r>
+              <a:rPr lang="es-ES" sz="1200" dirty="0"/>
+              <a:t>Modo de operación:</a:t>
+            </a:r>
+          </a:p>
+          <a:p>
+            <a:r>
+              <a:rPr lang="es-ES" sz="1200" dirty="0" err="1"/>
+              <a:t>Directional</a:t>
+            </a:r>
+            <a:r>
+              <a:rPr lang="es-ES" sz="1200" dirty="0"/>
+              <a:t> </a:t>
+            </a:r>
+            <a:r>
+              <a:rPr lang="es-ES" sz="1200" dirty="0" err="1"/>
+              <a:t>couplers</a:t>
+            </a:r>
+            <a:r>
+              <a:rPr lang="es-ES" sz="1200" dirty="0"/>
+              <a:t> </a:t>
+            </a:r>
+            <a:r>
+              <a:rPr lang="es-ES" sz="1200" dirty="0">
+                <a:sym typeface="Wingdings" panose="05000000000000000000" pitchFamily="2" charset="2"/>
+              </a:rPr>
+              <a:t></a:t>
+            </a:r>
+            <a:r>
+              <a:rPr lang="es-ES" sz="1200" dirty="0"/>
+              <a:t>Transferencia de campo evanescente</a:t>
+            </a:r>
+          </a:p>
+          <a:p>
+            <a:r>
+              <a:rPr lang="es-ES" sz="1200" dirty="0"/>
+              <a:t>MMI </a:t>
+            </a:r>
+            <a:r>
+              <a:rPr lang="es-ES" sz="1200" dirty="0">
+                <a:sym typeface="Wingdings" panose="05000000000000000000" pitchFamily="2" charset="2"/>
+              </a:rPr>
+              <a:t> </a:t>
+            </a:r>
+            <a:r>
+              <a:rPr lang="es-ES" sz="1200" dirty="0"/>
+              <a:t>Interferencia modal</a:t>
+            </a:r>
+          </a:p>
+        </p:txBody>
+      </p:sp>
+      <p:sp>
+        <p:nvSpPr>
+          <p:cNvPr id="6" name="CuadroTexto 5">
+            <a:extLst>
+              <a:ext uri="{FF2B5EF4-FFF2-40B4-BE49-F238E27FC236}">
+                <a16:creationId xmlns:a16="http://schemas.microsoft.com/office/drawing/2014/main" id="{F9FF0642-522B-41B8-BECF-6A66A842FFBA}"/>
+              </a:ext>
+            </a:extLst>
+          </p:cNvPr>
+          <p:cNvSpPr txBox="1"/>
+          <p:nvPr/>
+        </p:nvSpPr>
+        <p:spPr>
+          <a:xfrm>
+            <a:off x="8153400" y="2875625"/>
+            <a:ext cx="3124200" cy="461665"/>
+          </a:xfrm>
+          <a:prstGeom prst="rect">
+            <a:avLst/>
+          </a:prstGeom>
+          <a:noFill/>
+        </p:spPr>
+        <p:txBody>
+          <a:bodyPr wrap="square" rtlCol="0">
+            <a:spAutoFit/>
+          </a:bodyPr>
+          <a:lstStyle/>
+          <a:p>
+            <a:r>
+              <a:rPr lang="es-ES" sz="1200" dirty="0"/>
+              <a:t>En el DC el índice efectivo se usa para hallar la longitud de batido.</a:t>
+            </a:r>
+          </a:p>
+        </p:txBody>
+      </p:sp>
     </p:spTree>
     <p:extLst>
       <p:ext uri="{BB962C8B-B14F-4D97-AF65-F5344CB8AC3E}">
@@ -10228,13 +10797,41 @@
           </a:p>
           <a:p>
             <a:pPr algn="just"/>
-            <a:endParaRPr lang="en-US" sz="1200" dirty="0">
-              <a:latin typeface="Arial" panose="020B0604020202020204" pitchFamily="34" charset="0"/>
-              <a:cs typeface="Arial" panose="020B0604020202020204" pitchFamily="34" charset="0"/>
-            </a:endParaRPr>
-          </a:p>
-          <a:p>
-            <a:pPr algn="just"/>
+            <a:r>
+              <a:rPr lang="es-ES" sz="1200" dirty="0">
+                <a:latin typeface="Arial" panose="020B0604020202020204" pitchFamily="34" charset="0"/>
+                <a:cs typeface="Arial" panose="020B0604020202020204" pitchFamily="34" charset="0"/>
+              </a:rPr>
+              <a:t>Por tanto, para obtener una transferencia completa de energía entre guías de onda, se necesitará una longitud (L) igual a la longitud de batido (</a:t>
+            </a:r>
+            <a:r>
+              <a:rPr lang="es-ES" sz="1200" dirty="0" err="1">
+                <a:latin typeface="Arial" panose="020B0604020202020204" pitchFamily="34" charset="0"/>
+                <a:cs typeface="Arial" panose="020B0604020202020204" pitchFamily="34" charset="0"/>
+              </a:rPr>
+              <a:t>L_pi</a:t>
+            </a:r>
+            <a:r>
+              <a:rPr lang="es-ES" sz="1200" dirty="0">
+                <a:latin typeface="Arial" panose="020B0604020202020204" pitchFamily="34" charset="0"/>
+                <a:cs typeface="Arial" panose="020B0604020202020204" pitchFamily="34" charset="0"/>
+              </a:rPr>
+              <a:t>). Por otra parte, para obtener una división de la potencia a la mitad se necesita una longitud (L) de la mitad de la longitud de batido (</a:t>
+            </a:r>
+            <a:r>
+              <a:rPr lang="es-ES" sz="1200" dirty="0" err="1">
+                <a:latin typeface="Arial" panose="020B0604020202020204" pitchFamily="34" charset="0"/>
+                <a:cs typeface="Arial" panose="020B0604020202020204" pitchFamily="34" charset="0"/>
+              </a:rPr>
+              <a:t>L_pi</a:t>
+            </a:r>
+            <a:r>
+              <a:rPr lang="es-ES" sz="1200" dirty="0">
+                <a:latin typeface="Arial" panose="020B0604020202020204" pitchFamily="34" charset="0"/>
+                <a:cs typeface="Arial" panose="020B0604020202020204" pitchFamily="34" charset="0"/>
+              </a:rPr>
+              <a:t>).</a:t>
+            </a:r>
             <a:endParaRPr lang="en-US" sz="1200" dirty="0">
               <a:latin typeface="Arial" panose="020B0604020202020204" pitchFamily="34" charset="0"/>
               <a:cs typeface="Arial" panose="020B0604020202020204" pitchFamily="34" charset="0"/>
@@ -10354,7 +10951,7 @@
             <a:pPr algn="ctr"/>
             <a:r>
               <a:rPr lang="en-US" dirty="0"/>
-              <a:t>Paste L/</a:t>
+              <a:t>Paste K vs L/</a:t>
             </a:r>
             <a:r>
               <a:rPr lang="en-US" dirty="0" err="1"/>
@@ -10362,7 +10959,7 @@
             </a:r>
             <a:r>
               <a:rPr lang="en-US" dirty="0"/>
-              <a:t> vs K plot here</a:t>
+              <a:t> plot here</a:t>
             </a:r>
           </a:p>
         </p:txBody>
@@ -10490,7 +11087,7 @@
             </a:br>
             <a:r>
               <a:rPr lang="en-US" b="0" dirty="0"/>
-              <a:t>Width 0.6 - 1.6 µm (step 0.1 µm) – Wavelength 1.55 µm </a:t>
+              <a:t>Gap 0.6 - 1.6 µm (step 0.1 µm) – Wavelength 1.55 µm </a:t>
             </a:r>
             <a:endParaRPr lang="en-US" sz="2500" b="0" dirty="0">
               <a:latin typeface="+mj-lt"/>
@@ -10612,8 +11209,8 @@
         </p:nvSpPr>
         <p:spPr>
           <a:xfrm>
-            <a:off x="609441" y="4860334"/>
-            <a:ext cx="11199971" cy="1200329"/>
+            <a:off x="583019" y="4889565"/>
+            <a:ext cx="11199971" cy="1015663"/>
           </a:xfrm>
           <a:prstGeom prst="rect">
             <a:avLst/>
@@ -10667,17 +11264,55 @@
           </a:p>
           <a:p>
             <a:pPr algn="just"/>
-            <a:endParaRPr lang="en-US" sz="1200" dirty="0">
-              <a:latin typeface="Arial" panose="020B0604020202020204" pitchFamily="34" charset="0"/>
-              <a:cs typeface="Arial" panose="020B0604020202020204" pitchFamily="34" charset="0"/>
-            </a:endParaRPr>
-          </a:p>
-          <a:p>
-            <a:pPr algn="just"/>
-            <a:endParaRPr lang="en-US" sz="1200" dirty="0">
-              <a:latin typeface="Arial" panose="020B0604020202020204" pitchFamily="34" charset="0"/>
-              <a:cs typeface="Arial" panose="020B0604020202020204" pitchFamily="34" charset="0"/>
-            </a:endParaRPr>
+            <a:r>
+              <a:rPr lang="en-US" sz="1200" dirty="0">
+                <a:latin typeface="Arial" panose="020B0604020202020204" pitchFamily="34" charset="0"/>
+                <a:cs typeface="Arial" panose="020B0604020202020204" pitchFamily="34" charset="0"/>
+              </a:rPr>
+              <a:t>Para </a:t>
+            </a:r>
+            <a:r>
+              <a:rPr lang="en-US" sz="1200" dirty="0" err="1">
+                <a:latin typeface="Arial" panose="020B0604020202020204" pitchFamily="34" charset="0"/>
+                <a:cs typeface="Arial" panose="020B0604020202020204" pitchFamily="34" charset="0"/>
+              </a:rPr>
+              <a:t>cada</a:t>
+            </a:r>
+            <a:r>
+              <a:rPr lang="en-US" sz="1200" dirty="0">
+                <a:latin typeface="Arial" panose="020B0604020202020204" pitchFamily="34" charset="0"/>
+                <a:cs typeface="Arial" panose="020B0604020202020204" pitchFamily="34" charset="0"/>
+              </a:rPr>
+              <a:t> gap </a:t>
+            </a:r>
+            <a:r>
+              <a:rPr lang="en-US" sz="1200" dirty="0" err="1">
+                <a:latin typeface="Arial" panose="020B0604020202020204" pitchFamily="34" charset="0"/>
+                <a:cs typeface="Arial" panose="020B0604020202020204" pitchFamily="34" charset="0"/>
+              </a:rPr>
+              <a:t>hallar</a:t>
+            </a:r>
+            <a:r>
+              <a:rPr lang="en-US" sz="1200" dirty="0">
+                <a:latin typeface="Arial" panose="020B0604020202020204" pitchFamily="34" charset="0"/>
+                <a:cs typeface="Arial" panose="020B0604020202020204" pitchFamily="34" charset="0"/>
+              </a:rPr>
+              <a:t> la division de </a:t>
+            </a:r>
+            <a:r>
+              <a:rPr lang="en-US" sz="1200" dirty="0" err="1">
+                <a:latin typeface="Arial" panose="020B0604020202020204" pitchFamily="34" charset="0"/>
+                <a:cs typeface="Arial" panose="020B0604020202020204" pitchFamily="34" charset="0"/>
+              </a:rPr>
+              <a:t>potencia</a:t>
+            </a:r>
+            <a:r>
+              <a:rPr lang="en-US" sz="1200" dirty="0">
+                <a:latin typeface="Arial" panose="020B0604020202020204" pitchFamily="34" charset="0"/>
+                <a:cs typeface="Arial" panose="020B0604020202020204" pitchFamily="34" charset="0"/>
+              </a:rPr>
+              <a:t> de 50/50</a:t>
+            </a:r>
           </a:p>
           <a:p>
             <a:pPr algn="just"/>
@@ -10798,6 +11433,36 @@
           </a:p>
         </p:txBody>
       </p:sp>
+      <p:pic>
+        <p:nvPicPr>
+          <p:cNvPr id="5" name="Imagen 4">
+            <a:extLst>
+              <a:ext uri="{FF2B5EF4-FFF2-40B4-BE49-F238E27FC236}">
+                <a16:creationId xmlns:a16="http://schemas.microsoft.com/office/drawing/2014/main" id="{B9587ED5-83B4-453E-80B2-8A8468ED87BA}"/>
+              </a:ext>
+            </a:extLst>
+          </p:cNvPr>
+          <p:cNvPicPr>
+            <a:picLocks noChangeAspect="1"/>
+          </p:cNvPicPr>
+          <p:nvPr/>
+        </p:nvPicPr>
+        <p:blipFill>
+          <a:blip r:embed="rId5"/>
+          <a:stretch>
+            <a:fillRect/>
+          </a:stretch>
+        </p:blipFill>
+        <p:spPr>
+          <a:xfrm>
+            <a:off x="1066800" y="1688991"/>
+            <a:ext cx="3728137" cy="2924659"/>
+          </a:xfrm>
+          <a:prstGeom prst="rect">
+            <a:avLst/>
+          </a:prstGeom>
+        </p:spPr>
+      </p:pic>
     </p:spTree>
     <p:extLst>
       <p:ext uri="{BB962C8B-B14F-4D97-AF65-F5344CB8AC3E}">
@@ -10812,6 +11477,184 @@
 </file>
 
 <file path=ppt/slides/slide6.xml><?xml version="1.0" encoding="utf-8"?>
+<p:sld xmlns:a="http://schemas.openxmlformats.org/drawingml/2006/main" xmlns:r="http://schemas.openxmlformats.org/officeDocument/2006/relationships" xmlns:p="http://schemas.openxmlformats.org/presentationml/2006/main">
+  <p:cSld>
+    <p:spTree>
+      <p:nvGrpSpPr>
+        <p:cNvPr id="1" name=""/>
+        <p:cNvGrpSpPr/>
+        <p:nvPr/>
+      </p:nvGrpSpPr>
+      <p:grpSpPr>
+        <a:xfrm>
+          <a:off x="0" y="0"/>
+          <a:ext cx="0" cy="0"/>
+          <a:chOff x="0" y="0"/>
+          <a:chExt cx="0" cy="0"/>
+        </a:xfrm>
+      </p:grpSpPr>
+      <p:sp>
+        <p:nvSpPr>
+          <p:cNvPr id="2" name="Título 1">
+            <a:extLst>
+              <a:ext uri="{FF2B5EF4-FFF2-40B4-BE49-F238E27FC236}">
+                <a16:creationId xmlns:a16="http://schemas.microsoft.com/office/drawing/2014/main" id="{6043ED34-A14D-4A6E-B8F4-17FFD9B09985}"/>
+              </a:ext>
+            </a:extLst>
+          </p:cNvPr>
+          <p:cNvSpPr>
+            <a:spLocks noGrp="1"/>
+          </p:cNvSpPr>
+          <p:nvPr>
+            <p:ph type="title"/>
+          </p:nvPr>
+        </p:nvSpPr>
+        <p:spPr/>
+        <p:txBody>
+          <a:bodyPr/>
+          <a:lstStyle/>
+          <a:p>
+            <a:endParaRPr lang="es-ES"/>
+          </a:p>
+        </p:txBody>
+      </p:sp>
+      <p:sp>
+        <p:nvSpPr>
+          <p:cNvPr id="3" name="Marcador de texto 2">
+            <a:extLst>
+              <a:ext uri="{FF2B5EF4-FFF2-40B4-BE49-F238E27FC236}">
+                <a16:creationId xmlns:a16="http://schemas.microsoft.com/office/drawing/2014/main" id="{A03F63E1-4FB0-4720-815E-D28325DD6207}"/>
+              </a:ext>
+            </a:extLst>
+          </p:cNvPr>
+          <p:cNvSpPr>
+            <a:spLocks noGrp="1"/>
+          </p:cNvSpPr>
+          <p:nvPr>
+            <p:ph type="body" idx="1"/>
+          </p:nvPr>
+        </p:nvSpPr>
+        <p:spPr>
+          <a:xfrm>
+            <a:off x="609600" y="838200"/>
+            <a:ext cx="10972800" cy="5265420"/>
+          </a:xfrm>
+        </p:spPr>
+        <p:txBody>
+          <a:bodyPr/>
+          <a:lstStyle/>
+          <a:p>
+            <a:endParaRPr lang="es-ES" dirty="0"/>
+          </a:p>
+        </p:txBody>
+      </p:sp>
+      <p:sp>
+        <p:nvSpPr>
+          <p:cNvPr id="4" name="Marcador de pie de página 3">
+            <a:extLst>
+              <a:ext uri="{FF2B5EF4-FFF2-40B4-BE49-F238E27FC236}">
+                <a16:creationId xmlns:a16="http://schemas.microsoft.com/office/drawing/2014/main" id="{9E771CBF-5C82-482D-923C-D4E6E77ECE0E}"/>
+              </a:ext>
+            </a:extLst>
+          </p:cNvPr>
+          <p:cNvSpPr>
+            <a:spLocks noGrp="1"/>
+          </p:cNvSpPr>
+          <p:nvPr>
+            <p:ph type="ftr" sz="quarter" idx="5"/>
+          </p:nvPr>
+        </p:nvSpPr>
+        <p:spPr/>
+        <p:txBody>
+          <a:bodyPr/>
+          <a:lstStyle/>
+          <a:p>
+            <a:pPr marL="12700">
+              <a:spcBef>
+                <a:spcPts val="15"/>
+              </a:spcBef>
+            </a:pPr>
+            <a:r>
+              <a:rPr lang="es-ES" spc="-5"/>
+              <a:t>LAB 2.0. COUPLERS</a:t>
+            </a:r>
+            <a:endParaRPr lang="es-ES" spc="-5" dirty="0"/>
+          </a:p>
+        </p:txBody>
+      </p:sp>
+      <p:sp>
+        <p:nvSpPr>
+          <p:cNvPr id="5" name="Marcador de número de diapositiva 4">
+            <a:extLst>
+              <a:ext uri="{FF2B5EF4-FFF2-40B4-BE49-F238E27FC236}">
+                <a16:creationId xmlns:a16="http://schemas.microsoft.com/office/drawing/2014/main" id="{B0E895DD-4DDF-49D4-993B-E9F3D1EC9FFB}"/>
+              </a:ext>
+            </a:extLst>
+          </p:cNvPr>
+          <p:cNvSpPr>
+            <a:spLocks noGrp="1"/>
+          </p:cNvSpPr>
+          <p:nvPr>
+            <p:ph type="sldNum" sz="quarter" idx="7"/>
+          </p:nvPr>
+        </p:nvSpPr>
+        <p:spPr/>
+        <p:txBody>
+          <a:bodyPr/>
+          <a:lstStyle/>
+          <a:p>
+            <a:fld id="{B6F15528-21DE-4FAA-801E-634DDDAF4B2B}" type="slidenum">
+              <a:rPr lang="es-ES" smtClean="0"/>
+              <a:t>6</a:t>
+            </a:fld>
+            <a:endParaRPr lang="es-ES"/>
+          </a:p>
+        </p:txBody>
+      </p:sp>
+      <p:pic>
+        <p:nvPicPr>
+          <p:cNvPr id="7" name="Imagen 6">
+            <a:extLst>
+              <a:ext uri="{FF2B5EF4-FFF2-40B4-BE49-F238E27FC236}">
+                <a16:creationId xmlns:a16="http://schemas.microsoft.com/office/drawing/2014/main" id="{9B4A4D68-8EE2-4129-A570-C1FFFC38DAAF}"/>
+              </a:ext>
+            </a:extLst>
+          </p:cNvPr>
+          <p:cNvPicPr>
+            <a:picLocks noChangeAspect="1"/>
+          </p:cNvPicPr>
+          <p:nvPr/>
+        </p:nvPicPr>
+        <p:blipFill>
+          <a:blip r:embed="rId2"/>
+          <a:stretch>
+            <a:fillRect/>
+          </a:stretch>
+        </p:blipFill>
+        <p:spPr>
+          <a:xfrm>
+            <a:off x="609600" y="838200"/>
+            <a:ext cx="3429000" cy="872081"/>
+          </a:xfrm>
+          <a:prstGeom prst="rect">
+            <a:avLst/>
+          </a:prstGeom>
+        </p:spPr>
+      </p:pic>
+    </p:spTree>
+    <p:extLst>
+      <p:ext uri="{BB962C8B-B14F-4D97-AF65-F5344CB8AC3E}">
+        <p14:creationId xmlns:p14="http://schemas.microsoft.com/office/powerpoint/2010/main" val="2591439134"/>
+      </p:ext>
+    </p:extLst>
+  </p:cSld>
+  <p:clrMapOvr>
+    <a:masterClrMapping/>
+  </p:clrMapOvr>
+</p:sld>
+</file>
+
+<file path=ppt/slides/slide7.xml><?xml version="1.0" encoding="utf-8"?>
 <p:sld xmlns:a="http://schemas.openxmlformats.org/drawingml/2006/main" xmlns:r="http://schemas.openxmlformats.org/officeDocument/2006/relationships" xmlns:p="http://schemas.openxmlformats.org/presentationml/2006/main">
   <p:cSld>
     <p:spTree>
@@ -10957,7 +11800,7 @@
           <a:p>
             <a:fld id="{B6F15528-21DE-4FAA-801E-634DDDAF4B2B}" type="slidenum">
               <a:rPr lang="es-ES" smtClean="0"/>
-              <a:t>6</a:t>
+              <a:t>7</a:t>
             </a:fld>
             <a:endParaRPr lang="es-ES"/>
           </a:p>
@@ -11012,7 +11855,7 @@
         <p:spPr>
           <a:xfrm>
             <a:off x="609441" y="4627196"/>
-            <a:ext cx="11199971" cy="2123658"/>
+            <a:ext cx="11199971" cy="1754326"/>
           </a:xfrm>
           <a:prstGeom prst="rect">
             <a:avLst/>
@@ -11083,24 +11926,146 @@
           </a:p>
           <a:p>
             <a:pPr algn="just"/>
-            <a:endParaRPr lang="en-US" sz="1200" dirty="0">
-              <a:latin typeface="Arial" panose="020B0604020202020204" pitchFamily="34" charset="0"/>
-              <a:cs typeface="Arial" panose="020B0604020202020204" pitchFamily="34" charset="0"/>
-            </a:endParaRPr>
-          </a:p>
-          <a:p>
-            <a:pPr algn="just"/>
-            <a:endParaRPr lang="en-US" sz="1200" dirty="0">
-              <a:latin typeface="Arial" panose="020B0604020202020204" pitchFamily="34" charset="0"/>
-              <a:cs typeface="Arial" panose="020B0604020202020204" pitchFamily="34" charset="0"/>
-            </a:endParaRPr>
-          </a:p>
-          <a:p>
-            <a:pPr algn="just"/>
-            <a:endParaRPr lang="en-US" sz="1200" dirty="0">
-              <a:latin typeface="Arial" panose="020B0604020202020204" pitchFamily="34" charset="0"/>
-              <a:cs typeface="Arial" panose="020B0604020202020204" pitchFamily="34" charset="0"/>
-            </a:endParaRPr>
+            <a:r>
+              <a:rPr lang="en-US" sz="1200" dirty="0" err="1">
+                <a:latin typeface="Arial" panose="020B0604020202020204" pitchFamily="34" charset="0"/>
+                <a:cs typeface="Arial" panose="020B0604020202020204" pitchFamily="34" charset="0"/>
+              </a:rPr>
+              <a:t>Cual</a:t>
+            </a:r>
+            <a:r>
+              <a:rPr lang="en-US" sz="1200" dirty="0">
+                <a:latin typeface="Arial" panose="020B0604020202020204" pitchFamily="34" charset="0"/>
+                <a:cs typeface="Arial" panose="020B0604020202020204" pitchFamily="34" charset="0"/>
+              </a:rPr>
+              <a:t> </a:t>
+            </a:r>
+            <a:r>
+              <a:rPr lang="en-US" sz="1200" dirty="0" err="1">
+                <a:latin typeface="Arial" panose="020B0604020202020204" pitchFamily="34" charset="0"/>
+                <a:cs typeface="Arial" panose="020B0604020202020204" pitchFamily="34" charset="0"/>
+              </a:rPr>
+              <a:t>sería</a:t>
+            </a:r>
+            <a:r>
+              <a:rPr lang="en-US" sz="1200" dirty="0">
+                <a:latin typeface="Arial" panose="020B0604020202020204" pitchFamily="34" charset="0"/>
+                <a:cs typeface="Arial" panose="020B0604020202020204" pitchFamily="34" charset="0"/>
+              </a:rPr>
+              <a:t> la </a:t>
+            </a:r>
+            <a:r>
+              <a:rPr lang="en-US" sz="1200" dirty="0" err="1">
+                <a:latin typeface="Arial" panose="020B0604020202020204" pitchFamily="34" charset="0"/>
+                <a:cs typeface="Arial" panose="020B0604020202020204" pitchFamily="34" charset="0"/>
+              </a:rPr>
+              <a:t>distancia</a:t>
+            </a:r>
+            <a:r>
+              <a:rPr lang="en-US" sz="1200" dirty="0">
+                <a:latin typeface="Arial" panose="020B0604020202020204" pitchFamily="34" charset="0"/>
+                <a:cs typeface="Arial" panose="020B0604020202020204" pitchFamily="34" charset="0"/>
+              </a:rPr>
+              <a:t> para la </a:t>
+            </a:r>
+            <a:r>
+              <a:rPr lang="en-US" sz="1200" dirty="0" err="1">
+                <a:latin typeface="Arial" panose="020B0604020202020204" pitchFamily="34" charset="0"/>
+                <a:cs typeface="Arial" panose="020B0604020202020204" pitchFamily="34" charset="0"/>
+              </a:rPr>
+              <a:t>cual</a:t>
+            </a:r>
+            <a:r>
+              <a:rPr lang="en-US" sz="1200" dirty="0">
+                <a:latin typeface="Arial" panose="020B0604020202020204" pitchFamily="34" charset="0"/>
+                <a:cs typeface="Arial" panose="020B0604020202020204" pitchFamily="34" charset="0"/>
+              </a:rPr>
+              <a:t> no </a:t>
+            </a:r>
+            <a:r>
+              <a:rPr lang="en-US" sz="1200" dirty="0" err="1">
+                <a:latin typeface="Arial" panose="020B0604020202020204" pitchFamily="34" charset="0"/>
+                <a:cs typeface="Arial" panose="020B0604020202020204" pitchFamily="34" charset="0"/>
+              </a:rPr>
+              <a:t>sufre</a:t>
+            </a:r>
+            <a:r>
+              <a:rPr lang="en-US" sz="1200" dirty="0">
+                <a:latin typeface="Arial" panose="020B0604020202020204" pitchFamily="34" charset="0"/>
+                <a:cs typeface="Arial" panose="020B0604020202020204" pitchFamily="34" charset="0"/>
+              </a:rPr>
+              <a:t> </a:t>
+            </a:r>
+            <a:r>
+              <a:rPr lang="en-US" sz="1200" dirty="0" err="1">
+                <a:latin typeface="Arial" panose="020B0604020202020204" pitchFamily="34" charset="0"/>
+                <a:cs typeface="Arial" panose="020B0604020202020204" pitchFamily="34" charset="0"/>
+              </a:rPr>
+              <a:t>acoplamiento</a:t>
+            </a:r>
+            <a:r>
+              <a:rPr lang="en-US" sz="1200" dirty="0">
+                <a:latin typeface="Arial" panose="020B0604020202020204" pitchFamily="34" charset="0"/>
+                <a:cs typeface="Arial" panose="020B0604020202020204" pitchFamily="34" charset="0"/>
+              </a:rPr>
+              <a:t> de una </a:t>
+            </a:r>
+            <a:r>
+              <a:rPr lang="en-US" sz="1200" dirty="0" err="1">
+                <a:latin typeface="Arial" panose="020B0604020202020204" pitchFamily="34" charset="0"/>
+                <a:cs typeface="Arial" panose="020B0604020202020204" pitchFamily="34" charset="0"/>
+              </a:rPr>
+              <a:t>guía</a:t>
+            </a:r>
+            <a:r>
+              <a:rPr lang="en-US" sz="1200" dirty="0">
+                <a:latin typeface="Arial" panose="020B0604020202020204" pitchFamily="34" charset="0"/>
+                <a:cs typeface="Arial" panose="020B0604020202020204" pitchFamily="34" charset="0"/>
+              </a:rPr>
+              <a:t> de </a:t>
+            </a:r>
+            <a:r>
+              <a:rPr lang="en-US" sz="1200" dirty="0" err="1">
+                <a:latin typeface="Arial" panose="020B0604020202020204" pitchFamily="34" charset="0"/>
+                <a:cs typeface="Arial" panose="020B0604020202020204" pitchFamily="34" charset="0"/>
+              </a:rPr>
+              <a:t>onda</a:t>
+            </a:r>
+            <a:r>
+              <a:rPr lang="en-US" sz="1200" dirty="0">
+                <a:latin typeface="Arial" panose="020B0604020202020204" pitchFamily="34" charset="0"/>
+                <a:cs typeface="Arial" panose="020B0604020202020204" pitchFamily="34" charset="0"/>
+              </a:rPr>
+              <a:t> a </a:t>
+            </a:r>
+            <a:r>
+              <a:rPr lang="en-US" sz="1200" dirty="0" err="1">
+                <a:latin typeface="Arial" panose="020B0604020202020204" pitchFamily="34" charset="0"/>
+                <a:cs typeface="Arial" panose="020B0604020202020204" pitchFamily="34" charset="0"/>
+              </a:rPr>
+              <a:t>otra</a:t>
+            </a:r>
+            <a:r>
+              <a:rPr lang="en-US" sz="1200" dirty="0">
+                <a:latin typeface="Arial" panose="020B0604020202020204" pitchFamily="34" charset="0"/>
+                <a:cs typeface="Arial" panose="020B0604020202020204" pitchFamily="34" charset="0"/>
+              </a:rPr>
+              <a:t>. El </a:t>
+            </a:r>
+            <a:r>
+              <a:rPr lang="en-US" sz="1200" dirty="0" err="1">
+                <a:latin typeface="Arial" panose="020B0604020202020204" pitchFamily="34" charset="0"/>
+                <a:cs typeface="Arial" panose="020B0604020202020204" pitchFamily="34" charset="0"/>
+              </a:rPr>
+              <a:t>parámetro</a:t>
+            </a:r>
+            <a:r>
+              <a:rPr lang="en-US" sz="1200" dirty="0">
+                <a:latin typeface="Arial" panose="020B0604020202020204" pitchFamily="34" charset="0"/>
+                <a:cs typeface="Arial" panose="020B0604020202020204" pitchFamily="34" charset="0"/>
+              </a:rPr>
+              <a:t> clave es que K&lt;0.1</a:t>
+            </a:r>
           </a:p>
           <a:p>
             <a:pPr algn="just"/>
@@ -11481,7 +12446,7 @@
 </p:sld>
 </file>
 
-<file path=ppt/slides/slide7.xml><?xml version="1.0" encoding="utf-8"?>
+<file path=ppt/slides/slide8.xml><?xml version="1.0" encoding="utf-8"?>
 <p:sld xmlns:a="http://schemas.openxmlformats.org/drawingml/2006/main" xmlns:r="http://schemas.openxmlformats.org/officeDocument/2006/relationships" xmlns:p="http://schemas.openxmlformats.org/presentationml/2006/main">
   <p:cSld>
     <p:spTree>
@@ -11561,7 +12526,7 @@
           <a:p>
             <a:fld id="{B6F15528-21DE-4FAA-801E-634DDDAF4B2B}" type="slidenum">
               <a:rPr lang="es-ES" smtClean="0"/>
-              <a:t>7</a:t>
+              <a:t>8</a:t>
             </a:fld>
             <a:endParaRPr lang="es-ES"/>
           </a:p>
@@ -11622,7 +12587,7 @@
 </p:sld>
 </file>
 
-<file path=ppt/slides/slide8.xml><?xml version="1.0" encoding="utf-8"?>
+<file path=ppt/slides/slide9.xml><?xml version="1.0" encoding="utf-8"?>
 <p:sld xmlns:a="http://schemas.openxmlformats.org/drawingml/2006/main" xmlns:r="http://schemas.openxmlformats.org/officeDocument/2006/relationships" xmlns:p="http://schemas.openxmlformats.org/presentationml/2006/main">
   <p:cSld>
     <p:spTree>
@@ -11769,7 +12734,7 @@
           <a:p>
             <a:fld id="{B6F15528-21DE-4FAA-801E-634DDDAF4B2B}" type="slidenum">
               <a:rPr lang="es-ES" smtClean="0"/>
-              <a:t>8</a:t>
+              <a:t>9</a:t>
             </a:fld>
             <a:endParaRPr lang="es-ES"/>
           </a:p>
@@ -12013,460 +12978,6 @@
     <p:extLst>
       <p:ext uri="{BB962C8B-B14F-4D97-AF65-F5344CB8AC3E}">
         <p14:creationId xmlns:p14="http://schemas.microsoft.com/office/powerpoint/2010/main" val="2815679427"/>
-      </p:ext>
-    </p:extLst>
-  </p:cSld>
-  <p:clrMapOvr>
-    <a:masterClrMapping/>
-  </p:clrMapOvr>
-</p:sld>
-</file>
-
-<file path=ppt/slides/slide9.xml><?xml version="1.0" encoding="utf-8"?>
-<p:sld xmlns:a="http://schemas.openxmlformats.org/drawingml/2006/main" xmlns:r="http://schemas.openxmlformats.org/officeDocument/2006/relationships" xmlns:p="http://schemas.openxmlformats.org/presentationml/2006/main">
-  <p:cSld>
-    <p:spTree>
-      <p:nvGrpSpPr>
-        <p:cNvPr id="1" name="">
-          <a:extLst>
-            <a:ext uri="{FF2B5EF4-FFF2-40B4-BE49-F238E27FC236}">
-              <a16:creationId xmlns:a16="http://schemas.microsoft.com/office/drawing/2014/main" id="{D1F11DBE-A482-7036-60B2-70B7E2318F46}"/>
-            </a:ext>
-          </a:extLst>
-        </p:cNvPr>
-        <p:cNvGrpSpPr/>
-        <p:nvPr/>
-      </p:nvGrpSpPr>
-      <p:grpSpPr>
-        <a:xfrm>
-          <a:off x="0" y="0"/>
-          <a:ext cx="0" cy="0"/>
-          <a:chOff x="0" y="0"/>
-          <a:chExt cx="0" cy="0"/>
-        </a:xfrm>
-      </p:grpSpPr>
-      <p:sp>
-        <p:nvSpPr>
-          <p:cNvPr id="16" name="object 16">
-            <a:extLst>
-              <a:ext uri="{FF2B5EF4-FFF2-40B4-BE49-F238E27FC236}">
-                <a16:creationId xmlns:a16="http://schemas.microsoft.com/office/drawing/2014/main" id="{C096193E-AB86-E3CD-BDAC-0F9156C1A3F0}"/>
-              </a:ext>
-            </a:extLst>
-          </p:cNvPr>
-          <p:cNvSpPr txBox="1">
-            <a:spLocks noGrp="1"/>
-          </p:cNvSpPr>
-          <p:nvPr>
-            <p:ph type="title"/>
-          </p:nvPr>
-        </p:nvSpPr>
-        <p:spPr>
-          <a:xfrm>
-            <a:off x="685800" y="408883"/>
-            <a:ext cx="10994410" cy="705321"/>
-          </a:xfrm>
-          <a:prstGeom prst="rect">
-            <a:avLst/>
-          </a:prstGeom>
-        </p:spPr>
-        <p:txBody>
-          <a:bodyPr vert="horz" wrap="square" lIns="0" tIns="12700" rIns="0" bIns="0" rtlCol="0">
-            <a:spAutoFit/>
-          </a:bodyPr>
-          <a:lstStyle/>
-          <a:p>
-            <a:pPr marL="12700">
-              <a:lnSpc>
-                <a:spcPct val="100000"/>
-              </a:lnSpc>
-              <a:spcBef>
-                <a:spcPts val="100"/>
-              </a:spcBef>
-            </a:pPr>
-            <a:r>
-              <a:rPr lang="en-US" sz="2500" dirty="0"/>
-              <a:t>Learning outcome #4.2 – 2x2 Multimode Interference Coupler - Optimization</a:t>
-            </a:r>
-            <a:br>
-              <a:rPr lang="en-US" sz="2500" dirty="0"/>
-            </a:br>
-            <a:r>
-              <a:rPr lang="en-US" b="0" dirty="0"/>
-              <a:t>Wavelength 1.55 µm, </a:t>
-            </a:r>
-            <a:r>
-              <a:rPr lang="en-US" b="0" dirty="0" err="1"/>
-              <a:t>wMMI</a:t>
-            </a:r>
-            <a:r>
-              <a:rPr lang="en-US" b="0" dirty="0"/>
-              <a:t> = 6.6 µm</a:t>
-            </a:r>
-            <a:endParaRPr lang="en-US" sz="2500" b="0" dirty="0">
-              <a:latin typeface="+mj-lt"/>
-              <a:cs typeface="Lucida Sans"/>
-            </a:endParaRPr>
-          </a:p>
-        </p:txBody>
-      </p:sp>
-      <p:pic>
-        <p:nvPicPr>
-          <p:cNvPr id="83" name="Gráfico 82">
-            <a:extLst>
-              <a:ext uri="{FF2B5EF4-FFF2-40B4-BE49-F238E27FC236}">
-                <a16:creationId xmlns:a16="http://schemas.microsoft.com/office/drawing/2014/main" id="{2D17DCD6-D851-E62D-D95C-A9F9954602DE}"/>
-              </a:ext>
-            </a:extLst>
-          </p:cNvPr>
-          <p:cNvPicPr>
-            <a:picLocks noChangeAspect="1"/>
-          </p:cNvPicPr>
-          <p:nvPr/>
-        </p:nvPicPr>
-        <p:blipFill>
-          <a:blip r:embed="rId3">
-            <a:extLst>
-              <a:ext uri="{96DAC541-7B7A-43D3-8B79-37D633B846F1}">
-                <asvg:svgBlip xmlns:asvg="http://schemas.microsoft.com/office/drawing/2016/SVG/main" r:embed="rId4"/>
-              </a:ext>
-            </a:extLst>
-          </a:blip>
-          <a:stretch>
-            <a:fillRect/>
-          </a:stretch>
-        </p:blipFill>
-        <p:spPr>
-          <a:xfrm>
-            <a:off x="5045006" y="6356057"/>
-            <a:ext cx="6409575" cy="363174"/>
-          </a:xfrm>
-          <a:prstGeom prst="rect">
-            <a:avLst/>
-          </a:prstGeom>
-        </p:spPr>
-      </p:pic>
-      <p:sp>
-        <p:nvSpPr>
-          <p:cNvPr id="84" name="Marcador de número de diapositiva 83">
-            <a:extLst>
-              <a:ext uri="{FF2B5EF4-FFF2-40B4-BE49-F238E27FC236}">
-                <a16:creationId xmlns:a16="http://schemas.microsoft.com/office/drawing/2014/main" id="{4891046F-11DC-B7FC-54F7-9583E688DC0E}"/>
-              </a:ext>
-            </a:extLst>
-          </p:cNvPr>
-          <p:cNvSpPr>
-            <a:spLocks noGrp="1"/>
-          </p:cNvSpPr>
-          <p:nvPr>
-            <p:ph type="sldNum" sz="quarter" idx="7"/>
-          </p:nvPr>
-        </p:nvSpPr>
-        <p:spPr/>
-        <p:txBody>
-          <a:bodyPr/>
-          <a:lstStyle/>
-          <a:p>
-            <a:fld id="{B6F15528-21DE-4FAA-801E-634DDDAF4B2B}" type="slidenum">
-              <a:rPr lang="es-ES" smtClean="0"/>
-              <a:t>9</a:t>
-            </a:fld>
-            <a:endParaRPr lang="es-ES"/>
-          </a:p>
-        </p:txBody>
-      </p:sp>
-      <p:sp>
-        <p:nvSpPr>
-          <p:cNvPr id="3" name="Marcador de pie de página 2">
-            <a:extLst>
-              <a:ext uri="{FF2B5EF4-FFF2-40B4-BE49-F238E27FC236}">
-                <a16:creationId xmlns:a16="http://schemas.microsoft.com/office/drawing/2014/main" id="{4C9BAA39-017F-D602-6705-A6CF44830139}"/>
-              </a:ext>
-            </a:extLst>
-          </p:cNvPr>
-          <p:cNvSpPr>
-            <a:spLocks noGrp="1"/>
-          </p:cNvSpPr>
-          <p:nvPr>
-            <p:ph type="ftr" sz="quarter" idx="5"/>
-          </p:nvPr>
-        </p:nvSpPr>
-        <p:spPr/>
-        <p:txBody>
-          <a:bodyPr/>
-          <a:lstStyle/>
-          <a:p>
-            <a:pPr marL="12700">
-              <a:spcBef>
-                <a:spcPts val="15"/>
-              </a:spcBef>
-            </a:pPr>
-            <a:r>
-              <a:rPr lang="es-ES" spc="-5"/>
-              <a:t>LAB 2.0. COUPLERS</a:t>
-            </a:r>
-            <a:endParaRPr lang="es-ES" spc="-5" dirty="0"/>
-          </a:p>
-        </p:txBody>
-      </p:sp>
-      <p:sp>
-        <p:nvSpPr>
-          <p:cNvPr id="2" name="CuadroTexto 1">
-            <a:extLst>
-              <a:ext uri="{FF2B5EF4-FFF2-40B4-BE49-F238E27FC236}">
-                <a16:creationId xmlns:a16="http://schemas.microsoft.com/office/drawing/2014/main" id="{43D7D9E5-DAC3-2BB8-7377-826863CBAD4E}"/>
-              </a:ext>
-            </a:extLst>
-          </p:cNvPr>
-          <p:cNvSpPr txBox="1"/>
-          <p:nvPr/>
-        </p:nvSpPr>
-        <p:spPr>
-          <a:xfrm>
-            <a:off x="609441" y="4819471"/>
-            <a:ext cx="11199971" cy="1384995"/>
-          </a:xfrm>
-          <a:prstGeom prst="rect">
-            <a:avLst/>
-          </a:prstGeom>
-          <a:solidFill>
-            <a:schemeClr val="bg1">
-              <a:lumMod val="95000"/>
-            </a:schemeClr>
-          </a:solidFill>
-          <a:ln w="28575">
-            <a:solidFill>
-              <a:srgbClr val="E0700D"/>
-            </a:solidFill>
-          </a:ln>
-        </p:spPr>
-        <p:txBody>
-          <a:bodyPr wrap="square" rtlCol="0">
-            <a:spAutoFit/>
-          </a:bodyPr>
-          <a:lstStyle/>
-          <a:p>
-            <a:pPr algn="just"/>
-            <a:r>
-              <a:rPr lang="en-US" sz="1200" dirty="0">
-                <a:latin typeface="Arial" panose="020B0604020202020204" pitchFamily="34" charset="0"/>
-                <a:cs typeface="Arial" panose="020B0604020202020204" pitchFamily="34" charset="0"/>
-              </a:rPr>
-              <a:t>Comment results</a:t>
-            </a:r>
-          </a:p>
-          <a:p>
-            <a:pPr algn="just"/>
-            <a:endParaRPr lang="en-US" sz="1200" dirty="0">
-              <a:latin typeface="Arial" panose="020B0604020202020204" pitchFamily="34" charset="0"/>
-              <a:cs typeface="Arial" panose="020B0604020202020204" pitchFamily="34" charset="0"/>
-            </a:endParaRPr>
-          </a:p>
-          <a:p>
-            <a:pPr algn="just"/>
-            <a:endParaRPr lang="en-US" sz="1200" dirty="0">
-              <a:latin typeface="Arial" panose="020B0604020202020204" pitchFamily="34" charset="0"/>
-              <a:cs typeface="Arial" panose="020B0604020202020204" pitchFamily="34" charset="0"/>
-            </a:endParaRPr>
-          </a:p>
-          <a:p>
-            <a:pPr algn="just"/>
-            <a:endParaRPr lang="en-US" sz="1200" dirty="0">
-              <a:latin typeface="Arial" panose="020B0604020202020204" pitchFamily="34" charset="0"/>
-              <a:cs typeface="Arial" panose="020B0604020202020204" pitchFamily="34" charset="0"/>
-            </a:endParaRPr>
-          </a:p>
-          <a:p>
-            <a:pPr algn="just"/>
-            <a:endParaRPr lang="en-US" sz="1200" dirty="0">
-              <a:latin typeface="Arial" panose="020B0604020202020204" pitchFamily="34" charset="0"/>
-              <a:cs typeface="Arial" panose="020B0604020202020204" pitchFamily="34" charset="0"/>
-            </a:endParaRPr>
-          </a:p>
-          <a:p>
-            <a:pPr algn="just"/>
-            <a:endParaRPr lang="en-US" sz="1200" dirty="0">
-              <a:latin typeface="Arial" panose="020B0604020202020204" pitchFamily="34" charset="0"/>
-              <a:cs typeface="Arial" panose="020B0604020202020204" pitchFamily="34" charset="0"/>
-            </a:endParaRPr>
-          </a:p>
-          <a:p>
-            <a:pPr algn="just"/>
-            <a:endParaRPr lang="en-US" sz="1200" dirty="0">
-              <a:latin typeface="Arial" panose="020B0604020202020204" pitchFamily="34" charset="0"/>
-              <a:cs typeface="Arial" panose="020B0604020202020204" pitchFamily="34" charset="0"/>
-            </a:endParaRPr>
-          </a:p>
-        </p:txBody>
-      </p:sp>
-      <p:sp>
-        <p:nvSpPr>
-          <p:cNvPr id="7" name="Rectángulo 6">
-            <a:extLst>
-              <a:ext uri="{FF2B5EF4-FFF2-40B4-BE49-F238E27FC236}">
-                <a16:creationId xmlns:a16="http://schemas.microsoft.com/office/drawing/2014/main" id="{9772491E-4FFB-FFC3-C855-72A4B15F3E73}"/>
-              </a:ext>
-            </a:extLst>
-          </p:cNvPr>
-          <p:cNvSpPr/>
-          <p:nvPr/>
-        </p:nvSpPr>
-        <p:spPr>
-          <a:xfrm>
-            <a:off x="609441" y="1377510"/>
-            <a:ext cx="11199971" cy="3306028"/>
-          </a:xfrm>
-          <a:prstGeom prst="rect">
-            <a:avLst/>
-          </a:prstGeom>
-          <a:noFill/>
-          <a:ln w="28575">
-            <a:solidFill>
-              <a:srgbClr val="E0700D"/>
-            </a:solidFill>
-          </a:ln>
-        </p:spPr>
-        <p:style>
-          <a:lnRef idx="2">
-            <a:schemeClr val="accent1">
-              <a:shade val="15000"/>
-            </a:schemeClr>
-          </a:lnRef>
-          <a:fillRef idx="1">
-            <a:schemeClr val="accent1"/>
-          </a:fillRef>
-          <a:effectRef idx="0">
-            <a:schemeClr val="accent1"/>
-          </a:effectRef>
-          <a:fontRef idx="minor">
-            <a:schemeClr val="lt1"/>
-          </a:fontRef>
-        </p:style>
-        <p:txBody>
-          <a:bodyPr rtlCol="0" anchor="ctr"/>
-          <a:lstStyle/>
-          <a:p>
-            <a:pPr algn="ctr"/>
-            <a:endParaRPr lang="en-US"/>
-          </a:p>
-        </p:txBody>
-      </p:sp>
-      <p:sp>
-        <p:nvSpPr>
-          <p:cNvPr id="8" name="CuadroTexto 7">
-            <a:extLst>
-              <a:ext uri="{FF2B5EF4-FFF2-40B4-BE49-F238E27FC236}">
-                <a16:creationId xmlns:a16="http://schemas.microsoft.com/office/drawing/2014/main" id="{643565A9-7DB6-D6EE-152F-2852C8BA7986}"/>
-              </a:ext>
-            </a:extLst>
-          </p:cNvPr>
-          <p:cNvSpPr txBox="1"/>
-          <p:nvPr/>
-        </p:nvSpPr>
-        <p:spPr>
-          <a:xfrm>
-            <a:off x="640245" y="1942909"/>
-            <a:ext cx="11199972" cy="2708434"/>
-          </a:xfrm>
-          <a:prstGeom prst="rect">
-            <a:avLst/>
-          </a:prstGeom>
-          <a:noFill/>
-        </p:spPr>
-        <p:txBody>
-          <a:bodyPr wrap="square" rtlCol="0">
-            <a:spAutoFit/>
-          </a:bodyPr>
-          <a:lstStyle/>
-          <a:p>
-            <a:pPr algn="ctr"/>
-            <a:r>
-              <a:rPr lang="en-US" b="1" dirty="0"/>
-              <a:t>deep</a:t>
-            </a:r>
-            <a:r>
-              <a:rPr lang="en-US" dirty="0"/>
-              <a:t> waveguide</a:t>
-            </a:r>
-          </a:p>
-          <a:p>
-            <a:pPr algn="ctr"/>
-            <a:endParaRPr lang="en-US" dirty="0"/>
-          </a:p>
-          <a:p>
-            <a:pPr algn="ctr"/>
-            <a:r>
-              <a:rPr lang="en-US" dirty="0"/>
-              <a:t>Paste propagation plot and console results</a:t>
-            </a:r>
-          </a:p>
-          <a:p>
-            <a:pPr algn="ctr"/>
-            <a:endParaRPr lang="en-US" dirty="0"/>
-          </a:p>
-          <a:p>
-            <a:pPr algn="ctr"/>
-            <a:endParaRPr lang="en-US" dirty="0"/>
-          </a:p>
-          <a:p>
-            <a:pPr algn="r"/>
-            <a:r>
-              <a:rPr lang="en-US" sz="1600" b="1" dirty="0"/>
-              <a:t>Target</a:t>
-            </a:r>
-            <a:r>
-              <a:rPr lang="en-US" sz="1600" dirty="0"/>
-              <a:t>: make equal ratio over outputs (even if not 0.5) and minimize excess loss (even if not 0.0 dB)</a:t>
-            </a:r>
-          </a:p>
-          <a:p>
-            <a:pPr algn="r"/>
-            <a:r>
-              <a:rPr lang="en-US" sz="1600" dirty="0"/>
-              <a:t>With same settings of previous LO, now adjust try to manually optimize the MMI by changing iteratively:</a:t>
-            </a:r>
-          </a:p>
-          <a:p>
-            <a:pPr algn="r"/>
-            <a:r>
-              <a:rPr lang="en-US" sz="1600" dirty="0"/>
-              <a:t>- Change </a:t>
-            </a:r>
-            <a:r>
-              <a:rPr lang="en-US" sz="1600" dirty="0" err="1"/>
-              <a:t>dL_MMI</a:t>
-            </a:r>
-            <a:endParaRPr lang="en-US" sz="1600" dirty="0"/>
-          </a:p>
-          <a:p>
-            <a:pPr algn="r"/>
-            <a:r>
-              <a:rPr lang="en-US" sz="1600" dirty="0"/>
-              <a:t>- Change I/O waveguide position +/- </a:t>
-            </a:r>
-            <a:r>
-              <a:rPr lang="en-US" sz="1600" dirty="0" err="1"/>
-              <a:t>dy</a:t>
-            </a:r>
-            <a:endParaRPr lang="en-US" sz="1600" dirty="0"/>
-          </a:p>
-          <a:p>
-            <a:pPr algn="r"/>
-            <a:r>
-              <a:rPr lang="en-US" sz="1600" b="1" dirty="0"/>
-              <a:t>Hints</a:t>
-            </a:r>
-            <a:r>
-              <a:rPr lang="en-US" sz="1600" dirty="0"/>
-              <a:t>: observe the 2D EME propagation results to guide you to the best settings of a) and b).</a:t>
-            </a:r>
-          </a:p>
-        </p:txBody>
-      </p:sp>
-    </p:spTree>
-    <p:extLst>
-      <p:ext uri="{BB962C8B-B14F-4D97-AF65-F5344CB8AC3E}">
-        <p14:creationId xmlns:p14="http://schemas.microsoft.com/office/powerpoint/2010/main" val="2685215753"/>
       </p:ext>
     </p:extLst>
   </p:cSld>

--- a/LabBook_20.pptx
+++ b/LabBook_20.pptx
@@ -818,7 +818,7 @@
           <a:p>
             <a:fld id="{8438F8DC-35B0-48E6-A86E-42F1F08DD00F}" type="datetimeFigureOut">
               <a:rPr lang="es-ES" smtClean="0"/>
-              <a:t>02/03/2026</a:t>
+              <a:t>09/03/2026</a:t>
             </a:fld>
             <a:endParaRPr lang="es-ES"/>
           </a:p>
@@ -995,7 +995,7 @@
           <a:p>
             <a:fld id="{FACBDC12-F39B-4B97-8F4D-6734F9D366FF}" type="datetimeFigureOut">
               <a:rPr lang="es-ES" smtClean="0"/>
-              <a:t>02/03/2026</a:t>
+              <a:t>09/03/2026</a:t>
             </a:fld>
             <a:endParaRPr lang="es-ES"/>
           </a:p>
@@ -11000,6 +11000,36 @@
           </a:prstGeom>
         </p:spPr>
       </p:pic>
+      <p:pic>
+        <p:nvPicPr>
+          <p:cNvPr id="5" name="Imagen 4">
+            <a:extLst>
+              <a:ext uri="{FF2B5EF4-FFF2-40B4-BE49-F238E27FC236}">
+                <a16:creationId xmlns:a16="http://schemas.microsoft.com/office/drawing/2014/main" id="{639DB798-21EF-485D-976A-2DE43EF48492}"/>
+              </a:ext>
+            </a:extLst>
+          </p:cNvPr>
+          <p:cNvPicPr>
+            <a:picLocks noChangeAspect="1"/>
+          </p:cNvPicPr>
+          <p:nvPr/>
+        </p:nvPicPr>
+        <p:blipFill>
+          <a:blip r:embed="rId6"/>
+          <a:stretch>
+            <a:fillRect/>
+          </a:stretch>
+        </p:blipFill>
+        <p:spPr>
+          <a:xfrm>
+            <a:off x="4876800" y="1536921"/>
+            <a:ext cx="4877435" cy="3153613"/>
+          </a:xfrm>
+          <a:prstGeom prst="rect">
+            <a:avLst/>
+          </a:prstGeom>
+        </p:spPr>
+      </p:pic>
     </p:spTree>
     <p:extLst>
       <p:ext uri="{BB962C8B-B14F-4D97-AF65-F5344CB8AC3E}">
@@ -11210,7 +11240,7 @@
         <p:spPr>
           <a:xfrm>
             <a:off x="583019" y="4889565"/>
-            <a:ext cx="11199971" cy="1015663"/>
+            <a:ext cx="11199971" cy="1384995"/>
           </a:xfrm>
           <a:prstGeom prst="rect">
             <a:avLst/>
@@ -11269,13 +11299,307 @@
                 <a:latin typeface="Arial" panose="020B0604020202020204" pitchFamily="34" charset="0"/>
                 <a:cs typeface="Arial" panose="020B0604020202020204" pitchFamily="34" charset="0"/>
               </a:rPr>
-              <a:t>Para </a:t>
+              <a:t>Se ha </a:t>
             </a:r>
             <a:r>
               <a:rPr lang="en-US" sz="1200" dirty="0" err="1">
                 <a:latin typeface="Arial" panose="020B0604020202020204" pitchFamily="34" charset="0"/>
                 <a:cs typeface="Arial" panose="020B0604020202020204" pitchFamily="34" charset="0"/>
               </a:rPr>
+              <a:t>realizado</a:t>
+            </a:r>
+            <a:r>
+              <a:rPr lang="en-US" sz="1200" dirty="0">
+                <a:latin typeface="Arial" panose="020B0604020202020204" pitchFamily="34" charset="0"/>
+                <a:cs typeface="Arial" panose="020B0604020202020204" pitchFamily="34" charset="0"/>
+              </a:rPr>
+              <a:t> una </a:t>
+            </a:r>
+            <a:r>
+              <a:rPr lang="en-US" sz="1200" dirty="0" err="1">
+                <a:latin typeface="Arial" panose="020B0604020202020204" pitchFamily="34" charset="0"/>
+                <a:cs typeface="Arial" panose="020B0604020202020204" pitchFamily="34" charset="0"/>
+              </a:rPr>
+              <a:t>gráfica</a:t>
+            </a:r>
+            <a:r>
+              <a:rPr lang="en-US" sz="1200" dirty="0">
+                <a:latin typeface="Arial" panose="020B0604020202020204" pitchFamily="34" charset="0"/>
+                <a:cs typeface="Arial" panose="020B0604020202020204" pitchFamily="34" charset="0"/>
+              </a:rPr>
+              <a:t> que </a:t>
+            </a:r>
+            <a:r>
+              <a:rPr lang="en-US" sz="1200" dirty="0" err="1">
+                <a:latin typeface="Arial" panose="020B0604020202020204" pitchFamily="34" charset="0"/>
+                <a:cs typeface="Arial" panose="020B0604020202020204" pitchFamily="34" charset="0"/>
+              </a:rPr>
+              <a:t>muestra</a:t>
+            </a:r>
+            <a:r>
+              <a:rPr lang="en-US" sz="1200" dirty="0">
+                <a:latin typeface="Arial" panose="020B0604020202020204" pitchFamily="34" charset="0"/>
+                <a:cs typeface="Arial" panose="020B0604020202020204" pitchFamily="34" charset="0"/>
+              </a:rPr>
+              <a:t> </a:t>
+            </a:r>
+            <a:r>
+              <a:rPr lang="en-US" sz="1200" dirty="0" err="1">
+                <a:latin typeface="Arial" panose="020B0604020202020204" pitchFamily="34" charset="0"/>
+                <a:cs typeface="Arial" panose="020B0604020202020204" pitchFamily="34" charset="0"/>
+              </a:rPr>
+              <a:t>el</a:t>
+            </a:r>
+            <a:r>
+              <a:rPr lang="en-US" sz="1200" dirty="0">
+                <a:latin typeface="Arial" panose="020B0604020202020204" pitchFamily="34" charset="0"/>
+                <a:cs typeface="Arial" panose="020B0604020202020204" pitchFamily="34" charset="0"/>
+              </a:rPr>
+              <a:t> </a:t>
+            </a:r>
+            <a:r>
+              <a:rPr lang="en-US" sz="1200" dirty="0" err="1">
+                <a:latin typeface="Arial" panose="020B0604020202020204" pitchFamily="34" charset="0"/>
+                <a:cs typeface="Arial" panose="020B0604020202020204" pitchFamily="34" charset="0"/>
+              </a:rPr>
+              <a:t>cambio</a:t>
+            </a:r>
+            <a:r>
+              <a:rPr lang="en-US" sz="1200" dirty="0">
+                <a:latin typeface="Arial" panose="020B0604020202020204" pitchFamily="34" charset="0"/>
+                <a:cs typeface="Arial" panose="020B0604020202020204" pitchFamily="34" charset="0"/>
+              </a:rPr>
+              <a:t> </a:t>
+            </a:r>
+            <a:r>
+              <a:rPr lang="en-US" sz="1200" dirty="0" err="1">
+                <a:latin typeface="Arial" panose="020B0604020202020204" pitchFamily="34" charset="0"/>
+                <a:cs typeface="Arial" panose="020B0604020202020204" pitchFamily="34" charset="0"/>
+              </a:rPr>
+              <a:t>en</a:t>
+            </a:r>
+            <a:r>
+              <a:rPr lang="en-US" sz="1200" dirty="0">
+                <a:latin typeface="Arial" panose="020B0604020202020204" pitchFamily="34" charset="0"/>
+                <a:cs typeface="Arial" panose="020B0604020202020204" pitchFamily="34" charset="0"/>
+              </a:rPr>
+              <a:t> la </a:t>
+            </a:r>
+            <a:r>
+              <a:rPr lang="en-US" sz="1200" dirty="0" err="1">
+                <a:latin typeface="Arial" panose="020B0604020202020204" pitchFamily="34" charset="0"/>
+                <a:cs typeface="Arial" panose="020B0604020202020204" pitchFamily="34" charset="0"/>
+              </a:rPr>
+              <a:t>longitud</a:t>
+            </a:r>
+            <a:r>
+              <a:rPr lang="en-US" sz="1200" dirty="0">
+                <a:latin typeface="Arial" panose="020B0604020202020204" pitchFamily="34" charset="0"/>
+                <a:cs typeface="Arial" panose="020B0604020202020204" pitchFamily="34" charset="0"/>
+              </a:rPr>
+              <a:t> de batido </a:t>
+            </a:r>
+            <a:r>
+              <a:rPr lang="en-US" sz="1200" dirty="0" err="1">
+                <a:latin typeface="Arial" panose="020B0604020202020204" pitchFamily="34" charset="0"/>
+                <a:cs typeface="Arial" panose="020B0604020202020204" pitchFamily="34" charset="0"/>
+              </a:rPr>
+              <a:t>en</a:t>
+            </a:r>
+            <a:r>
+              <a:rPr lang="en-US" sz="1200" dirty="0">
+                <a:latin typeface="Arial" panose="020B0604020202020204" pitchFamily="34" charset="0"/>
+                <a:cs typeface="Arial" panose="020B0604020202020204" pitchFamily="34" charset="0"/>
+              </a:rPr>
+              <a:t> </a:t>
+            </a:r>
+            <a:r>
+              <a:rPr lang="en-US" sz="1200" dirty="0" err="1">
+                <a:latin typeface="Arial" panose="020B0604020202020204" pitchFamily="34" charset="0"/>
+                <a:cs typeface="Arial" panose="020B0604020202020204" pitchFamily="34" charset="0"/>
+              </a:rPr>
+              <a:t>función</a:t>
+            </a:r>
+            <a:r>
+              <a:rPr lang="en-US" sz="1200" dirty="0">
+                <a:latin typeface="Arial" panose="020B0604020202020204" pitchFamily="34" charset="0"/>
+                <a:cs typeface="Arial" panose="020B0604020202020204" pitchFamily="34" charset="0"/>
+              </a:rPr>
+              <a:t> del gap entre </a:t>
+            </a:r>
+            <a:r>
+              <a:rPr lang="en-US" sz="1200" dirty="0" err="1">
+                <a:latin typeface="Arial" panose="020B0604020202020204" pitchFamily="34" charset="0"/>
+                <a:cs typeface="Arial" panose="020B0604020202020204" pitchFamily="34" charset="0"/>
+              </a:rPr>
+              <a:t>guías</a:t>
+            </a:r>
+            <a:r>
+              <a:rPr lang="en-US" sz="1200" dirty="0">
+                <a:latin typeface="Arial" panose="020B0604020202020204" pitchFamily="34" charset="0"/>
+                <a:cs typeface="Arial" panose="020B0604020202020204" pitchFamily="34" charset="0"/>
+              </a:rPr>
+              <a:t> de </a:t>
+            </a:r>
+            <a:r>
+              <a:rPr lang="en-US" sz="1200" dirty="0" err="1">
+                <a:latin typeface="Arial" panose="020B0604020202020204" pitchFamily="34" charset="0"/>
+                <a:cs typeface="Arial" panose="020B0604020202020204" pitchFamily="34" charset="0"/>
+              </a:rPr>
+              <a:t>onda</a:t>
+            </a:r>
+            <a:r>
+              <a:rPr lang="en-US" sz="1200" dirty="0">
+                <a:latin typeface="Arial" panose="020B0604020202020204" pitchFamily="34" charset="0"/>
+                <a:cs typeface="Arial" panose="020B0604020202020204" pitchFamily="34" charset="0"/>
+              </a:rPr>
+              <a:t>. Podemos </a:t>
+            </a:r>
+            <a:r>
+              <a:rPr lang="en-US" sz="1200" dirty="0" err="1">
+                <a:latin typeface="Arial" panose="020B0604020202020204" pitchFamily="34" charset="0"/>
+                <a:cs typeface="Arial" panose="020B0604020202020204" pitchFamily="34" charset="0"/>
+              </a:rPr>
+              <a:t>observar</a:t>
+            </a:r>
+            <a:r>
+              <a:rPr lang="en-US" sz="1200" dirty="0">
+                <a:latin typeface="Arial" panose="020B0604020202020204" pitchFamily="34" charset="0"/>
+                <a:cs typeface="Arial" panose="020B0604020202020204" pitchFamily="34" charset="0"/>
+              </a:rPr>
+              <a:t> que hay un </a:t>
+            </a:r>
+            <a:r>
+              <a:rPr lang="en-US" sz="1200" dirty="0" err="1">
+                <a:latin typeface="Arial" panose="020B0604020202020204" pitchFamily="34" charset="0"/>
+                <a:cs typeface="Arial" panose="020B0604020202020204" pitchFamily="34" charset="0"/>
+              </a:rPr>
+              <a:t>aumento</a:t>
+            </a:r>
+            <a:r>
+              <a:rPr lang="en-US" sz="1200" dirty="0">
+                <a:latin typeface="Arial" panose="020B0604020202020204" pitchFamily="34" charset="0"/>
+                <a:cs typeface="Arial" panose="020B0604020202020204" pitchFamily="34" charset="0"/>
+              </a:rPr>
+              <a:t> </a:t>
+            </a:r>
+            <a:r>
+              <a:rPr lang="en-US" sz="1200" dirty="0" err="1">
+                <a:latin typeface="Arial" panose="020B0604020202020204" pitchFamily="34" charset="0"/>
+                <a:cs typeface="Arial" panose="020B0604020202020204" pitchFamily="34" charset="0"/>
+              </a:rPr>
+              <a:t>exponencial</a:t>
+            </a:r>
+            <a:r>
+              <a:rPr lang="en-US" sz="1200" dirty="0">
+                <a:latin typeface="Arial" panose="020B0604020202020204" pitchFamily="34" charset="0"/>
+                <a:cs typeface="Arial" panose="020B0604020202020204" pitchFamily="34" charset="0"/>
+              </a:rPr>
+              <a:t> de la </a:t>
+            </a:r>
+            <a:r>
+              <a:rPr lang="en-US" sz="1200" dirty="0" err="1">
+                <a:latin typeface="Arial" panose="020B0604020202020204" pitchFamily="34" charset="0"/>
+                <a:cs typeface="Arial" panose="020B0604020202020204" pitchFamily="34" charset="0"/>
+              </a:rPr>
+              <a:t>L_pi</a:t>
+            </a:r>
+            <a:r>
+              <a:rPr lang="en-US" sz="1200" dirty="0">
+                <a:latin typeface="Arial" panose="020B0604020202020204" pitchFamily="34" charset="0"/>
+                <a:cs typeface="Arial" panose="020B0604020202020204" pitchFamily="34" charset="0"/>
+              </a:rPr>
+              <a:t> a </a:t>
+            </a:r>
+            <a:r>
+              <a:rPr lang="en-US" sz="1200" dirty="0" err="1">
+                <a:latin typeface="Arial" panose="020B0604020202020204" pitchFamily="34" charset="0"/>
+                <a:cs typeface="Arial" panose="020B0604020202020204" pitchFamily="34" charset="0"/>
+              </a:rPr>
+              <a:t>medida</a:t>
+            </a:r>
+            <a:r>
+              <a:rPr lang="en-US" sz="1200" dirty="0">
+                <a:latin typeface="Arial" panose="020B0604020202020204" pitchFamily="34" charset="0"/>
+                <a:cs typeface="Arial" panose="020B0604020202020204" pitchFamily="34" charset="0"/>
+              </a:rPr>
+              <a:t> que se </a:t>
+            </a:r>
+            <a:r>
+              <a:rPr lang="en-US" sz="1200" dirty="0" err="1">
+                <a:latin typeface="Arial" panose="020B0604020202020204" pitchFamily="34" charset="0"/>
+                <a:cs typeface="Arial" panose="020B0604020202020204" pitchFamily="34" charset="0"/>
+              </a:rPr>
+              <a:t>aumenta</a:t>
+            </a:r>
+            <a:r>
+              <a:rPr lang="en-US" sz="1200" dirty="0">
+                <a:latin typeface="Arial" panose="020B0604020202020204" pitchFamily="34" charset="0"/>
+                <a:cs typeface="Arial" panose="020B0604020202020204" pitchFamily="34" charset="0"/>
+              </a:rPr>
+              <a:t> </a:t>
+            </a:r>
+            <a:r>
+              <a:rPr lang="en-US" sz="1200" dirty="0" err="1">
+                <a:latin typeface="Arial" panose="020B0604020202020204" pitchFamily="34" charset="0"/>
+                <a:cs typeface="Arial" panose="020B0604020202020204" pitchFamily="34" charset="0"/>
+              </a:rPr>
+              <a:t>el</a:t>
+            </a:r>
+            <a:r>
+              <a:rPr lang="en-US" sz="1200" dirty="0">
+                <a:latin typeface="Arial" panose="020B0604020202020204" pitchFamily="34" charset="0"/>
+                <a:cs typeface="Arial" panose="020B0604020202020204" pitchFamily="34" charset="0"/>
+              </a:rPr>
+              <a:t> gap, </a:t>
+            </a:r>
+            <a:r>
+              <a:rPr lang="en-US" sz="1200" dirty="0" err="1">
+                <a:latin typeface="Arial" panose="020B0604020202020204" pitchFamily="34" charset="0"/>
+                <a:cs typeface="Arial" panose="020B0604020202020204" pitchFamily="34" charset="0"/>
+              </a:rPr>
+              <a:t>esto</a:t>
+            </a:r>
+            <a:r>
+              <a:rPr lang="en-US" sz="1200" dirty="0">
+                <a:latin typeface="Arial" panose="020B0604020202020204" pitchFamily="34" charset="0"/>
+                <a:cs typeface="Arial" panose="020B0604020202020204" pitchFamily="34" charset="0"/>
+              </a:rPr>
+              <a:t> es </a:t>
+            </a:r>
+            <a:r>
+              <a:rPr lang="en-US" sz="1200" dirty="0" err="1">
+                <a:latin typeface="Arial" panose="020B0604020202020204" pitchFamily="34" charset="0"/>
+                <a:cs typeface="Arial" panose="020B0604020202020204" pitchFamily="34" charset="0"/>
+              </a:rPr>
+              <a:t>debido</a:t>
+            </a:r>
+            <a:r>
+              <a:rPr lang="en-US" sz="1200" dirty="0">
+                <a:latin typeface="Arial" panose="020B0604020202020204" pitchFamily="34" charset="0"/>
+                <a:cs typeface="Arial" panose="020B0604020202020204" pitchFamily="34" charset="0"/>
+              </a:rPr>
+              <a:t> a que al </a:t>
+            </a:r>
+            <a:r>
+              <a:rPr lang="en-US" sz="1200" dirty="0" err="1">
+                <a:latin typeface="Arial" panose="020B0604020202020204" pitchFamily="34" charset="0"/>
+                <a:cs typeface="Arial" panose="020B0604020202020204" pitchFamily="34" charset="0"/>
+              </a:rPr>
+              <a:t>estar</a:t>
+            </a:r>
+            <a:r>
+              <a:rPr lang="en-US" sz="1200" dirty="0">
+                <a:latin typeface="Arial" panose="020B0604020202020204" pitchFamily="34" charset="0"/>
+                <a:cs typeface="Arial" panose="020B0604020202020204" pitchFamily="34" charset="0"/>
+              </a:rPr>
+              <a:t> </a:t>
+            </a:r>
+            <a:r>
+              <a:rPr lang="en-US" sz="1200" dirty="0" err="1">
+                <a:latin typeface="Arial" panose="020B0604020202020204" pitchFamily="34" charset="0"/>
+                <a:cs typeface="Arial" panose="020B0604020202020204" pitchFamily="34" charset="0"/>
+              </a:rPr>
               <a:t>cada</a:t>
             </a:r>
             <a:r>
@@ -11283,43 +11607,438 @@
                 <a:latin typeface="Arial" panose="020B0604020202020204" pitchFamily="34" charset="0"/>
                 <a:cs typeface="Arial" panose="020B0604020202020204" pitchFamily="34" charset="0"/>
               </a:rPr>
-              <a:t> gap </a:t>
+              <a:t> </a:t>
             </a:r>
             <a:r>
               <a:rPr lang="en-US" sz="1200" dirty="0" err="1">
                 <a:latin typeface="Arial" panose="020B0604020202020204" pitchFamily="34" charset="0"/>
                 <a:cs typeface="Arial" panose="020B0604020202020204" pitchFamily="34" charset="0"/>
               </a:rPr>
-              <a:t>hallar</a:t>
+              <a:t>vez</a:t>
             </a:r>
             <a:r>
               <a:rPr lang="en-US" sz="1200" dirty="0">
                 <a:latin typeface="Arial" panose="020B0604020202020204" pitchFamily="34" charset="0"/>
                 <a:cs typeface="Arial" panose="020B0604020202020204" pitchFamily="34" charset="0"/>
               </a:rPr>
-              <a:t> la division de </a:t>
+              <a:t> </a:t>
             </a:r>
             <a:r>
               <a:rPr lang="en-US" sz="1200" dirty="0" err="1">
                 <a:latin typeface="Arial" panose="020B0604020202020204" pitchFamily="34" charset="0"/>
                 <a:cs typeface="Arial" panose="020B0604020202020204" pitchFamily="34" charset="0"/>
               </a:rPr>
-              <a:t>potencia</a:t>
+              <a:t>más</a:t>
             </a:r>
             <a:r>
               <a:rPr lang="en-US" sz="1200" dirty="0">
                 <a:latin typeface="Arial" panose="020B0604020202020204" pitchFamily="34" charset="0"/>
                 <a:cs typeface="Arial" panose="020B0604020202020204" pitchFamily="34" charset="0"/>
               </a:rPr>
-              <a:t> de 50/50</a:t>
+              <a:t> </a:t>
+            </a:r>
+            <a:r>
+              <a:rPr lang="en-US" sz="1200" dirty="0" err="1">
+                <a:latin typeface="Arial" panose="020B0604020202020204" pitchFamily="34" charset="0"/>
+                <a:cs typeface="Arial" panose="020B0604020202020204" pitchFamily="34" charset="0"/>
+              </a:rPr>
+              <a:t>lejos</a:t>
+            </a:r>
+            <a:r>
+              <a:rPr lang="en-US" sz="1200" dirty="0">
+                <a:latin typeface="Arial" panose="020B0604020202020204" pitchFamily="34" charset="0"/>
+                <a:cs typeface="Arial" panose="020B0604020202020204" pitchFamily="34" charset="0"/>
+              </a:rPr>
+              <a:t> una </a:t>
+            </a:r>
+            <a:r>
+              <a:rPr lang="en-US" sz="1200" dirty="0" err="1">
+                <a:latin typeface="Arial" panose="020B0604020202020204" pitchFamily="34" charset="0"/>
+                <a:cs typeface="Arial" panose="020B0604020202020204" pitchFamily="34" charset="0"/>
+              </a:rPr>
+              <a:t>guía</a:t>
+            </a:r>
+            <a:r>
+              <a:rPr lang="en-US" sz="1200" dirty="0">
+                <a:latin typeface="Arial" panose="020B0604020202020204" pitchFamily="34" charset="0"/>
+                <a:cs typeface="Arial" panose="020B0604020202020204" pitchFamily="34" charset="0"/>
+              </a:rPr>
+              <a:t> de </a:t>
+            </a:r>
+            <a:r>
+              <a:rPr lang="en-US" sz="1200" dirty="0" err="1">
+                <a:latin typeface="Arial" panose="020B0604020202020204" pitchFamily="34" charset="0"/>
+                <a:cs typeface="Arial" panose="020B0604020202020204" pitchFamily="34" charset="0"/>
+              </a:rPr>
+              <a:t>otra</a:t>
+            </a:r>
+            <a:r>
+              <a:rPr lang="en-US" sz="1200" dirty="0">
+                <a:latin typeface="Arial" panose="020B0604020202020204" pitchFamily="34" charset="0"/>
+                <a:cs typeface="Arial" panose="020B0604020202020204" pitchFamily="34" charset="0"/>
+              </a:rPr>
+              <a:t> se </a:t>
+            </a:r>
+            <a:r>
+              <a:rPr lang="en-US" sz="1200" dirty="0" err="1">
+                <a:latin typeface="Arial" panose="020B0604020202020204" pitchFamily="34" charset="0"/>
+                <a:cs typeface="Arial" panose="020B0604020202020204" pitchFamily="34" charset="0"/>
+              </a:rPr>
+              <a:t>intercambia</a:t>
+            </a:r>
+            <a:r>
+              <a:rPr lang="en-US" sz="1200" dirty="0">
+                <a:latin typeface="Arial" panose="020B0604020202020204" pitchFamily="34" charset="0"/>
+                <a:cs typeface="Arial" panose="020B0604020202020204" pitchFamily="34" charset="0"/>
+              </a:rPr>
+              <a:t> </a:t>
+            </a:r>
+            <a:r>
+              <a:rPr lang="en-US" sz="1200" dirty="0" err="1">
+                <a:latin typeface="Arial" panose="020B0604020202020204" pitchFamily="34" charset="0"/>
+                <a:cs typeface="Arial" panose="020B0604020202020204" pitchFamily="34" charset="0"/>
+              </a:rPr>
+              <a:t>cada</a:t>
+            </a:r>
+            <a:r>
+              <a:rPr lang="en-US" sz="1200" dirty="0">
+                <a:latin typeface="Arial" panose="020B0604020202020204" pitchFamily="34" charset="0"/>
+                <a:cs typeface="Arial" panose="020B0604020202020204" pitchFamily="34" charset="0"/>
+              </a:rPr>
+              <a:t> </a:t>
+            </a:r>
+            <a:r>
+              <a:rPr lang="en-US" sz="1200" dirty="0" err="1">
+                <a:latin typeface="Arial" panose="020B0604020202020204" pitchFamily="34" charset="0"/>
+                <a:cs typeface="Arial" panose="020B0604020202020204" pitchFamily="34" charset="0"/>
+              </a:rPr>
+              <a:t>vez</a:t>
+            </a:r>
+            <a:r>
+              <a:rPr lang="en-US" sz="1200" dirty="0">
+                <a:latin typeface="Arial" panose="020B0604020202020204" pitchFamily="34" charset="0"/>
+                <a:cs typeface="Arial" panose="020B0604020202020204" pitchFamily="34" charset="0"/>
+              </a:rPr>
+              <a:t> </a:t>
+            </a:r>
+            <a:r>
+              <a:rPr lang="en-US" sz="1200" dirty="0" err="1">
+                <a:latin typeface="Arial" panose="020B0604020202020204" pitchFamily="34" charset="0"/>
+                <a:cs typeface="Arial" panose="020B0604020202020204" pitchFamily="34" charset="0"/>
+              </a:rPr>
+              <a:t>menos</a:t>
+            </a:r>
+            <a:r>
+              <a:rPr lang="en-US" sz="1200" dirty="0">
+                <a:latin typeface="Arial" panose="020B0604020202020204" pitchFamily="34" charset="0"/>
+                <a:cs typeface="Arial" panose="020B0604020202020204" pitchFamily="34" charset="0"/>
+              </a:rPr>
+              <a:t> </a:t>
+            </a:r>
+            <a:r>
+              <a:rPr lang="en-US" sz="1200" dirty="0" err="1">
+                <a:latin typeface="Arial" panose="020B0604020202020204" pitchFamily="34" charset="0"/>
+                <a:cs typeface="Arial" panose="020B0604020202020204" pitchFamily="34" charset="0"/>
+              </a:rPr>
+              <a:t>energía</a:t>
+            </a:r>
+            <a:r>
+              <a:rPr lang="en-US" sz="1200" dirty="0">
+                <a:latin typeface="Arial" panose="020B0604020202020204" pitchFamily="34" charset="0"/>
+                <a:cs typeface="Arial" panose="020B0604020202020204" pitchFamily="34" charset="0"/>
+              </a:rPr>
+              <a:t> entre </a:t>
+            </a:r>
+            <a:r>
+              <a:rPr lang="en-US" sz="1200" dirty="0" err="1">
+                <a:latin typeface="Arial" panose="020B0604020202020204" pitchFamily="34" charset="0"/>
+                <a:cs typeface="Arial" panose="020B0604020202020204" pitchFamily="34" charset="0"/>
+              </a:rPr>
+              <a:t>estas</a:t>
+            </a:r>
+            <a:r>
+              <a:rPr lang="en-US" sz="1200" dirty="0">
+                <a:latin typeface="Arial" panose="020B0604020202020204" pitchFamily="34" charset="0"/>
+                <a:cs typeface="Arial" panose="020B0604020202020204" pitchFamily="34" charset="0"/>
+              </a:rPr>
+              <a:t>, por lo que se </a:t>
+            </a:r>
+            <a:r>
+              <a:rPr lang="en-US" sz="1200" dirty="0" err="1">
+                <a:latin typeface="Arial" panose="020B0604020202020204" pitchFamily="34" charset="0"/>
+                <a:cs typeface="Arial" panose="020B0604020202020204" pitchFamily="34" charset="0"/>
+              </a:rPr>
+              <a:t>necesita</a:t>
+            </a:r>
+            <a:r>
+              <a:rPr lang="en-US" sz="1200" dirty="0">
+                <a:latin typeface="Arial" panose="020B0604020202020204" pitchFamily="34" charset="0"/>
+                <a:cs typeface="Arial" panose="020B0604020202020204" pitchFamily="34" charset="0"/>
+              </a:rPr>
+              <a:t> una longitude </a:t>
+            </a:r>
+            <a:r>
+              <a:rPr lang="en-US" sz="1200" dirty="0" err="1">
+                <a:latin typeface="Arial" panose="020B0604020202020204" pitchFamily="34" charset="0"/>
+                <a:cs typeface="Arial" panose="020B0604020202020204" pitchFamily="34" charset="0"/>
+              </a:rPr>
+              <a:t>cada</a:t>
+            </a:r>
+            <a:r>
+              <a:rPr lang="en-US" sz="1200" dirty="0">
+                <a:latin typeface="Arial" panose="020B0604020202020204" pitchFamily="34" charset="0"/>
+                <a:cs typeface="Arial" panose="020B0604020202020204" pitchFamily="34" charset="0"/>
+              </a:rPr>
+              <a:t> </a:t>
+            </a:r>
+            <a:r>
+              <a:rPr lang="en-US" sz="1200" dirty="0" err="1">
+                <a:latin typeface="Arial" panose="020B0604020202020204" pitchFamily="34" charset="0"/>
+                <a:cs typeface="Arial" panose="020B0604020202020204" pitchFamily="34" charset="0"/>
+              </a:rPr>
+              <a:t>vez</a:t>
+            </a:r>
+            <a:r>
+              <a:rPr lang="en-US" sz="1200" dirty="0">
+                <a:latin typeface="Arial" panose="020B0604020202020204" pitchFamily="34" charset="0"/>
+                <a:cs typeface="Arial" panose="020B0604020202020204" pitchFamily="34" charset="0"/>
+              </a:rPr>
+              <a:t> </a:t>
+            </a:r>
+            <a:r>
+              <a:rPr lang="en-US" sz="1200" dirty="0" err="1">
+                <a:latin typeface="Arial" panose="020B0604020202020204" pitchFamily="34" charset="0"/>
+                <a:cs typeface="Arial" panose="020B0604020202020204" pitchFamily="34" charset="0"/>
+              </a:rPr>
+              <a:t>más</a:t>
+            </a:r>
+            <a:r>
+              <a:rPr lang="en-US" sz="1200" dirty="0">
+                <a:latin typeface="Arial" panose="020B0604020202020204" pitchFamily="34" charset="0"/>
+                <a:cs typeface="Arial" panose="020B0604020202020204" pitchFamily="34" charset="0"/>
+              </a:rPr>
+              <a:t> </a:t>
+            </a:r>
+            <a:r>
+              <a:rPr lang="en-US" sz="1200" dirty="0" err="1">
+                <a:latin typeface="Arial" panose="020B0604020202020204" pitchFamily="34" charset="0"/>
+                <a:cs typeface="Arial" panose="020B0604020202020204" pitchFamily="34" charset="0"/>
+              </a:rPr>
+              <a:t>grande</a:t>
+            </a:r>
+            <a:r>
+              <a:rPr lang="en-US" sz="1200" dirty="0">
+                <a:latin typeface="Arial" panose="020B0604020202020204" pitchFamily="34" charset="0"/>
+                <a:cs typeface="Arial" panose="020B0604020202020204" pitchFamily="34" charset="0"/>
+              </a:rPr>
+              <a:t> para </a:t>
+            </a:r>
+            <a:r>
+              <a:rPr lang="en-US" sz="1200" dirty="0" err="1">
+                <a:latin typeface="Arial" panose="020B0604020202020204" pitchFamily="34" charset="0"/>
+                <a:cs typeface="Arial" panose="020B0604020202020204" pitchFamily="34" charset="0"/>
+              </a:rPr>
+              <a:t>poder</a:t>
+            </a:r>
+            <a:r>
+              <a:rPr lang="en-US" sz="1200" dirty="0">
+                <a:latin typeface="Arial" panose="020B0604020202020204" pitchFamily="34" charset="0"/>
+                <a:cs typeface="Arial" panose="020B0604020202020204" pitchFamily="34" charset="0"/>
+              </a:rPr>
+              <a:t> </a:t>
+            </a:r>
+            <a:r>
+              <a:rPr lang="en-US" sz="1200" dirty="0" err="1">
+                <a:latin typeface="Arial" panose="020B0604020202020204" pitchFamily="34" charset="0"/>
+                <a:cs typeface="Arial" panose="020B0604020202020204" pitchFamily="34" charset="0"/>
+              </a:rPr>
+              <a:t>acoplar</a:t>
+            </a:r>
+            <a:r>
+              <a:rPr lang="en-US" sz="1200" dirty="0">
+                <a:latin typeface="Arial" panose="020B0604020202020204" pitchFamily="34" charset="0"/>
+                <a:cs typeface="Arial" panose="020B0604020202020204" pitchFamily="34" charset="0"/>
+              </a:rPr>
+              <a:t> </a:t>
+            </a:r>
+            <a:r>
+              <a:rPr lang="en-US" sz="1200" dirty="0" err="1">
+                <a:latin typeface="Arial" panose="020B0604020202020204" pitchFamily="34" charset="0"/>
+                <a:cs typeface="Arial" panose="020B0604020202020204" pitchFamily="34" charset="0"/>
+              </a:rPr>
+              <a:t>toda</a:t>
+            </a:r>
+            <a:r>
+              <a:rPr lang="en-US" sz="1200" dirty="0">
+                <a:latin typeface="Arial" panose="020B0604020202020204" pitchFamily="34" charset="0"/>
+                <a:cs typeface="Arial" panose="020B0604020202020204" pitchFamily="34" charset="0"/>
+              </a:rPr>
+              <a:t> la luz de una </a:t>
+            </a:r>
+            <a:r>
+              <a:rPr lang="en-US" sz="1200" dirty="0" err="1">
+                <a:latin typeface="Arial" panose="020B0604020202020204" pitchFamily="34" charset="0"/>
+                <a:cs typeface="Arial" panose="020B0604020202020204" pitchFamily="34" charset="0"/>
+              </a:rPr>
+              <a:t>guía</a:t>
+            </a:r>
+            <a:r>
+              <a:rPr lang="en-US" sz="1200" dirty="0">
+                <a:latin typeface="Arial" panose="020B0604020202020204" pitchFamily="34" charset="0"/>
+                <a:cs typeface="Arial" panose="020B0604020202020204" pitchFamily="34" charset="0"/>
+              </a:rPr>
+              <a:t> de </a:t>
+            </a:r>
+            <a:r>
+              <a:rPr lang="en-US" sz="1200" dirty="0" err="1">
+                <a:latin typeface="Arial" panose="020B0604020202020204" pitchFamily="34" charset="0"/>
+                <a:cs typeface="Arial" panose="020B0604020202020204" pitchFamily="34" charset="0"/>
+              </a:rPr>
+              <a:t>onda</a:t>
+            </a:r>
+            <a:r>
+              <a:rPr lang="en-US" sz="1200" dirty="0">
+                <a:latin typeface="Arial" panose="020B0604020202020204" pitchFamily="34" charset="0"/>
+                <a:cs typeface="Arial" panose="020B0604020202020204" pitchFamily="34" charset="0"/>
+              </a:rPr>
+              <a:t> a </a:t>
+            </a:r>
+            <a:r>
+              <a:rPr lang="en-US" sz="1200" dirty="0" err="1">
+                <a:latin typeface="Arial" panose="020B0604020202020204" pitchFamily="34" charset="0"/>
+                <a:cs typeface="Arial" panose="020B0604020202020204" pitchFamily="34" charset="0"/>
+              </a:rPr>
+              <a:t>otra</a:t>
+            </a:r>
+            <a:r>
+              <a:rPr lang="en-US" sz="1200" dirty="0">
+                <a:latin typeface="Arial" panose="020B0604020202020204" pitchFamily="34" charset="0"/>
+                <a:cs typeface="Arial" panose="020B0604020202020204" pitchFamily="34" charset="0"/>
+              </a:rPr>
+              <a:t>. </a:t>
             </a:r>
           </a:p>
           <a:p>
             <a:pPr algn="just"/>
-            <a:endParaRPr lang="en-US" sz="1200" dirty="0">
-              <a:latin typeface="Arial" panose="020B0604020202020204" pitchFamily="34" charset="0"/>
-              <a:cs typeface="Arial" panose="020B0604020202020204" pitchFamily="34" charset="0"/>
-            </a:endParaRPr>
+            <a:r>
+              <a:rPr lang="en-US" sz="1200" dirty="0">
+                <a:latin typeface="Arial" panose="020B0604020202020204" pitchFamily="34" charset="0"/>
+                <a:cs typeface="Arial" panose="020B0604020202020204" pitchFamily="34" charset="0"/>
+              </a:rPr>
+              <a:t>No obstante, al </a:t>
+            </a:r>
+            <a:r>
+              <a:rPr lang="en-US" sz="1200" dirty="0" err="1">
+                <a:latin typeface="Arial" panose="020B0604020202020204" pitchFamily="34" charset="0"/>
+                <a:cs typeface="Arial" panose="020B0604020202020204" pitchFamily="34" charset="0"/>
+              </a:rPr>
+              <a:t>hacer</a:t>
+            </a:r>
+            <a:r>
+              <a:rPr lang="en-US" sz="1200" dirty="0">
+                <a:latin typeface="Arial" panose="020B0604020202020204" pitchFamily="34" charset="0"/>
+                <a:cs typeface="Arial" panose="020B0604020202020204" pitchFamily="34" charset="0"/>
+              </a:rPr>
+              <a:t> </a:t>
+            </a:r>
+            <a:r>
+              <a:rPr lang="en-US" sz="1200" dirty="0" err="1">
+                <a:latin typeface="Arial" panose="020B0604020202020204" pitchFamily="34" charset="0"/>
+                <a:cs typeface="Arial" panose="020B0604020202020204" pitchFamily="34" charset="0"/>
+              </a:rPr>
+              <a:t>el</a:t>
+            </a:r>
+            <a:r>
+              <a:rPr lang="en-US" sz="1200" dirty="0">
+                <a:latin typeface="Arial" panose="020B0604020202020204" pitchFamily="34" charset="0"/>
+                <a:cs typeface="Arial" panose="020B0604020202020204" pitchFamily="34" charset="0"/>
+              </a:rPr>
+              <a:t> </a:t>
+            </a:r>
+            <a:r>
+              <a:rPr lang="en-US" sz="1200" dirty="0" err="1">
+                <a:latin typeface="Arial" panose="020B0604020202020204" pitchFamily="34" charset="0"/>
+                <a:cs typeface="Arial" panose="020B0604020202020204" pitchFamily="34" charset="0"/>
+              </a:rPr>
+              <a:t>dispositivo</a:t>
+            </a:r>
+            <a:r>
+              <a:rPr lang="en-US" sz="1200" dirty="0">
+                <a:latin typeface="Arial" panose="020B0604020202020204" pitchFamily="34" charset="0"/>
+                <a:cs typeface="Arial" panose="020B0604020202020204" pitchFamily="34" charset="0"/>
+              </a:rPr>
+              <a:t> </a:t>
+            </a:r>
+            <a:r>
+              <a:rPr lang="en-US" sz="1200" dirty="0" err="1">
+                <a:latin typeface="Arial" panose="020B0604020202020204" pitchFamily="34" charset="0"/>
+                <a:cs typeface="Arial" panose="020B0604020202020204" pitchFamily="34" charset="0"/>
+              </a:rPr>
+              <a:t>más</a:t>
+            </a:r>
+            <a:r>
+              <a:rPr lang="en-US" sz="1200" dirty="0">
+                <a:latin typeface="Arial" panose="020B0604020202020204" pitchFamily="34" charset="0"/>
+                <a:cs typeface="Arial" panose="020B0604020202020204" pitchFamily="34" charset="0"/>
+              </a:rPr>
+              <a:t> largo, </a:t>
+            </a:r>
+            <a:r>
+              <a:rPr lang="en-US" sz="1200" dirty="0" err="1">
+                <a:latin typeface="Arial" panose="020B0604020202020204" pitchFamily="34" charset="0"/>
+                <a:cs typeface="Arial" panose="020B0604020202020204" pitchFamily="34" charset="0"/>
+              </a:rPr>
+              <a:t>habrán</a:t>
+            </a:r>
+            <a:r>
+              <a:rPr lang="en-US" sz="1200" dirty="0">
+                <a:latin typeface="Arial" panose="020B0604020202020204" pitchFamily="34" charset="0"/>
+                <a:cs typeface="Arial" panose="020B0604020202020204" pitchFamily="34" charset="0"/>
+              </a:rPr>
+              <a:t> </a:t>
+            </a:r>
+            <a:r>
+              <a:rPr lang="en-US" sz="1200" dirty="0" err="1">
+                <a:latin typeface="Arial" panose="020B0604020202020204" pitchFamily="34" charset="0"/>
+                <a:cs typeface="Arial" panose="020B0604020202020204" pitchFamily="34" charset="0"/>
+              </a:rPr>
+              <a:t>mayores</a:t>
+            </a:r>
+            <a:r>
+              <a:rPr lang="en-US" sz="1200" dirty="0">
+                <a:latin typeface="Arial" panose="020B0604020202020204" pitchFamily="34" charset="0"/>
+                <a:cs typeface="Arial" panose="020B0604020202020204" pitchFamily="34" charset="0"/>
+              </a:rPr>
+              <a:t> </a:t>
+            </a:r>
+            <a:r>
+              <a:rPr lang="en-US" sz="1200" dirty="0" err="1">
+                <a:latin typeface="Arial" panose="020B0604020202020204" pitchFamily="34" charset="0"/>
+                <a:cs typeface="Arial" panose="020B0604020202020204" pitchFamily="34" charset="0"/>
+              </a:rPr>
+              <a:t>perdidas</a:t>
+            </a:r>
+            <a:r>
+              <a:rPr lang="en-US" sz="1200" dirty="0">
+                <a:latin typeface="Arial" panose="020B0604020202020204" pitchFamily="34" charset="0"/>
+                <a:cs typeface="Arial" panose="020B0604020202020204" pitchFamily="34" charset="0"/>
+              </a:rPr>
+              <a:t> por </a:t>
+            </a:r>
+            <a:r>
+              <a:rPr lang="en-US" sz="1200" dirty="0" err="1">
+                <a:latin typeface="Arial" panose="020B0604020202020204" pitchFamily="34" charset="0"/>
+                <a:cs typeface="Arial" panose="020B0604020202020204" pitchFamily="34" charset="0"/>
+              </a:rPr>
+              <a:t>propagación</a:t>
+            </a:r>
+            <a:r>
+              <a:rPr lang="en-US" sz="1200" dirty="0">
+                <a:latin typeface="Arial" panose="020B0604020202020204" pitchFamily="34" charset="0"/>
+                <a:cs typeface="Arial" panose="020B0604020202020204" pitchFamily="34" charset="0"/>
+              </a:rPr>
+              <a:t>.</a:t>
+            </a:r>
           </a:p>
           <a:p>
             <a:pPr algn="just"/>
@@ -11435,10 +12154,10 @@
       </p:sp>
       <p:pic>
         <p:nvPicPr>
-          <p:cNvPr id="5" name="Imagen 4">
-            <a:extLst>
-              <a:ext uri="{FF2B5EF4-FFF2-40B4-BE49-F238E27FC236}">
-                <a16:creationId xmlns:a16="http://schemas.microsoft.com/office/drawing/2014/main" id="{B9587ED5-83B4-453E-80B2-8A8468ED87BA}"/>
+          <p:cNvPr id="6" name="Imagen 5">
+            <a:extLst>
+              <a:ext uri="{FF2B5EF4-FFF2-40B4-BE49-F238E27FC236}">
+                <a16:creationId xmlns:a16="http://schemas.microsoft.com/office/drawing/2014/main" id="{F1D5D206-4269-46CA-AE98-83E2412ABD84}"/>
               </a:ext>
             </a:extLst>
           </p:cNvPr>
@@ -11455,8 +12174,8 @@
         </p:blipFill>
         <p:spPr>
           <a:xfrm>
-            <a:off x="1066800" y="1688991"/>
-            <a:ext cx="3728137" cy="2924659"/>
+            <a:off x="4038600" y="1484265"/>
+            <a:ext cx="4114800" cy="3227990"/>
           </a:xfrm>
           <a:prstGeom prst="rect">
             <a:avLst/>
@@ -11514,36 +12233,50 @@
           <a:bodyPr/>
           <a:lstStyle/>
           <a:p>
-            <a:endParaRPr lang="es-ES"/>
-          </a:p>
-        </p:txBody>
-      </p:sp>
-      <p:sp>
-        <p:nvSpPr>
-          <p:cNvPr id="3" name="Marcador de texto 2">
-            <a:extLst>
-              <a:ext uri="{FF2B5EF4-FFF2-40B4-BE49-F238E27FC236}">
-                <a16:creationId xmlns:a16="http://schemas.microsoft.com/office/drawing/2014/main" id="{A03F63E1-4FB0-4720-815E-D28325DD6207}"/>
-              </a:ext>
-            </a:extLst>
-          </p:cNvPr>
-          <p:cNvSpPr>
-            <a:spLocks noGrp="1"/>
-          </p:cNvSpPr>
-          <p:nvPr>
-            <p:ph type="body" idx="1"/>
-          </p:nvPr>
-        </p:nvSpPr>
-        <p:spPr>
-          <a:xfrm>
-            <a:off x="609600" y="838200"/>
-            <a:ext cx="10972800" cy="5265420"/>
-          </a:xfrm>
-        </p:spPr>
-        <p:txBody>
-          <a:bodyPr/>
-          <a:lstStyle/>
-          <a:p>
+            <a:r>
+              <a:rPr lang="es-ES" dirty="0" err="1"/>
+              <a:t>Propagation</a:t>
+            </a:r>
+            <a:r>
+              <a:rPr lang="es-ES" dirty="0"/>
+              <a:t> </a:t>
+            </a:r>
+            <a:r>
+              <a:rPr lang="es-ES" dirty="0" err="1"/>
+              <a:t>plots</a:t>
+            </a:r>
+            <a:r>
+              <a:rPr lang="es-ES" dirty="0"/>
+              <a:t> </a:t>
+            </a:r>
+            <a:r>
+              <a:rPr lang="es-ES" dirty="0" err="1"/>
+              <a:t>for</a:t>
+            </a:r>
+            <a:r>
+              <a:rPr lang="es-ES" dirty="0"/>
+              <a:t> </a:t>
+            </a:r>
+            <a:r>
+              <a:rPr lang="es-ES" dirty="0" err="1"/>
+              <a:t>each</a:t>
+            </a:r>
+            <a:r>
+              <a:rPr lang="es-ES" dirty="0"/>
+              <a:t> gap </a:t>
+            </a:r>
+            <a:r>
+              <a:rPr lang="es-ES" dirty="0" err="1"/>
+              <a:t>between</a:t>
+            </a:r>
+            <a:r>
+              <a:rPr lang="es-ES" dirty="0"/>
+              <a:t> </a:t>
+            </a:r>
+            <a:r>
+              <a:rPr lang="en-US" dirty="0"/>
+              <a:t>0.6 - 1.6 µm (step 0.1 µm)</a:t>
+            </a:r>
             <a:endParaRPr lang="es-ES" dirty="0"/>
           </a:p>
         </p:txBody>
@@ -11633,8 +12366,308 @@
         </p:blipFill>
         <p:spPr>
           <a:xfrm>
-            <a:off x="609600" y="838200"/>
-            <a:ext cx="3429000" cy="872081"/>
+            <a:off x="609599" y="838200"/>
+            <a:ext cx="4341395" cy="1104126"/>
+          </a:xfrm>
+          <a:prstGeom prst="rect">
+            <a:avLst/>
+          </a:prstGeom>
+        </p:spPr>
+      </p:pic>
+      <p:pic>
+        <p:nvPicPr>
+          <p:cNvPr id="8" name="Imagen 7">
+            <a:extLst>
+              <a:ext uri="{FF2B5EF4-FFF2-40B4-BE49-F238E27FC236}">
+                <a16:creationId xmlns:a16="http://schemas.microsoft.com/office/drawing/2014/main" id="{F9668BE0-230A-4D72-8A9C-718E3034D8AC}"/>
+              </a:ext>
+            </a:extLst>
+          </p:cNvPr>
+          <p:cNvPicPr>
+            <a:picLocks noChangeAspect="1"/>
+          </p:cNvPicPr>
+          <p:nvPr/>
+        </p:nvPicPr>
+        <p:blipFill>
+          <a:blip r:embed="rId3"/>
+          <a:stretch>
+            <a:fillRect/>
+          </a:stretch>
+        </p:blipFill>
+        <p:spPr>
+          <a:xfrm>
+            <a:off x="609593" y="1867477"/>
+            <a:ext cx="4341401" cy="998973"/>
+          </a:xfrm>
+          <a:prstGeom prst="rect">
+            <a:avLst/>
+          </a:prstGeom>
+        </p:spPr>
+      </p:pic>
+      <p:pic>
+        <p:nvPicPr>
+          <p:cNvPr id="10" name="Imagen 9">
+            <a:extLst>
+              <a:ext uri="{FF2B5EF4-FFF2-40B4-BE49-F238E27FC236}">
+                <a16:creationId xmlns:a16="http://schemas.microsoft.com/office/drawing/2014/main" id="{1B391061-3F8E-4898-8597-8AEB14C95C33}"/>
+              </a:ext>
+            </a:extLst>
+          </p:cNvPr>
+          <p:cNvPicPr>
+            <a:picLocks noChangeAspect="1"/>
+          </p:cNvPicPr>
+          <p:nvPr/>
+        </p:nvPicPr>
+        <p:blipFill>
+          <a:blip r:embed="rId4"/>
+          <a:stretch>
+            <a:fillRect/>
+          </a:stretch>
+        </p:blipFill>
+        <p:spPr>
+          <a:xfrm>
+            <a:off x="609593" y="2843823"/>
+            <a:ext cx="4341401" cy="916351"/>
+          </a:xfrm>
+          <a:prstGeom prst="rect">
+            <a:avLst/>
+          </a:prstGeom>
+        </p:spPr>
+      </p:pic>
+      <p:pic>
+        <p:nvPicPr>
+          <p:cNvPr id="12" name="Imagen 11">
+            <a:extLst>
+              <a:ext uri="{FF2B5EF4-FFF2-40B4-BE49-F238E27FC236}">
+                <a16:creationId xmlns:a16="http://schemas.microsoft.com/office/drawing/2014/main" id="{52B3D118-9F8D-4E9A-8F0B-4AEB6C65063A}"/>
+              </a:ext>
+            </a:extLst>
+          </p:cNvPr>
+          <p:cNvPicPr>
+            <a:picLocks noChangeAspect="1"/>
+          </p:cNvPicPr>
+          <p:nvPr/>
+        </p:nvPicPr>
+        <p:blipFill>
+          <a:blip r:embed="rId5"/>
+          <a:stretch>
+            <a:fillRect/>
+          </a:stretch>
+        </p:blipFill>
+        <p:spPr>
+          <a:xfrm>
+            <a:off x="609593" y="3756680"/>
+            <a:ext cx="4341402" cy="856263"/>
+          </a:xfrm>
+          <a:prstGeom prst="rect">
+            <a:avLst/>
+          </a:prstGeom>
+        </p:spPr>
+      </p:pic>
+      <p:pic>
+        <p:nvPicPr>
+          <p:cNvPr id="14" name="Imagen 13">
+            <a:extLst>
+              <a:ext uri="{FF2B5EF4-FFF2-40B4-BE49-F238E27FC236}">
+                <a16:creationId xmlns:a16="http://schemas.microsoft.com/office/drawing/2014/main" id="{42910353-9139-4C23-952B-2AE127801635}"/>
+              </a:ext>
+            </a:extLst>
+          </p:cNvPr>
+          <p:cNvPicPr>
+            <a:picLocks noChangeAspect="1"/>
+          </p:cNvPicPr>
+          <p:nvPr/>
+        </p:nvPicPr>
+        <p:blipFill>
+          <a:blip r:embed="rId6"/>
+          <a:stretch>
+            <a:fillRect/>
+          </a:stretch>
+        </p:blipFill>
+        <p:spPr>
+          <a:xfrm>
+            <a:off x="620172" y="4600717"/>
+            <a:ext cx="4341401" cy="803685"/>
+          </a:xfrm>
+          <a:prstGeom prst="rect">
+            <a:avLst/>
+          </a:prstGeom>
+        </p:spPr>
+      </p:pic>
+      <p:pic>
+        <p:nvPicPr>
+          <p:cNvPr id="16" name="Imagen 15">
+            <a:extLst>
+              <a:ext uri="{FF2B5EF4-FFF2-40B4-BE49-F238E27FC236}">
+                <a16:creationId xmlns:a16="http://schemas.microsoft.com/office/drawing/2014/main" id="{1A4A0DD5-D810-4F77-B4E0-2979AB33D0B1}"/>
+              </a:ext>
+            </a:extLst>
+          </p:cNvPr>
+          <p:cNvPicPr>
+            <a:picLocks noChangeAspect="1"/>
+          </p:cNvPicPr>
+          <p:nvPr/>
+        </p:nvPicPr>
+        <p:blipFill>
+          <a:blip r:embed="rId7"/>
+          <a:stretch>
+            <a:fillRect/>
+          </a:stretch>
+        </p:blipFill>
+        <p:spPr>
+          <a:xfrm>
+            <a:off x="599017" y="5401487"/>
+            <a:ext cx="4341395" cy="766129"/>
+          </a:xfrm>
+          <a:prstGeom prst="rect">
+            <a:avLst/>
+          </a:prstGeom>
+        </p:spPr>
+      </p:pic>
+      <p:pic>
+        <p:nvPicPr>
+          <p:cNvPr id="18" name="Imagen 17">
+            <a:extLst>
+              <a:ext uri="{FF2B5EF4-FFF2-40B4-BE49-F238E27FC236}">
+                <a16:creationId xmlns:a16="http://schemas.microsoft.com/office/drawing/2014/main" id="{FE48C53E-1FE3-41C5-A922-9A22805A30FD}"/>
+              </a:ext>
+            </a:extLst>
+          </p:cNvPr>
+          <p:cNvPicPr>
+            <a:picLocks noChangeAspect="1"/>
+          </p:cNvPicPr>
+          <p:nvPr/>
+        </p:nvPicPr>
+        <p:blipFill>
+          <a:blip r:embed="rId8"/>
+          <a:stretch>
+            <a:fillRect/>
+          </a:stretch>
+        </p:blipFill>
+        <p:spPr>
+          <a:xfrm>
+            <a:off x="5791200" y="838200"/>
+            <a:ext cx="4341396" cy="736085"/>
+          </a:xfrm>
+          <a:prstGeom prst="rect">
+            <a:avLst/>
+          </a:prstGeom>
+        </p:spPr>
+      </p:pic>
+      <p:pic>
+        <p:nvPicPr>
+          <p:cNvPr id="20" name="Imagen 19">
+            <a:extLst>
+              <a:ext uri="{FF2B5EF4-FFF2-40B4-BE49-F238E27FC236}">
+                <a16:creationId xmlns:a16="http://schemas.microsoft.com/office/drawing/2014/main" id="{36E77304-8992-4F72-8D3E-D10C10C02EF2}"/>
+              </a:ext>
+            </a:extLst>
+          </p:cNvPr>
+          <p:cNvPicPr>
+            <a:picLocks noChangeAspect="1"/>
+          </p:cNvPicPr>
+          <p:nvPr/>
+        </p:nvPicPr>
+        <p:blipFill>
+          <a:blip r:embed="rId9"/>
+          <a:stretch>
+            <a:fillRect/>
+          </a:stretch>
+        </p:blipFill>
+        <p:spPr>
+          <a:xfrm>
+            <a:off x="5791200" y="1577906"/>
+            <a:ext cx="4341394" cy="713551"/>
+          </a:xfrm>
+          <a:prstGeom prst="rect">
+            <a:avLst/>
+          </a:prstGeom>
+        </p:spPr>
+      </p:pic>
+      <p:pic>
+        <p:nvPicPr>
+          <p:cNvPr id="22" name="Imagen 21">
+            <a:extLst>
+              <a:ext uri="{FF2B5EF4-FFF2-40B4-BE49-F238E27FC236}">
+                <a16:creationId xmlns:a16="http://schemas.microsoft.com/office/drawing/2014/main" id="{64294B9B-C3F9-4932-8522-139DA0BF0EAF}"/>
+              </a:ext>
+            </a:extLst>
+          </p:cNvPr>
+          <p:cNvPicPr>
+            <a:picLocks noChangeAspect="1"/>
+          </p:cNvPicPr>
+          <p:nvPr/>
+        </p:nvPicPr>
+        <p:blipFill>
+          <a:blip r:embed="rId10"/>
+          <a:stretch>
+            <a:fillRect/>
+          </a:stretch>
+        </p:blipFill>
+        <p:spPr>
+          <a:xfrm>
+            <a:off x="5791200" y="2291457"/>
+            <a:ext cx="4341399" cy="691018"/>
+          </a:xfrm>
+          <a:prstGeom prst="rect">
+            <a:avLst/>
+          </a:prstGeom>
+        </p:spPr>
+      </p:pic>
+      <p:pic>
+        <p:nvPicPr>
+          <p:cNvPr id="24" name="Imagen 23">
+            <a:extLst>
+              <a:ext uri="{FF2B5EF4-FFF2-40B4-BE49-F238E27FC236}">
+                <a16:creationId xmlns:a16="http://schemas.microsoft.com/office/drawing/2014/main" id="{8A7977DA-AD60-4E68-B777-A03669F1B05F}"/>
+              </a:ext>
+            </a:extLst>
+          </p:cNvPr>
+          <p:cNvPicPr>
+            <a:picLocks noChangeAspect="1"/>
+          </p:cNvPicPr>
+          <p:nvPr/>
+        </p:nvPicPr>
+        <p:blipFill>
+          <a:blip r:embed="rId11"/>
+          <a:stretch>
+            <a:fillRect/>
+          </a:stretch>
+        </p:blipFill>
+        <p:spPr>
+          <a:xfrm>
+            <a:off x="5791200" y="2982475"/>
+            <a:ext cx="4341395" cy="683507"/>
+          </a:xfrm>
+          <a:prstGeom prst="rect">
+            <a:avLst/>
+          </a:prstGeom>
+        </p:spPr>
+      </p:pic>
+      <p:pic>
+        <p:nvPicPr>
+          <p:cNvPr id="26" name="Imagen 25">
+            <a:extLst>
+              <a:ext uri="{FF2B5EF4-FFF2-40B4-BE49-F238E27FC236}">
+                <a16:creationId xmlns:a16="http://schemas.microsoft.com/office/drawing/2014/main" id="{3A84F086-2E10-48CA-9408-1A0AC3EAD974}"/>
+              </a:ext>
+            </a:extLst>
+          </p:cNvPr>
+          <p:cNvPicPr>
+            <a:picLocks noChangeAspect="1"/>
+          </p:cNvPicPr>
+          <p:nvPr/>
+        </p:nvPicPr>
+        <p:blipFill>
+          <a:blip r:embed="rId12"/>
+          <a:stretch>
+            <a:fillRect/>
+          </a:stretch>
+        </p:blipFill>
+        <p:spPr>
+          <a:xfrm>
+            <a:off x="5791200" y="3661119"/>
+            <a:ext cx="4341395" cy="668485"/>
           </a:xfrm>
           <a:prstGeom prst="rect">
             <a:avLst/>

--- a/LabBook_20.pptx
+++ b/LabBook_20.pptx
@@ -818,7 +818,7 @@
           <a:p>
             <a:fld id="{8438F8DC-35B0-48E6-A86E-42F1F08DD00F}" type="datetimeFigureOut">
               <a:rPr lang="es-ES" smtClean="0"/>
-              <a:t>09/03/2026</a:t>
+              <a:t>10/03/2026</a:t>
             </a:fld>
             <a:endParaRPr lang="es-ES"/>
           </a:p>
@@ -995,7 +995,7 @@
           <a:p>
             <a:fld id="{FACBDC12-F39B-4B97-8F4D-6734F9D366FF}" type="datetimeFigureOut">
               <a:rPr lang="es-ES" smtClean="0"/>
-              <a:t>09/03/2026</a:t>
+              <a:t>10/03/2026</a:t>
             </a:fld>
             <a:endParaRPr lang="es-ES"/>
           </a:p>
@@ -3943,7 +3943,21 @@
                 <a:latin typeface="Arial"/>
                 <a:cs typeface="Arial"/>
               </a:rPr>
-              <a:t>: </a:t>
+              <a:t>: Sergi </a:t>
+            </a:r>
+            <a:r>
+              <a:rPr lang="es-ES" spc="165" dirty="0" err="1">
+                <a:latin typeface="Arial"/>
+                <a:cs typeface="Arial"/>
+              </a:rPr>
+              <a:t>Nàcher</a:t>
+            </a:r>
+            <a:r>
+              <a:rPr lang="es-ES" spc="165" dirty="0">
+                <a:latin typeface="Arial"/>
+                <a:cs typeface="Arial"/>
+              </a:rPr>
+              <a:t> Muñoz </a:t>
             </a:r>
             <a:endParaRPr sz="1800" dirty="0">
               <a:latin typeface="Arial"/>
@@ -12960,144 +12974,137 @@
           <a:p>
             <a:pPr algn="just"/>
             <a:r>
+              <a:rPr lang="en-US" sz="1200" dirty="0">
+                <a:latin typeface="Arial" panose="020B0604020202020204" pitchFamily="34" charset="0"/>
+                <a:cs typeface="Arial" panose="020B0604020202020204" pitchFamily="34" charset="0"/>
+              </a:rPr>
+              <a:t>La </a:t>
+            </a:r>
+            <a:r>
               <a:rPr lang="en-US" sz="1200" dirty="0" err="1">
                 <a:latin typeface="Arial" panose="020B0604020202020204" pitchFamily="34" charset="0"/>
                 <a:cs typeface="Arial" panose="020B0604020202020204" pitchFamily="34" charset="0"/>
               </a:rPr>
-              <a:t>Cual</a:t>
+              <a:t>distancia</a:t>
             </a:r>
             <a:r>
               <a:rPr lang="en-US" sz="1200" dirty="0">
                 <a:latin typeface="Arial" panose="020B0604020202020204" pitchFamily="34" charset="0"/>
                 <a:cs typeface="Arial" panose="020B0604020202020204" pitchFamily="34" charset="0"/>
               </a:rPr>
-              <a:t> </a:t>
+              <a:t> para la </a:t>
             </a:r>
             <a:r>
               <a:rPr lang="en-US" sz="1200" dirty="0" err="1">
                 <a:latin typeface="Arial" panose="020B0604020202020204" pitchFamily="34" charset="0"/>
                 <a:cs typeface="Arial" panose="020B0604020202020204" pitchFamily="34" charset="0"/>
               </a:rPr>
-              <a:t>sería</a:t>
+              <a:t>cual</a:t>
             </a:r>
             <a:r>
               <a:rPr lang="en-US" sz="1200" dirty="0">
                 <a:latin typeface="Arial" panose="020B0604020202020204" pitchFamily="34" charset="0"/>
                 <a:cs typeface="Arial" panose="020B0604020202020204" pitchFamily="34" charset="0"/>
               </a:rPr>
-              <a:t> la </a:t>
+              <a:t> no </a:t>
             </a:r>
             <a:r>
               <a:rPr lang="en-US" sz="1200" dirty="0" err="1">
                 <a:latin typeface="Arial" panose="020B0604020202020204" pitchFamily="34" charset="0"/>
                 <a:cs typeface="Arial" panose="020B0604020202020204" pitchFamily="34" charset="0"/>
               </a:rPr>
-              <a:t>distancia</a:t>
+              <a:t>sufre</a:t>
             </a:r>
             <a:r>
               <a:rPr lang="en-US" sz="1200" dirty="0">
                 <a:latin typeface="Arial" panose="020B0604020202020204" pitchFamily="34" charset="0"/>
                 <a:cs typeface="Arial" panose="020B0604020202020204" pitchFamily="34" charset="0"/>
               </a:rPr>
-              <a:t> para la </a:t>
+              <a:t> </a:t>
             </a:r>
             <a:r>
               <a:rPr lang="en-US" sz="1200" dirty="0" err="1">
                 <a:latin typeface="Arial" panose="020B0604020202020204" pitchFamily="34" charset="0"/>
                 <a:cs typeface="Arial" panose="020B0604020202020204" pitchFamily="34" charset="0"/>
               </a:rPr>
-              <a:t>cual</a:t>
+              <a:t>acoplamiento</a:t>
             </a:r>
             <a:r>
               <a:rPr lang="en-US" sz="1200" dirty="0">
                 <a:latin typeface="Arial" panose="020B0604020202020204" pitchFamily="34" charset="0"/>
                 <a:cs typeface="Arial" panose="020B0604020202020204" pitchFamily="34" charset="0"/>
               </a:rPr>
-              <a:t> no </a:t>
+              <a:t> de una </a:t>
             </a:r>
             <a:r>
               <a:rPr lang="en-US" sz="1200" dirty="0" err="1">
                 <a:latin typeface="Arial" panose="020B0604020202020204" pitchFamily="34" charset="0"/>
                 <a:cs typeface="Arial" panose="020B0604020202020204" pitchFamily="34" charset="0"/>
               </a:rPr>
-              <a:t>sufre</a:t>
+              <a:t>guía</a:t>
             </a:r>
             <a:r>
               <a:rPr lang="en-US" sz="1200" dirty="0">
                 <a:latin typeface="Arial" panose="020B0604020202020204" pitchFamily="34" charset="0"/>
                 <a:cs typeface="Arial" panose="020B0604020202020204" pitchFamily="34" charset="0"/>
               </a:rPr>
-              <a:t> </a:t>
+              <a:t> de </a:t>
             </a:r>
             <a:r>
               <a:rPr lang="en-US" sz="1200" dirty="0" err="1">
                 <a:latin typeface="Arial" panose="020B0604020202020204" pitchFamily="34" charset="0"/>
                 <a:cs typeface="Arial" panose="020B0604020202020204" pitchFamily="34" charset="0"/>
               </a:rPr>
-              <a:t>acoplamiento</a:t>
+              <a:t>onda</a:t>
             </a:r>
             <a:r>
               <a:rPr lang="en-US" sz="1200" dirty="0">
                 <a:latin typeface="Arial" panose="020B0604020202020204" pitchFamily="34" charset="0"/>
                 <a:cs typeface="Arial" panose="020B0604020202020204" pitchFamily="34" charset="0"/>
               </a:rPr>
-              <a:t> de una </a:t>
+              <a:t> a </a:t>
             </a:r>
             <a:r>
               <a:rPr lang="en-US" sz="1200" dirty="0" err="1">
                 <a:latin typeface="Arial" panose="020B0604020202020204" pitchFamily="34" charset="0"/>
                 <a:cs typeface="Arial" panose="020B0604020202020204" pitchFamily="34" charset="0"/>
               </a:rPr>
-              <a:t>guía</a:t>
+              <a:t>otra</a:t>
             </a:r>
             <a:r>
               <a:rPr lang="en-US" sz="1200" dirty="0">
                 <a:latin typeface="Arial" panose="020B0604020202020204" pitchFamily="34" charset="0"/>
                 <a:cs typeface="Arial" panose="020B0604020202020204" pitchFamily="34" charset="0"/>
               </a:rPr>
-              <a:t> de </a:t>
+              <a:t> con un </a:t>
             </a:r>
             <a:r>
               <a:rPr lang="en-US" sz="1200" dirty="0" err="1">
                 <a:latin typeface="Arial" panose="020B0604020202020204" pitchFamily="34" charset="0"/>
                 <a:cs typeface="Arial" panose="020B0604020202020204" pitchFamily="34" charset="0"/>
               </a:rPr>
-              <a:t>onda</a:t>
+              <a:t>coeficiente</a:t>
             </a:r>
             <a:r>
               <a:rPr lang="en-US" sz="1200" dirty="0">
                 <a:latin typeface="Arial" panose="020B0604020202020204" pitchFamily="34" charset="0"/>
                 <a:cs typeface="Arial" panose="020B0604020202020204" pitchFamily="34" charset="0"/>
               </a:rPr>
-              <a:t> a </a:t>
+              <a:t> de </a:t>
             </a:r>
             <a:r>
               <a:rPr lang="en-US" sz="1200" dirty="0" err="1">
                 <a:latin typeface="Arial" panose="020B0604020202020204" pitchFamily="34" charset="0"/>
                 <a:cs typeface="Arial" panose="020B0604020202020204" pitchFamily="34" charset="0"/>
               </a:rPr>
-              <a:t>otra</a:t>
+              <a:t>acoplamiento</a:t>
             </a:r>
             <a:r>
               <a:rPr lang="en-US" sz="1200" dirty="0">
                 <a:latin typeface="Arial" panose="020B0604020202020204" pitchFamily="34" charset="0"/>
                 <a:cs typeface="Arial" panose="020B0604020202020204" pitchFamily="34" charset="0"/>
               </a:rPr>
-              <a:t>. El </a:t>
-            </a:r>
-            <a:r>
-              <a:rPr lang="en-US" sz="1200" dirty="0" err="1">
-                <a:latin typeface="Arial" panose="020B0604020202020204" pitchFamily="34" charset="0"/>
-                <a:cs typeface="Arial" panose="020B0604020202020204" pitchFamily="34" charset="0"/>
-              </a:rPr>
-              <a:t>parámetro</a:t>
-            </a:r>
-            <a:r>
-              <a:rPr lang="en-US" sz="1200" dirty="0">
-                <a:latin typeface="Arial" panose="020B0604020202020204" pitchFamily="34" charset="0"/>
-                <a:cs typeface="Arial" panose="020B0604020202020204" pitchFamily="34" charset="0"/>
-              </a:rPr>
-              <a:t> clave es que K&lt;0.1</a:t>
+              <a:t> K=0.1</a:t>
             </a:r>
           </a:p>
           <a:p>

--- a/LabBook_20.pptx
+++ b/LabBook_20.pptx
@@ -5,10 +5,10 @@
     <p:sldMasterId id="2147483648" r:id="rId1"/>
   </p:sldMasterIdLst>
   <p:notesMasterIdLst>
-    <p:notesMasterId r:id="rId19"/>
+    <p:notesMasterId r:id="rId21"/>
   </p:notesMasterIdLst>
   <p:handoutMasterIdLst>
-    <p:handoutMasterId r:id="rId20"/>
+    <p:handoutMasterId r:id="rId22"/>
   </p:handoutMasterIdLst>
   <p:sldIdLst>
     <p:sldId id="256" r:id="rId2"/>
@@ -21,13 +21,15 @@
     <p:sldId id="296" r:id="rId9"/>
     <p:sldId id="294" r:id="rId10"/>
     <p:sldId id="299" r:id="rId11"/>
-    <p:sldId id="300" r:id="rId12"/>
-    <p:sldId id="301" r:id="rId13"/>
-    <p:sldId id="297" r:id="rId14"/>
-    <p:sldId id="290" r:id="rId15"/>
-    <p:sldId id="292" r:id="rId16"/>
-    <p:sldId id="298" r:id="rId17"/>
-    <p:sldId id="288" r:id="rId18"/>
+    <p:sldId id="305" r:id="rId12"/>
+    <p:sldId id="300" r:id="rId13"/>
+    <p:sldId id="306" r:id="rId14"/>
+    <p:sldId id="301" r:id="rId15"/>
+    <p:sldId id="297" r:id="rId16"/>
+    <p:sldId id="290" r:id="rId17"/>
+    <p:sldId id="292" r:id="rId18"/>
+    <p:sldId id="298" r:id="rId19"/>
+    <p:sldId id="288" r:id="rId20"/>
   </p:sldIdLst>
   <p:sldSz cx="12192000" cy="6858000"/>
   <p:notesSz cx="12192000" cy="6858000"/>
@@ -1459,7 +1461,7 @@
           <a:p>
             <a:fld id="{676223B9-C868-4436-87D9-1A3152E1157A}" type="slidenum">
               <a:rPr lang="es-ES" smtClean="0"/>
-              <a:t>15</a:t>
+              <a:t>17</a:t>
             </a:fld>
             <a:endParaRPr lang="es-ES"/>
           </a:p>
@@ -1567,7 +1569,7 @@
           <a:p>
             <a:fld id="{676223B9-C868-4436-87D9-1A3152E1157A}" type="slidenum">
               <a:rPr lang="es-ES" smtClean="0"/>
-              <a:t>16</a:t>
+              <a:t>18</a:t>
             </a:fld>
             <a:endParaRPr lang="es-ES"/>
           </a:p>
@@ -2107,7 +2109,7 @@
           <a:p>
             <a:fld id="{676223B9-C868-4436-87D9-1A3152E1157A}" type="slidenum">
               <a:rPr lang="es-ES" smtClean="0"/>
-              <a:t>11</a:t>
+              <a:t>12</a:t>
             </a:fld>
             <a:endParaRPr lang="es-ES"/>
           </a:p>
@@ -2215,7 +2217,7 @@
           <a:p>
             <a:fld id="{676223B9-C868-4436-87D9-1A3152E1157A}" type="slidenum">
               <a:rPr lang="es-ES" smtClean="0"/>
-              <a:t>12</a:t>
+              <a:t>14</a:t>
             </a:fld>
             <a:endParaRPr lang="es-ES"/>
           </a:p>
@@ -2323,7 +2325,7 @@
           <a:p>
             <a:fld id="{676223B9-C868-4436-87D9-1A3152E1157A}" type="slidenum">
               <a:rPr lang="es-ES" smtClean="0"/>
-              <a:t>13</a:t>
+              <a:t>15</a:t>
             </a:fld>
             <a:endParaRPr lang="es-ES"/>
           </a:p>
@@ -2407,7 +2409,7 @@
           <a:p>
             <a:fld id="{676223B9-C868-4436-87D9-1A3152E1157A}" type="slidenum">
               <a:rPr lang="es-ES" smtClean="0"/>
-              <a:t>14</a:t>
+              <a:t>16</a:t>
             </a:fld>
             <a:endParaRPr lang="es-ES"/>
           </a:p>
@@ -4234,21 +4236,11 @@
         <p:spPr>
           <a:xfrm>
             <a:off x="609441" y="4819471"/>
-            <a:ext cx="11199971" cy="1384995"/>
+            <a:ext cx="11199971" cy="1200329"/>
           </a:xfrm>
           <a:prstGeom prst="rect">
             <a:avLst/>
           </a:prstGeom>
-          <a:solidFill>
-            <a:schemeClr val="bg1">
-              <a:lumMod val="95000"/>
-            </a:schemeClr>
-          </a:solidFill>
-          <a:ln w="28575">
-            <a:solidFill>
-              <a:srgbClr val="E0700D"/>
-            </a:solidFill>
-          </a:ln>
         </p:spPr>
         <p:txBody>
           <a:bodyPr wrap="square" rtlCol="0">
@@ -4264,13 +4256,6 @@
               </a:rPr>
               <a:t>Comment results</a:t>
             </a:r>
-          </a:p>
-          <a:p>
-            <a:pPr algn="just"/>
-            <a:endParaRPr lang="en-US" sz="1200" dirty="0">
-              <a:latin typeface="Arial" panose="020B0604020202020204" pitchFamily="34" charset="0"/>
-              <a:cs typeface="Arial" panose="020B0604020202020204" pitchFamily="34" charset="0"/>
-            </a:endParaRPr>
           </a:p>
           <a:p>
             <a:pPr algn="just"/>
@@ -4491,6 +4476,284 @@
   <p:cSld>
     <p:spTree>
       <p:nvGrpSpPr>
+        <p:cNvPr id="1" name=""/>
+        <p:cNvGrpSpPr/>
+        <p:nvPr/>
+      </p:nvGrpSpPr>
+      <p:grpSpPr>
+        <a:xfrm>
+          <a:off x="0" y="0"/>
+          <a:ext cx="0" cy="0"/>
+          <a:chOff x="0" y="0"/>
+          <a:chExt cx="0" cy="0"/>
+        </a:xfrm>
+      </p:grpSpPr>
+      <p:sp>
+        <p:nvSpPr>
+          <p:cNvPr id="2" name="Título 1">
+            <a:extLst>
+              <a:ext uri="{FF2B5EF4-FFF2-40B4-BE49-F238E27FC236}">
+                <a16:creationId xmlns:a16="http://schemas.microsoft.com/office/drawing/2014/main" id="{1919EE04-608E-4B8E-B687-7B8B2C35C0E6}"/>
+              </a:ext>
+            </a:extLst>
+          </p:cNvPr>
+          <p:cNvSpPr>
+            <a:spLocks noGrp="1"/>
+          </p:cNvSpPr>
+          <p:nvPr>
+            <p:ph type="title"/>
+          </p:nvPr>
+        </p:nvSpPr>
+        <p:spPr/>
+        <p:txBody>
+          <a:bodyPr/>
+          <a:lstStyle/>
+          <a:p>
+            <a:r>
+              <a:rPr lang="es-ES" dirty="0"/>
+              <a:t>Resolución </a:t>
+            </a:r>
+            <a:r>
+              <a:rPr lang="en-US" sz="2000" dirty="0"/>
+              <a:t>Learning outcome #4.2</a:t>
+            </a:r>
+            <a:endParaRPr lang="es-ES" dirty="0"/>
+          </a:p>
+        </p:txBody>
+      </p:sp>
+      <p:sp>
+        <p:nvSpPr>
+          <p:cNvPr id="3" name="Marcador de texto 2">
+            <a:extLst>
+              <a:ext uri="{FF2B5EF4-FFF2-40B4-BE49-F238E27FC236}">
+                <a16:creationId xmlns:a16="http://schemas.microsoft.com/office/drawing/2014/main" id="{F25E8729-3742-4527-A81D-59CD52779EE7}"/>
+              </a:ext>
+            </a:extLst>
+          </p:cNvPr>
+          <p:cNvSpPr>
+            <a:spLocks noGrp="1"/>
+          </p:cNvSpPr>
+          <p:nvPr>
+            <p:ph type="body" idx="1"/>
+          </p:nvPr>
+        </p:nvSpPr>
+        <p:spPr>
+          <a:xfrm>
+            <a:off x="590550" y="5037559"/>
+            <a:ext cx="10972800" cy="369332"/>
+          </a:xfrm>
+        </p:spPr>
+        <p:txBody>
+          <a:bodyPr/>
+          <a:lstStyle/>
+          <a:p>
+            <a:r>
+              <a:rPr lang="es-ES" sz="1200" dirty="0">
+                <a:latin typeface="Arial" panose="020B0604020202020204" pitchFamily="34" charset="0"/>
+                <a:cs typeface="Arial" panose="020B0604020202020204" pitchFamily="34" charset="0"/>
+              </a:rPr>
+              <a:t>Para los valores de </a:t>
+            </a:r>
+            <a:r>
+              <a:rPr lang="es-ES" sz="1200" dirty="0" err="1">
+                <a:latin typeface="Arial" panose="020B0604020202020204" pitchFamily="34" charset="0"/>
+                <a:cs typeface="Arial" panose="020B0604020202020204" pitchFamily="34" charset="0"/>
+              </a:rPr>
+              <a:t>dL_MMI</a:t>
+            </a:r>
+            <a:r>
+              <a:rPr lang="es-ES" sz="1200" dirty="0">
+                <a:latin typeface="Arial" panose="020B0604020202020204" pitchFamily="34" charset="0"/>
+                <a:cs typeface="Arial" panose="020B0604020202020204" pitchFamily="34" charset="0"/>
+              </a:rPr>
+              <a:t> = -0.4 µm y </a:t>
+            </a:r>
+            <a:r>
+              <a:rPr lang="es-ES" sz="1200" dirty="0" err="1">
+                <a:latin typeface="Arial" panose="020B0604020202020204" pitchFamily="34" charset="0"/>
+                <a:cs typeface="Arial" panose="020B0604020202020204" pitchFamily="34" charset="0"/>
+              </a:rPr>
+              <a:t>dy</a:t>
+            </a:r>
+            <a:r>
+              <a:rPr lang="es-ES" sz="1200" dirty="0">
+                <a:latin typeface="Arial" panose="020B0604020202020204" pitchFamily="34" charset="0"/>
+                <a:cs typeface="Arial" panose="020B0604020202020204" pitchFamily="34" charset="0"/>
+              </a:rPr>
+              <a:t> = 0.05 µm se obtiene el mínimo valor de </a:t>
+            </a:r>
+            <a:r>
+              <a:rPr lang="es-ES" sz="1200" dirty="0" err="1">
+                <a:latin typeface="Arial" panose="020B0604020202020204" pitchFamily="34" charset="0"/>
+                <a:cs typeface="Arial" panose="020B0604020202020204" pitchFamily="34" charset="0"/>
+              </a:rPr>
+              <a:t>excess</a:t>
+            </a:r>
+            <a:r>
+              <a:rPr lang="es-ES" sz="1200" dirty="0">
+                <a:latin typeface="Arial" panose="020B0604020202020204" pitchFamily="34" charset="0"/>
+                <a:cs typeface="Arial" panose="020B0604020202020204" pitchFamily="34" charset="0"/>
+              </a:rPr>
+              <a:t> </a:t>
+            </a:r>
+            <a:r>
+              <a:rPr lang="es-ES" sz="1200" dirty="0" err="1">
+                <a:latin typeface="Arial" panose="020B0604020202020204" pitchFamily="34" charset="0"/>
+                <a:cs typeface="Arial" panose="020B0604020202020204" pitchFamily="34" charset="0"/>
+              </a:rPr>
+              <a:t>loss</a:t>
+            </a:r>
+            <a:r>
+              <a:rPr lang="es-ES" sz="1200" dirty="0">
+                <a:latin typeface="Arial" panose="020B0604020202020204" pitchFamily="34" charset="0"/>
+                <a:cs typeface="Arial" panose="020B0604020202020204" pitchFamily="34" charset="0"/>
+              </a:rPr>
+              <a:t> =  0.3429 dB. A la derecha se puede observar la propagación con estas especificaciones para el MMI. </a:t>
+            </a:r>
+          </a:p>
+        </p:txBody>
+      </p:sp>
+      <p:sp>
+        <p:nvSpPr>
+          <p:cNvPr id="4" name="Marcador de pie de página 3">
+            <a:extLst>
+              <a:ext uri="{FF2B5EF4-FFF2-40B4-BE49-F238E27FC236}">
+                <a16:creationId xmlns:a16="http://schemas.microsoft.com/office/drawing/2014/main" id="{C5EDBD82-056D-4F51-8607-3FBE8F0A5BDB}"/>
+              </a:ext>
+            </a:extLst>
+          </p:cNvPr>
+          <p:cNvSpPr>
+            <a:spLocks noGrp="1"/>
+          </p:cNvSpPr>
+          <p:nvPr>
+            <p:ph type="ftr" sz="quarter" idx="5"/>
+          </p:nvPr>
+        </p:nvSpPr>
+        <p:spPr/>
+        <p:txBody>
+          <a:bodyPr/>
+          <a:lstStyle/>
+          <a:p>
+            <a:pPr marL="12700">
+              <a:spcBef>
+                <a:spcPts val="15"/>
+              </a:spcBef>
+            </a:pPr>
+            <a:r>
+              <a:rPr lang="es-ES" spc="-5"/>
+              <a:t>LAB 2.0. COUPLERS</a:t>
+            </a:r>
+            <a:endParaRPr lang="es-ES" spc="-5" dirty="0"/>
+          </a:p>
+        </p:txBody>
+      </p:sp>
+      <p:sp>
+        <p:nvSpPr>
+          <p:cNvPr id="5" name="Marcador de número de diapositiva 4">
+            <a:extLst>
+              <a:ext uri="{FF2B5EF4-FFF2-40B4-BE49-F238E27FC236}">
+                <a16:creationId xmlns:a16="http://schemas.microsoft.com/office/drawing/2014/main" id="{95826EC4-A33C-4520-ACF7-D0FDE25B9487}"/>
+              </a:ext>
+            </a:extLst>
+          </p:cNvPr>
+          <p:cNvSpPr>
+            <a:spLocks noGrp="1"/>
+          </p:cNvSpPr>
+          <p:nvPr>
+            <p:ph type="sldNum" sz="quarter" idx="7"/>
+          </p:nvPr>
+        </p:nvSpPr>
+        <p:spPr/>
+        <p:txBody>
+          <a:bodyPr/>
+          <a:lstStyle/>
+          <a:p>
+            <a:fld id="{B6F15528-21DE-4FAA-801E-634DDDAF4B2B}" type="slidenum">
+              <a:rPr lang="es-ES" smtClean="0"/>
+              <a:t>11</a:t>
+            </a:fld>
+            <a:endParaRPr lang="es-ES"/>
+          </a:p>
+        </p:txBody>
+      </p:sp>
+      <p:pic>
+        <p:nvPicPr>
+          <p:cNvPr id="6" name="Imagen 5">
+            <a:extLst>
+              <a:ext uri="{FF2B5EF4-FFF2-40B4-BE49-F238E27FC236}">
+                <a16:creationId xmlns:a16="http://schemas.microsoft.com/office/drawing/2014/main" id="{46DEF932-7029-4E49-B61A-86DCDEED6915}"/>
+              </a:ext>
+            </a:extLst>
+          </p:cNvPr>
+          <p:cNvPicPr>
+            <a:picLocks noChangeAspect="1"/>
+          </p:cNvPicPr>
+          <p:nvPr/>
+        </p:nvPicPr>
+        <p:blipFill>
+          <a:blip r:embed="rId2"/>
+          <a:stretch>
+            <a:fillRect/>
+          </a:stretch>
+        </p:blipFill>
+        <p:spPr>
+          <a:xfrm>
+            <a:off x="838200" y="1406461"/>
+            <a:ext cx="3124200" cy="2888411"/>
+          </a:xfrm>
+          <a:prstGeom prst="rect">
+            <a:avLst/>
+          </a:prstGeom>
+        </p:spPr>
+      </p:pic>
+      <p:pic>
+        <p:nvPicPr>
+          <p:cNvPr id="7" name="Imagen 6">
+            <a:extLst>
+              <a:ext uri="{FF2B5EF4-FFF2-40B4-BE49-F238E27FC236}">
+                <a16:creationId xmlns:a16="http://schemas.microsoft.com/office/drawing/2014/main" id="{770355A5-07CC-4DA4-A363-7EB159DF0A29}"/>
+              </a:ext>
+            </a:extLst>
+          </p:cNvPr>
+          <p:cNvPicPr>
+            <a:picLocks noChangeAspect="1"/>
+          </p:cNvPicPr>
+          <p:nvPr/>
+        </p:nvPicPr>
+        <p:blipFill>
+          <a:blip r:embed="rId3"/>
+          <a:stretch>
+            <a:fillRect/>
+          </a:stretch>
+        </p:blipFill>
+        <p:spPr>
+          <a:xfrm>
+            <a:off x="5029200" y="1726585"/>
+            <a:ext cx="5725549" cy="2371289"/>
+          </a:xfrm>
+          <a:prstGeom prst="rect">
+            <a:avLst/>
+          </a:prstGeom>
+        </p:spPr>
+      </p:pic>
+    </p:spTree>
+    <p:extLst>
+      <p:ext uri="{BB962C8B-B14F-4D97-AF65-F5344CB8AC3E}">
+        <p14:creationId xmlns:p14="http://schemas.microsoft.com/office/powerpoint/2010/main" val="1714004382"/>
+      </p:ext>
+    </p:extLst>
+  </p:cSld>
+  <p:clrMapOvr>
+    <a:masterClrMapping/>
+  </p:clrMapOvr>
+</p:sld>
+</file>
+
+<file path=ppt/slides/slide12.xml><?xml version="1.0" encoding="utf-8"?>
+<p:sld xmlns:a="http://schemas.openxmlformats.org/drawingml/2006/main" xmlns:r="http://schemas.openxmlformats.org/officeDocument/2006/relationships" xmlns:p="http://schemas.openxmlformats.org/presentationml/2006/main">
+  <p:cSld>
+    <p:spTree>
+      <p:nvGrpSpPr>
         <p:cNvPr id="1" name="">
           <a:extLst>
             <a:ext uri="{FF2B5EF4-FFF2-40B4-BE49-F238E27FC236}">
@@ -4633,7 +4896,7 @@
           <a:p>
             <a:fld id="{B6F15528-21DE-4FAA-801E-634DDDAF4B2B}" type="slidenum">
               <a:rPr lang="es-ES" smtClean="0"/>
-              <a:t>11</a:t>
+              <a:t>12</a:t>
             </a:fld>
             <a:endParaRPr lang="es-ES"/>
           </a:p>
@@ -4934,7 +5197,1096 @@
 </p:sld>
 </file>
 
-<file path=ppt/slides/slide12.xml><?xml version="1.0" encoding="utf-8"?>
+<file path=ppt/slides/slide13.xml><?xml version="1.0" encoding="utf-8"?>
+<p:sld xmlns:a="http://schemas.openxmlformats.org/drawingml/2006/main" xmlns:r="http://schemas.openxmlformats.org/officeDocument/2006/relationships" xmlns:p="http://schemas.openxmlformats.org/presentationml/2006/main">
+  <p:cSld>
+    <p:spTree>
+      <p:nvGrpSpPr>
+        <p:cNvPr id="1" name=""/>
+        <p:cNvGrpSpPr/>
+        <p:nvPr/>
+      </p:nvGrpSpPr>
+      <p:grpSpPr>
+        <a:xfrm>
+          <a:off x="0" y="0"/>
+          <a:ext cx="0" cy="0"/>
+          <a:chOff x="0" y="0"/>
+          <a:chExt cx="0" cy="0"/>
+        </a:xfrm>
+      </p:grpSpPr>
+      <p:sp>
+        <p:nvSpPr>
+          <p:cNvPr id="3" name="Marcador de texto 2">
+            <a:extLst>
+              <a:ext uri="{FF2B5EF4-FFF2-40B4-BE49-F238E27FC236}">
+                <a16:creationId xmlns:a16="http://schemas.microsoft.com/office/drawing/2014/main" id="{BFB6762D-51C9-4DF7-8526-BF131C202C48}"/>
+              </a:ext>
+            </a:extLst>
+          </p:cNvPr>
+          <p:cNvSpPr>
+            <a:spLocks noGrp="1"/>
+          </p:cNvSpPr>
+          <p:nvPr>
+            <p:ph type="body" idx="1"/>
+          </p:nvPr>
+        </p:nvSpPr>
+        <p:spPr>
+          <a:xfrm>
+            <a:off x="4876800" y="2153573"/>
+            <a:ext cx="6705600" cy="2585323"/>
+          </a:xfrm>
+        </p:spPr>
+        <p:txBody>
+          <a:bodyPr/>
+          <a:lstStyle/>
+          <a:p>
+            <a:r>
+              <a:rPr lang="es-ES" sz="1200" dirty="0"/>
+              <a:t>Los resultados del barrido paramétrico muestran que el acoplador MMI cumple satisfactoriamente con las especificaciones. Desde el primer incremento de 0.6 µm en el ancho de las guías de acceso, las pérdidas por exceso caen a 0.096 dB (por debajo del límite exigido de 0.1 dB), manteniendo en todo momento una relación de división de potencia muy equilibrada y cercana a 0.5 en los puertos de salida.</a:t>
+            </a:r>
+          </a:p>
+          <a:p>
+            <a:endParaRPr lang="es-ES" sz="1200" dirty="0"/>
+          </a:p>
+          <a:p>
+            <a:r>
+              <a:rPr lang="es-ES" sz="1200" dirty="0"/>
+              <a:t>Al ensanchar progresivamente estas guías de entrada y salida, la adaptación modal hacia la región multimodo es mucho más suave, lo que reduce drásticamente las pérdidas. Un incremento en torno a 1.0 µm destaca como un punto de operación óptimo, ya que minimiza las pérdidas por exceso a tan solo 0.015 dB sin apenas penalizar el balance entre las ramas.</a:t>
+            </a:r>
+          </a:p>
+          <a:p>
+            <a:endParaRPr lang="es-ES" sz="1200" dirty="0"/>
+          </a:p>
+          <a:p>
+            <a:r>
+              <a:rPr lang="es-ES" sz="1200" dirty="0"/>
+              <a:t>Finalmente, para los ensanchamientos mayores (1.3 µm y 1.4 µm), el simulador nos da valores de pérdidas negativos. Al tratarse de un componente pasivo, esto representa un artefacto numérico propio del método de simulación, lo que simplemente nos indica que en esas geometrías las pérdidas reales son virtualmente nulas.</a:t>
+            </a:r>
+          </a:p>
+        </p:txBody>
+      </p:sp>
+      <p:sp>
+        <p:nvSpPr>
+          <p:cNvPr id="4" name="Marcador de pie de página 3">
+            <a:extLst>
+              <a:ext uri="{FF2B5EF4-FFF2-40B4-BE49-F238E27FC236}">
+                <a16:creationId xmlns:a16="http://schemas.microsoft.com/office/drawing/2014/main" id="{E07B3D63-2EED-4E27-88FB-3CC136D96024}"/>
+              </a:ext>
+            </a:extLst>
+          </p:cNvPr>
+          <p:cNvSpPr>
+            <a:spLocks noGrp="1"/>
+          </p:cNvSpPr>
+          <p:nvPr>
+            <p:ph type="ftr" sz="quarter" idx="5"/>
+          </p:nvPr>
+        </p:nvSpPr>
+        <p:spPr/>
+        <p:txBody>
+          <a:bodyPr/>
+          <a:lstStyle/>
+          <a:p>
+            <a:pPr marL="12700">
+              <a:spcBef>
+                <a:spcPts val="15"/>
+              </a:spcBef>
+            </a:pPr>
+            <a:r>
+              <a:rPr lang="es-ES" spc="-5"/>
+              <a:t>LAB 2.0. COUPLERS</a:t>
+            </a:r>
+            <a:endParaRPr lang="es-ES" spc="-5" dirty="0"/>
+          </a:p>
+        </p:txBody>
+      </p:sp>
+      <p:sp>
+        <p:nvSpPr>
+          <p:cNvPr id="5" name="Marcador de número de diapositiva 4">
+            <a:extLst>
+              <a:ext uri="{FF2B5EF4-FFF2-40B4-BE49-F238E27FC236}">
+                <a16:creationId xmlns:a16="http://schemas.microsoft.com/office/drawing/2014/main" id="{22E76897-0BB8-4599-ACBE-09BF1E5765CE}"/>
+              </a:ext>
+            </a:extLst>
+          </p:cNvPr>
+          <p:cNvSpPr>
+            <a:spLocks noGrp="1"/>
+          </p:cNvSpPr>
+          <p:nvPr>
+            <p:ph type="sldNum" sz="quarter" idx="7"/>
+          </p:nvPr>
+        </p:nvSpPr>
+        <p:spPr/>
+        <p:txBody>
+          <a:bodyPr/>
+          <a:lstStyle/>
+          <a:p>
+            <a:fld id="{B6F15528-21DE-4FAA-801E-634DDDAF4B2B}" type="slidenum">
+              <a:rPr lang="es-ES" smtClean="0"/>
+              <a:t>13</a:t>
+            </a:fld>
+            <a:endParaRPr lang="es-ES"/>
+          </a:p>
+        </p:txBody>
+      </p:sp>
+      <p:graphicFrame>
+        <p:nvGraphicFramePr>
+          <p:cNvPr id="6" name="Tabla 5">
+            <a:extLst>
+              <a:ext uri="{FF2B5EF4-FFF2-40B4-BE49-F238E27FC236}">
+                <a16:creationId xmlns:a16="http://schemas.microsoft.com/office/drawing/2014/main" id="{FA1FA2A7-EB5E-4E49-B3C3-269F67776732}"/>
+              </a:ext>
+            </a:extLst>
+          </p:cNvPr>
+          <p:cNvGraphicFramePr>
+            <a:graphicFrameLocks noGrp="1"/>
+          </p:cNvGraphicFramePr>
+          <p:nvPr>
+            <p:extLst>
+              <p:ext uri="{D42A27DB-BD31-4B8C-83A1-F6EECF244321}">
+                <p14:modId xmlns:p14="http://schemas.microsoft.com/office/powerpoint/2010/main" val="781047502"/>
+              </p:ext>
+            </p:extLst>
+          </p:nvPr>
+        </p:nvGraphicFramePr>
+        <p:xfrm>
+          <a:off x="609600" y="1371600"/>
+          <a:ext cx="3810000" cy="4393760"/>
+        </p:xfrm>
+        <a:graphic>
+          <a:graphicData uri="http://schemas.openxmlformats.org/drawingml/2006/table">
+            <a:tbl>
+              <a:tblPr>
+                <a:tableStyleId>{69CF1AB2-1976-4502-BF36-3FF5EA218861}</a:tableStyleId>
+              </a:tblPr>
+              <a:tblGrid>
+                <a:gridCol w="1219200">
+                  <a:extLst>
+                    <a:ext uri="{9D8B030D-6E8A-4147-A177-3AD203B41FA5}">
+                      <a16:colId xmlns:a16="http://schemas.microsoft.com/office/drawing/2014/main" val="418551341"/>
+                    </a:ext>
+                  </a:extLst>
+                </a:gridCol>
+                <a:gridCol w="1219200">
+                  <a:extLst>
+                    <a:ext uri="{9D8B030D-6E8A-4147-A177-3AD203B41FA5}">
+                      <a16:colId xmlns:a16="http://schemas.microsoft.com/office/drawing/2014/main" val="3717760985"/>
+                    </a:ext>
+                  </a:extLst>
+                </a:gridCol>
+                <a:gridCol w="1371600">
+                  <a:extLst>
+                    <a:ext uri="{9D8B030D-6E8A-4147-A177-3AD203B41FA5}">
+                      <a16:colId xmlns:a16="http://schemas.microsoft.com/office/drawing/2014/main" val="2118386432"/>
+                    </a:ext>
+                  </a:extLst>
+                </a:gridCol>
+              </a:tblGrid>
+              <a:tr h="588213">
+                <a:tc>
+                  <a:txBody>
+                    <a:bodyPr/>
+                    <a:lstStyle/>
+                    <a:p>
+                      <a:pPr rtl="0"/>
+                      <a:r>
+                        <a:rPr lang="es-ES" sz="1200" b="1">
+                          <a:solidFill>
+                            <a:srgbClr val="1F1F1F"/>
+                          </a:solidFill>
+                          <a:effectLst/>
+                        </a:rPr>
+                        <a:t>Incremento ancho I/O (µm)</a:t>
+                      </a:r>
+                      <a:endParaRPr lang="es-ES" sz="1200">
+                        <a:solidFill>
+                          <a:srgbClr val="1F1F1F"/>
+                        </a:solidFill>
+                        <a:effectLst/>
+                        <a:latin typeface="Google Sans Text"/>
+                      </a:endParaRPr>
+                    </a:p>
+                  </a:txBody>
+                  <a:tcPr marL="71463" marR="89328" marT="119104" marB="119104" anchor="ctr"/>
+                </a:tc>
+                <a:tc>
+                  <a:txBody>
+                    <a:bodyPr/>
+                    <a:lstStyle/>
+                    <a:p>
+                      <a:pPr rtl="0"/>
+                      <a:r>
+                        <a:rPr lang="es-ES" sz="1200" b="1">
+                          <a:solidFill>
+                            <a:srgbClr val="1F1F1F"/>
+                          </a:solidFill>
+                          <a:effectLst/>
+                        </a:rPr>
+                        <a:t>Excess loss [dB]</a:t>
+                      </a:r>
+                      <a:endParaRPr lang="es-ES" sz="1200">
+                        <a:solidFill>
+                          <a:srgbClr val="1F1F1F"/>
+                        </a:solidFill>
+                        <a:effectLst/>
+                        <a:latin typeface="Google Sans Text"/>
+                      </a:endParaRPr>
+                    </a:p>
+                  </a:txBody>
+                  <a:tcPr marL="71463" marR="89328" marT="119104" marB="119104" anchor="ctr"/>
+                </a:tc>
+                <a:tc>
+                  <a:txBody>
+                    <a:bodyPr/>
+                    <a:lstStyle/>
+                    <a:p>
+                      <a:pPr rtl="0"/>
+                      <a:r>
+                        <a:rPr lang="es-ES" sz="1200" b="1" dirty="0">
+                          <a:solidFill>
+                            <a:srgbClr val="1F1F1F"/>
+                          </a:solidFill>
+                          <a:effectLst/>
+                        </a:rPr>
+                        <a:t>Ratio OUT</a:t>
+                      </a:r>
+                      <a:endParaRPr lang="es-ES" sz="1200" dirty="0">
+                        <a:solidFill>
+                          <a:srgbClr val="1F1F1F"/>
+                        </a:solidFill>
+                        <a:effectLst/>
+                        <a:latin typeface="Google Sans Text"/>
+                      </a:endParaRPr>
+                    </a:p>
+                  </a:txBody>
+                  <a:tcPr marL="71463" marR="71463" marT="119104" marB="119104" anchor="ctr"/>
+                </a:tc>
+                <a:extLst>
+                  <a:ext uri="{0D108BD9-81ED-4DB2-BD59-A6C34878D82A}">
+                    <a16:rowId xmlns:a16="http://schemas.microsoft.com/office/drawing/2014/main" val="3703569266"/>
+                  </a:ext>
+                </a:extLst>
+              </a:tr>
+              <a:tr h="410103">
+                <a:tc>
+                  <a:txBody>
+                    <a:bodyPr/>
+                    <a:lstStyle/>
+                    <a:p>
+                      <a:pPr rtl="0"/>
+                      <a:r>
+                        <a:rPr lang="es-ES" sz="1200" b="1" dirty="0">
+                          <a:solidFill>
+                            <a:srgbClr val="1F1F1F"/>
+                          </a:solidFill>
+                          <a:effectLst/>
+                        </a:rPr>
+                        <a:t>0.6</a:t>
+                      </a:r>
+                      <a:endParaRPr lang="es-ES" sz="1200" dirty="0">
+                        <a:solidFill>
+                          <a:srgbClr val="1F1F1F"/>
+                        </a:solidFill>
+                        <a:effectLst/>
+                        <a:latin typeface="Google Sans Text"/>
+                      </a:endParaRPr>
+                    </a:p>
+                  </a:txBody>
+                  <a:tcPr marL="71463" marR="89328" marT="119104" marB="119104" anchor="ctr"/>
+                </a:tc>
+                <a:tc>
+                  <a:txBody>
+                    <a:bodyPr/>
+                    <a:lstStyle/>
+                    <a:p>
+                      <a:pPr rtl="0"/>
+                      <a:r>
+                        <a:rPr lang="es-ES" sz="1200">
+                          <a:solidFill>
+                            <a:srgbClr val="1F1F1F"/>
+                          </a:solidFill>
+                          <a:effectLst/>
+                        </a:rPr>
+                        <a:t>0.0964</a:t>
+                      </a:r>
+                      <a:endParaRPr lang="es-ES" sz="1200">
+                        <a:solidFill>
+                          <a:srgbClr val="1F1F1F"/>
+                        </a:solidFill>
+                        <a:effectLst/>
+                        <a:latin typeface="Google Sans Text"/>
+                      </a:endParaRPr>
+                    </a:p>
+                  </a:txBody>
+                  <a:tcPr marL="71463" marR="89328" marT="119104" marB="119104" anchor="ctr"/>
+                </a:tc>
+                <a:tc>
+                  <a:txBody>
+                    <a:bodyPr/>
+                    <a:lstStyle/>
+                    <a:p>
+                      <a:pPr rtl="0"/>
+                      <a:r>
+                        <a:rPr lang="es-ES" sz="1200">
+                          <a:solidFill>
+                            <a:srgbClr val="1F1F1F"/>
+                          </a:solidFill>
+                          <a:effectLst/>
+                        </a:rPr>
+                        <a:t>['0.5094', '0.4906']</a:t>
+                      </a:r>
+                      <a:endParaRPr lang="es-ES" sz="1200">
+                        <a:solidFill>
+                          <a:srgbClr val="1F1F1F"/>
+                        </a:solidFill>
+                        <a:effectLst/>
+                        <a:latin typeface="Google Sans Text"/>
+                      </a:endParaRPr>
+                    </a:p>
+                  </a:txBody>
+                  <a:tcPr marL="71463" marR="71463" marT="119104" marB="119104" anchor="ctr"/>
+                </a:tc>
+                <a:extLst>
+                  <a:ext uri="{0D108BD9-81ED-4DB2-BD59-A6C34878D82A}">
+                    <a16:rowId xmlns:a16="http://schemas.microsoft.com/office/drawing/2014/main" val="1524176688"/>
+                  </a:ext>
+                </a:extLst>
+              </a:tr>
+              <a:tr h="410103">
+                <a:tc>
+                  <a:txBody>
+                    <a:bodyPr/>
+                    <a:lstStyle/>
+                    <a:p>
+                      <a:pPr rtl="0"/>
+                      <a:r>
+                        <a:rPr lang="es-ES" sz="1200" b="1">
+                          <a:solidFill>
+                            <a:srgbClr val="1F1F1F"/>
+                          </a:solidFill>
+                          <a:effectLst/>
+                        </a:rPr>
+                        <a:t>0.7</a:t>
+                      </a:r>
+                      <a:endParaRPr lang="es-ES" sz="1200">
+                        <a:solidFill>
+                          <a:srgbClr val="1F1F1F"/>
+                        </a:solidFill>
+                        <a:effectLst/>
+                        <a:latin typeface="Google Sans Text"/>
+                      </a:endParaRPr>
+                    </a:p>
+                  </a:txBody>
+                  <a:tcPr marL="71463" marR="89328" marT="119104" marB="119104" anchor="ctr"/>
+                </a:tc>
+                <a:tc>
+                  <a:txBody>
+                    <a:bodyPr/>
+                    <a:lstStyle/>
+                    <a:p>
+                      <a:pPr rtl="0"/>
+                      <a:r>
+                        <a:rPr lang="es-ES" sz="1200" dirty="0">
+                          <a:solidFill>
+                            <a:srgbClr val="1F1F1F"/>
+                          </a:solidFill>
+                          <a:effectLst/>
+                        </a:rPr>
+                        <a:t>0.0702</a:t>
+                      </a:r>
+                      <a:endParaRPr lang="es-ES" sz="1200" dirty="0">
+                        <a:solidFill>
+                          <a:srgbClr val="1F1F1F"/>
+                        </a:solidFill>
+                        <a:effectLst/>
+                        <a:latin typeface="Google Sans Text"/>
+                      </a:endParaRPr>
+                    </a:p>
+                  </a:txBody>
+                  <a:tcPr marL="71463" marR="89328" marT="119104" marB="119104" anchor="ctr"/>
+                </a:tc>
+                <a:tc>
+                  <a:txBody>
+                    <a:bodyPr/>
+                    <a:lstStyle/>
+                    <a:p>
+                      <a:pPr rtl="0"/>
+                      <a:r>
+                        <a:rPr lang="es-ES" sz="1200">
+                          <a:solidFill>
+                            <a:srgbClr val="1F1F1F"/>
+                          </a:solidFill>
+                          <a:effectLst/>
+                        </a:rPr>
+                        <a:t>['0.5097', '0.4903']</a:t>
+                      </a:r>
+                      <a:endParaRPr lang="es-ES" sz="1200">
+                        <a:solidFill>
+                          <a:srgbClr val="1F1F1F"/>
+                        </a:solidFill>
+                        <a:effectLst/>
+                        <a:latin typeface="Google Sans Text"/>
+                      </a:endParaRPr>
+                    </a:p>
+                  </a:txBody>
+                  <a:tcPr marL="71463" marR="71463" marT="119104" marB="119104" anchor="ctr"/>
+                </a:tc>
+                <a:extLst>
+                  <a:ext uri="{0D108BD9-81ED-4DB2-BD59-A6C34878D82A}">
+                    <a16:rowId xmlns:a16="http://schemas.microsoft.com/office/drawing/2014/main" val="271857907"/>
+                  </a:ext>
+                </a:extLst>
+              </a:tr>
+              <a:tr h="410103">
+                <a:tc>
+                  <a:txBody>
+                    <a:bodyPr/>
+                    <a:lstStyle/>
+                    <a:p>
+                      <a:pPr rtl="0"/>
+                      <a:r>
+                        <a:rPr lang="es-ES" sz="1200" b="1">
+                          <a:solidFill>
+                            <a:srgbClr val="1F1F1F"/>
+                          </a:solidFill>
+                          <a:effectLst/>
+                        </a:rPr>
+                        <a:t>0.8</a:t>
+                      </a:r>
+                      <a:endParaRPr lang="es-ES" sz="1200">
+                        <a:solidFill>
+                          <a:srgbClr val="1F1F1F"/>
+                        </a:solidFill>
+                        <a:effectLst/>
+                        <a:latin typeface="Google Sans Text"/>
+                      </a:endParaRPr>
+                    </a:p>
+                  </a:txBody>
+                  <a:tcPr marL="71463" marR="89328" marT="119104" marB="119104" anchor="ctr"/>
+                </a:tc>
+                <a:tc>
+                  <a:txBody>
+                    <a:bodyPr/>
+                    <a:lstStyle/>
+                    <a:p>
+                      <a:pPr rtl="0"/>
+                      <a:r>
+                        <a:rPr lang="es-ES" sz="1200">
+                          <a:solidFill>
+                            <a:srgbClr val="1F1F1F"/>
+                          </a:solidFill>
+                          <a:effectLst/>
+                        </a:rPr>
+                        <a:t>0.0440</a:t>
+                      </a:r>
+                      <a:endParaRPr lang="es-ES" sz="1200">
+                        <a:solidFill>
+                          <a:srgbClr val="1F1F1F"/>
+                        </a:solidFill>
+                        <a:effectLst/>
+                        <a:latin typeface="Google Sans Text"/>
+                      </a:endParaRPr>
+                    </a:p>
+                  </a:txBody>
+                  <a:tcPr marL="71463" marR="89328" marT="119104" marB="119104" anchor="ctr"/>
+                </a:tc>
+                <a:tc>
+                  <a:txBody>
+                    <a:bodyPr/>
+                    <a:lstStyle/>
+                    <a:p>
+                      <a:pPr rtl="0"/>
+                      <a:r>
+                        <a:rPr lang="es-ES" sz="1200">
+                          <a:solidFill>
+                            <a:srgbClr val="1F1F1F"/>
+                          </a:solidFill>
+                          <a:effectLst/>
+                        </a:rPr>
+                        <a:t>['0.5100', '0.4900']</a:t>
+                      </a:r>
+                      <a:endParaRPr lang="es-ES" sz="1200">
+                        <a:solidFill>
+                          <a:srgbClr val="1F1F1F"/>
+                        </a:solidFill>
+                        <a:effectLst/>
+                        <a:latin typeface="Google Sans Text"/>
+                      </a:endParaRPr>
+                    </a:p>
+                  </a:txBody>
+                  <a:tcPr marL="71463" marR="71463" marT="119104" marB="119104" anchor="ctr"/>
+                </a:tc>
+                <a:extLst>
+                  <a:ext uri="{0D108BD9-81ED-4DB2-BD59-A6C34878D82A}">
+                    <a16:rowId xmlns:a16="http://schemas.microsoft.com/office/drawing/2014/main" val="3265266826"/>
+                  </a:ext>
+                </a:extLst>
+              </a:tr>
+              <a:tr h="410103">
+                <a:tc>
+                  <a:txBody>
+                    <a:bodyPr/>
+                    <a:lstStyle/>
+                    <a:p>
+                      <a:pPr rtl="0"/>
+                      <a:r>
+                        <a:rPr lang="es-ES" sz="1200" b="1">
+                          <a:solidFill>
+                            <a:srgbClr val="1F1F1F"/>
+                          </a:solidFill>
+                          <a:effectLst/>
+                        </a:rPr>
+                        <a:t>0.9</a:t>
+                      </a:r>
+                      <a:endParaRPr lang="es-ES" sz="1200">
+                        <a:solidFill>
+                          <a:srgbClr val="1F1F1F"/>
+                        </a:solidFill>
+                        <a:effectLst/>
+                        <a:latin typeface="Google Sans Text"/>
+                      </a:endParaRPr>
+                    </a:p>
+                  </a:txBody>
+                  <a:tcPr marL="71463" marR="89328" marT="119104" marB="119104" anchor="ctr"/>
+                </a:tc>
+                <a:tc>
+                  <a:txBody>
+                    <a:bodyPr/>
+                    <a:lstStyle/>
+                    <a:p>
+                      <a:pPr rtl="0"/>
+                      <a:r>
+                        <a:rPr lang="es-ES" sz="1200">
+                          <a:solidFill>
+                            <a:srgbClr val="1F1F1F"/>
+                          </a:solidFill>
+                          <a:effectLst/>
+                        </a:rPr>
+                        <a:t>0.0290</a:t>
+                      </a:r>
+                      <a:endParaRPr lang="es-ES" sz="1200">
+                        <a:solidFill>
+                          <a:srgbClr val="1F1F1F"/>
+                        </a:solidFill>
+                        <a:effectLst/>
+                        <a:latin typeface="Google Sans Text"/>
+                      </a:endParaRPr>
+                    </a:p>
+                  </a:txBody>
+                  <a:tcPr marL="71463" marR="89328" marT="119104" marB="119104" anchor="ctr"/>
+                </a:tc>
+                <a:tc>
+                  <a:txBody>
+                    <a:bodyPr/>
+                    <a:lstStyle/>
+                    <a:p>
+                      <a:pPr rtl="0"/>
+                      <a:r>
+                        <a:rPr lang="es-ES" sz="1200">
+                          <a:solidFill>
+                            <a:srgbClr val="1F1F1F"/>
+                          </a:solidFill>
+                          <a:effectLst/>
+                        </a:rPr>
+                        <a:t>['0.5102', '0.4898']</a:t>
+                      </a:r>
+                      <a:endParaRPr lang="es-ES" sz="1200">
+                        <a:solidFill>
+                          <a:srgbClr val="1F1F1F"/>
+                        </a:solidFill>
+                        <a:effectLst/>
+                        <a:latin typeface="Google Sans Text"/>
+                      </a:endParaRPr>
+                    </a:p>
+                  </a:txBody>
+                  <a:tcPr marL="71463" marR="71463" marT="119104" marB="119104" anchor="ctr"/>
+                </a:tc>
+                <a:extLst>
+                  <a:ext uri="{0D108BD9-81ED-4DB2-BD59-A6C34878D82A}">
+                    <a16:rowId xmlns:a16="http://schemas.microsoft.com/office/drawing/2014/main" val="1837996345"/>
+                  </a:ext>
+                </a:extLst>
+              </a:tr>
+              <a:tr h="410103">
+                <a:tc>
+                  <a:txBody>
+                    <a:bodyPr/>
+                    <a:lstStyle/>
+                    <a:p>
+                      <a:pPr rtl="0"/>
+                      <a:r>
+                        <a:rPr lang="es-ES" sz="1200" b="1">
+                          <a:solidFill>
+                            <a:srgbClr val="1F1F1F"/>
+                          </a:solidFill>
+                          <a:effectLst/>
+                        </a:rPr>
+                        <a:t>1.0</a:t>
+                      </a:r>
+                      <a:endParaRPr lang="es-ES" sz="1200">
+                        <a:solidFill>
+                          <a:srgbClr val="1F1F1F"/>
+                        </a:solidFill>
+                        <a:effectLst/>
+                        <a:latin typeface="Google Sans Text"/>
+                      </a:endParaRPr>
+                    </a:p>
+                  </a:txBody>
+                  <a:tcPr marL="71463" marR="89328" marT="119104" marB="119104" anchor="ctr"/>
+                </a:tc>
+                <a:tc>
+                  <a:txBody>
+                    <a:bodyPr/>
+                    <a:lstStyle/>
+                    <a:p>
+                      <a:pPr rtl="0"/>
+                      <a:r>
+                        <a:rPr lang="es-ES" sz="1200">
+                          <a:solidFill>
+                            <a:srgbClr val="1F1F1F"/>
+                          </a:solidFill>
+                          <a:effectLst/>
+                        </a:rPr>
+                        <a:t>0.0150</a:t>
+                      </a:r>
+                      <a:endParaRPr lang="es-ES" sz="1200">
+                        <a:solidFill>
+                          <a:srgbClr val="1F1F1F"/>
+                        </a:solidFill>
+                        <a:effectLst/>
+                        <a:latin typeface="Google Sans Text"/>
+                      </a:endParaRPr>
+                    </a:p>
+                  </a:txBody>
+                  <a:tcPr marL="71463" marR="89328" marT="119104" marB="119104" anchor="ctr"/>
+                </a:tc>
+                <a:tc>
+                  <a:txBody>
+                    <a:bodyPr/>
+                    <a:lstStyle/>
+                    <a:p>
+                      <a:pPr rtl="0"/>
+                      <a:r>
+                        <a:rPr lang="es-ES" sz="1200">
+                          <a:solidFill>
+                            <a:srgbClr val="1F1F1F"/>
+                          </a:solidFill>
+                          <a:effectLst/>
+                        </a:rPr>
+                        <a:t>['0.5105', '0.4895']</a:t>
+                      </a:r>
+                      <a:endParaRPr lang="es-ES" sz="1200">
+                        <a:solidFill>
+                          <a:srgbClr val="1F1F1F"/>
+                        </a:solidFill>
+                        <a:effectLst/>
+                        <a:latin typeface="Google Sans Text"/>
+                      </a:endParaRPr>
+                    </a:p>
+                  </a:txBody>
+                  <a:tcPr marL="71463" marR="71463" marT="119104" marB="119104" anchor="ctr"/>
+                </a:tc>
+                <a:extLst>
+                  <a:ext uri="{0D108BD9-81ED-4DB2-BD59-A6C34878D82A}">
+                    <a16:rowId xmlns:a16="http://schemas.microsoft.com/office/drawing/2014/main" val="2537061632"/>
+                  </a:ext>
+                </a:extLst>
+              </a:tr>
+              <a:tr h="410103">
+                <a:tc>
+                  <a:txBody>
+                    <a:bodyPr/>
+                    <a:lstStyle/>
+                    <a:p>
+                      <a:pPr rtl="0"/>
+                      <a:r>
+                        <a:rPr lang="es-ES" sz="1200" b="1">
+                          <a:solidFill>
+                            <a:srgbClr val="1F1F1F"/>
+                          </a:solidFill>
+                          <a:effectLst/>
+                        </a:rPr>
+                        <a:t>1.1</a:t>
+                      </a:r>
+                      <a:endParaRPr lang="es-ES" sz="1200">
+                        <a:solidFill>
+                          <a:srgbClr val="1F1F1F"/>
+                        </a:solidFill>
+                        <a:effectLst/>
+                        <a:latin typeface="Google Sans Text"/>
+                      </a:endParaRPr>
+                    </a:p>
+                  </a:txBody>
+                  <a:tcPr marL="71463" marR="89328" marT="119104" marB="119104" anchor="ctr"/>
+                </a:tc>
+                <a:tc>
+                  <a:txBody>
+                    <a:bodyPr/>
+                    <a:lstStyle/>
+                    <a:p>
+                      <a:pPr rtl="0"/>
+                      <a:r>
+                        <a:rPr lang="es-ES" sz="1200">
+                          <a:solidFill>
+                            <a:srgbClr val="1F1F1F"/>
+                          </a:solidFill>
+                          <a:effectLst/>
+                        </a:rPr>
+                        <a:t>0.0076</a:t>
+                      </a:r>
+                      <a:endParaRPr lang="es-ES" sz="1200">
+                        <a:solidFill>
+                          <a:srgbClr val="1F1F1F"/>
+                        </a:solidFill>
+                        <a:effectLst/>
+                        <a:latin typeface="Google Sans Text"/>
+                      </a:endParaRPr>
+                    </a:p>
+                  </a:txBody>
+                  <a:tcPr marL="71463" marR="89328" marT="119104" marB="119104" anchor="ctr"/>
+                </a:tc>
+                <a:tc>
+                  <a:txBody>
+                    <a:bodyPr/>
+                    <a:lstStyle/>
+                    <a:p>
+                      <a:pPr rtl="0"/>
+                      <a:r>
+                        <a:rPr lang="es-ES" sz="1200">
+                          <a:solidFill>
+                            <a:srgbClr val="1F1F1F"/>
+                          </a:solidFill>
+                          <a:effectLst/>
+                        </a:rPr>
+                        <a:t>['0.5106', '0.4894']</a:t>
+                      </a:r>
+                      <a:endParaRPr lang="es-ES" sz="1200">
+                        <a:solidFill>
+                          <a:srgbClr val="1F1F1F"/>
+                        </a:solidFill>
+                        <a:effectLst/>
+                        <a:latin typeface="Google Sans Text"/>
+                      </a:endParaRPr>
+                    </a:p>
+                  </a:txBody>
+                  <a:tcPr marL="71463" marR="71463" marT="119104" marB="119104" anchor="ctr"/>
+                </a:tc>
+                <a:extLst>
+                  <a:ext uri="{0D108BD9-81ED-4DB2-BD59-A6C34878D82A}">
+                    <a16:rowId xmlns:a16="http://schemas.microsoft.com/office/drawing/2014/main" val="2153415897"/>
+                  </a:ext>
+                </a:extLst>
+              </a:tr>
+              <a:tr h="410103">
+                <a:tc>
+                  <a:txBody>
+                    <a:bodyPr/>
+                    <a:lstStyle/>
+                    <a:p>
+                      <a:pPr rtl="0"/>
+                      <a:r>
+                        <a:rPr lang="es-ES" sz="1200" b="1">
+                          <a:solidFill>
+                            <a:srgbClr val="1F1F1F"/>
+                          </a:solidFill>
+                          <a:effectLst/>
+                        </a:rPr>
+                        <a:t>1.2</a:t>
+                      </a:r>
+                      <a:endParaRPr lang="es-ES" sz="1200">
+                        <a:solidFill>
+                          <a:srgbClr val="1F1F1F"/>
+                        </a:solidFill>
+                        <a:effectLst/>
+                        <a:latin typeface="Google Sans Text"/>
+                      </a:endParaRPr>
+                    </a:p>
+                  </a:txBody>
+                  <a:tcPr marL="71463" marR="89328" marT="119104" marB="119104" anchor="ctr"/>
+                </a:tc>
+                <a:tc>
+                  <a:txBody>
+                    <a:bodyPr/>
+                    <a:lstStyle/>
+                    <a:p>
+                      <a:pPr rtl="0"/>
+                      <a:r>
+                        <a:rPr lang="es-ES" sz="1200">
+                          <a:solidFill>
+                            <a:srgbClr val="1F1F1F"/>
+                          </a:solidFill>
+                          <a:effectLst/>
+                        </a:rPr>
+                        <a:t>0.0002</a:t>
+                      </a:r>
+                      <a:endParaRPr lang="es-ES" sz="1200">
+                        <a:solidFill>
+                          <a:srgbClr val="1F1F1F"/>
+                        </a:solidFill>
+                        <a:effectLst/>
+                        <a:latin typeface="Google Sans Text"/>
+                      </a:endParaRPr>
+                    </a:p>
+                  </a:txBody>
+                  <a:tcPr marL="71463" marR="89328" marT="119104" marB="119104" anchor="ctr"/>
+                </a:tc>
+                <a:tc>
+                  <a:txBody>
+                    <a:bodyPr/>
+                    <a:lstStyle/>
+                    <a:p>
+                      <a:pPr rtl="0"/>
+                      <a:r>
+                        <a:rPr lang="es-ES" sz="1200">
+                          <a:solidFill>
+                            <a:srgbClr val="1F1F1F"/>
+                          </a:solidFill>
+                          <a:effectLst/>
+                        </a:rPr>
+                        <a:t>['0.5108', '0.4892']</a:t>
+                      </a:r>
+                      <a:endParaRPr lang="es-ES" sz="1200">
+                        <a:solidFill>
+                          <a:srgbClr val="1F1F1F"/>
+                        </a:solidFill>
+                        <a:effectLst/>
+                        <a:latin typeface="Google Sans Text"/>
+                      </a:endParaRPr>
+                    </a:p>
+                  </a:txBody>
+                  <a:tcPr marL="71463" marR="71463" marT="119104" marB="119104" anchor="ctr"/>
+                </a:tc>
+                <a:extLst>
+                  <a:ext uri="{0D108BD9-81ED-4DB2-BD59-A6C34878D82A}">
+                    <a16:rowId xmlns:a16="http://schemas.microsoft.com/office/drawing/2014/main" val="468093681"/>
+                  </a:ext>
+                </a:extLst>
+              </a:tr>
+              <a:tr h="410103">
+                <a:tc>
+                  <a:txBody>
+                    <a:bodyPr/>
+                    <a:lstStyle/>
+                    <a:p>
+                      <a:pPr rtl="0"/>
+                      <a:r>
+                        <a:rPr lang="es-ES" sz="1200" b="1">
+                          <a:solidFill>
+                            <a:srgbClr val="1F1F1F"/>
+                          </a:solidFill>
+                          <a:effectLst/>
+                        </a:rPr>
+                        <a:t>1.3</a:t>
+                      </a:r>
+                      <a:endParaRPr lang="es-ES" sz="1200">
+                        <a:solidFill>
+                          <a:srgbClr val="1F1F1F"/>
+                        </a:solidFill>
+                        <a:effectLst/>
+                        <a:latin typeface="Google Sans Text"/>
+                      </a:endParaRPr>
+                    </a:p>
+                  </a:txBody>
+                  <a:tcPr marL="71463" marR="89328" marT="119104" marB="119104" anchor="ctr"/>
+                </a:tc>
+                <a:tc>
+                  <a:txBody>
+                    <a:bodyPr/>
+                    <a:lstStyle/>
+                    <a:p>
+                      <a:pPr rtl="0"/>
+                      <a:r>
+                        <a:rPr lang="es-ES" sz="1200">
+                          <a:solidFill>
+                            <a:srgbClr val="1F1F1F"/>
+                          </a:solidFill>
+                          <a:effectLst/>
+                        </a:rPr>
+                        <a:t>-0.0034</a:t>
+                      </a:r>
+                      <a:endParaRPr lang="es-ES" sz="1200">
+                        <a:solidFill>
+                          <a:srgbClr val="1F1F1F"/>
+                        </a:solidFill>
+                        <a:effectLst/>
+                        <a:latin typeface="Google Sans Text"/>
+                      </a:endParaRPr>
+                    </a:p>
+                  </a:txBody>
+                  <a:tcPr marL="71463" marR="89328" marT="119104" marB="119104" anchor="ctr"/>
+                </a:tc>
+                <a:tc>
+                  <a:txBody>
+                    <a:bodyPr/>
+                    <a:lstStyle/>
+                    <a:p>
+                      <a:pPr rtl="0"/>
+                      <a:r>
+                        <a:rPr lang="es-ES" sz="1200" dirty="0">
+                          <a:solidFill>
+                            <a:srgbClr val="1F1F1F"/>
+                          </a:solidFill>
+                          <a:effectLst/>
+                        </a:rPr>
+                        <a:t>['0.5109', '0.4891']</a:t>
+                      </a:r>
+                      <a:endParaRPr lang="es-ES" sz="1200" dirty="0">
+                        <a:solidFill>
+                          <a:srgbClr val="1F1F1F"/>
+                        </a:solidFill>
+                        <a:effectLst/>
+                        <a:latin typeface="Google Sans Text"/>
+                      </a:endParaRPr>
+                    </a:p>
+                  </a:txBody>
+                  <a:tcPr marL="71463" marR="71463" marT="119104" marB="119104" anchor="ctr"/>
+                </a:tc>
+                <a:extLst>
+                  <a:ext uri="{0D108BD9-81ED-4DB2-BD59-A6C34878D82A}">
+                    <a16:rowId xmlns:a16="http://schemas.microsoft.com/office/drawing/2014/main" val="2482600613"/>
+                  </a:ext>
+                </a:extLst>
+              </a:tr>
+              <a:tr h="410103">
+                <a:tc>
+                  <a:txBody>
+                    <a:bodyPr/>
+                    <a:lstStyle/>
+                    <a:p>
+                      <a:pPr rtl="0"/>
+                      <a:r>
+                        <a:rPr lang="es-ES" sz="1200" b="1">
+                          <a:solidFill>
+                            <a:srgbClr val="1F1F1F"/>
+                          </a:solidFill>
+                          <a:effectLst/>
+                        </a:rPr>
+                        <a:t>1.4</a:t>
+                      </a:r>
+                      <a:endParaRPr lang="es-ES" sz="1200">
+                        <a:solidFill>
+                          <a:srgbClr val="1F1F1F"/>
+                        </a:solidFill>
+                        <a:effectLst/>
+                        <a:latin typeface="Google Sans Text"/>
+                      </a:endParaRPr>
+                    </a:p>
+                  </a:txBody>
+                  <a:tcPr marL="71463" marR="89328" marT="119104" marB="119104" anchor="ctr"/>
+                </a:tc>
+                <a:tc>
+                  <a:txBody>
+                    <a:bodyPr/>
+                    <a:lstStyle/>
+                    <a:p>
+                      <a:pPr rtl="0"/>
+                      <a:r>
+                        <a:rPr lang="es-ES" sz="1200">
+                          <a:solidFill>
+                            <a:srgbClr val="1F1F1F"/>
+                          </a:solidFill>
+                          <a:effectLst/>
+                        </a:rPr>
+                        <a:t>-0.0087</a:t>
+                      </a:r>
+                      <a:endParaRPr lang="es-ES" sz="1200">
+                        <a:solidFill>
+                          <a:srgbClr val="1F1F1F"/>
+                        </a:solidFill>
+                        <a:effectLst/>
+                        <a:latin typeface="Google Sans Text"/>
+                      </a:endParaRPr>
+                    </a:p>
+                  </a:txBody>
+                  <a:tcPr marL="71463" marR="89328" marT="119104" marB="119104" anchor="ctr"/>
+                </a:tc>
+                <a:tc>
+                  <a:txBody>
+                    <a:bodyPr/>
+                    <a:lstStyle/>
+                    <a:p>
+                      <a:pPr rtl="0"/>
+                      <a:r>
+                        <a:rPr lang="es-ES" sz="1200" dirty="0">
+                          <a:solidFill>
+                            <a:srgbClr val="1F1F1F"/>
+                          </a:solidFill>
+                          <a:effectLst/>
+                        </a:rPr>
+                        <a:t>['0.5109', '0.4891']</a:t>
+                      </a:r>
+                      <a:endParaRPr lang="es-ES" sz="1200" dirty="0">
+                        <a:solidFill>
+                          <a:srgbClr val="1F1F1F"/>
+                        </a:solidFill>
+                        <a:effectLst/>
+                        <a:latin typeface="Google Sans Text"/>
+                      </a:endParaRPr>
+                    </a:p>
+                  </a:txBody>
+                  <a:tcPr marL="71463" marR="71463" marT="119104" marB="119104" anchor="ctr"/>
+                </a:tc>
+                <a:extLst>
+                  <a:ext uri="{0D108BD9-81ED-4DB2-BD59-A6C34878D82A}">
+                    <a16:rowId xmlns:a16="http://schemas.microsoft.com/office/drawing/2014/main" val="2804983260"/>
+                  </a:ext>
+                </a:extLst>
+              </a:tr>
+            </a:tbl>
+          </a:graphicData>
+        </a:graphic>
+      </p:graphicFrame>
+      <p:sp>
+        <p:nvSpPr>
+          <p:cNvPr id="7" name="Título 1">
+            <a:extLst>
+              <a:ext uri="{FF2B5EF4-FFF2-40B4-BE49-F238E27FC236}">
+                <a16:creationId xmlns:a16="http://schemas.microsoft.com/office/drawing/2014/main" id="{CC7EFDCE-A0BC-4806-86F6-4A229C4890C4}"/>
+              </a:ext>
+            </a:extLst>
+          </p:cNvPr>
+          <p:cNvSpPr>
+            <a:spLocks noGrp="1"/>
+          </p:cNvSpPr>
+          <p:nvPr>
+            <p:ph type="title"/>
+          </p:nvPr>
+        </p:nvSpPr>
+        <p:spPr>
+          <a:xfrm>
+            <a:off x="590550" y="206375"/>
+            <a:ext cx="10991850" cy="307975"/>
+          </a:xfrm>
+        </p:spPr>
+        <p:txBody>
+          <a:bodyPr/>
+          <a:lstStyle/>
+          <a:p>
+            <a:r>
+              <a:rPr lang="es-ES" dirty="0"/>
+              <a:t>Resolución </a:t>
+            </a:r>
+            <a:r>
+              <a:rPr lang="en-US" sz="2000" dirty="0"/>
+              <a:t>Learning outcome #4.3</a:t>
+            </a:r>
+            <a:endParaRPr lang="es-ES" dirty="0"/>
+          </a:p>
+        </p:txBody>
+      </p:sp>
+    </p:spTree>
+    <p:extLst>
+      <p:ext uri="{BB962C8B-B14F-4D97-AF65-F5344CB8AC3E}">
+        <p14:creationId xmlns:p14="http://schemas.microsoft.com/office/powerpoint/2010/main" val="659153174"/>
+      </p:ext>
+    </p:extLst>
+  </p:cSld>
+  <p:clrMapOvr>
+    <a:masterClrMapping/>
+  </p:clrMapOvr>
+</p:sld>
+</file>
+
+<file path=ppt/slides/slide14.xml><?xml version="1.0" encoding="utf-8"?>
 <p:sld xmlns:a="http://schemas.openxmlformats.org/drawingml/2006/main" xmlns:r="http://schemas.openxmlformats.org/officeDocument/2006/relationships" xmlns:p="http://schemas.openxmlformats.org/presentationml/2006/main">
   <p:cSld>
     <p:spTree>
@@ -5089,7 +6441,7 @@
           <a:p>
             <a:fld id="{B6F15528-21DE-4FAA-801E-634DDDAF4B2B}" type="slidenum">
               <a:rPr lang="es-ES" smtClean="0"/>
-              <a:t>12</a:t>
+              <a:t>14</a:t>
             </a:fld>
             <a:endParaRPr lang="es-ES"/>
           </a:p>
@@ -5172,21 +6524,7 @@
                 <a:latin typeface="Arial" panose="020B0604020202020204" pitchFamily="34" charset="0"/>
                 <a:cs typeface="Arial" panose="020B0604020202020204" pitchFamily="34" charset="0"/>
               </a:rPr>
-              <a:t>Repeat all the design </a:t>
-            </a:r>
-            <a:r>
-              <a:rPr lang="en-US" sz="1200">
-                <a:latin typeface="Arial" panose="020B0604020202020204" pitchFamily="34" charset="0"/>
-                <a:cs typeface="Arial" panose="020B0604020202020204" pitchFamily="34" charset="0"/>
-              </a:rPr>
-              <a:t>process for a </a:t>
-            </a:r>
-            <a:r>
-              <a:rPr lang="en-US" sz="1200" dirty="0">
-                <a:latin typeface="Arial" panose="020B0604020202020204" pitchFamily="34" charset="0"/>
-                <a:cs typeface="Arial" panose="020B0604020202020204" pitchFamily="34" charset="0"/>
-              </a:rPr>
-              <a:t>1x4 MMI Coupler.  </a:t>
+              <a:t>Repeat all the design process for a 1x4 MMI Coupler.  </a:t>
             </a:r>
           </a:p>
           <a:p>
@@ -5198,10 +6536,27 @@
           </a:p>
           <a:p>
             <a:pPr algn="just"/>
-            <a:endParaRPr lang="en-US" sz="1200" dirty="0">
-              <a:latin typeface="Arial" panose="020B0604020202020204" pitchFamily="34" charset="0"/>
-              <a:cs typeface="Arial" panose="020B0604020202020204" pitchFamily="34" charset="0"/>
-            </a:endParaRPr>
+            <a:r>
+              <a:rPr lang="en-US" sz="1200" dirty="0">
+                <a:latin typeface="Arial" panose="020B0604020202020204" pitchFamily="34" charset="0"/>
+                <a:cs typeface="Arial" panose="020B0604020202020204" pitchFamily="34" charset="0"/>
+              </a:rPr>
+              <a:t>Dl = 0.1 </a:t>
+            </a:r>
+            <a:r>
+              <a:rPr lang="en-US" sz="1200" dirty="0" err="1">
+                <a:latin typeface="Arial" panose="020B0604020202020204" pitchFamily="34" charset="0"/>
+                <a:cs typeface="Arial" panose="020B0604020202020204" pitchFamily="34" charset="0"/>
+              </a:rPr>
+              <a:t>dy</a:t>
+            </a:r>
+            <a:r>
+              <a:rPr lang="en-US" sz="1200" dirty="0">
+                <a:latin typeface="Arial" panose="020B0604020202020204" pitchFamily="34" charset="0"/>
+                <a:cs typeface="Arial" panose="020B0604020202020204" pitchFamily="34" charset="0"/>
+              </a:rPr>
+              <a:t> = -1</a:t>
+            </a:r>
           </a:p>
           <a:p>
             <a:pPr algn="just"/>
@@ -5342,7 +6697,7 @@
 </p:sld>
 </file>
 
-<file path=ppt/slides/slide13.xml><?xml version="1.0" encoding="utf-8"?>
+<file path=ppt/slides/slide15.xml><?xml version="1.0" encoding="utf-8"?>
 <p:sld xmlns:a="http://schemas.openxmlformats.org/drawingml/2006/main" xmlns:r="http://schemas.openxmlformats.org/officeDocument/2006/relationships" xmlns:p="http://schemas.openxmlformats.org/presentationml/2006/main">
   <p:cSld>
     <p:spTree>
@@ -5498,7 +6853,7 @@
           <a:p>
             <a:fld id="{B6F15528-21DE-4FAA-801E-634DDDAF4B2B}" type="slidenum">
               <a:rPr lang="es-ES" smtClean="0"/>
-              <a:t>13</a:t>
+              <a:t>15</a:t>
             </a:fld>
             <a:endParaRPr lang="es-ES"/>
           </a:p>
@@ -6054,7 +7409,7 @@
 </p:sld>
 </file>
 
-<file path=ppt/slides/slide14.xml><?xml version="1.0" encoding="utf-8"?>
+<file path=ppt/slides/slide16.xml><?xml version="1.0" encoding="utf-8"?>
 <p:sld xmlns:a="http://schemas.openxmlformats.org/drawingml/2006/main" xmlns:r="http://schemas.openxmlformats.org/officeDocument/2006/relationships" xmlns:p="http://schemas.openxmlformats.org/presentationml/2006/main">
   <p:cSld>
     <p:spTree>
@@ -6207,7 +7562,7 @@
           <a:p>
             <a:fld id="{B6F15528-21DE-4FAA-801E-634DDDAF4B2B}" type="slidenum">
               <a:rPr lang="es-ES" smtClean="0"/>
-              <a:t>14</a:t>
+              <a:t>16</a:t>
             </a:fld>
             <a:endParaRPr lang="es-ES"/>
           </a:p>
@@ -6740,7 +8095,7 @@
 </p:sld>
 </file>
 
-<file path=ppt/slides/slide15.xml><?xml version="1.0" encoding="utf-8"?>
+<file path=ppt/slides/slide17.xml><?xml version="1.0" encoding="utf-8"?>
 <p:sld xmlns:a="http://schemas.openxmlformats.org/drawingml/2006/main" xmlns:r="http://schemas.openxmlformats.org/officeDocument/2006/relationships" xmlns:p="http://schemas.openxmlformats.org/presentationml/2006/main">
   <p:cSld>
     <p:spTree>
@@ -6890,7 +8245,7 @@
           <a:p>
             <a:fld id="{B6F15528-21DE-4FAA-801E-634DDDAF4B2B}" type="slidenum">
               <a:rPr lang="es-ES" smtClean="0"/>
-              <a:t>15</a:t>
+              <a:t>17</a:t>
             </a:fld>
             <a:endParaRPr lang="es-ES"/>
           </a:p>
@@ -7446,7 +8801,7 @@
 </p:sld>
 </file>
 
-<file path=ppt/slides/slide16.xml><?xml version="1.0" encoding="utf-8"?>
+<file path=ppt/slides/slide18.xml><?xml version="1.0" encoding="utf-8"?>
 <p:sld xmlns:a="http://schemas.openxmlformats.org/drawingml/2006/main" xmlns:r="http://schemas.openxmlformats.org/officeDocument/2006/relationships" xmlns:p="http://schemas.openxmlformats.org/presentationml/2006/main">
   <p:cSld>
     <p:spTree>
@@ -7596,7 +8951,7 @@
           <a:p>
             <a:fld id="{B6F15528-21DE-4FAA-801E-634DDDAF4B2B}" type="slidenum">
               <a:rPr lang="es-ES" smtClean="0"/>
-              <a:t>16</a:t>
+              <a:t>18</a:t>
             </a:fld>
             <a:endParaRPr lang="es-ES"/>
           </a:p>
@@ -8143,7 +9498,7 @@
 </p:sld>
 </file>
 
-<file path=ppt/slides/slide17.xml><?xml version="1.0" encoding="utf-8"?>
+<file path=ppt/slides/slide19.xml><?xml version="1.0" encoding="utf-8"?>
 <p:sld xmlns:a="http://schemas.openxmlformats.org/drawingml/2006/main" xmlns:r="http://schemas.openxmlformats.org/officeDocument/2006/relationships" xmlns:p="http://schemas.openxmlformats.org/presentationml/2006/main">
   <p:cSld>
     <p:spTree>
@@ -8282,7 +9637,7 @@
           <a:p>
             <a:fld id="{B6F15528-21DE-4FAA-801E-634DDDAF4B2B}" type="slidenum">
               <a:rPr lang="es-ES" smtClean="0"/>
-              <a:t>17</a:t>
+              <a:t>19</a:t>
             </a:fld>
             <a:endParaRPr lang="es-ES"/>
           </a:p>
@@ -13883,10 +15238,20 @@
           </a:p>
           <a:p>
             <a:pPr algn="just"/>
-            <a:endParaRPr lang="en-US" sz="1200" dirty="0">
-              <a:latin typeface="Arial" panose="020B0604020202020204" pitchFamily="34" charset="0"/>
-              <a:cs typeface="Arial" panose="020B0604020202020204" pitchFamily="34" charset="0"/>
-            </a:endParaRPr>
+            <a:r>
+              <a:rPr lang="en-US" sz="1200" dirty="0" err="1">
+                <a:latin typeface="Arial" panose="020B0604020202020204" pitchFamily="34" charset="0"/>
+                <a:cs typeface="Arial" panose="020B0604020202020204" pitchFamily="34" charset="0"/>
+              </a:rPr>
+              <a:t>L_pi</a:t>
+            </a:r>
+            <a:r>
+              <a:rPr lang="en-US" sz="1200" dirty="0">
+                <a:latin typeface="Arial" panose="020B0604020202020204" pitchFamily="34" charset="0"/>
+                <a:cs typeface="Arial" panose="020B0604020202020204" pitchFamily="34" charset="0"/>
+              </a:rPr>
+              <a:t> =  69.03598607255049  µm</a:t>
+            </a:r>
           </a:p>
           <a:p>
             <a:pPr algn="just"/>
@@ -13897,6 +15262,27 @@
           </a:p>
           <a:p>
             <a:pPr algn="just"/>
+            <a:r>
+              <a:rPr lang="es-ES" sz="1200" dirty="0">
+                <a:latin typeface="Arial" panose="020B0604020202020204" pitchFamily="34" charset="0"/>
+                <a:cs typeface="Arial" panose="020B0604020202020204" pitchFamily="34" charset="0"/>
+              </a:rPr>
+              <a:t>Distancia para obtener una imagen con dos salidas = </a:t>
+            </a:r>
+            <a:r>
+              <a:rPr lang="es-ES" sz="1200" dirty="0" err="1">
+                <a:latin typeface="Arial" panose="020B0604020202020204" pitchFamily="34" charset="0"/>
+                <a:cs typeface="Arial" panose="020B0604020202020204" pitchFamily="34" charset="0"/>
+              </a:rPr>
+              <a:t>L_pi</a:t>
+            </a:r>
+            <a:r>
+              <a:rPr lang="es-ES" sz="1200" dirty="0">
+                <a:latin typeface="Arial" panose="020B0604020202020204" pitchFamily="34" charset="0"/>
+                <a:cs typeface="Arial" panose="020B0604020202020204" pitchFamily="34" charset="0"/>
+              </a:rPr>
+              <a:t>/2 = 34.52 µm</a:t>
+            </a:r>
             <a:endParaRPr lang="en-US" sz="1200" dirty="0">
               <a:latin typeface="Arial" panose="020B0604020202020204" pitchFamily="34" charset="0"/>
               <a:cs typeface="Arial" panose="020B0604020202020204" pitchFamily="34" charset="0"/>
@@ -14014,6 +15400,36 @@
           </a:p>
         </p:txBody>
       </p:sp>
+      <p:pic>
+        <p:nvPicPr>
+          <p:cNvPr id="9" name="Imagen 8">
+            <a:extLst>
+              <a:ext uri="{FF2B5EF4-FFF2-40B4-BE49-F238E27FC236}">
+                <a16:creationId xmlns:a16="http://schemas.microsoft.com/office/drawing/2014/main" id="{9BCE17F0-A639-467B-9595-2BDBCFE50D4D}"/>
+              </a:ext>
+            </a:extLst>
+          </p:cNvPr>
+          <p:cNvPicPr>
+            <a:picLocks noChangeAspect="1"/>
+          </p:cNvPicPr>
+          <p:nvPr/>
+        </p:nvPicPr>
+        <p:blipFill>
+          <a:blip r:embed="rId5"/>
+          <a:stretch>
+            <a:fillRect/>
+          </a:stretch>
+        </p:blipFill>
+        <p:spPr>
+          <a:xfrm>
+            <a:off x="4098056" y="1387610"/>
+            <a:ext cx="3995888" cy="3295928"/>
+          </a:xfrm>
+          <a:prstGeom prst="rect">
+            <a:avLst/>
+          </a:prstGeom>
+        </p:spPr>
+      </p:pic>
     </p:spTree>
     <p:extLst>
       <p:ext uri="{BB962C8B-B14F-4D97-AF65-F5344CB8AC3E}">

--- a/LabBook_20.pptx
+++ b/LabBook_20.pptx
@@ -820,7 +820,7 @@
           <a:p>
             <a:fld id="{8438F8DC-35B0-48E6-A86E-42F1F08DD00F}" type="datetimeFigureOut">
               <a:rPr lang="es-ES" smtClean="0"/>
-              <a:t>10/03/2026</a:t>
+              <a:t>11/03/2026</a:t>
             </a:fld>
             <a:endParaRPr lang="es-ES"/>
           </a:p>
@@ -997,7 +997,7 @@
           <a:p>
             <a:fld id="{FACBDC12-F39B-4B97-8F4D-6734F9D366FF}" type="datetimeFigureOut">
               <a:rPr lang="es-ES" smtClean="0"/>
-              <a:t>10/03/2026</a:t>
+              <a:t>11/03/2026</a:t>
             </a:fld>
             <a:endParaRPr lang="es-ES"/>
           </a:p>

--- a/LabBook_20.pptx
+++ b/LabBook_20.pptx
@@ -5,10 +5,10 @@
     <p:sldMasterId id="2147483648" r:id="rId1"/>
   </p:sldMasterIdLst>
   <p:notesMasterIdLst>
-    <p:notesMasterId r:id="rId21"/>
+    <p:notesMasterId r:id="rId26"/>
   </p:notesMasterIdLst>
   <p:handoutMasterIdLst>
-    <p:handoutMasterId r:id="rId22"/>
+    <p:handoutMasterId r:id="rId27"/>
   </p:handoutMasterIdLst>
   <p:sldIdLst>
     <p:sldId id="256" r:id="rId2"/>
@@ -18,18 +18,23 @@
     <p:sldId id="303" r:id="rId6"/>
     <p:sldId id="304" r:id="rId7"/>
     <p:sldId id="291" r:id="rId8"/>
-    <p:sldId id="296" r:id="rId9"/>
-    <p:sldId id="294" r:id="rId10"/>
-    <p:sldId id="299" r:id="rId11"/>
-    <p:sldId id="305" r:id="rId12"/>
-    <p:sldId id="300" r:id="rId13"/>
-    <p:sldId id="306" r:id="rId14"/>
-    <p:sldId id="301" r:id="rId15"/>
-    <p:sldId id="297" r:id="rId16"/>
-    <p:sldId id="290" r:id="rId17"/>
-    <p:sldId id="292" r:id="rId18"/>
-    <p:sldId id="298" r:id="rId19"/>
-    <p:sldId id="288" r:id="rId20"/>
+    <p:sldId id="311" r:id="rId9"/>
+    <p:sldId id="296" r:id="rId10"/>
+    <p:sldId id="294" r:id="rId11"/>
+    <p:sldId id="310" r:id="rId12"/>
+    <p:sldId id="299" r:id="rId13"/>
+    <p:sldId id="305" r:id="rId14"/>
+    <p:sldId id="300" r:id="rId15"/>
+    <p:sldId id="306" r:id="rId16"/>
+    <p:sldId id="301" r:id="rId17"/>
+    <p:sldId id="307" r:id="rId18"/>
+    <p:sldId id="308" r:id="rId19"/>
+    <p:sldId id="309" r:id="rId20"/>
+    <p:sldId id="297" r:id="rId21"/>
+    <p:sldId id="290" r:id="rId22"/>
+    <p:sldId id="292" r:id="rId23"/>
+    <p:sldId id="298" r:id="rId24"/>
+    <p:sldId id="288" r:id="rId25"/>
   </p:sldIdLst>
   <p:sldSz cx="12192000" cy="6858000"/>
   <p:notesSz cx="12192000" cy="6858000"/>
@@ -1461,7 +1466,7 @@
           <a:p>
             <a:fld id="{676223B9-C868-4436-87D9-1A3152E1157A}" type="slidenum">
               <a:rPr lang="es-ES" smtClean="0"/>
-              <a:t>17</a:t>
+              <a:t>22</a:t>
             </a:fld>
             <a:endParaRPr lang="es-ES"/>
           </a:p>
@@ -1569,7 +1574,7 @@
           <a:p>
             <a:fld id="{676223B9-C868-4436-87D9-1A3152E1157A}" type="slidenum">
               <a:rPr lang="es-ES" smtClean="0"/>
-              <a:t>18</a:t>
+              <a:t>23</a:t>
             </a:fld>
             <a:endParaRPr lang="es-ES"/>
           </a:p>
@@ -1893,7 +1898,7 @@
           <a:p>
             <a:fld id="{676223B9-C868-4436-87D9-1A3152E1157A}" type="slidenum">
               <a:rPr lang="es-ES" smtClean="0"/>
-              <a:t>9</a:t>
+              <a:t>10</a:t>
             </a:fld>
             <a:endParaRPr lang="es-ES"/>
           </a:p>
@@ -2001,7 +2006,7 @@
           <a:p>
             <a:fld id="{676223B9-C868-4436-87D9-1A3152E1157A}" type="slidenum">
               <a:rPr lang="es-ES" smtClean="0"/>
-              <a:t>10</a:t>
+              <a:t>12</a:t>
             </a:fld>
             <a:endParaRPr lang="es-ES"/>
           </a:p>
@@ -2109,7 +2114,7 @@
           <a:p>
             <a:fld id="{676223B9-C868-4436-87D9-1A3152E1157A}" type="slidenum">
               <a:rPr lang="es-ES" smtClean="0"/>
-              <a:t>12</a:t>
+              <a:t>14</a:t>
             </a:fld>
             <a:endParaRPr lang="es-ES"/>
           </a:p>
@@ -2217,7 +2222,7 @@
           <a:p>
             <a:fld id="{676223B9-C868-4436-87D9-1A3152E1157A}" type="slidenum">
               <a:rPr lang="es-ES" smtClean="0"/>
-              <a:t>14</a:t>
+              <a:t>16</a:t>
             </a:fld>
             <a:endParaRPr lang="es-ES"/>
           </a:p>
@@ -2325,7 +2330,7 @@
           <a:p>
             <a:fld id="{676223B9-C868-4436-87D9-1A3152E1157A}" type="slidenum">
               <a:rPr lang="es-ES" smtClean="0"/>
-              <a:t>15</a:t>
+              <a:t>20</a:t>
             </a:fld>
             <a:endParaRPr lang="es-ES"/>
           </a:p>
@@ -2409,7 +2414,7 @@
           <a:p>
             <a:fld id="{676223B9-C868-4436-87D9-1A3152E1157A}" type="slidenum">
               <a:rPr lang="es-ES" smtClean="0"/>
-              <a:t>16</a:t>
+              <a:t>21</a:t>
             </a:fld>
             <a:endParaRPr lang="es-ES"/>
           </a:p>
@@ -4042,7 +4047,7 @@
         <p:cNvPr id="1" name="">
           <a:extLst>
             <a:ext uri="{FF2B5EF4-FFF2-40B4-BE49-F238E27FC236}">
-              <a16:creationId xmlns:a16="http://schemas.microsoft.com/office/drawing/2014/main" id="{D1F11DBE-A482-7036-60B2-70B7E2318F46}"/>
+              <a16:creationId xmlns:a16="http://schemas.microsoft.com/office/drawing/2014/main" id="{91BF7C0E-2677-BADF-D636-6F9B71E665FA}"/>
             </a:ext>
           </a:extLst>
         </p:cNvPr>
@@ -4062,7 +4067,7 @@
           <p:cNvPr id="16" name="object 16">
             <a:extLst>
               <a:ext uri="{FF2B5EF4-FFF2-40B4-BE49-F238E27FC236}">
-                <a16:creationId xmlns:a16="http://schemas.microsoft.com/office/drawing/2014/main" id="{C096193E-AB86-E3CD-BDAC-0F9156C1A3F0}"/>
+                <a16:creationId xmlns:a16="http://schemas.microsoft.com/office/drawing/2014/main" id="{2B8D44BF-A3B5-6BED-C39C-FA8260E83536}"/>
               </a:ext>
             </a:extLst>
           </p:cNvPr>
@@ -4098,7 +4103,7 @@
             </a:pPr>
             <a:r>
               <a:rPr lang="en-US" sz="2500" dirty="0"/>
-              <a:t>Learning outcome #4.2 – 2x2 Multimode Interference Coupler - Optimization</a:t>
+              <a:t>Learning outcome #4 – 4.1 2x2 Multimode Interference Coupler </a:t>
             </a:r>
             <a:br>
               <a:rPr lang="en-US" sz="2500" dirty="0"/>
@@ -4127,7 +4132,7 @@
           <p:cNvPr id="83" name="Gráfico 82">
             <a:extLst>
               <a:ext uri="{FF2B5EF4-FFF2-40B4-BE49-F238E27FC236}">
-                <a16:creationId xmlns:a16="http://schemas.microsoft.com/office/drawing/2014/main" id="{2D17DCD6-D851-E62D-D95C-A9F9954602DE}"/>
+                <a16:creationId xmlns:a16="http://schemas.microsoft.com/office/drawing/2014/main" id="{5DFCF1AD-6B06-F914-AC0B-80F0ED838EF9}"/>
               </a:ext>
             </a:extLst>
           </p:cNvPr>
@@ -4163,7 +4168,7 @@
           <p:cNvPr id="84" name="Marcador de número de diapositiva 83">
             <a:extLst>
               <a:ext uri="{FF2B5EF4-FFF2-40B4-BE49-F238E27FC236}">
-                <a16:creationId xmlns:a16="http://schemas.microsoft.com/office/drawing/2014/main" id="{4891046F-11DC-B7FC-54F7-9583E688DC0E}"/>
+                <a16:creationId xmlns:a16="http://schemas.microsoft.com/office/drawing/2014/main" id="{4A656CCE-66E0-EAE0-5C63-DF1315DF6299}"/>
               </a:ext>
             </a:extLst>
           </p:cNvPr>
@@ -4192,7 +4197,7 @@
           <p:cNvPr id="3" name="Marcador de pie de página 2">
             <a:extLst>
               <a:ext uri="{FF2B5EF4-FFF2-40B4-BE49-F238E27FC236}">
-                <a16:creationId xmlns:a16="http://schemas.microsoft.com/office/drawing/2014/main" id="{4C9BAA39-017F-D602-6705-A6CF44830139}"/>
+                <a16:creationId xmlns:a16="http://schemas.microsoft.com/office/drawing/2014/main" id="{D3AB6581-C493-80EB-A67F-5289454DAA28}"/>
               </a:ext>
             </a:extLst>
           </p:cNvPr>
@@ -4226,7 +4231,7 @@
           <p:cNvPr id="2" name="CuadroTexto 1">
             <a:extLst>
               <a:ext uri="{FF2B5EF4-FFF2-40B4-BE49-F238E27FC236}">
-                <a16:creationId xmlns:a16="http://schemas.microsoft.com/office/drawing/2014/main" id="{43D7D9E5-DAC3-2BB8-7377-826863CBAD4E}"/>
+                <a16:creationId xmlns:a16="http://schemas.microsoft.com/office/drawing/2014/main" id="{B5029729-ADF3-3B30-4FF9-83BE1DB82BD7}"/>
               </a:ext>
             </a:extLst>
           </p:cNvPr>
@@ -4236,11 +4241,21 @@
         <p:spPr>
           <a:xfrm>
             <a:off x="609441" y="4819471"/>
-            <a:ext cx="11199971" cy="1200329"/>
+            <a:ext cx="11199971" cy="646331"/>
           </a:xfrm>
           <a:prstGeom prst="rect">
             <a:avLst/>
           </a:prstGeom>
+          <a:solidFill>
+            <a:schemeClr val="bg1">
+              <a:lumMod val="95000"/>
+            </a:schemeClr>
+          </a:solidFill>
+          <a:ln w="28575">
+            <a:solidFill>
+              <a:srgbClr val="E0700D"/>
+            </a:solidFill>
+          </a:ln>
         </p:spPr>
         <p:txBody>
           <a:bodyPr wrap="square" rtlCol="0">
@@ -4254,7 +4269,21 @@
                 <a:latin typeface="Arial" panose="020B0604020202020204" pitchFamily="34" charset="0"/>
                 <a:cs typeface="Arial" panose="020B0604020202020204" pitchFamily="34" charset="0"/>
               </a:rPr>
-              <a:t>Comment results</a:t>
+              <a:t>Comment results (Coupling relationship, </a:t>
+            </a:r>
+            <a:r>
+              <a:rPr lang="en-US" sz="1200" dirty="0" err="1">
+                <a:latin typeface="Arial" panose="020B0604020202020204" pitchFamily="34" charset="0"/>
+                <a:cs typeface="Arial" panose="020B0604020202020204" pitchFamily="34" charset="0"/>
+              </a:rPr>
+              <a:t>Lpi</a:t>
+            </a:r>
+            <a:r>
+              <a:rPr lang="en-US" sz="1200" dirty="0">
+                <a:latin typeface="Arial" panose="020B0604020202020204" pitchFamily="34" charset="0"/>
+                <a:cs typeface="Arial" panose="020B0604020202020204" pitchFamily="34" charset="0"/>
+              </a:rPr>
+              <a:t>,  losses, comparison with Directional Coupler… )</a:t>
             </a:r>
           </a:p>
           <a:p>
@@ -4271,27 +4300,6 @@
               <a:cs typeface="Arial" panose="020B0604020202020204" pitchFamily="34" charset="0"/>
             </a:endParaRPr>
           </a:p>
-          <a:p>
-            <a:pPr algn="just"/>
-            <a:endParaRPr lang="en-US" sz="1200" dirty="0">
-              <a:latin typeface="Arial" panose="020B0604020202020204" pitchFamily="34" charset="0"/>
-              <a:cs typeface="Arial" panose="020B0604020202020204" pitchFamily="34" charset="0"/>
-            </a:endParaRPr>
-          </a:p>
-          <a:p>
-            <a:pPr algn="just"/>
-            <a:endParaRPr lang="en-US" sz="1200" dirty="0">
-              <a:latin typeface="Arial" panose="020B0604020202020204" pitchFamily="34" charset="0"/>
-              <a:cs typeface="Arial" panose="020B0604020202020204" pitchFamily="34" charset="0"/>
-            </a:endParaRPr>
-          </a:p>
-          <a:p>
-            <a:pPr algn="just"/>
-            <a:endParaRPr lang="en-US" sz="1200" dirty="0">
-              <a:latin typeface="Arial" panose="020B0604020202020204" pitchFamily="34" charset="0"/>
-              <a:cs typeface="Arial" panose="020B0604020202020204" pitchFamily="34" charset="0"/>
-            </a:endParaRPr>
-          </a:p>
         </p:txBody>
       </p:sp>
       <p:sp>
@@ -4299,7 +4307,7 @@
           <p:cNvPr id="7" name="Rectángulo 6">
             <a:extLst>
               <a:ext uri="{FF2B5EF4-FFF2-40B4-BE49-F238E27FC236}">
-                <a16:creationId xmlns:a16="http://schemas.microsoft.com/office/drawing/2014/main" id="{9772491E-4FFB-FFC3-C855-72A4B15F3E73}"/>
+                <a16:creationId xmlns:a16="http://schemas.microsoft.com/office/drawing/2014/main" id="{98DE5FDA-4E91-E843-E84A-1467BFAA9986}"/>
               </a:ext>
             </a:extLst>
           </p:cNvPr>
@@ -4351,7 +4359,7 @@
           <p:cNvPr id="8" name="CuadroTexto 7">
             <a:extLst>
               <a:ext uri="{FF2B5EF4-FFF2-40B4-BE49-F238E27FC236}">
-                <a16:creationId xmlns:a16="http://schemas.microsoft.com/office/drawing/2014/main" id="{643565A9-7DB6-D6EE-152F-2852C8BA7986}"/>
+                <a16:creationId xmlns:a16="http://schemas.microsoft.com/office/drawing/2014/main" id="{0DA14DBA-172E-DA2C-0573-6A00BF18F4A5}"/>
               </a:ext>
             </a:extLst>
           </p:cNvPr>
@@ -4360,8 +4368,8 @@
         </p:nvSpPr>
         <p:spPr>
           <a:xfrm>
-            <a:off x="640245" y="1942909"/>
-            <a:ext cx="11199972" cy="2708434"/>
+            <a:off x="2286000" y="2630415"/>
+            <a:ext cx="7718580" cy="923330"/>
           </a:xfrm>
           <a:prstGeom prst="rect">
             <a:avLst/>
@@ -4392,68 +4400,7 @@
             <a:pPr algn="ctr"/>
             <a:r>
               <a:rPr lang="en-US" dirty="0"/>
-              <a:t>Paste propagation plot and console results</a:t>
-            </a:r>
-          </a:p>
-          <a:p>
-            <a:pPr algn="ctr"/>
-            <a:endParaRPr lang="en-US" dirty="0"/>
-          </a:p>
-          <a:p>
-            <a:pPr algn="ctr"/>
-            <a:endParaRPr lang="en-US" dirty="0"/>
-          </a:p>
-          <a:p>
-            <a:pPr algn="r"/>
-            <a:r>
-              <a:rPr lang="en-US" sz="1600" b="1" dirty="0"/>
-              <a:t>Target</a:t>
-            </a:r>
-            <a:r>
-              <a:rPr lang="en-US" sz="1600" dirty="0"/>
-              <a:t>: make equal ratio over outputs (even if not 0.5) and minimize excess loss (even if not 0.0 dB)</a:t>
-            </a:r>
-          </a:p>
-          <a:p>
-            <a:pPr algn="r"/>
-            <a:r>
-              <a:rPr lang="en-US" sz="1600" dirty="0"/>
-              <a:t>With same settings of previous LO, now adjust try to manually optimize the MMI by changing iteratively:</a:t>
-            </a:r>
-          </a:p>
-          <a:p>
-            <a:pPr algn="r"/>
-            <a:r>
-              <a:rPr lang="en-US" sz="1600" dirty="0"/>
-              <a:t>- Change </a:t>
-            </a:r>
-            <a:r>
-              <a:rPr lang="en-US" sz="1600" dirty="0" err="1"/>
-              <a:t>dL_MMI</a:t>
-            </a:r>
-            <a:endParaRPr lang="en-US" sz="1600" dirty="0"/>
-          </a:p>
-          <a:p>
-            <a:pPr algn="r"/>
-            <a:r>
-              <a:rPr lang="en-US" sz="1600" dirty="0"/>
-              <a:t>- Change I/O waveguide position +/- </a:t>
-            </a:r>
-            <a:r>
-              <a:rPr lang="en-US" sz="1600" dirty="0" err="1"/>
-              <a:t>dy</a:t>
-            </a:r>
-            <a:endParaRPr lang="en-US" sz="1600" dirty="0"/>
-          </a:p>
-          <a:p>
-            <a:pPr algn="r"/>
-            <a:r>
-              <a:rPr lang="en-US" sz="1600" b="1" dirty="0"/>
-              <a:t>Hints</a:t>
-            </a:r>
-            <a:r>
-              <a:rPr lang="en-US" sz="1600" dirty="0"/>
-              <a:t>: observe the 2D EME propagation results to guide you to the best settings of a) and b).</a:t>
+              <a:t>Paste propagation plots and console results</a:t>
             </a:r>
           </a:p>
         </p:txBody>
@@ -4461,7 +4408,7 @@
     </p:spTree>
     <p:extLst>
       <p:ext uri="{BB962C8B-B14F-4D97-AF65-F5344CB8AC3E}">
-        <p14:creationId xmlns:p14="http://schemas.microsoft.com/office/powerpoint/2010/main" val="2685215753"/>
+        <p14:creationId xmlns:p14="http://schemas.microsoft.com/office/powerpoint/2010/main" val="2815679427"/>
       </p:ext>
     </p:extLst>
   </p:cSld>
@@ -4515,6 +4462,824 @@
             </a:r>
             <a:r>
               <a:rPr lang="en-US" sz="2000" dirty="0"/>
+              <a:t>Learning outcome #4.1</a:t>
+            </a:r>
+            <a:endParaRPr lang="es-ES" dirty="0"/>
+          </a:p>
+        </p:txBody>
+      </p:sp>
+      <mc:AlternateContent xmlns:mc="http://schemas.openxmlformats.org/markup-compatibility/2006" xmlns:a14="http://schemas.microsoft.com/office/drawing/2010/main">
+        <mc:Choice Requires="a14">
+          <p:sp>
+            <p:nvSpPr>
+              <p:cNvPr id="3" name="Marcador de texto 2">
+                <a:extLst>
+                  <a:ext uri="{FF2B5EF4-FFF2-40B4-BE49-F238E27FC236}">
+                    <a16:creationId xmlns:a16="http://schemas.microsoft.com/office/drawing/2014/main" id="{F25E8729-3742-4527-A81D-59CD52779EE7}"/>
+                  </a:ext>
+                </a:extLst>
+              </p:cNvPr>
+              <p:cNvSpPr>
+                <a:spLocks noGrp="1"/>
+              </p:cNvSpPr>
+              <p:nvPr>
+                <p:ph type="body" idx="1"/>
+              </p:nvPr>
+            </p:nvSpPr>
+            <p:spPr>
+              <a:xfrm>
+                <a:off x="556683" y="4639323"/>
+                <a:ext cx="10972800" cy="1369286"/>
+              </a:xfrm>
+            </p:spPr>
+            <p:txBody>
+              <a:bodyPr/>
+              <a:lstStyle/>
+              <a:p>
+                <a:pPr algn="just"/>
+                <a:r>
+                  <a:rPr lang="es-ES" sz="1200" dirty="0">
+                    <a:latin typeface="Arial" panose="020B0604020202020204" pitchFamily="34" charset="0"/>
+                    <a:cs typeface="Arial" panose="020B0604020202020204" pitchFamily="34" charset="0"/>
+                  </a:rPr>
+                  <a:t>Para obtener este acoplador MMI 2x2, se ha calculado primero la longitud de batido del dispositivo (</a:t>
+                </a:r>
+                <a14:m>
+                  <m:oMath xmlns:m="http://schemas.openxmlformats.org/officeDocument/2006/math">
+                    <m:sSub>
+                      <m:sSubPr>
+                        <m:ctrlPr>
+                          <a:rPr lang="es-ES" sz="1200" i="1" dirty="0" smtClean="0">
+                            <a:latin typeface="Cambria Math" panose="02040503050406030204" pitchFamily="18" charset="0"/>
+                            <a:cs typeface="Arial" panose="020B0604020202020204" pitchFamily="34" charset="0"/>
+                          </a:rPr>
+                        </m:ctrlPr>
+                      </m:sSubPr>
+                      <m:e>
+                        <m:r>
+                          <a:rPr lang="es-ES" sz="1200" i="1" dirty="0" smtClean="0">
+                            <a:latin typeface="Cambria Math" panose="02040503050406030204" pitchFamily="18" charset="0"/>
+                            <a:cs typeface="Arial" panose="020B0604020202020204" pitchFamily="34" charset="0"/>
+                          </a:rPr>
+                          <m:t>𝐿</m:t>
+                        </m:r>
+                      </m:e>
+                      <m:sub>
+                        <m:r>
+                          <a:rPr lang="es-ES" sz="1200" i="1" dirty="0" smtClean="0">
+                            <a:latin typeface="Cambria Math" panose="02040503050406030204" pitchFamily="18" charset="0"/>
+                            <a:cs typeface="Arial" panose="020B0604020202020204" pitchFamily="34" charset="0"/>
+                          </a:rPr>
+                          <m:t>𝜋</m:t>
+                        </m:r>
+                      </m:sub>
+                    </m:sSub>
+                    <m:r>
+                      <a:rPr lang="es-ES" sz="1200" b="0" i="1" dirty="0" smtClean="0">
+                        <a:latin typeface="Cambria Math" panose="02040503050406030204" pitchFamily="18" charset="0"/>
+                        <a:cs typeface="Arial" panose="020B0604020202020204" pitchFamily="34" charset="0"/>
+                      </a:rPr>
+                      <m:t>=</m:t>
+                    </m:r>
+                    <m:r>
+                      <a:rPr lang="es-ES" sz="1200" i="1" dirty="0" smtClean="0">
+                        <a:latin typeface="Cambria Math" panose="02040503050406030204" pitchFamily="18" charset="0"/>
+                        <a:cs typeface="Arial" panose="020B0604020202020204" pitchFamily="34" charset="0"/>
+                      </a:rPr>
+                      <m:t>69.</m:t>
+                    </m:r>
+                  </m:oMath>
+                </a14:m>
+                <a:r>
+                  <a:rPr lang="en-US" sz="1200" dirty="0">
+                    <a:latin typeface="Arial" panose="020B0604020202020204" pitchFamily="34" charset="0"/>
+                    <a:cs typeface="Arial" panose="020B0604020202020204" pitchFamily="34" charset="0"/>
+                  </a:rPr>
+                  <a:t>035986 </a:t>
+                </a:r>
+                <a:r>
+                  <a:rPr lang="es-ES" sz="1200" dirty="0">
+                    <a:latin typeface="Arial" panose="020B0604020202020204" pitchFamily="34" charset="0"/>
+                    <a:cs typeface="Arial" panose="020B0604020202020204" pitchFamily="34" charset="0"/>
+                  </a:rPr>
+                  <a:t>µm) y se ha fijado su longitud total en </a:t>
+                </a:r>
+                <a14:m>
+                  <m:oMath xmlns:m="http://schemas.openxmlformats.org/officeDocument/2006/math">
+                    <m:f>
+                      <m:fPr>
+                        <m:ctrlPr>
+                          <a:rPr lang="es-ES" sz="1200" i="1" dirty="0" smtClean="0">
+                            <a:latin typeface="Cambria Math" panose="02040503050406030204" pitchFamily="18" charset="0"/>
+                            <a:cs typeface="Arial" panose="020B0604020202020204" pitchFamily="34" charset="0"/>
+                          </a:rPr>
+                        </m:ctrlPr>
+                      </m:fPr>
+                      <m:num>
+                        <m:sSub>
+                          <m:sSubPr>
+                            <m:ctrlPr>
+                              <a:rPr lang="es-ES" sz="1200" i="1" dirty="0" smtClean="0">
+                                <a:latin typeface="Cambria Math" panose="02040503050406030204" pitchFamily="18" charset="0"/>
+                                <a:cs typeface="Arial" panose="020B0604020202020204" pitchFamily="34" charset="0"/>
+                              </a:rPr>
+                            </m:ctrlPr>
+                          </m:sSubPr>
+                          <m:e>
+                            <m:r>
+                              <a:rPr lang="es-ES" sz="1200" i="1" dirty="0" smtClean="0">
+                                <a:latin typeface="Cambria Math" panose="02040503050406030204" pitchFamily="18" charset="0"/>
+                                <a:cs typeface="Arial" panose="020B0604020202020204" pitchFamily="34" charset="0"/>
+                              </a:rPr>
+                              <m:t>𝐿</m:t>
+                            </m:r>
+                          </m:e>
+                          <m:sub>
+                            <m:r>
+                              <a:rPr lang="es-ES" sz="1200" i="1" dirty="0" smtClean="0">
+                                <a:latin typeface="Cambria Math" panose="02040503050406030204" pitchFamily="18" charset="0"/>
+                                <a:cs typeface="Arial" panose="020B0604020202020204" pitchFamily="34" charset="0"/>
+                              </a:rPr>
+                              <m:t>𝜋</m:t>
+                            </m:r>
+                          </m:sub>
+                        </m:sSub>
+                      </m:num>
+                      <m:den>
+                        <m:r>
+                          <a:rPr lang="es-ES" sz="1200" i="1" dirty="0" smtClean="0">
+                            <a:latin typeface="Cambria Math" panose="02040503050406030204" pitchFamily="18" charset="0"/>
+                            <a:cs typeface="Arial" panose="020B0604020202020204" pitchFamily="34" charset="0"/>
+                          </a:rPr>
+                          <m:t>2</m:t>
+                        </m:r>
+                      </m:den>
+                    </m:f>
+                  </m:oMath>
+                </a14:m>
+                <a:r>
+                  <a:rPr lang="es-ES" sz="1200" dirty="0">
+                    <a:latin typeface="Arial" panose="020B0604020202020204" pitchFamily="34" charset="0"/>
+                    <a:cs typeface="Arial" panose="020B0604020202020204" pitchFamily="34" charset="0"/>
+                  </a:rPr>
+                  <a:t> (34.52 µm) basándose en el principio de autoimagen. Los resultados muestran una relación de acoplamiento casi ideal, dividiendo la potencia de forma muy equilibrada (ratio 0.51/0.48), con unas pérdidas por exceso de 0.42 dB justificadas por la transición abrupta de las guías de acceso sin optimizar.</a:t>
+                </a:r>
+              </a:p>
+              <a:p>
+                <a:pPr algn="just"/>
+                <a:endParaRPr lang="es-ES" sz="1200" dirty="0">
+                  <a:latin typeface="Arial" panose="020B0604020202020204" pitchFamily="34" charset="0"/>
+                  <a:cs typeface="Arial" panose="020B0604020202020204" pitchFamily="34" charset="0"/>
+                </a:endParaRPr>
+              </a:p>
+              <a:p>
+                <a:pPr algn="just"/>
+                <a:r>
+                  <a:rPr lang="es-ES" sz="1200" dirty="0">
+                    <a:latin typeface="Arial" panose="020B0604020202020204" pitchFamily="34" charset="0"/>
+                    <a:cs typeface="Arial" panose="020B0604020202020204" pitchFamily="34" charset="0"/>
+                  </a:rPr>
+                  <a:t>Frente a un acoplador direccional tradicional, que es extremadamente sensible a pequeñas variaciones de fabricación en el gap o en la longitud de interacción, este diseño MMI resulta mucho más robusto, tolerante a errores litográficos y ofrece un mayor ancho de banda óptico, compensando así sus pérdidas de inserción iniciales.</a:t>
+                </a:r>
+                <a:endParaRPr lang="en-US" sz="1200" dirty="0">
+                  <a:latin typeface="Arial" panose="020B0604020202020204" pitchFamily="34" charset="0"/>
+                  <a:cs typeface="Arial" panose="020B0604020202020204" pitchFamily="34" charset="0"/>
+                </a:endParaRPr>
+              </a:p>
+            </p:txBody>
+          </p:sp>
+        </mc:Choice>
+        <mc:Fallback xmlns="">
+          <p:sp>
+            <p:nvSpPr>
+              <p:cNvPr id="3" name="Marcador de texto 2">
+                <a:extLst>
+                  <a:ext uri="{FF2B5EF4-FFF2-40B4-BE49-F238E27FC236}">
+                    <a16:creationId xmlns:a16="http://schemas.microsoft.com/office/drawing/2014/main" id="{F25E8729-3742-4527-A81D-59CD52779EE7}"/>
+                  </a:ext>
+                </a:extLst>
+              </p:cNvPr>
+              <p:cNvSpPr>
+                <a:spLocks noGrp="1" noRot="1" noChangeAspect="1" noMove="1" noResize="1" noEditPoints="1" noAdjustHandles="1" noChangeArrowheads="1" noChangeShapeType="1" noTextEdit="1"/>
+              </p:cNvSpPr>
+              <p:nvPr>
+                <p:ph type="body" idx="1"/>
+              </p:nvPr>
+            </p:nvSpPr>
+            <p:spPr>
+              <a:xfrm>
+                <a:off x="556683" y="4639323"/>
+                <a:ext cx="10972800" cy="1369286"/>
+              </a:xfrm>
+              <a:blipFill>
+                <a:blip r:embed="rId2"/>
+                <a:stretch>
+                  <a:fillRect l="-833" t="-1333" r="-889" b="-5778"/>
+                </a:stretch>
+              </a:blipFill>
+            </p:spPr>
+            <p:txBody>
+              <a:bodyPr/>
+              <a:lstStyle/>
+              <a:p>
+                <a:r>
+                  <a:rPr lang="es-ES">
+                    <a:noFill/>
+                  </a:rPr>
+                  <a:t> </a:t>
+                </a:r>
+              </a:p>
+            </p:txBody>
+          </p:sp>
+        </mc:Fallback>
+      </mc:AlternateContent>
+      <p:sp>
+        <p:nvSpPr>
+          <p:cNvPr id="4" name="Marcador de pie de página 3">
+            <a:extLst>
+              <a:ext uri="{FF2B5EF4-FFF2-40B4-BE49-F238E27FC236}">
+                <a16:creationId xmlns:a16="http://schemas.microsoft.com/office/drawing/2014/main" id="{C5EDBD82-056D-4F51-8607-3FBE8F0A5BDB}"/>
+              </a:ext>
+            </a:extLst>
+          </p:cNvPr>
+          <p:cNvSpPr>
+            <a:spLocks noGrp="1"/>
+          </p:cNvSpPr>
+          <p:nvPr>
+            <p:ph type="ftr" sz="quarter" idx="5"/>
+          </p:nvPr>
+        </p:nvSpPr>
+        <p:spPr/>
+        <p:txBody>
+          <a:bodyPr/>
+          <a:lstStyle/>
+          <a:p>
+            <a:pPr marL="12700">
+              <a:spcBef>
+                <a:spcPts val="15"/>
+              </a:spcBef>
+            </a:pPr>
+            <a:r>
+              <a:rPr lang="es-ES" spc="-5"/>
+              <a:t>LAB 2.0. COUPLERS</a:t>
+            </a:r>
+            <a:endParaRPr lang="es-ES" spc="-5" dirty="0"/>
+          </a:p>
+        </p:txBody>
+      </p:sp>
+      <p:sp>
+        <p:nvSpPr>
+          <p:cNvPr id="5" name="Marcador de número de diapositiva 4">
+            <a:extLst>
+              <a:ext uri="{FF2B5EF4-FFF2-40B4-BE49-F238E27FC236}">
+                <a16:creationId xmlns:a16="http://schemas.microsoft.com/office/drawing/2014/main" id="{95826EC4-A33C-4520-ACF7-D0FDE25B9487}"/>
+              </a:ext>
+            </a:extLst>
+          </p:cNvPr>
+          <p:cNvSpPr>
+            <a:spLocks noGrp="1"/>
+          </p:cNvSpPr>
+          <p:nvPr>
+            <p:ph type="sldNum" sz="quarter" idx="7"/>
+          </p:nvPr>
+        </p:nvSpPr>
+        <p:spPr/>
+        <p:txBody>
+          <a:bodyPr/>
+          <a:lstStyle/>
+          <a:p>
+            <a:fld id="{B6F15528-21DE-4FAA-801E-634DDDAF4B2B}" type="slidenum">
+              <a:rPr lang="es-ES" smtClean="0"/>
+              <a:t>11</a:t>
+            </a:fld>
+            <a:endParaRPr lang="es-ES"/>
+          </a:p>
+        </p:txBody>
+      </p:sp>
+      <p:pic>
+        <p:nvPicPr>
+          <p:cNvPr id="8" name="Imagen 7">
+            <a:extLst>
+              <a:ext uri="{FF2B5EF4-FFF2-40B4-BE49-F238E27FC236}">
+                <a16:creationId xmlns:a16="http://schemas.microsoft.com/office/drawing/2014/main" id="{5BC26979-82C0-4EB5-AD48-BD143A125583}"/>
+              </a:ext>
+            </a:extLst>
+          </p:cNvPr>
+          <p:cNvPicPr>
+            <a:picLocks noChangeAspect="1"/>
+          </p:cNvPicPr>
+          <p:nvPr/>
+        </p:nvPicPr>
+        <p:blipFill>
+          <a:blip r:embed="rId3"/>
+          <a:stretch>
+            <a:fillRect/>
+          </a:stretch>
+        </p:blipFill>
+        <p:spPr>
+          <a:xfrm>
+            <a:off x="3810000" y="974064"/>
+            <a:ext cx="3995888" cy="3295928"/>
+          </a:xfrm>
+          <a:prstGeom prst="rect">
+            <a:avLst/>
+          </a:prstGeom>
+        </p:spPr>
+      </p:pic>
+    </p:spTree>
+    <p:extLst>
+      <p:ext uri="{BB962C8B-B14F-4D97-AF65-F5344CB8AC3E}">
+        <p14:creationId xmlns:p14="http://schemas.microsoft.com/office/powerpoint/2010/main" val="2443045969"/>
+      </p:ext>
+    </p:extLst>
+  </p:cSld>
+  <p:clrMapOvr>
+    <a:masterClrMapping/>
+  </p:clrMapOvr>
+</p:sld>
+</file>
+
+<file path=ppt/slides/slide12.xml><?xml version="1.0" encoding="utf-8"?>
+<p:sld xmlns:a="http://schemas.openxmlformats.org/drawingml/2006/main" xmlns:r="http://schemas.openxmlformats.org/officeDocument/2006/relationships" xmlns:p="http://schemas.openxmlformats.org/presentationml/2006/main">
+  <p:cSld>
+    <p:spTree>
+      <p:nvGrpSpPr>
+        <p:cNvPr id="1" name="">
+          <a:extLst>
+            <a:ext uri="{FF2B5EF4-FFF2-40B4-BE49-F238E27FC236}">
+              <a16:creationId xmlns:a16="http://schemas.microsoft.com/office/drawing/2014/main" id="{D1F11DBE-A482-7036-60B2-70B7E2318F46}"/>
+            </a:ext>
+          </a:extLst>
+        </p:cNvPr>
+        <p:cNvGrpSpPr/>
+        <p:nvPr/>
+      </p:nvGrpSpPr>
+      <p:grpSpPr>
+        <a:xfrm>
+          <a:off x="0" y="0"/>
+          <a:ext cx="0" cy="0"/>
+          <a:chOff x="0" y="0"/>
+          <a:chExt cx="0" cy="0"/>
+        </a:xfrm>
+      </p:grpSpPr>
+      <p:sp>
+        <p:nvSpPr>
+          <p:cNvPr id="16" name="object 16">
+            <a:extLst>
+              <a:ext uri="{FF2B5EF4-FFF2-40B4-BE49-F238E27FC236}">
+                <a16:creationId xmlns:a16="http://schemas.microsoft.com/office/drawing/2014/main" id="{C096193E-AB86-E3CD-BDAC-0F9156C1A3F0}"/>
+              </a:ext>
+            </a:extLst>
+          </p:cNvPr>
+          <p:cNvSpPr txBox="1">
+            <a:spLocks noGrp="1"/>
+          </p:cNvSpPr>
+          <p:nvPr>
+            <p:ph type="title"/>
+          </p:nvPr>
+        </p:nvSpPr>
+        <p:spPr>
+          <a:xfrm>
+            <a:off x="685800" y="408883"/>
+            <a:ext cx="10994410" cy="705321"/>
+          </a:xfrm>
+          <a:prstGeom prst="rect">
+            <a:avLst/>
+          </a:prstGeom>
+        </p:spPr>
+        <p:txBody>
+          <a:bodyPr vert="horz" wrap="square" lIns="0" tIns="12700" rIns="0" bIns="0" rtlCol="0">
+            <a:spAutoFit/>
+          </a:bodyPr>
+          <a:lstStyle/>
+          <a:p>
+            <a:pPr marL="12700">
+              <a:lnSpc>
+                <a:spcPct val="100000"/>
+              </a:lnSpc>
+              <a:spcBef>
+                <a:spcPts val="100"/>
+              </a:spcBef>
+            </a:pPr>
+            <a:r>
+              <a:rPr lang="en-US" sz="2500" dirty="0"/>
+              <a:t>Learning outcome #4.2 – 2x2 Multimode Interference Coupler - Optimization</a:t>
+            </a:r>
+            <a:br>
+              <a:rPr lang="en-US" sz="2500" dirty="0"/>
+            </a:br>
+            <a:r>
+              <a:rPr lang="en-US" b="0" dirty="0"/>
+              <a:t>Wavelength 1.55 µm, </a:t>
+            </a:r>
+            <a:r>
+              <a:rPr lang="en-US" b="0" dirty="0" err="1"/>
+              <a:t>wMMI</a:t>
+            </a:r>
+            <a:r>
+              <a:rPr lang="en-US" b="0" dirty="0"/>
+              <a:t> = 6.6 µm</a:t>
+            </a:r>
+            <a:endParaRPr lang="en-US" sz="2500" b="0" dirty="0">
+              <a:latin typeface="+mj-lt"/>
+              <a:cs typeface="Lucida Sans"/>
+            </a:endParaRPr>
+          </a:p>
+        </p:txBody>
+      </p:sp>
+      <p:pic>
+        <p:nvPicPr>
+          <p:cNvPr id="83" name="Gráfico 82">
+            <a:extLst>
+              <a:ext uri="{FF2B5EF4-FFF2-40B4-BE49-F238E27FC236}">
+                <a16:creationId xmlns:a16="http://schemas.microsoft.com/office/drawing/2014/main" id="{2D17DCD6-D851-E62D-D95C-A9F9954602DE}"/>
+              </a:ext>
+            </a:extLst>
+          </p:cNvPr>
+          <p:cNvPicPr>
+            <a:picLocks noChangeAspect="1"/>
+          </p:cNvPicPr>
+          <p:nvPr/>
+        </p:nvPicPr>
+        <p:blipFill>
+          <a:blip r:embed="rId3">
+            <a:extLst>
+              <a:ext uri="{96DAC541-7B7A-43D3-8B79-37D633B846F1}">
+                <asvg:svgBlip xmlns:asvg="http://schemas.microsoft.com/office/drawing/2016/SVG/main" r:embed="rId4"/>
+              </a:ext>
+            </a:extLst>
+          </a:blip>
+          <a:stretch>
+            <a:fillRect/>
+          </a:stretch>
+        </p:blipFill>
+        <p:spPr>
+          <a:xfrm>
+            <a:off x="5045006" y="6356057"/>
+            <a:ext cx="6409575" cy="363174"/>
+          </a:xfrm>
+          <a:prstGeom prst="rect">
+            <a:avLst/>
+          </a:prstGeom>
+        </p:spPr>
+      </p:pic>
+      <p:sp>
+        <p:nvSpPr>
+          <p:cNvPr id="84" name="Marcador de número de diapositiva 83">
+            <a:extLst>
+              <a:ext uri="{FF2B5EF4-FFF2-40B4-BE49-F238E27FC236}">
+                <a16:creationId xmlns:a16="http://schemas.microsoft.com/office/drawing/2014/main" id="{4891046F-11DC-B7FC-54F7-9583E688DC0E}"/>
+              </a:ext>
+            </a:extLst>
+          </p:cNvPr>
+          <p:cNvSpPr>
+            <a:spLocks noGrp="1"/>
+          </p:cNvSpPr>
+          <p:nvPr>
+            <p:ph type="sldNum" sz="quarter" idx="7"/>
+          </p:nvPr>
+        </p:nvSpPr>
+        <p:spPr/>
+        <p:txBody>
+          <a:bodyPr/>
+          <a:lstStyle/>
+          <a:p>
+            <a:fld id="{B6F15528-21DE-4FAA-801E-634DDDAF4B2B}" type="slidenum">
+              <a:rPr lang="es-ES" smtClean="0"/>
+              <a:t>12</a:t>
+            </a:fld>
+            <a:endParaRPr lang="es-ES"/>
+          </a:p>
+        </p:txBody>
+      </p:sp>
+      <p:sp>
+        <p:nvSpPr>
+          <p:cNvPr id="3" name="Marcador de pie de página 2">
+            <a:extLst>
+              <a:ext uri="{FF2B5EF4-FFF2-40B4-BE49-F238E27FC236}">
+                <a16:creationId xmlns:a16="http://schemas.microsoft.com/office/drawing/2014/main" id="{4C9BAA39-017F-D602-6705-A6CF44830139}"/>
+              </a:ext>
+            </a:extLst>
+          </p:cNvPr>
+          <p:cNvSpPr>
+            <a:spLocks noGrp="1"/>
+          </p:cNvSpPr>
+          <p:nvPr>
+            <p:ph type="ftr" sz="quarter" idx="5"/>
+          </p:nvPr>
+        </p:nvSpPr>
+        <p:spPr/>
+        <p:txBody>
+          <a:bodyPr/>
+          <a:lstStyle/>
+          <a:p>
+            <a:pPr marL="12700">
+              <a:spcBef>
+                <a:spcPts val="15"/>
+              </a:spcBef>
+            </a:pPr>
+            <a:r>
+              <a:rPr lang="es-ES" spc="-5"/>
+              <a:t>LAB 2.0. COUPLERS</a:t>
+            </a:r>
+            <a:endParaRPr lang="es-ES" spc="-5" dirty="0"/>
+          </a:p>
+        </p:txBody>
+      </p:sp>
+      <p:sp>
+        <p:nvSpPr>
+          <p:cNvPr id="2" name="CuadroTexto 1">
+            <a:extLst>
+              <a:ext uri="{FF2B5EF4-FFF2-40B4-BE49-F238E27FC236}">
+                <a16:creationId xmlns:a16="http://schemas.microsoft.com/office/drawing/2014/main" id="{43D7D9E5-DAC3-2BB8-7377-826863CBAD4E}"/>
+              </a:ext>
+            </a:extLst>
+          </p:cNvPr>
+          <p:cNvSpPr txBox="1"/>
+          <p:nvPr/>
+        </p:nvSpPr>
+        <p:spPr>
+          <a:xfrm>
+            <a:off x="609441" y="4819471"/>
+            <a:ext cx="11199971" cy="1200329"/>
+          </a:xfrm>
+          <a:prstGeom prst="rect">
+            <a:avLst/>
+          </a:prstGeom>
+        </p:spPr>
+        <p:txBody>
+          <a:bodyPr wrap="square" rtlCol="0">
+            <a:spAutoFit/>
+          </a:bodyPr>
+          <a:lstStyle/>
+          <a:p>
+            <a:pPr algn="just"/>
+            <a:r>
+              <a:rPr lang="en-US" sz="1200" dirty="0">
+                <a:latin typeface="Arial" panose="020B0604020202020204" pitchFamily="34" charset="0"/>
+                <a:cs typeface="Arial" panose="020B0604020202020204" pitchFamily="34" charset="0"/>
+              </a:rPr>
+              <a:t>Comment results</a:t>
+            </a:r>
+          </a:p>
+          <a:p>
+            <a:pPr algn="just"/>
+            <a:endParaRPr lang="en-US" sz="1200" dirty="0">
+              <a:latin typeface="Arial" panose="020B0604020202020204" pitchFamily="34" charset="0"/>
+              <a:cs typeface="Arial" panose="020B0604020202020204" pitchFamily="34" charset="0"/>
+            </a:endParaRPr>
+          </a:p>
+          <a:p>
+            <a:pPr algn="just"/>
+            <a:endParaRPr lang="en-US" sz="1200" dirty="0">
+              <a:latin typeface="Arial" panose="020B0604020202020204" pitchFamily="34" charset="0"/>
+              <a:cs typeface="Arial" panose="020B0604020202020204" pitchFamily="34" charset="0"/>
+            </a:endParaRPr>
+          </a:p>
+          <a:p>
+            <a:pPr algn="just"/>
+            <a:endParaRPr lang="en-US" sz="1200" dirty="0">
+              <a:latin typeface="Arial" panose="020B0604020202020204" pitchFamily="34" charset="0"/>
+              <a:cs typeface="Arial" panose="020B0604020202020204" pitchFamily="34" charset="0"/>
+            </a:endParaRPr>
+          </a:p>
+          <a:p>
+            <a:pPr algn="just"/>
+            <a:endParaRPr lang="en-US" sz="1200" dirty="0">
+              <a:latin typeface="Arial" panose="020B0604020202020204" pitchFamily="34" charset="0"/>
+              <a:cs typeface="Arial" panose="020B0604020202020204" pitchFamily="34" charset="0"/>
+            </a:endParaRPr>
+          </a:p>
+          <a:p>
+            <a:pPr algn="just"/>
+            <a:endParaRPr lang="en-US" sz="1200" dirty="0">
+              <a:latin typeface="Arial" panose="020B0604020202020204" pitchFamily="34" charset="0"/>
+              <a:cs typeface="Arial" panose="020B0604020202020204" pitchFamily="34" charset="0"/>
+            </a:endParaRPr>
+          </a:p>
+        </p:txBody>
+      </p:sp>
+      <p:sp>
+        <p:nvSpPr>
+          <p:cNvPr id="7" name="Rectángulo 6">
+            <a:extLst>
+              <a:ext uri="{FF2B5EF4-FFF2-40B4-BE49-F238E27FC236}">
+                <a16:creationId xmlns:a16="http://schemas.microsoft.com/office/drawing/2014/main" id="{9772491E-4FFB-FFC3-C855-72A4B15F3E73}"/>
+              </a:ext>
+            </a:extLst>
+          </p:cNvPr>
+          <p:cNvSpPr/>
+          <p:nvPr/>
+        </p:nvSpPr>
+        <p:spPr>
+          <a:xfrm>
+            <a:off x="609441" y="1377510"/>
+            <a:ext cx="11199971" cy="3306028"/>
+          </a:xfrm>
+          <a:prstGeom prst="rect">
+            <a:avLst/>
+          </a:prstGeom>
+          <a:noFill/>
+          <a:ln w="28575">
+            <a:solidFill>
+              <a:srgbClr val="E0700D"/>
+            </a:solidFill>
+          </a:ln>
+        </p:spPr>
+        <p:style>
+          <a:lnRef idx="2">
+            <a:schemeClr val="accent1">
+              <a:shade val="15000"/>
+            </a:schemeClr>
+          </a:lnRef>
+          <a:fillRef idx="1">
+            <a:schemeClr val="accent1"/>
+          </a:fillRef>
+          <a:effectRef idx="0">
+            <a:schemeClr val="accent1"/>
+          </a:effectRef>
+          <a:fontRef idx="minor">
+            <a:schemeClr val="lt1"/>
+          </a:fontRef>
+        </p:style>
+        <p:txBody>
+          <a:bodyPr rtlCol="0" anchor="ctr"/>
+          <a:lstStyle/>
+          <a:p>
+            <a:pPr algn="ctr"/>
+            <a:endParaRPr lang="en-US"/>
+          </a:p>
+        </p:txBody>
+      </p:sp>
+      <p:sp>
+        <p:nvSpPr>
+          <p:cNvPr id="8" name="CuadroTexto 7">
+            <a:extLst>
+              <a:ext uri="{FF2B5EF4-FFF2-40B4-BE49-F238E27FC236}">
+                <a16:creationId xmlns:a16="http://schemas.microsoft.com/office/drawing/2014/main" id="{643565A9-7DB6-D6EE-152F-2852C8BA7986}"/>
+              </a:ext>
+            </a:extLst>
+          </p:cNvPr>
+          <p:cNvSpPr txBox="1"/>
+          <p:nvPr/>
+        </p:nvSpPr>
+        <p:spPr>
+          <a:xfrm>
+            <a:off x="640245" y="1942909"/>
+            <a:ext cx="11199972" cy="2708434"/>
+          </a:xfrm>
+          <a:prstGeom prst="rect">
+            <a:avLst/>
+          </a:prstGeom>
+          <a:noFill/>
+        </p:spPr>
+        <p:txBody>
+          <a:bodyPr wrap="square" rtlCol="0">
+            <a:spAutoFit/>
+          </a:bodyPr>
+          <a:lstStyle/>
+          <a:p>
+            <a:pPr algn="ctr"/>
+            <a:r>
+              <a:rPr lang="en-US" b="1" dirty="0"/>
+              <a:t>deep</a:t>
+            </a:r>
+            <a:r>
+              <a:rPr lang="en-US" dirty="0"/>
+              <a:t> waveguide</a:t>
+            </a:r>
+          </a:p>
+          <a:p>
+            <a:pPr algn="ctr"/>
+            <a:endParaRPr lang="en-US" dirty="0"/>
+          </a:p>
+          <a:p>
+            <a:pPr algn="ctr"/>
+            <a:r>
+              <a:rPr lang="en-US" dirty="0"/>
+              <a:t>Paste propagation plot and console results</a:t>
+            </a:r>
+          </a:p>
+          <a:p>
+            <a:pPr algn="ctr"/>
+            <a:endParaRPr lang="en-US" dirty="0"/>
+          </a:p>
+          <a:p>
+            <a:pPr algn="ctr"/>
+            <a:endParaRPr lang="en-US" dirty="0"/>
+          </a:p>
+          <a:p>
+            <a:pPr algn="r"/>
+            <a:r>
+              <a:rPr lang="en-US" sz="1600" b="1" dirty="0"/>
+              <a:t>Target</a:t>
+            </a:r>
+            <a:r>
+              <a:rPr lang="en-US" sz="1600" dirty="0"/>
+              <a:t>: make equal ratio over outputs (even if not 0.5) and minimize excess loss (even if not 0.0 dB)</a:t>
+            </a:r>
+          </a:p>
+          <a:p>
+            <a:pPr algn="r"/>
+            <a:r>
+              <a:rPr lang="en-US" sz="1600" dirty="0"/>
+              <a:t>With same settings of previous LO, now adjust try to manually optimize the MMI by changing iteratively:</a:t>
+            </a:r>
+          </a:p>
+          <a:p>
+            <a:pPr algn="r"/>
+            <a:r>
+              <a:rPr lang="en-US" sz="1600" dirty="0"/>
+              <a:t>- Change </a:t>
+            </a:r>
+            <a:r>
+              <a:rPr lang="en-US" sz="1600" dirty="0" err="1"/>
+              <a:t>dL_MMI</a:t>
+            </a:r>
+            <a:endParaRPr lang="en-US" sz="1600" dirty="0"/>
+          </a:p>
+          <a:p>
+            <a:pPr algn="r"/>
+            <a:r>
+              <a:rPr lang="en-US" sz="1600" dirty="0"/>
+              <a:t>- Change I/O waveguide position +/- </a:t>
+            </a:r>
+            <a:r>
+              <a:rPr lang="en-US" sz="1600" dirty="0" err="1"/>
+              <a:t>dy</a:t>
+            </a:r>
+            <a:endParaRPr lang="en-US" sz="1600" dirty="0"/>
+          </a:p>
+          <a:p>
+            <a:pPr algn="r"/>
+            <a:r>
+              <a:rPr lang="en-US" sz="1600" b="1" dirty="0"/>
+              <a:t>Hints</a:t>
+            </a:r>
+            <a:r>
+              <a:rPr lang="en-US" sz="1600" dirty="0"/>
+              <a:t>: observe the 2D EME propagation results to guide you to the best settings of a) and b).</a:t>
+            </a:r>
+          </a:p>
+        </p:txBody>
+      </p:sp>
+    </p:spTree>
+    <p:extLst>
+      <p:ext uri="{BB962C8B-B14F-4D97-AF65-F5344CB8AC3E}">
+        <p14:creationId xmlns:p14="http://schemas.microsoft.com/office/powerpoint/2010/main" val="2685215753"/>
+      </p:ext>
+    </p:extLst>
+  </p:cSld>
+  <p:clrMapOvr>
+    <a:masterClrMapping/>
+  </p:clrMapOvr>
+</p:sld>
+</file>
+
+<file path=ppt/slides/slide13.xml><?xml version="1.0" encoding="utf-8"?>
+<p:sld xmlns:a="http://schemas.openxmlformats.org/drawingml/2006/main" xmlns:r="http://schemas.openxmlformats.org/officeDocument/2006/relationships" xmlns:p="http://schemas.openxmlformats.org/presentationml/2006/main">
+  <p:cSld>
+    <p:spTree>
+      <p:nvGrpSpPr>
+        <p:cNvPr id="1" name=""/>
+        <p:cNvGrpSpPr/>
+        <p:nvPr/>
+      </p:nvGrpSpPr>
+      <p:grpSpPr>
+        <a:xfrm>
+          <a:off x="0" y="0"/>
+          <a:ext cx="0" cy="0"/>
+          <a:chOff x="0" y="0"/>
+          <a:chExt cx="0" cy="0"/>
+        </a:xfrm>
+      </p:grpSpPr>
+      <p:sp>
+        <p:nvSpPr>
+          <p:cNvPr id="2" name="Título 1">
+            <a:extLst>
+              <a:ext uri="{FF2B5EF4-FFF2-40B4-BE49-F238E27FC236}">
+                <a16:creationId xmlns:a16="http://schemas.microsoft.com/office/drawing/2014/main" id="{1919EE04-608E-4B8E-B687-7B8B2C35C0E6}"/>
+              </a:ext>
+            </a:extLst>
+          </p:cNvPr>
+          <p:cNvSpPr>
+            <a:spLocks noGrp="1"/>
+          </p:cNvSpPr>
+          <p:nvPr>
+            <p:ph type="title"/>
+          </p:nvPr>
+        </p:nvSpPr>
+        <p:spPr/>
+        <p:txBody>
+          <a:bodyPr/>
+          <a:lstStyle/>
+          <a:p>
+            <a:r>
+              <a:rPr lang="es-ES" dirty="0"/>
+              <a:t>Resolución </a:t>
+            </a:r>
+            <a:r>
+              <a:rPr lang="en-US" sz="2000" dirty="0"/>
               <a:t>Learning outcome #4.2</a:t>
             </a:r>
             <a:endParaRPr lang="es-ES" dirty="0"/>
@@ -4539,8 +5304,8 @@
         </p:nvSpPr>
         <p:spPr>
           <a:xfrm>
-            <a:off x="590550" y="5037559"/>
-            <a:ext cx="10972800" cy="369332"/>
+            <a:off x="590550" y="4788574"/>
+            <a:ext cx="10972800" cy="1292662"/>
           </a:xfrm>
         </p:spPr>
         <p:txBody>
@@ -4552,7 +5317,7 @@
                 <a:latin typeface="Arial" panose="020B0604020202020204" pitchFamily="34" charset="0"/>
                 <a:cs typeface="Arial" panose="020B0604020202020204" pitchFamily="34" charset="0"/>
               </a:rPr>
-              <a:t>Para los valores de </a:t>
+              <a:t>Para optimizar el rendimiento del acoplador MMI 2x2, se ha realizado un ajuste manual iterativo de su geometría. Por un lado, se ha acortado ligeramente su longitud teórica (</a:t>
             </a:r>
             <a:r>
               <a:rPr lang="es-ES" sz="1200" dirty="0" err="1">
@@ -4566,7 +5331,7 @@
                 <a:latin typeface="Arial" panose="020B0604020202020204" pitchFamily="34" charset="0"/>
                 <a:cs typeface="Arial" panose="020B0604020202020204" pitchFamily="34" charset="0"/>
               </a:rPr>
-              <a:t> = -0.4 µm y </a:t>
+              <a:t> = -0.4 µm) y, por otro, se han desplazado transversalmente las guías de entrada y salida (</a:t>
             </a:r>
             <a:r>
               <a:rPr lang="es-ES" sz="1200" dirty="0" err="1">
@@ -4580,35 +5345,22 @@
                 <a:latin typeface="Arial" panose="020B0604020202020204" pitchFamily="34" charset="0"/>
                 <a:cs typeface="Arial" panose="020B0604020202020204" pitchFamily="34" charset="0"/>
               </a:rPr>
-              <a:t> = 0.05 µm se obtiene el mínimo valor de </a:t>
-            </a:r>
-            <a:r>
-              <a:rPr lang="es-ES" sz="1200" dirty="0" err="1">
-                <a:latin typeface="Arial" panose="020B0604020202020204" pitchFamily="34" charset="0"/>
-                <a:cs typeface="Arial" panose="020B0604020202020204" pitchFamily="34" charset="0"/>
-              </a:rPr>
-              <a:t>excess</a:t>
-            </a:r>
+              <a:t> = 0.05 µm) para alinearlas con mayor precisión sobre los máximos reales del patrón de interferencia.</a:t>
+            </a:r>
+          </a:p>
+          <a:p>
+            <a:endParaRPr lang="es-ES" sz="1200" dirty="0">
+              <a:latin typeface="Arial" panose="020B0604020202020204" pitchFamily="34" charset="0"/>
+              <a:cs typeface="Arial" panose="020B0604020202020204" pitchFamily="34" charset="0"/>
+            </a:endParaRPr>
+          </a:p>
+          <a:p>
             <a:r>
               <a:rPr lang="es-ES" sz="1200" dirty="0">
                 <a:latin typeface="Arial" panose="020B0604020202020204" pitchFamily="34" charset="0"/>
                 <a:cs typeface="Arial" panose="020B0604020202020204" pitchFamily="34" charset="0"/>
               </a:rPr>
-              <a:t> </a:t>
-            </a:r>
-            <a:r>
-              <a:rPr lang="es-ES" sz="1200" dirty="0" err="1">
-                <a:latin typeface="Arial" panose="020B0604020202020204" pitchFamily="34" charset="0"/>
-                <a:cs typeface="Arial" panose="020B0604020202020204" pitchFamily="34" charset="0"/>
-              </a:rPr>
-              <a:t>loss</a:t>
-            </a:r>
-            <a:r>
-              <a:rPr lang="es-ES" sz="1200" dirty="0">
-                <a:latin typeface="Arial" panose="020B0604020202020204" pitchFamily="34" charset="0"/>
-                <a:cs typeface="Arial" panose="020B0604020202020204" pitchFamily="34" charset="0"/>
-              </a:rPr>
-              <a:t> =  0.3429 dB. A la derecha se puede observar la propagación con estas especificaciones para el MMI. </a:t>
+              <a:t>Gracias a esta corrección espacial, se ha mejorado la captura de luz en los puertos, logrando minimizar las pérdidas por exceso hasta 0.3429 dB. Simultáneamente, se ha cumplido el objetivo principal de equilibrar el dispositivo, obteniendo una división de potencia casi perfectamente simétrica en las ramas de salida (ratio de 0.508 / 0.492).</a:t>
             </a:r>
           </a:p>
         </p:txBody>
@@ -4670,7 +5422,7 @@
           <a:p>
             <a:fld id="{B6F15528-21DE-4FAA-801E-634DDDAF4B2B}" type="slidenum">
               <a:rPr lang="es-ES" smtClean="0"/>
-              <a:t>11</a:t>
+              <a:t>13</a:t>
             </a:fld>
             <a:endParaRPr lang="es-ES"/>
           </a:p>
@@ -4749,7 +5501,7 @@
 </p:sld>
 </file>
 
-<file path=ppt/slides/slide12.xml><?xml version="1.0" encoding="utf-8"?>
+<file path=ppt/slides/slide14.xml><?xml version="1.0" encoding="utf-8"?>
 <p:sld xmlns:a="http://schemas.openxmlformats.org/drawingml/2006/main" xmlns:r="http://schemas.openxmlformats.org/officeDocument/2006/relationships" xmlns:p="http://schemas.openxmlformats.org/presentationml/2006/main">
   <p:cSld>
     <p:spTree>
@@ -4896,7 +5648,7 @@
           <a:p>
             <a:fld id="{B6F15528-21DE-4FAA-801E-634DDDAF4B2B}" type="slidenum">
               <a:rPr lang="es-ES" smtClean="0"/>
-              <a:t>12</a:t>
+              <a:t>14</a:t>
             </a:fld>
             <a:endParaRPr lang="es-ES"/>
           </a:p>
@@ -5197,7 +5949,7 @@
 </p:sld>
 </file>
 
-<file path=ppt/slides/slide13.xml><?xml version="1.0" encoding="utf-8"?>
+<file path=ppt/slides/slide15.xml><?xml version="1.0" encoding="utf-8"?>
 <p:sld xmlns:a="http://schemas.openxmlformats.org/drawingml/2006/main" xmlns:r="http://schemas.openxmlformats.org/officeDocument/2006/relationships" xmlns:p="http://schemas.openxmlformats.org/presentationml/2006/main">
   <p:cSld>
     <p:spTree>
@@ -5232,7 +5984,7 @@
         </p:nvSpPr>
         <p:spPr>
           <a:xfrm>
-            <a:off x="4876800" y="2153573"/>
+            <a:off x="4876800" y="3180037"/>
             <a:ext cx="6705600" cy="2585323"/>
           </a:xfrm>
         </p:spPr>
@@ -5260,7 +6012,7 @@
           <a:p>
             <a:r>
               <a:rPr lang="es-ES" sz="1200" dirty="0"/>
-              <a:t>Finalmente, para los ensanchamientos mayores (1.3 µm y 1.4 µm), el simulador nos da valores de pérdidas negativos. Al tratarse de un componente pasivo, esto representa un artefacto numérico propio del método de simulación, lo que simplemente nos indica que en esas geometrías las pérdidas reales son virtualmente nulas.</a:t>
+              <a:t>Finalmente, para los ensanchamientos mayores (1.3 µm y 1.4 µm), el simulador nos da valores de pérdidas negativos. Al tratarse de un componente pasivo, esto representa un artefacto numérico propio del método de simulación, lo que simplemente nos indica que en esas geometrías las pérdidas reales son virtualmente nulas. </a:t>
             </a:r>
           </a:p>
         </p:txBody>
@@ -5322,7 +6074,7 @@
           <a:p>
             <a:fld id="{B6F15528-21DE-4FAA-801E-634DDDAF4B2B}" type="slidenum">
               <a:rPr lang="es-ES" smtClean="0"/>
-              <a:t>13</a:t>
+              <a:t>15</a:t>
             </a:fld>
             <a:endParaRPr lang="es-ES"/>
           </a:p>
@@ -5500,7 +6252,7 @@
                     <a:p>
                       <a:pPr rtl="0"/>
                       <a:r>
-                        <a:rPr lang="es-ES" sz="1200">
+                        <a:rPr lang="es-ES" sz="1200" dirty="0">
                           <a:solidFill>
                             <a:srgbClr val="1F1F1F"/>
                           </a:solidFill>
@@ -5508,7 +6260,7 @@
                         </a:rPr>
                         <a:t>0.0964</a:t>
                       </a:r>
-                      <a:endParaRPr lang="es-ES" sz="1200">
+                      <a:endParaRPr lang="es-ES" sz="1200" dirty="0">
                         <a:solidFill>
                           <a:srgbClr val="1F1F1F"/>
                         </a:solidFill>
@@ -5840,7 +6592,7 @@
                     <a:p>
                       <a:pPr rtl="0"/>
                       <a:r>
-                        <a:rPr lang="es-ES" sz="1200">
+                        <a:rPr lang="es-ES" sz="1200" dirty="0">
                           <a:solidFill>
                             <a:srgbClr val="1F1F1F"/>
                           </a:solidFill>
@@ -5848,7 +6600,7 @@
                         </a:rPr>
                         <a:t>0.0150</a:t>
                       </a:r>
-                      <a:endParaRPr lang="es-ES" sz="1200">
+                      <a:endParaRPr lang="es-ES" sz="1200" dirty="0">
                         <a:solidFill>
                           <a:srgbClr val="1F1F1F"/>
                         </a:solidFill>
@@ -6010,7 +6762,7 @@
                     <a:p>
                       <a:pPr rtl="0"/>
                       <a:r>
-                        <a:rPr lang="es-ES" sz="1200">
+                        <a:rPr lang="es-ES" sz="1200" dirty="0">
                           <a:solidFill>
                             <a:srgbClr val="1F1F1F"/>
                           </a:solidFill>
@@ -6018,7 +6770,7 @@
                         </a:rPr>
                         <a:t>0.0002</a:t>
                       </a:r>
-                      <a:endParaRPr lang="es-ES" sz="1200">
+                      <a:endParaRPr lang="es-ES" sz="1200" dirty="0">
                         <a:solidFill>
                           <a:srgbClr val="1F1F1F"/>
                         </a:solidFill>
@@ -6095,7 +6847,7 @@
                     <a:p>
                       <a:pPr rtl="0"/>
                       <a:r>
-                        <a:rPr lang="es-ES" sz="1200">
+                        <a:rPr lang="es-ES" sz="1200" dirty="0">
                           <a:solidFill>
                             <a:srgbClr val="1F1F1F"/>
                           </a:solidFill>
@@ -6103,7 +6855,7 @@
                         </a:rPr>
                         <a:t>-0.0034</a:t>
                       </a:r>
-                      <a:endParaRPr lang="es-ES" sz="1200">
+                      <a:endParaRPr lang="es-ES" sz="1200" dirty="0">
                         <a:solidFill>
                           <a:srgbClr val="1F1F1F"/>
                         </a:solidFill>
@@ -6180,7 +6932,7 @@
                     <a:p>
                       <a:pPr rtl="0"/>
                       <a:r>
-                        <a:rPr lang="es-ES" sz="1200">
+                        <a:rPr lang="es-ES" sz="1200" dirty="0">
                           <a:solidFill>
                             <a:srgbClr val="1F1F1F"/>
                           </a:solidFill>
@@ -6188,7 +6940,7 @@
                         </a:rPr>
                         <a:t>-0.0087</a:t>
                       </a:r>
-                      <a:endParaRPr lang="es-ES" sz="1200">
+                      <a:endParaRPr lang="es-ES" sz="1200" dirty="0">
                         <a:solidFill>
                           <a:srgbClr val="1F1F1F"/>
                         </a:solidFill>
@@ -6273,6 +7025,36 @@
           </a:p>
         </p:txBody>
       </p:sp>
+      <p:pic>
+        <p:nvPicPr>
+          <p:cNvPr id="9" name="Imagen 8">
+            <a:extLst>
+              <a:ext uri="{FF2B5EF4-FFF2-40B4-BE49-F238E27FC236}">
+                <a16:creationId xmlns:a16="http://schemas.microsoft.com/office/drawing/2014/main" id="{7B3BC8C2-F385-40B0-AAE4-C72088C26D97}"/>
+              </a:ext>
+            </a:extLst>
+          </p:cNvPr>
+          <p:cNvPicPr>
+            <a:picLocks noChangeAspect="1"/>
+          </p:cNvPicPr>
+          <p:nvPr/>
+        </p:nvPicPr>
+        <p:blipFill>
+          <a:blip r:embed="rId2"/>
+          <a:stretch>
+            <a:fillRect/>
+          </a:stretch>
+        </p:blipFill>
+        <p:spPr>
+          <a:xfrm>
+            <a:off x="5791200" y="1126930"/>
+            <a:ext cx="4572000" cy="1893536"/>
+          </a:xfrm>
+          <a:prstGeom prst="rect">
+            <a:avLst/>
+          </a:prstGeom>
+        </p:spPr>
+      </p:pic>
     </p:spTree>
     <p:extLst>
       <p:ext uri="{BB962C8B-B14F-4D97-AF65-F5344CB8AC3E}">
@@ -6286,7 +7068,7 @@
 </p:sld>
 </file>
 
-<file path=ppt/slides/slide14.xml><?xml version="1.0" encoding="utf-8"?>
+<file path=ppt/slides/slide16.xml><?xml version="1.0" encoding="utf-8"?>
 <p:sld xmlns:a="http://schemas.openxmlformats.org/drawingml/2006/main" xmlns:r="http://schemas.openxmlformats.org/officeDocument/2006/relationships" xmlns:p="http://schemas.openxmlformats.org/presentationml/2006/main">
   <p:cSld>
     <p:spTree>
@@ -6441,7 +7223,7 @@
           <a:p>
             <a:fld id="{B6F15528-21DE-4FAA-801E-634DDDAF4B2B}" type="slidenum">
               <a:rPr lang="es-ES" smtClean="0"/>
-              <a:t>14</a:t>
+              <a:t>16</a:t>
             </a:fld>
             <a:endParaRPr lang="es-ES"/>
           </a:p>
@@ -6496,7 +7278,7 @@
         <p:spPr>
           <a:xfrm>
             <a:off x="609441" y="4819471"/>
-            <a:ext cx="11199971" cy="1200329"/>
+            <a:ext cx="11199971" cy="1015663"/>
           </a:xfrm>
           <a:prstGeom prst="rect">
             <a:avLst/>
@@ -6533,30 +7315,6 @@
               <a:latin typeface="Arial" panose="020B0604020202020204" pitchFamily="34" charset="0"/>
               <a:cs typeface="Arial" panose="020B0604020202020204" pitchFamily="34" charset="0"/>
             </a:endParaRPr>
-          </a:p>
-          <a:p>
-            <a:pPr algn="just"/>
-            <a:r>
-              <a:rPr lang="en-US" sz="1200" dirty="0">
-                <a:latin typeface="Arial" panose="020B0604020202020204" pitchFamily="34" charset="0"/>
-                <a:cs typeface="Arial" panose="020B0604020202020204" pitchFamily="34" charset="0"/>
-              </a:rPr>
-              <a:t>Dl = 0.1 </a:t>
-            </a:r>
-            <a:r>
-              <a:rPr lang="en-US" sz="1200" dirty="0" err="1">
-                <a:latin typeface="Arial" panose="020B0604020202020204" pitchFamily="34" charset="0"/>
-                <a:cs typeface="Arial" panose="020B0604020202020204" pitchFamily="34" charset="0"/>
-              </a:rPr>
-              <a:t>dy</a:t>
-            </a:r>
-            <a:r>
-              <a:rPr lang="en-US" sz="1200" dirty="0">
-                <a:latin typeface="Arial" panose="020B0604020202020204" pitchFamily="34" charset="0"/>
-                <a:cs typeface="Arial" panose="020B0604020202020204" pitchFamily="34" charset="0"/>
-              </a:rPr>
-              <a:t> = -1</a:t>
-            </a:r>
           </a:p>
           <a:p>
             <a:pPr algn="just"/>
@@ -6697,7 +7455,3191 @@
 </p:sld>
 </file>
 
-<file path=ppt/slides/slide15.xml><?xml version="1.0" encoding="utf-8"?>
+<file path=ppt/slides/slide17.xml><?xml version="1.0" encoding="utf-8"?>
+<p:sld xmlns:a="http://schemas.openxmlformats.org/drawingml/2006/main" xmlns:r="http://schemas.openxmlformats.org/officeDocument/2006/relationships" xmlns:p="http://schemas.openxmlformats.org/presentationml/2006/main">
+  <p:cSld>
+    <p:spTree>
+      <p:nvGrpSpPr>
+        <p:cNvPr id="1" name=""/>
+        <p:cNvGrpSpPr/>
+        <p:nvPr/>
+      </p:nvGrpSpPr>
+      <p:grpSpPr>
+        <a:xfrm>
+          <a:off x="0" y="0"/>
+          <a:ext cx="0" cy="0"/>
+          <a:chOff x="0" y="0"/>
+          <a:chExt cx="0" cy="0"/>
+        </a:xfrm>
+      </p:grpSpPr>
+      <mc:AlternateContent xmlns:mc="http://schemas.openxmlformats.org/markup-compatibility/2006" xmlns:a14="http://schemas.microsoft.com/office/drawing/2010/main">
+        <mc:Choice Requires="a14">
+          <p:sp>
+            <p:nvSpPr>
+              <p:cNvPr id="3" name="Marcador de texto 2">
+                <a:extLst>
+                  <a:ext uri="{FF2B5EF4-FFF2-40B4-BE49-F238E27FC236}">
+                    <a16:creationId xmlns:a16="http://schemas.microsoft.com/office/drawing/2014/main" id="{AE170CC2-ABB7-44B3-B060-94A64E5A9A02}"/>
+                  </a:ext>
+                </a:extLst>
+              </p:cNvPr>
+              <p:cNvSpPr>
+                <a:spLocks noGrp="1"/>
+              </p:cNvSpPr>
+              <p:nvPr>
+                <p:ph type="body" idx="1"/>
+              </p:nvPr>
+            </p:nvSpPr>
+            <p:spPr>
+              <a:xfrm>
+                <a:off x="609600" y="4724400"/>
+                <a:ext cx="10972800" cy="736997"/>
+              </a:xfrm>
+            </p:spPr>
+            <p:txBody>
+              <a:bodyPr/>
+              <a:lstStyle/>
+              <a:p>
+                <a:r>
+                  <a:rPr lang="es-ES" sz="1400" dirty="0"/>
+                  <a:t>Como diseño base sin optimizar, se han implementado los parámetros teóricos exactos para un MMI 1x4 (longitud </a:t>
+                </a:r>
+                <a14:m>
+                  <m:oMath xmlns:m="http://schemas.openxmlformats.org/officeDocument/2006/math">
+                    <m:f>
+                      <m:fPr>
+                        <m:ctrlPr>
+                          <a:rPr lang="es-ES" sz="1400" i="1" dirty="0" smtClean="0">
+                            <a:latin typeface="Cambria Math" panose="02040503050406030204" pitchFamily="18" charset="0"/>
+                          </a:rPr>
+                        </m:ctrlPr>
+                      </m:fPr>
+                      <m:num>
+                        <m:r>
+                          <a:rPr lang="es-ES" sz="1400" i="1" dirty="0" smtClean="0">
+                            <a:latin typeface="Cambria Math" panose="02040503050406030204" pitchFamily="18" charset="0"/>
+                          </a:rPr>
+                          <m:t>3</m:t>
+                        </m:r>
+                        <m:sSub>
+                          <m:sSubPr>
+                            <m:ctrlPr>
+                              <a:rPr lang="es-ES" sz="1400" i="1" dirty="0" smtClean="0">
+                                <a:latin typeface="Cambria Math" panose="02040503050406030204" pitchFamily="18" charset="0"/>
+                              </a:rPr>
+                            </m:ctrlPr>
+                          </m:sSubPr>
+                          <m:e>
+                            <m:r>
+                              <a:rPr lang="es-ES" sz="1400" i="1" dirty="0" smtClean="0">
+                                <a:latin typeface="Cambria Math" panose="02040503050406030204" pitchFamily="18" charset="0"/>
+                              </a:rPr>
+                              <m:t>𝐿</m:t>
+                            </m:r>
+                          </m:e>
+                          <m:sub>
+                            <m:r>
+                              <a:rPr lang="es-ES" sz="1400" i="1" dirty="0" smtClean="0">
+                                <a:latin typeface="Cambria Math" panose="02040503050406030204" pitchFamily="18" charset="0"/>
+                              </a:rPr>
+                              <m:t>𝜋</m:t>
+                            </m:r>
+                          </m:sub>
+                        </m:sSub>
+                      </m:num>
+                      <m:den>
+                        <m:r>
+                          <a:rPr lang="es-ES" sz="1400" i="1" dirty="0" smtClean="0">
+                            <a:latin typeface="Cambria Math" panose="02040503050406030204" pitchFamily="18" charset="0"/>
+                          </a:rPr>
+                          <m:t>16</m:t>
+                        </m:r>
+                      </m:den>
+                    </m:f>
+                  </m:oMath>
+                </a14:m>
+                <a:r>
+                  <a:rPr lang="es-ES" sz="1400" dirty="0"/>
+                  <a:t> y posiciones de salida a </a:t>
+                </a:r>
+                <a14:m>
+                  <m:oMath xmlns:m="http://schemas.openxmlformats.org/officeDocument/2006/math">
+                    <m:r>
+                      <a:rPr lang="es-ES" sz="1400" i="1" dirty="0" smtClean="0">
+                        <a:latin typeface="Cambria Math" panose="02040503050406030204" pitchFamily="18" charset="0"/>
+                      </a:rPr>
+                      <m:t>±</m:t>
+                    </m:r>
+                    <m:f>
+                      <m:fPr>
+                        <m:ctrlPr>
+                          <a:rPr lang="es-ES" sz="1400" i="1" dirty="0" smtClean="0">
+                            <a:latin typeface="Cambria Math" panose="02040503050406030204" pitchFamily="18" charset="0"/>
+                          </a:rPr>
+                        </m:ctrlPr>
+                      </m:fPr>
+                      <m:num>
+                        <m:r>
+                          <a:rPr lang="es-ES" sz="1400" i="1" dirty="0" smtClean="0">
+                            <a:latin typeface="Cambria Math" panose="02040503050406030204" pitchFamily="18" charset="0"/>
+                          </a:rPr>
+                          <m:t>1</m:t>
+                        </m:r>
+                      </m:num>
+                      <m:den>
+                        <m:r>
+                          <a:rPr lang="es-ES" sz="1400" i="1" dirty="0" smtClean="0">
+                            <a:latin typeface="Cambria Math" panose="02040503050406030204" pitchFamily="18" charset="0"/>
+                          </a:rPr>
+                          <m:t>8</m:t>
+                        </m:r>
+                        <m:r>
+                          <a:rPr lang="es-ES" sz="1400" b="0" i="1" dirty="0" smtClean="0">
+                            <a:latin typeface="Cambria Math" panose="02040503050406030204" pitchFamily="18" charset="0"/>
+                          </a:rPr>
+                          <m:t> </m:t>
+                        </m:r>
+                      </m:den>
+                    </m:f>
+                  </m:oMath>
+                </a14:m>
+                <a:r>
+                  <a:rPr lang="es-ES" sz="1400" dirty="0"/>
+                  <a:t> y </a:t>
+                </a:r>
+                <a14:m>
+                  <m:oMath xmlns:m="http://schemas.openxmlformats.org/officeDocument/2006/math">
+                    <m:r>
+                      <a:rPr lang="es-ES" sz="1400" i="1" dirty="0" smtClean="0">
+                        <a:latin typeface="Cambria Math" panose="02040503050406030204" pitchFamily="18" charset="0"/>
+                      </a:rPr>
+                      <m:t>±</m:t>
+                    </m:r>
+                    <m:f>
+                      <m:fPr>
+                        <m:ctrlPr>
+                          <a:rPr lang="es-ES" sz="1400" i="1" dirty="0" smtClean="0">
+                            <a:latin typeface="Cambria Math" panose="02040503050406030204" pitchFamily="18" charset="0"/>
+                          </a:rPr>
+                        </m:ctrlPr>
+                      </m:fPr>
+                      <m:num>
+                        <m:r>
+                          <a:rPr lang="es-ES" sz="1400" i="1" dirty="0" smtClean="0">
+                            <a:latin typeface="Cambria Math" panose="02040503050406030204" pitchFamily="18" charset="0"/>
+                          </a:rPr>
+                          <m:t>3</m:t>
+                        </m:r>
+                      </m:num>
+                      <m:den>
+                        <m:r>
+                          <a:rPr lang="es-ES" sz="1400" i="1" dirty="0" smtClean="0">
+                            <a:latin typeface="Cambria Math" panose="02040503050406030204" pitchFamily="18" charset="0"/>
+                          </a:rPr>
+                          <m:t>8</m:t>
+                        </m:r>
+                      </m:den>
+                    </m:f>
+                  </m:oMath>
+                </a14:m>
+                <a:r>
+                  <a:rPr lang="es-ES" sz="1400" dirty="0"/>
+                  <a:t> del ancho). Aunque se consigue una relación de división de potencia bastante equilibrada (en torno al 25% por rama), el acoplamiento no es ideal, lo que genera unas elevadas pérdidas por exceso de 0.81 dB. Este resultado justifica la necesidad de realizar las optimizaciones geométricas posteriores.</a:t>
+                </a:r>
+              </a:p>
+            </p:txBody>
+          </p:sp>
+        </mc:Choice>
+        <mc:Fallback xmlns="">
+          <p:sp>
+            <p:nvSpPr>
+              <p:cNvPr id="3" name="Marcador de texto 2">
+                <a:extLst>
+                  <a:ext uri="{FF2B5EF4-FFF2-40B4-BE49-F238E27FC236}">
+                    <a16:creationId xmlns:a16="http://schemas.microsoft.com/office/drawing/2014/main" id="{AE170CC2-ABB7-44B3-B060-94A64E5A9A02}"/>
+                  </a:ext>
+                </a:extLst>
+              </p:cNvPr>
+              <p:cNvSpPr>
+                <a:spLocks noGrp="1" noRot="1" noChangeAspect="1" noMove="1" noResize="1" noEditPoints="1" noAdjustHandles="1" noChangeArrowheads="1" noChangeShapeType="1" noTextEdit="1"/>
+              </p:cNvSpPr>
+              <p:nvPr>
+                <p:ph type="body" idx="1"/>
+              </p:nvPr>
+            </p:nvSpPr>
+            <p:spPr>
+              <a:xfrm>
+                <a:off x="609600" y="4724400"/>
+                <a:ext cx="10972800" cy="736997"/>
+              </a:xfrm>
+              <a:blipFill>
+                <a:blip r:embed="rId2"/>
+                <a:stretch>
+                  <a:fillRect l="-1000" t="-826" r="-333" b="-14050"/>
+                </a:stretch>
+              </a:blipFill>
+            </p:spPr>
+            <p:txBody>
+              <a:bodyPr/>
+              <a:lstStyle/>
+              <a:p>
+                <a:r>
+                  <a:rPr lang="es-ES">
+                    <a:noFill/>
+                  </a:rPr>
+                  <a:t> </a:t>
+                </a:r>
+              </a:p>
+            </p:txBody>
+          </p:sp>
+        </mc:Fallback>
+      </mc:AlternateContent>
+      <p:sp>
+        <p:nvSpPr>
+          <p:cNvPr id="4" name="Marcador de pie de página 3">
+            <a:extLst>
+              <a:ext uri="{FF2B5EF4-FFF2-40B4-BE49-F238E27FC236}">
+                <a16:creationId xmlns:a16="http://schemas.microsoft.com/office/drawing/2014/main" id="{F5652E37-7B6D-4A72-AC4B-73088E5D50BD}"/>
+              </a:ext>
+            </a:extLst>
+          </p:cNvPr>
+          <p:cNvSpPr>
+            <a:spLocks noGrp="1"/>
+          </p:cNvSpPr>
+          <p:nvPr>
+            <p:ph type="ftr" sz="quarter" idx="5"/>
+          </p:nvPr>
+        </p:nvSpPr>
+        <p:spPr/>
+        <p:txBody>
+          <a:bodyPr/>
+          <a:lstStyle/>
+          <a:p>
+            <a:pPr marL="12700">
+              <a:spcBef>
+                <a:spcPts val="15"/>
+              </a:spcBef>
+            </a:pPr>
+            <a:r>
+              <a:rPr lang="es-ES" spc="-5"/>
+              <a:t>LAB 2.0. COUPLERS</a:t>
+            </a:r>
+            <a:endParaRPr lang="es-ES" spc="-5" dirty="0"/>
+          </a:p>
+        </p:txBody>
+      </p:sp>
+      <p:sp>
+        <p:nvSpPr>
+          <p:cNvPr id="5" name="Marcador de número de diapositiva 4">
+            <a:extLst>
+              <a:ext uri="{FF2B5EF4-FFF2-40B4-BE49-F238E27FC236}">
+                <a16:creationId xmlns:a16="http://schemas.microsoft.com/office/drawing/2014/main" id="{D5638AE2-B201-4795-BF32-35EAD9B831AF}"/>
+              </a:ext>
+            </a:extLst>
+          </p:cNvPr>
+          <p:cNvSpPr>
+            <a:spLocks noGrp="1"/>
+          </p:cNvSpPr>
+          <p:nvPr>
+            <p:ph type="sldNum" sz="quarter" idx="7"/>
+          </p:nvPr>
+        </p:nvSpPr>
+        <p:spPr/>
+        <p:txBody>
+          <a:bodyPr/>
+          <a:lstStyle/>
+          <a:p>
+            <a:fld id="{B6F15528-21DE-4FAA-801E-634DDDAF4B2B}" type="slidenum">
+              <a:rPr lang="es-ES" smtClean="0"/>
+              <a:t>17</a:t>
+            </a:fld>
+            <a:endParaRPr lang="es-ES"/>
+          </a:p>
+        </p:txBody>
+      </p:sp>
+      <p:sp>
+        <p:nvSpPr>
+          <p:cNvPr id="7" name="Título 1">
+            <a:extLst>
+              <a:ext uri="{FF2B5EF4-FFF2-40B4-BE49-F238E27FC236}">
+                <a16:creationId xmlns:a16="http://schemas.microsoft.com/office/drawing/2014/main" id="{1EF48184-A353-4AB8-B746-BA66723320DE}"/>
+              </a:ext>
+            </a:extLst>
+          </p:cNvPr>
+          <p:cNvSpPr>
+            <a:spLocks noGrp="1"/>
+          </p:cNvSpPr>
+          <p:nvPr>
+            <p:ph type="title"/>
+          </p:nvPr>
+        </p:nvSpPr>
+        <p:spPr>
+          <a:xfrm>
+            <a:off x="590550" y="206375"/>
+            <a:ext cx="10991850" cy="307975"/>
+          </a:xfrm>
+        </p:spPr>
+        <p:txBody>
+          <a:bodyPr/>
+          <a:lstStyle/>
+          <a:p>
+            <a:r>
+              <a:rPr lang="es-ES" dirty="0"/>
+              <a:t>Resolución </a:t>
+            </a:r>
+            <a:r>
+              <a:rPr lang="en-US" sz="2000" dirty="0"/>
+              <a:t>Learning outcome #</a:t>
+            </a:r>
+            <a:r>
+              <a:rPr lang="en-US" dirty="0"/>
+              <a:t>5</a:t>
+            </a:r>
+            <a:endParaRPr lang="es-ES" dirty="0"/>
+          </a:p>
+        </p:txBody>
+      </p:sp>
+      <p:pic>
+        <p:nvPicPr>
+          <p:cNvPr id="9" name="Imagen 8">
+            <a:extLst>
+              <a:ext uri="{FF2B5EF4-FFF2-40B4-BE49-F238E27FC236}">
+                <a16:creationId xmlns:a16="http://schemas.microsoft.com/office/drawing/2014/main" id="{EF38F2E1-754D-4187-838D-7D0283C0281E}"/>
+              </a:ext>
+            </a:extLst>
+          </p:cNvPr>
+          <p:cNvPicPr>
+            <a:picLocks noChangeAspect="1"/>
+          </p:cNvPicPr>
+          <p:nvPr/>
+        </p:nvPicPr>
+        <p:blipFill>
+          <a:blip r:embed="rId3"/>
+          <a:stretch>
+            <a:fillRect/>
+          </a:stretch>
+        </p:blipFill>
+        <p:spPr>
+          <a:xfrm>
+            <a:off x="609600" y="1143000"/>
+            <a:ext cx="3664414" cy="3085499"/>
+          </a:xfrm>
+          <a:prstGeom prst="rect">
+            <a:avLst/>
+          </a:prstGeom>
+        </p:spPr>
+      </p:pic>
+      <p:pic>
+        <p:nvPicPr>
+          <p:cNvPr id="17" name="Imagen 16">
+            <a:extLst>
+              <a:ext uri="{FF2B5EF4-FFF2-40B4-BE49-F238E27FC236}">
+                <a16:creationId xmlns:a16="http://schemas.microsoft.com/office/drawing/2014/main" id="{0BA24095-0C25-4035-B30D-8A49926EB8E2}"/>
+              </a:ext>
+            </a:extLst>
+          </p:cNvPr>
+          <p:cNvPicPr>
+            <a:picLocks noChangeAspect="1"/>
+          </p:cNvPicPr>
+          <p:nvPr/>
+        </p:nvPicPr>
+        <p:blipFill>
+          <a:blip r:embed="rId4"/>
+          <a:stretch>
+            <a:fillRect/>
+          </a:stretch>
+        </p:blipFill>
+        <p:spPr>
+          <a:xfrm>
+            <a:off x="5410200" y="1988644"/>
+            <a:ext cx="4724400" cy="1595138"/>
+          </a:xfrm>
+          <a:prstGeom prst="rect">
+            <a:avLst/>
+          </a:prstGeom>
+        </p:spPr>
+      </p:pic>
+      <p:sp>
+        <p:nvSpPr>
+          <p:cNvPr id="18" name="Título 1">
+            <a:extLst>
+              <a:ext uri="{FF2B5EF4-FFF2-40B4-BE49-F238E27FC236}">
+                <a16:creationId xmlns:a16="http://schemas.microsoft.com/office/drawing/2014/main" id="{6593265B-7858-4487-9FCA-4993C8257AB5}"/>
+              </a:ext>
+            </a:extLst>
+          </p:cNvPr>
+          <p:cNvSpPr txBox="1">
+            <a:spLocks/>
+          </p:cNvSpPr>
+          <p:nvPr/>
+        </p:nvSpPr>
+        <p:spPr>
+          <a:xfrm>
+            <a:off x="590550" y="582579"/>
+            <a:ext cx="10991850" cy="307975"/>
+          </a:xfrm>
+          <a:prstGeom prst="rect">
+            <a:avLst/>
+          </a:prstGeom>
+        </p:spPr>
+        <p:txBody>
+          <a:bodyPr wrap="square" lIns="0" tIns="0" rIns="0" bIns="0">
+            <a:spAutoFit/>
+          </a:bodyPr>
+          <a:lstStyle>
+            <a:lvl1pPr>
+              <a:defRPr sz="2000" b="1" i="0">
+                <a:solidFill>
+                  <a:schemeClr val="tx1"/>
+                </a:solidFill>
+                <a:latin typeface="Calibri"/>
+                <a:ea typeface="+mj-ea"/>
+                <a:cs typeface="Calibri"/>
+              </a:defRPr>
+            </a:lvl1pPr>
+          </a:lstStyle>
+          <a:p>
+            <a:r>
+              <a:rPr lang="es-ES" u="sng" kern="0" dirty="0"/>
+              <a:t>Sin optimización</a:t>
+            </a:r>
+          </a:p>
+        </p:txBody>
+      </p:sp>
+    </p:spTree>
+    <p:extLst>
+      <p:ext uri="{BB962C8B-B14F-4D97-AF65-F5344CB8AC3E}">
+        <p14:creationId xmlns:p14="http://schemas.microsoft.com/office/powerpoint/2010/main" val="2371510807"/>
+      </p:ext>
+    </p:extLst>
+  </p:cSld>
+  <p:clrMapOvr>
+    <a:masterClrMapping/>
+  </p:clrMapOvr>
+</p:sld>
+</file>
+
+<file path=ppt/slides/slide18.xml><?xml version="1.0" encoding="utf-8"?>
+<p:sld xmlns:a="http://schemas.openxmlformats.org/drawingml/2006/main" xmlns:r="http://schemas.openxmlformats.org/officeDocument/2006/relationships" xmlns:p="http://schemas.openxmlformats.org/presentationml/2006/main">
+  <p:cSld>
+    <p:spTree>
+      <p:nvGrpSpPr>
+        <p:cNvPr id="1" name=""/>
+        <p:cNvGrpSpPr/>
+        <p:nvPr/>
+      </p:nvGrpSpPr>
+      <p:grpSpPr>
+        <a:xfrm>
+          <a:off x="0" y="0"/>
+          <a:ext cx="0" cy="0"/>
+          <a:chOff x="0" y="0"/>
+          <a:chExt cx="0" cy="0"/>
+        </a:xfrm>
+      </p:grpSpPr>
+      <p:sp>
+        <p:nvSpPr>
+          <p:cNvPr id="3" name="Marcador de texto 2">
+            <a:extLst>
+              <a:ext uri="{FF2B5EF4-FFF2-40B4-BE49-F238E27FC236}">
+                <a16:creationId xmlns:a16="http://schemas.microsoft.com/office/drawing/2014/main" id="{AE170CC2-ABB7-44B3-B060-94A64E5A9A02}"/>
+              </a:ext>
+            </a:extLst>
+          </p:cNvPr>
+          <p:cNvSpPr>
+            <a:spLocks noGrp="1"/>
+          </p:cNvSpPr>
+          <p:nvPr>
+            <p:ph type="body" idx="1"/>
+          </p:nvPr>
+        </p:nvSpPr>
+        <p:spPr>
+          <a:xfrm>
+            <a:off x="609600" y="4800600"/>
+            <a:ext cx="10972800" cy="1046440"/>
+          </a:xfrm>
+        </p:spPr>
+        <p:txBody>
+          <a:bodyPr/>
+          <a:lstStyle/>
+          <a:p>
+            <a:r>
+              <a:rPr lang="es-ES" sz="1400" dirty="0"/>
+              <a:t>La primera optimización ha consistido en la aplicación de un desplazamiento de las guías de onda de salida, modificando ligeramente su posición transversal (parámetro </a:t>
+            </a:r>
+            <a:r>
+              <a:rPr lang="es-ES" sz="1400" dirty="0" err="1"/>
+              <a:t>dy</a:t>
+            </a:r>
+            <a:r>
+              <a:rPr lang="es-ES" sz="1400" dirty="0"/>
+              <a:t>) para alinearlas con mayor precisión sobre los verdaderos máximos de intensidad del patrón de interferencia multimodo, mejorando así el acoplamiento y el balance de potencia. Además se ha hecho un incremento de longitud del MMI respecto a la longitud ideal de -1.3 µm</a:t>
+            </a:r>
+            <a:r>
+              <a:rPr lang="es-ES" sz="1400" dirty="0">
+                <a:latin typeface="Arial" panose="020B0604020202020204" pitchFamily="34" charset="0"/>
+                <a:cs typeface="Arial" panose="020B0604020202020204" pitchFamily="34" charset="0"/>
+              </a:rPr>
+              <a:t>.</a:t>
+            </a:r>
+            <a:endParaRPr lang="es-ES" sz="1400" dirty="0"/>
+          </a:p>
+          <a:p>
+            <a:endParaRPr lang="es-ES" sz="1200" dirty="0"/>
+          </a:p>
+        </p:txBody>
+      </p:sp>
+      <p:sp>
+        <p:nvSpPr>
+          <p:cNvPr id="4" name="Marcador de pie de página 3">
+            <a:extLst>
+              <a:ext uri="{FF2B5EF4-FFF2-40B4-BE49-F238E27FC236}">
+                <a16:creationId xmlns:a16="http://schemas.microsoft.com/office/drawing/2014/main" id="{F5652E37-7B6D-4A72-AC4B-73088E5D50BD}"/>
+              </a:ext>
+            </a:extLst>
+          </p:cNvPr>
+          <p:cNvSpPr>
+            <a:spLocks noGrp="1"/>
+          </p:cNvSpPr>
+          <p:nvPr>
+            <p:ph type="ftr" sz="quarter" idx="5"/>
+          </p:nvPr>
+        </p:nvSpPr>
+        <p:spPr/>
+        <p:txBody>
+          <a:bodyPr/>
+          <a:lstStyle/>
+          <a:p>
+            <a:pPr marL="12700">
+              <a:spcBef>
+                <a:spcPts val="15"/>
+              </a:spcBef>
+            </a:pPr>
+            <a:r>
+              <a:rPr lang="es-ES" spc="-5"/>
+              <a:t>LAB 2.0. COUPLERS</a:t>
+            </a:r>
+            <a:endParaRPr lang="es-ES" spc="-5" dirty="0"/>
+          </a:p>
+        </p:txBody>
+      </p:sp>
+      <p:sp>
+        <p:nvSpPr>
+          <p:cNvPr id="5" name="Marcador de número de diapositiva 4">
+            <a:extLst>
+              <a:ext uri="{FF2B5EF4-FFF2-40B4-BE49-F238E27FC236}">
+                <a16:creationId xmlns:a16="http://schemas.microsoft.com/office/drawing/2014/main" id="{D5638AE2-B201-4795-BF32-35EAD9B831AF}"/>
+              </a:ext>
+            </a:extLst>
+          </p:cNvPr>
+          <p:cNvSpPr>
+            <a:spLocks noGrp="1"/>
+          </p:cNvSpPr>
+          <p:nvPr>
+            <p:ph type="sldNum" sz="quarter" idx="7"/>
+          </p:nvPr>
+        </p:nvSpPr>
+        <p:spPr/>
+        <p:txBody>
+          <a:bodyPr/>
+          <a:lstStyle/>
+          <a:p>
+            <a:fld id="{B6F15528-21DE-4FAA-801E-634DDDAF4B2B}" type="slidenum">
+              <a:rPr lang="es-ES" smtClean="0"/>
+              <a:t>18</a:t>
+            </a:fld>
+            <a:endParaRPr lang="es-ES"/>
+          </a:p>
+        </p:txBody>
+      </p:sp>
+      <p:sp>
+        <p:nvSpPr>
+          <p:cNvPr id="7" name="Título 1">
+            <a:extLst>
+              <a:ext uri="{FF2B5EF4-FFF2-40B4-BE49-F238E27FC236}">
+                <a16:creationId xmlns:a16="http://schemas.microsoft.com/office/drawing/2014/main" id="{1EF48184-A353-4AB8-B746-BA66723320DE}"/>
+              </a:ext>
+            </a:extLst>
+          </p:cNvPr>
+          <p:cNvSpPr>
+            <a:spLocks noGrp="1"/>
+          </p:cNvSpPr>
+          <p:nvPr>
+            <p:ph type="title"/>
+          </p:nvPr>
+        </p:nvSpPr>
+        <p:spPr>
+          <a:xfrm>
+            <a:off x="590550" y="206375"/>
+            <a:ext cx="10991850" cy="307975"/>
+          </a:xfrm>
+        </p:spPr>
+        <p:txBody>
+          <a:bodyPr/>
+          <a:lstStyle/>
+          <a:p>
+            <a:r>
+              <a:rPr lang="es-ES" dirty="0"/>
+              <a:t>Resolución </a:t>
+            </a:r>
+            <a:r>
+              <a:rPr lang="en-US" sz="2000" dirty="0"/>
+              <a:t>Learning outcome #</a:t>
+            </a:r>
+            <a:r>
+              <a:rPr lang="en-US" dirty="0"/>
+              <a:t>5</a:t>
+            </a:r>
+            <a:endParaRPr lang="es-ES" dirty="0"/>
+          </a:p>
+        </p:txBody>
+      </p:sp>
+      <p:pic>
+        <p:nvPicPr>
+          <p:cNvPr id="11" name="Imagen 10">
+            <a:extLst>
+              <a:ext uri="{FF2B5EF4-FFF2-40B4-BE49-F238E27FC236}">
+                <a16:creationId xmlns:a16="http://schemas.microsoft.com/office/drawing/2014/main" id="{0BF4ECB0-B0AD-4791-B333-6FCEB5DB199D}"/>
+              </a:ext>
+            </a:extLst>
+          </p:cNvPr>
+          <p:cNvPicPr>
+            <a:picLocks noChangeAspect="1"/>
+          </p:cNvPicPr>
+          <p:nvPr/>
+        </p:nvPicPr>
+        <p:blipFill>
+          <a:blip r:embed="rId2"/>
+          <a:stretch>
+            <a:fillRect/>
+          </a:stretch>
+        </p:blipFill>
+        <p:spPr>
+          <a:xfrm>
+            <a:off x="615950" y="1107763"/>
+            <a:ext cx="3631637" cy="3083237"/>
+          </a:xfrm>
+          <a:prstGeom prst="rect">
+            <a:avLst/>
+          </a:prstGeom>
+        </p:spPr>
+      </p:pic>
+      <p:pic>
+        <p:nvPicPr>
+          <p:cNvPr id="6" name="Imagen 5">
+            <a:extLst>
+              <a:ext uri="{FF2B5EF4-FFF2-40B4-BE49-F238E27FC236}">
+                <a16:creationId xmlns:a16="http://schemas.microsoft.com/office/drawing/2014/main" id="{3DE218C0-C0CF-4FCE-8A90-AAD46CE9F91A}"/>
+              </a:ext>
+            </a:extLst>
+          </p:cNvPr>
+          <p:cNvPicPr>
+            <a:picLocks noChangeAspect="1"/>
+          </p:cNvPicPr>
+          <p:nvPr/>
+        </p:nvPicPr>
+        <p:blipFill>
+          <a:blip r:embed="rId3"/>
+          <a:stretch>
+            <a:fillRect/>
+          </a:stretch>
+        </p:blipFill>
+        <p:spPr>
+          <a:xfrm>
+            <a:off x="4648200" y="1752600"/>
+            <a:ext cx="6466136" cy="1764163"/>
+          </a:xfrm>
+          <a:prstGeom prst="rect">
+            <a:avLst/>
+          </a:prstGeom>
+        </p:spPr>
+      </p:pic>
+      <p:sp>
+        <p:nvSpPr>
+          <p:cNvPr id="12" name="Título 1">
+            <a:extLst>
+              <a:ext uri="{FF2B5EF4-FFF2-40B4-BE49-F238E27FC236}">
+                <a16:creationId xmlns:a16="http://schemas.microsoft.com/office/drawing/2014/main" id="{1B51BFF4-9218-471E-A6BE-99ABF5BB6B81}"/>
+              </a:ext>
+            </a:extLst>
+          </p:cNvPr>
+          <p:cNvSpPr txBox="1">
+            <a:spLocks/>
+          </p:cNvSpPr>
+          <p:nvPr/>
+        </p:nvSpPr>
+        <p:spPr>
+          <a:xfrm>
+            <a:off x="590550" y="582579"/>
+            <a:ext cx="10991850" cy="307975"/>
+          </a:xfrm>
+          <a:prstGeom prst="rect">
+            <a:avLst/>
+          </a:prstGeom>
+        </p:spPr>
+        <p:txBody>
+          <a:bodyPr wrap="square" lIns="0" tIns="0" rIns="0" bIns="0">
+            <a:spAutoFit/>
+          </a:bodyPr>
+          <a:lstStyle>
+            <a:lvl1pPr>
+              <a:defRPr sz="2000" b="1" i="0">
+                <a:solidFill>
+                  <a:schemeClr val="tx1"/>
+                </a:solidFill>
+                <a:latin typeface="Calibri"/>
+                <a:ea typeface="+mj-ea"/>
+                <a:cs typeface="Calibri"/>
+              </a:defRPr>
+            </a:lvl1pPr>
+          </a:lstStyle>
+          <a:p>
+            <a:r>
+              <a:rPr lang="es-ES" u="sng" kern="0" dirty="0"/>
+              <a:t>1ª optimización</a:t>
+            </a:r>
+          </a:p>
+        </p:txBody>
+      </p:sp>
+    </p:spTree>
+    <p:extLst>
+      <p:ext uri="{BB962C8B-B14F-4D97-AF65-F5344CB8AC3E}">
+        <p14:creationId xmlns:p14="http://schemas.microsoft.com/office/powerpoint/2010/main" val="3287160060"/>
+      </p:ext>
+    </p:extLst>
+  </p:cSld>
+  <p:clrMapOvr>
+    <a:masterClrMapping/>
+  </p:clrMapOvr>
+</p:sld>
+</file>
+
+<file path=ppt/slides/slide19.xml><?xml version="1.0" encoding="utf-8"?>
+<p:sld xmlns:a="http://schemas.openxmlformats.org/drawingml/2006/main" xmlns:r="http://schemas.openxmlformats.org/officeDocument/2006/relationships" xmlns:p="http://schemas.openxmlformats.org/presentationml/2006/main">
+  <p:cSld>
+    <p:spTree>
+      <p:nvGrpSpPr>
+        <p:cNvPr id="1" name=""/>
+        <p:cNvGrpSpPr/>
+        <p:nvPr/>
+      </p:nvGrpSpPr>
+      <p:grpSpPr>
+        <a:xfrm>
+          <a:off x="0" y="0"/>
+          <a:ext cx="0" cy="0"/>
+          <a:chOff x="0" y="0"/>
+          <a:chExt cx="0" cy="0"/>
+        </a:xfrm>
+      </p:grpSpPr>
+      <p:sp>
+        <p:nvSpPr>
+          <p:cNvPr id="3" name="Marcador de texto 2">
+            <a:extLst>
+              <a:ext uri="{FF2B5EF4-FFF2-40B4-BE49-F238E27FC236}">
+                <a16:creationId xmlns:a16="http://schemas.microsoft.com/office/drawing/2014/main" id="{AE170CC2-ABB7-44B3-B060-94A64E5A9A02}"/>
+              </a:ext>
+            </a:extLst>
+          </p:cNvPr>
+          <p:cNvSpPr>
+            <a:spLocks noGrp="1"/>
+          </p:cNvSpPr>
+          <p:nvPr>
+            <p:ph type="body" idx="1"/>
+          </p:nvPr>
+        </p:nvSpPr>
+        <p:spPr>
+          <a:xfrm>
+            <a:off x="590550" y="4897880"/>
+            <a:ext cx="10972800" cy="861774"/>
+          </a:xfrm>
+        </p:spPr>
+        <p:txBody>
+          <a:bodyPr/>
+          <a:lstStyle/>
+          <a:p>
+            <a:r>
+              <a:rPr lang="es-ES" sz="1400" dirty="0"/>
+              <a:t>Para la segunda optimización, se ha incrementado el ancho de las guías de acceso (entrada y salidas) mediante el parámetro </a:t>
+            </a:r>
+            <a:r>
+              <a:rPr lang="es-ES" sz="1400" dirty="0" err="1"/>
+              <a:t>dw</a:t>
+            </a:r>
+            <a:r>
+              <a:rPr lang="es-ES" sz="1400" dirty="0"/>
+              <a:t> = 1.5 µm. Este ensanchamiento permite una adaptación modal mucho más suave entre las guías y la región multimodo. Como resultado, se logra una reducción drástica de las pérdidas por exceso, alcanzando un valor óptimo de 0.013 dB, a la vez que se obtiene un balance de potencia casi perfecto (en torno al 25% por rama) en los cuatro puertos de salida.</a:t>
+            </a:r>
+          </a:p>
+        </p:txBody>
+      </p:sp>
+      <p:sp>
+        <p:nvSpPr>
+          <p:cNvPr id="4" name="Marcador de pie de página 3">
+            <a:extLst>
+              <a:ext uri="{FF2B5EF4-FFF2-40B4-BE49-F238E27FC236}">
+                <a16:creationId xmlns:a16="http://schemas.microsoft.com/office/drawing/2014/main" id="{F5652E37-7B6D-4A72-AC4B-73088E5D50BD}"/>
+              </a:ext>
+            </a:extLst>
+          </p:cNvPr>
+          <p:cNvSpPr>
+            <a:spLocks noGrp="1"/>
+          </p:cNvSpPr>
+          <p:nvPr>
+            <p:ph type="ftr" sz="quarter" idx="5"/>
+          </p:nvPr>
+        </p:nvSpPr>
+        <p:spPr/>
+        <p:txBody>
+          <a:bodyPr/>
+          <a:lstStyle/>
+          <a:p>
+            <a:pPr marL="12700">
+              <a:spcBef>
+                <a:spcPts val="15"/>
+              </a:spcBef>
+            </a:pPr>
+            <a:r>
+              <a:rPr lang="es-ES" spc="-5"/>
+              <a:t>LAB 2.0. COUPLERS</a:t>
+            </a:r>
+            <a:endParaRPr lang="es-ES" spc="-5" dirty="0"/>
+          </a:p>
+        </p:txBody>
+      </p:sp>
+      <p:sp>
+        <p:nvSpPr>
+          <p:cNvPr id="5" name="Marcador de número de diapositiva 4">
+            <a:extLst>
+              <a:ext uri="{FF2B5EF4-FFF2-40B4-BE49-F238E27FC236}">
+                <a16:creationId xmlns:a16="http://schemas.microsoft.com/office/drawing/2014/main" id="{D5638AE2-B201-4795-BF32-35EAD9B831AF}"/>
+              </a:ext>
+            </a:extLst>
+          </p:cNvPr>
+          <p:cNvSpPr>
+            <a:spLocks noGrp="1"/>
+          </p:cNvSpPr>
+          <p:nvPr>
+            <p:ph type="sldNum" sz="quarter" idx="7"/>
+          </p:nvPr>
+        </p:nvSpPr>
+        <p:spPr/>
+        <p:txBody>
+          <a:bodyPr/>
+          <a:lstStyle/>
+          <a:p>
+            <a:fld id="{B6F15528-21DE-4FAA-801E-634DDDAF4B2B}" type="slidenum">
+              <a:rPr lang="es-ES" smtClean="0"/>
+              <a:t>19</a:t>
+            </a:fld>
+            <a:endParaRPr lang="es-ES"/>
+          </a:p>
+        </p:txBody>
+      </p:sp>
+      <p:sp>
+        <p:nvSpPr>
+          <p:cNvPr id="7" name="Título 1">
+            <a:extLst>
+              <a:ext uri="{FF2B5EF4-FFF2-40B4-BE49-F238E27FC236}">
+                <a16:creationId xmlns:a16="http://schemas.microsoft.com/office/drawing/2014/main" id="{1EF48184-A353-4AB8-B746-BA66723320DE}"/>
+              </a:ext>
+            </a:extLst>
+          </p:cNvPr>
+          <p:cNvSpPr>
+            <a:spLocks noGrp="1"/>
+          </p:cNvSpPr>
+          <p:nvPr>
+            <p:ph type="title"/>
+          </p:nvPr>
+        </p:nvSpPr>
+        <p:spPr>
+          <a:xfrm>
+            <a:off x="590550" y="206375"/>
+            <a:ext cx="10991850" cy="307975"/>
+          </a:xfrm>
+        </p:spPr>
+        <p:txBody>
+          <a:bodyPr/>
+          <a:lstStyle/>
+          <a:p>
+            <a:r>
+              <a:rPr lang="es-ES" dirty="0"/>
+              <a:t>Resolución </a:t>
+            </a:r>
+            <a:r>
+              <a:rPr lang="en-US" sz="2000" dirty="0"/>
+              <a:t>Learning outcome #</a:t>
+            </a:r>
+            <a:r>
+              <a:rPr lang="en-US" dirty="0"/>
+              <a:t>5</a:t>
+            </a:r>
+            <a:endParaRPr lang="es-ES" dirty="0"/>
+          </a:p>
+        </p:txBody>
+      </p:sp>
+      <p:pic>
+        <p:nvPicPr>
+          <p:cNvPr id="15" name="Imagen 14">
+            <a:extLst>
+              <a:ext uri="{FF2B5EF4-FFF2-40B4-BE49-F238E27FC236}">
+                <a16:creationId xmlns:a16="http://schemas.microsoft.com/office/drawing/2014/main" id="{63D8F2F1-C4FB-4B55-B68C-38596DF67FF8}"/>
+              </a:ext>
+            </a:extLst>
+          </p:cNvPr>
+          <p:cNvPicPr>
+            <a:picLocks noChangeAspect="1"/>
+          </p:cNvPicPr>
+          <p:nvPr/>
+        </p:nvPicPr>
+        <p:blipFill>
+          <a:blip r:embed="rId2"/>
+          <a:stretch>
+            <a:fillRect/>
+          </a:stretch>
+        </p:blipFill>
+        <p:spPr>
+          <a:xfrm>
+            <a:off x="609600" y="1140012"/>
+            <a:ext cx="3641073" cy="3089395"/>
+          </a:xfrm>
+          <a:prstGeom prst="rect">
+            <a:avLst/>
+          </a:prstGeom>
+        </p:spPr>
+      </p:pic>
+      <p:sp>
+        <p:nvSpPr>
+          <p:cNvPr id="9" name="Título 1">
+            <a:extLst>
+              <a:ext uri="{FF2B5EF4-FFF2-40B4-BE49-F238E27FC236}">
+                <a16:creationId xmlns:a16="http://schemas.microsoft.com/office/drawing/2014/main" id="{9C46014E-CF00-483E-BB2D-3A230071BC61}"/>
+              </a:ext>
+            </a:extLst>
+          </p:cNvPr>
+          <p:cNvSpPr txBox="1">
+            <a:spLocks/>
+          </p:cNvSpPr>
+          <p:nvPr/>
+        </p:nvSpPr>
+        <p:spPr>
+          <a:xfrm>
+            <a:off x="590550" y="582579"/>
+            <a:ext cx="10991850" cy="307975"/>
+          </a:xfrm>
+          <a:prstGeom prst="rect">
+            <a:avLst/>
+          </a:prstGeom>
+        </p:spPr>
+        <p:txBody>
+          <a:bodyPr wrap="square" lIns="0" tIns="0" rIns="0" bIns="0">
+            <a:spAutoFit/>
+          </a:bodyPr>
+          <a:lstStyle>
+            <a:lvl1pPr>
+              <a:defRPr sz="2000" b="1" i="0">
+                <a:solidFill>
+                  <a:schemeClr val="tx1"/>
+                </a:solidFill>
+                <a:latin typeface="Calibri"/>
+                <a:ea typeface="+mj-ea"/>
+                <a:cs typeface="Calibri"/>
+              </a:defRPr>
+            </a:lvl1pPr>
+          </a:lstStyle>
+          <a:p>
+            <a:r>
+              <a:rPr lang="es-ES" u="sng" kern="0" dirty="0"/>
+              <a:t>2ª optimización</a:t>
+            </a:r>
+          </a:p>
+        </p:txBody>
+      </p:sp>
+      <p:pic>
+        <p:nvPicPr>
+          <p:cNvPr id="8" name="Imagen 7">
+            <a:extLst>
+              <a:ext uri="{FF2B5EF4-FFF2-40B4-BE49-F238E27FC236}">
+                <a16:creationId xmlns:a16="http://schemas.microsoft.com/office/drawing/2014/main" id="{ABF37F4B-299F-49EC-9B6D-15A7BB8A640C}"/>
+              </a:ext>
+            </a:extLst>
+          </p:cNvPr>
+          <p:cNvPicPr>
+            <a:picLocks noChangeAspect="1"/>
+          </p:cNvPicPr>
+          <p:nvPr/>
+        </p:nvPicPr>
+        <p:blipFill>
+          <a:blip r:embed="rId3"/>
+          <a:stretch>
+            <a:fillRect/>
+          </a:stretch>
+        </p:blipFill>
+        <p:spPr>
+          <a:xfrm>
+            <a:off x="5257800" y="890554"/>
+            <a:ext cx="5615580" cy="3447499"/>
+          </a:xfrm>
+          <a:prstGeom prst="rect">
+            <a:avLst/>
+          </a:prstGeom>
+        </p:spPr>
+      </p:pic>
+    </p:spTree>
+    <p:extLst>
+      <p:ext uri="{BB962C8B-B14F-4D97-AF65-F5344CB8AC3E}">
+        <p14:creationId xmlns:p14="http://schemas.microsoft.com/office/powerpoint/2010/main" val="2183422995"/>
+      </p:ext>
+    </p:extLst>
+  </p:cSld>
+  <p:clrMapOvr>
+    <a:masterClrMapping/>
+  </p:clrMapOvr>
+</p:sld>
+</file>
+
+<file path=ppt/slides/slide2.xml><?xml version="1.0" encoding="utf-8"?>
+<p:sld xmlns:a="http://schemas.openxmlformats.org/drawingml/2006/main" xmlns:r="http://schemas.openxmlformats.org/officeDocument/2006/relationships" xmlns:p="http://schemas.openxmlformats.org/presentationml/2006/main">
+  <p:cSld>
+    <p:spTree>
+      <p:nvGrpSpPr>
+        <p:cNvPr id="1" name="">
+          <a:extLst>
+            <a:ext uri="{FF2B5EF4-FFF2-40B4-BE49-F238E27FC236}">
+              <a16:creationId xmlns:a16="http://schemas.microsoft.com/office/drawing/2014/main" id="{4848A4D4-C3C4-085B-A7AD-EA04D83F480F}"/>
+            </a:ext>
+          </a:extLst>
+        </p:cNvPr>
+        <p:cNvGrpSpPr/>
+        <p:nvPr/>
+      </p:nvGrpSpPr>
+      <p:grpSpPr>
+        <a:xfrm>
+          <a:off x="0" y="0"/>
+          <a:ext cx="0" cy="0"/>
+          <a:chOff x="0" y="0"/>
+          <a:chExt cx="0" cy="0"/>
+        </a:xfrm>
+      </p:grpSpPr>
+      <p:sp>
+        <p:nvSpPr>
+          <p:cNvPr id="16" name="object 16">
+            <a:extLst>
+              <a:ext uri="{FF2B5EF4-FFF2-40B4-BE49-F238E27FC236}">
+                <a16:creationId xmlns:a16="http://schemas.microsoft.com/office/drawing/2014/main" id="{1B7433F1-7A0E-D925-6140-7305139D053A}"/>
+              </a:ext>
+            </a:extLst>
+          </p:cNvPr>
+          <p:cNvSpPr txBox="1">
+            <a:spLocks noGrp="1"/>
+          </p:cNvSpPr>
+          <p:nvPr>
+            <p:ph type="title"/>
+          </p:nvPr>
+        </p:nvSpPr>
+        <p:spPr>
+          <a:xfrm>
+            <a:off x="685800" y="408883"/>
+            <a:ext cx="6153785" cy="705321"/>
+          </a:xfrm>
+          <a:prstGeom prst="rect">
+            <a:avLst/>
+          </a:prstGeom>
+        </p:spPr>
+        <p:txBody>
+          <a:bodyPr vert="horz" wrap="square" lIns="0" tIns="12700" rIns="0" bIns="0" rtlCol="0">
+            <a:spAutoFit/>
+          </a:bodyPr>
+          <a:lstStyle/>
+          <a:p>
+            <a:pPr marL="12700">
+              <a:lnSpc>
+                <a:spcPct val="100000"/>
+              </a:lnSpc>
+              <a:spcBef>
+                <a:spcPts val="100"/>
+              </a:spcBef>
+            </a:pPr>
+            <a:r>
+              <a:rPr lang="es-ES" sz="2500" u="sng" spc="-5" dirty="0" err="1">
+                <a:latin typeface="+mj-lt"/>
+                <a:cs typeface="Lucida Sans"/>
+              </a:rPr>
+              <a:t>Instructions</a:t>
+            </a:r>
+            <a:br>
+              <a:rPr lang="es-ES" sz="2400" spc="-5" dirty="0">
+                <a:latin typeface="+mj-lt"/>
+                <a:cs typeface="Lucida Sans"/>
+              </a:rPr>
+            </a:br>
+            <a:r>
+              <a:rPr lang="es-ES" b="0" spc="-5" dirty="0">
+                <a:latin typeface="+mj-lt"/>
+                <a:cs typeface="Lucida Sans"/>
+              </a:rPr>
+              <a:t>General</a:t>
+            </a:r>
+            <a:endParaRPr sz="2400" b="0" dirty="0">
+              <a:latin typeface="+mj-lt"/>
+              <a:cs typeface="Lucida Sans"/>
+            </a:endParaRPr>
+          </a:p>
+        </p:txBody>
+      </p:sp>
+      <p:pic>
+        <p:nvPicPr>
+          <p:cNvPr id="83" name="Gráfico 82">
+            <a:extLst>
+              <a:ext uri="{FF2B5EF4-FFF2-40B4-BE49-F238E27FC236}">
+                <a16:creationId xmlns:a16="http://schemas.microsoft.com/office/drawing/2014/main" id="{E518E73B-CE22-A00C-9C86-634FB762EE69}"/>
+              </a:ext>
+            </a:extLst>
+          </p:cNvPr>
+          <p:cNvPicPr>
+            <a:picLocks noChangeAspect="1"/>
+          </p:cNvPicPr>
+          <p:nvPr/>
+        </p:nvPicPr>
+        <p:blipFill>
+          <a:blip r:embed="rId2">
+            <a:extLst>
+              <a:ext uri="{96DAC541-7B7A-43D3-8B79-37D633B846F1}">
+                <asvg:svgBlip xmlns:asvg="http://schemas.microsoft.com/office/drawing/2016/SVG/main" r:embed="rId3"/>
+              </a:ext>
+            </a:extLst>
+          </a:blip>
+          <a:stretch>
+            <a:fillRect/>
+          </a:stretch>
+        </p:blipFill>
+        <p:spPr>
+          <a:xfrm>
+            <a:off x="5045006" y="6356057"/>
+            <a:ext cx="6409575" cy="363174"/>
+          </a:xfrm>
+          <a:prstGeom prst="rect">
+            <a:avLst/>
+          </a:prstGeom>
+        </p:spPr>
+      </p:pic>
+      <p:sp>
+        <p:nvSpPr>
+          <p:cNvPr id="84" name="Marcador de número de diapositiva 83">
+            <a:extLst>
+              <a:ext uri="{FF2B5EF4-FFF2-40B4-BE49-F238E27FC236}">
+                <a16:creationId xmlns:a16="http://schemas.microsoft.com/office/drawing/2014/main" id="{1E163A6B-DFE4-C67D-5F3E-A56ACEF2EA4C}"/>
+              </a:ext>
+            </a:extLst>
+          </p:cNvPr>
+          <p:cNvSpPr>
+            <a:spLocks noGrp="1"/>
+          </p:cNvSpPr>
+          <p:nvPr>
+            <p:ph type="sldNum" sz="quarter" idx="7"/>
+          </p:nvPr>
+        </p:nvSpPr>
+        <p:spPr/>
+        <p:txBody>
+          <a:bodyPr/>
+          <a:lstStyle/>
+          <a:p>
+            <a:fld id="{B6F15528-21DE-4FAA-801E-634DDDAF4B2B}" type="slidenum">
+              <a:rPr lang="es-ES" smtClean="0"/>
+              <a:t>2</a:t>
+            </a:fld>
+            <a:endParaRPr lang="es-ES"/>
+          </a:p>
+        </p:txBody>
+      </p:sp>
+      <p:sp>
+        <p:nvSpPr>
+          <p:cNvPr id="3" name="Marcador de pie de página 2">
+            <a:extLst>
+              <a:ext uri="{FF2B5EF4-FFF2-40B4-BE49-F238E27FC236}">
+                <a16:creationId xmlns:a16="http://schemas.microsoft.com/office/drawing/2014/main" id="{95FC84FF-30D3-FDAB-0A5A-0F07F8EE1161}"/>
+              </a:ext>
+            </a:extLst>
+          </p:cNvPr>
+          <p:cNvSpPr>
+            <a:spLocks noGrp="1"/>
+          </p:cNvSpPr>
+          <p:nvPr>
+            <p:ph type="ftr" sz="quarter" idx="5"/>
+          </p:nvPr>
+        </p:nvSpPr>
+        <p:spPr/>
+        <p:txBody>
+          <a:bodyPr/>
+          <a:lstStyle/>
+          <a:p>
+            <a:pPr marL="12700">
+              <a:spcBef>
+                <a:spcPts val="15"/>
+              </a:spcBef>
+            </a:pPr>
+            <a:r>
+              <a:rPr lang="es-ES" spc="-5"/>
+              <a:t>LAB 2.0. COUPLERS</a:t>
+            </a:r>
+            <a:endParaRPr lang="es-ES" spc="-5" dirty="0"/>
+          </a:p>
+        </p:txBody>
+      </p:sp>
+      <p:sp>
+        <p:nvSpPr>
+          <p:cNvPr id="4" name="Marcador de texto 2">
+            <a:extLst>
+              <a:ext uri="{FF2B5EF4-FFF2-40B4-BE49-F238E27FC236}">
+                <a16:creationId xmlns:a16="http://schemas.microsoft.com/office/drawing/2014/main" id="{9F7BC140-B3D8-C3CB-55AD-9064C7CDE9CA}"/>
+              </a:ext>
+            </a:extLst>
+          </p:cNvPr>
+          <p:cNvSpPr txBox="1">
+            <a:spLocks/>
+          </p:cNvSpPr>
+          <p:nvPr/>
+        </p:nvSpPr>
+        <p:spPr>
+          <a:xfrm>
+            <a:off x="608011" y="1163263"/>
+            <a:ext cx="11048999" cy="4958137"/>
+          </a:xfrm>
+          <a:prstGeom prst="rect">
+            <a:avLst/>
+          </a:prstGeom>
+        </p:spPr>
+        <p:txBody>
+          <a:bodyPr>
+            <a:normAutofit/>
+          </a:bodyPr>
+          <a:lstStyle>
+            <a:lvl1pPr marL="0">
+              <a:defRPr>
+                <a:latin typeface="+mn-lt"/>
+                <a:ea typeface="+mn-ea"/>
+                <a:cs typeface="+mn-cs"/>
+              </a:defRPr>
+            </a:lvl1pPr>
+            <a:lvl2pPr marL="457200">
+              <a:defRPr>
+                <a:latin typeface="+mn-lt"/>
+                <a:ea typeface="+mn-ea"/>
+                <a:cs typeface="+mn-cs"/>
+              </a:defRPr>
+            </a:lvl2pPr>
+            <a:lvl3pPr marL="914400">
+              <a:defRPr>
+                <a:latin typeface="+mn-lt"/>
+                <a:ea typeface="+mn-ea"/>
+                <a:cs typeface="+mn-cs"/>
+              </a:defRPr>
+            </a:lvl3pPr>
+            <a:lvl4pPr marL="1371600">
+              <a:defRPr>
+                <a:latin typeface="+mn-lt"/>
+                <a:ea typeface="+mn-ea"/>
+                <a:cs typeface="+mn-cs"/>
+              </a:defRPr>
+            </a:lvl4pPr>
+            <a:lvl5pPr marL="1828800">
+              <a:defRPr>
+                <a:latin typeface="+mn-lt"/>
+                <a:ea typeface="+mn-ea"/>
+                <a:cs typeface="+mn-cs"/>
+              </a:defRPr>
+            </a:lvl5pPr>
+            <a:lvl6pPr marL="2286000">
+              <a:defRPr>
+                <a:latin typeface="+mn-lt"/>
+                <a:ea typeface="+mn-ea"/>
+                <a:cs typeface="+mn-cs"/>
+              </a:defRPr>
+            </a:lvl6pPr>
+            <a:lvl7pPr marL="2743200">
+              <a:defRPr>
+                <a:latin typeface="+mn-lt"/>
+                <a:ea typeface="+mn-ea"/>
+                <a:cs typeface="+mn-cs"/>
+              </a:defRPr>
+            </a:lvl7pPr>
+            <a:lvl8pPr marL="3200400">
+              <a:defRPr>
+                <a:latin typeface="+mn-lt"/>
+                <a:ea typeface="+mn-ea"/>
+                <a:cs typeface="+mn-cs"/>
+              </a:defRPr>
+            </a:lvl8pPr>
+            <a:lvl9pPr marL="3657600">
+              <a:defRPr>
+                <a:latin typeface="+mn-lt"/>
+                <a:ea typeface="+mn-ea"/>
+                <a:cs typeface="+mn-cs"/>
+              </a:defRPr>
+            </a:lvl9pPr>
+          </a:lstStyle>
+          <a:p>
+            <a:pPr algn="just"/>
+            <a:r>
+              <a:rPr lang="en-US" sz="2000" b="1" kern="0" dirty="0">
+                <a:solidFill>
+                  <a:sysClr val="windowText" lastClr="000000"/>
+                </a:solidFill>
+                <a:sym typeface="Wingdings" pitchFamily="2" charset="2"/>
+              </a:rPr>
+              <a:t>SCRIPTS</a:t>
+            </a:r>
+          </a:p>
+          <a:p>
+            <a:pPr marL="342900" indent="-342900" algn="just">
+              <a:buFont typeface="Arial" panose="020B0604020202020204" pitchFamily="34" charset="0"/>
+              <a:buChar char="•"/>
+            </a:pPr>
+            <a:r>
+              <a:rPr lang="en-US" kern="0" dirty="0">
+                <a:solidFill>
+                  <a:sysClr val="windowText" lastClr="000000"/>
+                </a:solidFill>
+                <a:sym typeface="Wingdings" pitchFamily="2" charset="2"/>
+              </a:rPr>
+              <a:t>From 	GitHub  </a:t>
+            </a:r>
+          </a:p>
+          <a:p>
+            <a:pPr marL="800100" lvl="1" indent="-342900" algn="just">
+              <a:buFont typeface="Arial" panose="020B0604020202020204" pitchFamily="34" charset="0"/>
+              <a:buChar char="•"/>
+            </a:pPr>
+            <a:r>
+              <a:rPr lang="en-US" kern="0" dirty="0">
+                <a:solidFill>
+                  <a:sysClr val="windowText" lastClr="000000"/>
+                </a:solidFill>
+                <a:sym typeface="Wingdings" pitchFamily="2" charset="2"/>
+              </a:rPr>
+              <a:t>Fork the repo: https://github.com/cccanvas-upv/pic-upv-lab2.git</a:t>
+            </a:r>
+          </a:p>
+          <a:p>
+            <a:pPr marL="800100" lvl="1" indent="-342900" algn="just">
+              <a:buFont typeface="Arial" panose="020B0604020202020204" pitchFamily="34" charset="0"/>
+              <a:buChar char="•"/>
+            </a:pPr>
+            <a:r>
+              <a:rPr lang="en-US" kern="0" dirty="0">
+                <a:solidFill>
+                  <a:sysClr val="windowText" lastClr="000000"/>
+                </a:solidFill>
+                <a:sym typeface="Wingdings" pitchFamily="2" charset="2"/>
+              </a:rPr>
+              <a:t>Clone the repo using </a:t>
+            </a:r>
+            <a:r>
+              <a:rPr lang="en-US" kern="0" dirty="0" err="1">
+                <a:solidFill>
+                  <a:sysClr val="windowText" lastClr="000000"/>
+                </a:solidFill>
+                <a:sym typeface="Wingdings" pitchFamily="2" charset="2"/>
+              </a:rPr>
+              <a:t>VSCode</a:t>
+            </a:r>
+            <a:endParaRPr lang="en-US" kern="0" dirty="0">
+              <a:solidFill>
+                <a:sysClr val="windowText" lastClr="000000"/>
+              </a:solidFill>
+              <a:sym typeface="Wingdings" pitchFamily="2" charset="2"/>
+            </a:endParaRPr>
+          </a:p>
+          <a:p>
+            <a:pPr marL="342900" indent="-342900" algn="just">
+              <a:buFont typeface="Arial" panose="020B0604020202020204" pitchFamily="34" charset="0"/>
+              <a:buChar char="•"/>
+            </a:pPr>
+            <a:r>
+              <a:rPr lang="en-US" kern="0" dirty="0">
+                <a:solidFill>
+                  <a:sysClr val="windowText" lastClr="000000"/>
+                </a:solidFill>
+              </a:rPr>
+              <a:t>Run the </a:t>
+            </a:r>
+            <a:r>
+              <a:rPr lang="en-US" kern="0" dirty="0" err="1">
+                <a:solidFill>
+                  <a:sysClr val="windowText" lastClr="000000"/>
+                </a:solidFill>
+              </a:rPr>
+              <a:t>Jupyter</a:t>
+            </a:r>
+            <a:r>
+              <a:rPr lang="en-US" kern="0" dirty="0">
+                <a:solidFill>
+                  <a:sysClr val="windowText" lastClr="000000"/>
+                </a:solidFill>
+              </a:rPr>
+              <a:t> Notebook: </a:t>
+            </a:r>
+          </a:p>
+          <a:p>
+            <a:pPr marL="800100" lvl="1" indent="-342900" algn="just">
+              <a:buFont typeface="Arial" panose="020B0604020202020204" pitchFamily="34" charset="0"/>
+              <a:buChar char="•"/>
+            </a:pPr>
+            <a:r>
+              <a:rPr lang="en-US" kern="0" dirty="0" err="1">
+                <a:solidFill>
+                  <a:sysClr val="windowText" lastClr="000000"/>
+                </a:solidFill>
+              </a:rPr>
+              <a:t>COUPLERS_Student.ipynb</a:t>
+            </a:r>
+            <a:r>
+              <a:rPr lang="en-US" kern="0" dirty="0">
+                <a:solidFill>
+                  <a:sysClr val="windowText" lastClr="000000"/>
+                </a:solidFill>
+              </a:rPr>
+              <a:t> </a:t>
+            </a:r>
+          </a:p>
+          <a:p>
+            <a:pPr algn="just"/>
+            <a:endParaRPr lang="en-US" b="1" i="1" dirty="0"/>
+          </a:p>
+          <a:p>
+            <a:pPr algn="just"/>
+            <a:r>
+              <a:rPr lang="en-US" b="1" i="1" dirty="0"/>
+              <a:t>Cross-Sections </a:t>
+            </a:r>
+            <a:r>
+              <a:rPr lang="en-US" i="1" dirty="0"/>
+              <a:t>to be studied:</a:t>
+            </a:r>
+            <a:endParaRPr lang="en-US" b="1" i="1" dirty="0"/>
+          </a:p>
+          <a:p>
+            <a:pPr algn="just"/>
+            <a:endParaRPr lang="en-US" sz="2000" b="1" i="1" dirty="0"/>
+          </a:p>
+          <a:p>
+            <a:pPr algn="just"/>
+            <a:endParaRPr lang="en-US" sz="2000" kern="0" dirty="0">
+              <a:solidFill>
+                <a:sysClr val="windowText" lastClr="000000"/>
+              </a:solidFill>
+            </a:endParaRPr>
+          </a:p>
+        </p:txBody>
+      </p:sp>
+      <p:sp>
+        <p:nvSpPr>
+          <p:cNvPr id="96" name="object 7">
+            <a:extLst>
+              <a:ext uri="{FF2B5EF4-FFF2-40B4-BE49-F238E27FC236}">
+                <a16:creationId xmlns:a16="http://schemas.microsoft.com/office/drawing/2014/main" id="{BB459788-0671-D4BA-B6DB-A3544D24EA92}"/>
+              </a:ext>
+            </a:extLst>
+          </p:cNvPr>
+          <p:cNvSpPr/>
+          <p:nvPr/>
+        </p:nvSpPr>
+        <p:spPr>
+          <a:xfrm>
+            <a:off x="1241591" y="3685362"/>
+            <a:ext cx="3929379" cy="1902460"/>
+          </a:xfrm>
+          <a:custGeom>
+            <a:avLst/>
+            <a:gdLst/>
+            <a:ahLst/>
+            <a:cxnLst/>
+            <a:rect l="l" t="t" r="r" b="b"/>
+            <a:pathLst>
+              <a:path w="3929379" h="1902460">
+                <a:moveTo>
+                  <a:pt x="0" y="1901952"/>
+                </a:moveTo>
+                <a:lnTo>
+                  <a:pt x="3928872" y="1901952"/>
+                </a:lnTo>
+                <a:lnTo>
+                  <a:pt x="3928872" y="0"/>
+                </a:lnTo>
+                <a:lnTo>
+                  <a:pt x="0" y="0"/>
+                </a:lnTo>
+                <a:lnTo>
+                  <a:pt x="0" y="1901952"/>
+                </a:lnTo>
+                <a:close/>
+              </a:path>
+            </a:pathLst>
+          </a:custGeom>
+          <a:solidFill>
+            <a:srgbClr val="F1F1F1"/>
+          </a:solidFill>
+        </p:spPr>
+        <p:txBody>
+          <a:bodyPr wrap="square" lIns="0" tIns="0" rIns="0" bIns="0" rtlCol="0"/>
+          <a:lstStyle/>
+          <a:p>
+            <a:endParaRPr dirty="0"/>
+          </a:p>
+        </p:txBody>
+      </p:sp>
+      <p:sp>
+        <p:nvSpPr>
+          <p:cNvPr id="97" name="object 62">
+            <a:extLst>
+              <a:ext uri="{FF2B5EF4-FFF2-40B4-BE49-F238E27FC236}">
+                <a16:creationId xmlns:a16="http://schemas.microsoft.com/office/drawing/2014/main" id="{13E0425E-CEDF-CBC4-B34B-0CC3951920EA}"/>
+              </a:ext>
+            </a:extLst>
+          </p:cNvPr>
+          <p:cNvSpPr/>
+          <p:nvPr/>
+        </p:nvSpPr>
+        <p:spPr>
+          <a:xfrm>
+            <a:off x="1795778" y="4331380"/>
+            <a:ext cx="67949" cy="610424"/>
+          </a:xfrm>
+          <a:custGeom>
+            <a:avLst/>
+            <a:gdLst/>
+            <a:ahLst/>
+            <a:cxnLst/>
+            <a:rect l="l" t="t" r="r" b="b"/>
+            <a:pathLst>
+              <a:path w="76200" h="986155">
+                <a:moveTo>
+                  <a:pt x="31750" y="909827"/>
+                </a:moveTo>
+                <a:lnTo>
+                  <a:pt x="0" y="909827"/>
+                </a:lnTo>
+                <a:lnTo>
+                  <a:pt x="38100" y="986027"/>
+                </a:lnTo>
+                <a:lnTo>
+                  <a:pt x="69850" y="922527"/>
+                </a:lnTo>
+                <a:lnTo>
+                  <a:pt x="31750" y="922527"/>
+                </a:lnTo>
+                <a:lnTo>
+                  <a:pt x="31750" y="909827"/>
+                </a:lnTo>
+                <a:close/>
+              </a:path>
+              <a:path w="76200" h="986155">
+                <a:moveTo>
+                  <a:pt x="44450" y="63500"/>
+                </a:moveTo>
+                <a:lnTo>
+                  <a:pt x="31750" y="63500"/>
+                </a:lnTo>
+                <a:lnTo>
+                  <a:pt x="31750" y="922527"/>
+                </a:lnTo>
+                <a:lnTo>
+                  <a:pt x="44450" y="922527"/>
+                </a:lnTo>
+                <a:lnTo>
+                  <a:pt x="44450" y="63500"/>
+                </a:lnTo>
+                <a:close/>
+              </a:path>
+              <a:path w="76200" h="986155">
+                <a:moveTo>
+                  <a:pt x="76200" y="909827"/>
+                </a:moveTo>
+                <a:lnTo>
+                  <a:pt x="44450" y="909827"/>
+                </a:lnTo>
+                <a:lnTo>
+                  <a:pt x="44450" y="922527"/>
+                </a:lnTo>
+                <a:lnTo>
+                  <a:pt x="69850" y="922527"/>
+                </a:lnTo>
+                <a:lnTo>
+                  <a:pt x="76200" y="909827"/>
+                </a:lnTo>
+                <a:close/>
+              </a:path>
+              <a:path w="76200" h="986155">
+                <a:moveTo>
+                  <a:pt x="38100" y="0"/>
+                </a:moveTo>
+                <a:lnTo>
+                  <a:pt x="0" y="76200"/>
+                </a:lnTo>
+                <a:lnTo>
+                  <a:pt x="31750" y="76200"/>
+                </a:lnTo>
+                <a:lnTo>
+                  <a:pt x="31750" y="63500"/>
+                </a:lnTo>
+                <a:lnTo>
+                  <a:pt x="69850" y="63500"/>
+                </a:lnTo>
+                <a:lnTo>
+                  <a:pt x="38100" y="0"/>
+                </a:lnTo>
+                <a:close/>
+              </a:path>
+              <a:path w="76200" h="986155">
+                <a:moveTo>
+                  <a:pt x="69850" y="63500"/>
+                </a:moveTo>
+                <a:lnTo>
+                  <a:pt x="44450" y="63500"/>
+                </a:lnTo>
+                <a:lnTo>
+                  <a:pt x="44450" y="76200"/>
+                </a:lnTo>
+                <a:lnTo>
+                  <a:pt x="76200" y="76200"/>
+                </a:lnTo>
+                <a:lnTo>
+                  <a:pt x="69850" y="63500"/>
+                </a:lnTo>
+                <a:close/>
+              </a:path>
+            </a:pathLst>
+          </a:custGeom>
+          <a:solidFill>
+            <a:srgbClr val="000000"/>
+          </a:solidFill>
+        </p:spPr>
+        <p:txBody>
+          <a:bodyPr wrap="square" lIns="0" tIns="0" rIns="0" bIns="0" rtlCol="0"/>
+          <a:lstStyle/>
+          <a:p>
+            <a:endParaRPr/>
+          </a:p>
+        </p:txBody>
+      </p:sp>
+      <p:sp>
+        <p:nvSpPr>
+          <p:cNvPr id="98" name="object 63">
+            <a:extLst>
+              <a:ext uri="{FF2B5EF4-FFF2-40B4-BE49-F238E27FC236}">
+                <a16:creationId xmlns:a16="http://schemas.microsoft.com/office/drawing/2014/main" id="{FDE45797-C0E3-ACE0-F66B-057BDEDB9070}"/>
+              </a:ext>
+            </a:extLst>
+          </p:cNvPr>
+          <p:cNvSpPr txBox="1"/>
+          <p:nvPr/>
+        </p:nvSpPr>
+        <p:spPr>
+          <a:xfrm>
+            <a:off x="1229760" y="4389164"/>
+            <a:ext cx="577850" cy="454025"/>
+          </a:xfrm>
+          <a:prstGeom prst="rect">
+            <a:avLst/>
+          </a:prstGeom>
+        </p:spPr>
+        <p:txBody>
+          <a:bodyPr vert="horz" wrap="square" lIns="0" tIns="13335" rIns="0" bIns="0" rtlCol="0">
+            <a:spAutoFit/>
+          </a:bodyPr>
+          <a:lstStyle/>
+          <a:p>
+            <a:pPr marR="3175" algn="ctr">
+              <a:lnSpc>
+                <a:spcPct val="100000"/>
+              </a:lnSpc>
+              <a:spcBef>
+                <a:spcPts val="105"/>
+              </a:spcBef>
+            </a:pPr>
+            <a:r>
+              <a:rPr sz="1400" dirty="0">
+                <a:latin typeface="Calibri"/>
+                <a:cs typeface="Calibri"/>
+              </a:rPr>
+              <a:t>h</a:t>
+            </a:r>
+          </a:p>
+          <a:p>
+            <a:pPr marR="5080" algn="ctr">
+              <a:lnSpc>
+                <a:spcPct val="100000"/>
+              </a:lnSpc>
+              <a:spcBef>
+                <a:spcPts val="5"/>
+              </a:spcBef>
+            </a:pPr>
+            <a:r>
+              <a:rPr sz="1400" spc="-10" dirty="0">
+                <a:latin typeface="Calibri"/>
+                <a:cs typeface="Calibri"/>
+              </a:rPr>
+              <a:t>(h</a:t>
+            </a:r>
+            <a:r>
+              <a:rPr sz="1400" dirty="0">
+                <a:latin typeface="Calibri"/>
+                <a:cs typeface="Calibri"/>
+              </a:rPr>
+              <a:t>eig</a:t>
+            </a:r>
+            <a:r>
+              <a:rPr sz="1400" spc="-25" dirty="0">
+                <a:latin typeface="Calibri"/>
+                <a:cs typeface="Calibri"/>
+              </a:rPr>
+              <a:t>h</a:t>
+            </a:r>
+            <a:r>
+              <a:rPr sz="1400" spc="-5" dirty="0">
+                <a:latin typeface="Calibri"/>
+                <a:cs typeface="Calibri"/>
+              </a:rPr>
+              <a:t>t</a:t>
+            </a:r>
+            <a:r>
+              <a:rPr sz="1400" dirty="0">
+                <a:latin typeface="Calibri"/>
+                <a:cs typeface="Calibri"/>
+              </a:rPr>
+              <a:t>)</a:t>
+            </a:r>
+          </a:p>
+        </p:txBody>
+      </p:sp>
+      <p:sp>
+        <p:nvSpPr>
+          <p:cNvPr id="99" name="object 64">
+            <a:extLst>
+              <a:ext uri="{FF2B5EF4-FFF2-40B4-BE49-F238E27FC236}">
+                <a16:creationId xmlns:a16="http://schemas.microsoft.com/office/drawing/2014/main" id="{ABAAA5DD-56CA-BF94-2180-F0866658B6B3}"/>
+              </a:ext>
+            </a:extLst>
+          </p:cNvPr>
+          <p:cNvSpPr/>
+          <p:nvPr/>
+        </p:nvSpPr>
+        <p:spPr>
+          <a:xfrm>
+            <a:off x="1948179" y="4155787"/>
+            <a:ext cx="914400" cy="89266"/>
+          </a:xfrm>
+          <a:custGeom>
+            <a:avLst/>
+            <a:gdLst/>
+            <a:ahLst/>
+            <a:cxnLst/>
+            <a:rect l="l" t="t" r="r" b="b"/>
+            <a:pathLst>
+              <a:path w="1758314" h="76200">
+                <a:moveTo>
+                  <a:pt x="76200" y="0"/>
+                </a:moveTo>
+                <a:lnTo>
+                  <a:pt x="0" y="38100"/>
+                </a:lnTo>
+                <a:lnTo>
+                  <a:pt x="76200" y="76200"/>
+                </a:lnTo>
+                <a:lnTo>
+                  <a:pt x="76200" y="44450"/>
+                </a:lnTo>
+                <a:lnTo>
+                  <a:pt x="63500" y="44450"/>
+                </a:lnTo>
+                <a:lnTo>
+                  <a:pt x="63500" y="31750"/>
+                </a:lnTo>
+                <a:lnTo>
+                  <a:pt x="76200" y="31750"/>
+                </a:lnTo>
+                <a:lnTo>
+                  <a:pt x="76200" y="0"/>
+                </a:lnTo>
+                <a:close/>
+              </a:path>
+              <a:path w="1758314" h="76200">
+                <a:moveTo>
+                  <a:pt x="1682114" y="0"/>
+                </a:moveTo>
+                <a:lnTo>
+                  <a:pt x="1682114" y="76200"/>
+                </a:lnTo>
+                <a:lnTo>
+                  <a:pt x="1745614" y="44450"/>
+                </a:lnTo>
+                <a:lnTo>
+                  <a:pt x="1694814" y="44450"/>
+                </a:lnTo>
+                <a:lnTo>
+                  <a:pt x="1694814" y="31750"/>
+                </a:lnTo>
+                <a:lnTo>
+                  <a:pt x="1745614" y="31750"/>
+                </a:lnTo>
+                <a:lnTo>
+                  <a:pt x="1682114" y="0"/>
+                </a:lnTo>
+                <a:close/>
+              </a:path>
+              <a:path w="1758314" h="76200">
+                <a:moveTo>
+                  <a:pt x="76200" y="31750"/>
+                </a:moveTo>
+                <a:lnTo>
+                  <a:pt x="63500" y="31750"/>
+                </a:lnTo>
+                <a:lnTo>
+                  <a:pt x="63500" y="44450"/>
+                </a:lnTo>
+                <a:lnTo>
+                  <a:pt x="76200" y="44450"/>
+                </a:lnTo>
+                <a:lnTo>
+                  <a:pt x="76200" y="31750"/>
+                </a:lnTo>
+                <a:close/>
+              </a:path>
+              <a:path w="1758314" h="76200">
+                <a:moveTo>
+                  <a:pt x="1682114" y="31750"/>
+                </a:moveTo>
+                <a:lnTo>
+                  <a:pt x="76200" y="31750"/>
+                </a:lnTo>
+                <a:lnTo>
+                  <a:pt x="76200" y="44450"/>
+                </a:lnTo>
+                <a:lnTo>
+                  <a:pt x="1682114" y="44450"/>
+                </a:lnTo>
+                <a:lnTo>
+                  <a:pt x="1682114" y="31750"/>
+                </a:lnTo>
+                <a:close/>
+              </a:path>
+              <a:path w="1758314" h="76200">
+                <a:moveTo>
+                  <a:pt x="1745614" y="31750"/>
+                </a:moveTo>
+                <a:lnTo>
+                  <a:pt x="1694814" y="31750"/>
+                </a:lnTo>
+                <a:lnTo>
+                  <a:pt x="1694814" y="44450"/>
+                </a:lnTo>
+                <a:lnTo>
+                  <a:pt x="1745614" y="44450"/>
+                </a:lnTo>
+                <a:lnTo>
+                  <a:pt x="1758314" y="38100"/>
+                </a:lnTo>
+                <a:lnTo>
+                  <a:pt x="1745614" y="31750"/>
+                </a:lnTo>
+                <a:close/>
+              </a:path>
+            </a:pathLst>
+          </a:custGeom>
+          <a:solidFill>
+            <a:srgbClr val="000000"/>
+          </a:solidFill>
+        </p:spPr>
+        <p:txBody>
+          <a:bodyPr wrap="square" lIns="0" tIns="0" rIns="0" bIns="0" rtlCol="0"/>
+          <a:lstStyle/>
+          <a:p>
+            <a:endParaRPr/>
+          </a:p>
+        </p:txBody>
+      </p:sp>
+      <p:sp>
+        <p:nvSpPr>
+          <p:cNvPr id="100" name="object 65">
+            <a:extLst>
+              <a:ext uri="{FF2B5EF4-FFF2-40B4-BE49-F238E27FC236}">
+                <a16:creationId xmlns:a16="http://schemas.microsoft.com/office/drawing/2014/main" id="{A1EF013C-5123-D9A7-DC76-FEFD731E96E2}"/>
+              </a:ext>
+            </a:extLst>
+          </p:cNvPr>
+          <p:cNvSpPr txBox="1"/>
+          <p:nvPr/>
+        </p:nvSpPr>
+        <p:spPr>
+          <a:xfrm>
+            <a:off x="2073955" y="3856694"/>
+            <a:ext cx="733425" cy="228909"/>
+          </a:xfrm>
+          <a:prstGeom prst="rect">
+            <a:avLst/>
+          </a:prstGeom>
+        </p:spPr>
+        <p:txBody>
+          <a:bodyPr vert="horz" wrap="square" lIns="0" tIns="13335" rIns="0" bIns="0" rtlCol="0">
+            <a:spAutoFit/>
+          </a:bodyPr>
+          <a:lstStyle/>
+          <a:p>
+            <a:pPr>
+              <a:lnSpc>
+                <a:spcPct val="100000"/>
+              </a:lnSpc>
+              <a:spcBef>
+                <a:spcPts val="105"/>
+              </a:spcBef>
+            </a:pPr>
+            <a:r>
+              <a:rPr lang="es-ES" sz="1400" spc="5" dirty="0">
+                <a:latin typeface="Calibri"/>
+                <a:cs typeface="Calibri"/>
+              </a:rPr>
+              <a:t>w</a:t>
+            </a:r>
+            <a:r>
+              <a:rPr sz="1400" spc="-65" dirty="0">
+                <a:latin typeface="Calibri"/>
+                <a:cs typeface="Calibri"/>
+              </a:rPr>
+              <a:t> </a:t>
+            </a:r>
+            <a:r>
+              <a:rPr sz="1400" spc="-5" dirty="0">
+                <a:latin typeface="Calibri"/>
+                <a:cs typeface="Calibri"/>
+              </a:rPr>
+              <a:t>(width)</a:t>
+            </a:r>
+            <a:endParaRPr sz="1400" dirty="0">
+              <a:latin typeface="Calibri"/>
+              <a:cs typeface="Calibri"/>
+            </a:endParaRPr>
+          </a:p>
+        </p:txBody>
+      </p:sp>
+      <p:sp>
+        <p:nvSpPr>
+          <p:cNvPr id="101" name="object 73">
+            <a:extLst>
+              <a:ext uri="{FF2B5EF4-FFF2-40B4-BE49-F238E27FC236}">
+                <a16:creationId xmlns:a16="http://schemas.microsoft.com/office/drawing/2014/main" id="{4C5C0871-D9B5-E642-7661-FFBCAD75720B}"/>
+              </a:ext>
+            </a:extLst>
+          </p:cNvPr>
+          <p:cNvSpPr txBox="1"/>
+          <p:nvPr/>
+        </p:nvSpPr>
+        <p:spPr>
+          <a:xfrm>
+            <a:off x="3523559" y="4331380"/>
+            <a:ext cx="984979" cy="610424"/>
+          </a:xfrm>
+          <a:prstGeom prst="rect">
+            <a:avLst/>
+          </a:prstGeom>
+          <a:solidFill>
+            <a:srgbClr val="CCB657"/>
+          </a:solidFill>
+        </p:spPr>
+        <p:txBody>
+          <a:bodyPr vert="horz" wrap="square" lIns="0" tIns="2540" rIns="0" bIns="0" rtlCol="0">
+            <a:spAutoFit/>
+          </a:bodyPr>
+          <a:lstStyle/>
+          <a:p>
+            <a:pPr>
+              <a:lnSpc>
+                <a:spcPct val="100000"/>
+              </a:lnSpc>
+              <a:spcBef>
+                <a:spcPts val="20"/>
+              </a:spcBef>
+            </a:pPr>
+            <a:endParaRPr sz="2350" dirty="0">
+              <a:latin typeface="Times New Roman"/>
+              <a:cs typeface="Times New Roman"/>
+            </a:endParaRPr>
+          </a:p>
+          <a:p>
+            <a:pPr marL="18415" algn="ctr">
+              <a:lnSpc>
+                <a:spcPct val="100000"/>
+              </a:lnSpc>
+            </a:pPr>
+            <a:r>
+              <a:rPr sz="1600" b="1" spc="-10" dirty="0">
+                <a:latin typeface="Calibri"/>
+                <a:cs typeface="Calibri"/>
+              </a:rPr>
+              <a:t>Core</a:t>
+            </a:r>
+            <a:endParaRPr sz="1600" dirty="0">
+              <a:latin typeface="Calibri"/>
+              <a:cs typeface="Calibri"/>
+            </a:endParaRPr>
+          </a:p>
+        </p:txBody>
+      </p:sp>
+      <p:sp>
+        <p:nvSpPr>
+          <p:cNvPr id="102" name="object 74">
+            <a:extLst>
+              <a:ext uri="{FF2B5EF4-FFF2-40B4-BE49-F238E27FC236}">
+                <a16:creationId xmlns:a16="http://schemas.microsoft.com/office/drawing/2014/main" id="{10CC4DBA-05F4-4CDC-BA0E-6200AF622CA9}"/>
+              </a:ext>
+            </a:extLst>
+          </p:cNvPr>
+          <p:cNvSpPr txBox="1"/>
+          <p:nvPr/>
+        </p:nvSpPr>
+        <p:spPr>
+          <a:xfrm>
+            <a:off x="4421819" y="5309818"/>
+            <a:ext cx="741045" cy="269240"/>
+          </a:xfrm>
+          <a:prstGeom prst="rect">
+            <a:avLst/>
+          </a:prstGeom>
+        </p:spPr>
+        <p:txBody>
+          <a:bodyPr vert="horz" wrap="square" lIns="0" tIns="12065" rIns="0" bIns="0" rtlCol="0">
+            <a:spAutoFit/>
+          </a:bodyPr>
+          <a:lstStyle/>
+          <a:p>
+            <a:pPr>
+              <a:lnSpc>
+                <a:spcPct val="100000"/>
+              </a:lnSpc>
+              <a:spcBef>
+                <a:spcPts val="95"/>
+              </a:spcBef>
+            </a:pPr>
+            <a:r>
+              <a:rPr sz="1600" b="1" spc="-10" dirty="0">
+                <a:latin typeface="Calibri"/>
+                <a:cs typeface="Calibri"/>
+              </a:rPr>
+              <a:t>Cladding</a:t>
+            </a:r>
+            <a:endParaRPr sz="1600" dirty="0">
+              <a:latin typeface="Calibri"/>
+              <a:cs typeface="Calibri"/>
+            </a:endParaRPr>
+          </a:p>
+        </p:txBody>
+      </p:sp>
+      <p:sp>
+        <p:nvSpPr>
+          <p:cNvPr id="111" name="object 7">
+            <a:extLst>
+              <a:ext uri="{FF2B5EF4-FFF2-40B4-BE49-F238E27FC236}">
+                <a16:creationId xmlns:a16="http://schemas.microsoft.com/office/drawing/2014/main" id="{06801468-6F27-A16A-64E3-D7AD4B6B6B96}"/>
+              </a:ext>
+            </a:extLst>
+          </p:cNvPr>
+          <p:cNvSpPr/>
+          <p:nvPr/>
+        </p:nvSpPr>
+        <p:spPr>
+          <a:xfrm>
+            <a:off x="7239000" y="3685362"/>
+            <a:ext cx="3929379" cy="1902460"/>
+          </a:xfrm>
+          <a:custGeom>
+            <a:avLst/>
+            <a:gdLst/>
+            <a:ahLst/>
+            <a:cxnLst/>
+            <a:rect l="l" t="t" r="r" b="b"/>
+            <a:pathLst>
+              <a:path w="3929379" h="1902460">
+                <a:moveTo>
+                  <a:pt x="0" y="1901952"/>
+                </a:moveTo>
+                <a:lnTo>
+                  <a:pt x="3928872" y="1901952"/>
+                </a:lnTo>
+                <a:lnTo>
+                  <a:pt x="3928872" y="0"/>
+                </a:lnTo>
+                <a:lnTo>
+                  <a:pt x="0" y="0"/>
+                </a:lnTo>
+                <a:lnTo>
+                  <a:pt x="0" y="1901952"/>
+                </a:lnTo>
+                <a:close/>
+              </a:path>
+            </a:pathLst>
+          </a:custGeom>
+          <a:solidFill>
+            <a:srgbClr val="F1F1F1"/>
+          </a:solidFill>
+        </p:spPr>
+        <p:txBody>
+          <a:bodyPr wrap="square" lIns="0" tIns="0" rIns="0" bIns="0" rtlCol="0"/>
+          <a:lstStyle/>
+          <a:p>
+            <a:endParaRPr dirty="0"/>
+          </a:p>
+        </p:txBody>
+      </p:sp>
+      <p:sp>
+        <p:nvSpPr>
+          <p:cNvPr id="114" name="object 64">
+            <a:extLst>
+              <a:ext uri="{FF2B5EF4-FFF2-40B4-BE49-F238E27FC236}">
+                <a16:creationId xmlns:a16="http://schemas.microsoft.com/office/drawing/2014/main" id="{D9E5D738-CA47-1898-E0D8-DFBC514F5A50}"/>
+              </a:ext>
+            </a:extLst>
+          </p:cNvPr>
+          <p:cNvSpPr/>
+          <p:nvPr/>
+        </p:nvSpPr>
+        <p:spPr>
+          <a:xfrm>
+            <a:off x="7663179" y="4163346"/>
+            <a:ext cx="3165333" cy="48374"/>
+          </a:xfrm>
+          <a:custGeom>
+            <a:avLst/>
+            <a:gdLst/>
+            <a:ahLst/>
+            <a:cxnLst/>
+            <a:rect l="l" t="t" r="r" b="b"/>
+            <a:pathLst>
+              <a:path w="1758314" h="76200">
+                <a:moveTo>
+                  <a:pt x="76200" y="0"/>
+                </a:moveTo>
+                <a:lnTo>
+                  <a:pt x="0" y="38100"/>
+                </a:lnTo>
+                <a:lnTo>
+                  <a:pt x="76200" y="76200"/>
+                </a:lnTo>
+                <a:lnTo>
+                  <a:pt x="76200" y="44450"/>
+                </a:lnTo>
+                <a:lnTo>
+                  <a:pt x="63500" y="44450"/>
+                </a:lnTo>
+                <a:lnTo>
+                  <a:pt x="63500" y="31750"/>
+                </a:lnTo>
+                <a:lnTo>
+                  <a:pt x="76200" y="31750"/>
+                </a:lnTo>
+                <a:lnTo>
+                  <a:pt x="76200" y="0"/>
+                </a:lnTo>
+                <a:close/>
+              </a:path>
+              <a:path w="1758314" h="76200">
+                <a:moveTo>
+                  <a:pt x="1682114" y="0"/>
+                </a:moveTo>
+                <a:lnTo>
+                  <a:pt x="1682114" y="76200"/>
+                </a:lnTo>
+                <a:lnTo>
+                  <a:pt x="1745614" y="44450"/>
+                </a:lnTo>
+                <a:lnTo>
+                  <a:pt x="1694814" y="44450"/>
+                </a:lnTo>
+                <a:lnTo>
+                  <a:pt x="1694814" y="31750"/>
+                </a:lnTo>
+                <a:lnTo>
+                  <a:pt x="1745614" y="31750"/>
+                </a:lnTo>
+                <a:lnTo>
+                  <a:pt x="1682114" y="0"/>
+                </a:lnTo>
+                <a:close/>
+              </a:path>
+              <a:path w="1758314" h="76200">
+                <a:moveTo>
+                  <a:pt x="76200" y="31750"/>
+                </a:moveTo>
+                <a:lnTo>
+                  <a:pt x="63500" y="31750"/>
+                </a:lnTo>
+                <a:lnTo>
+                  <a:pt x="63500" y="44450"/>
+                </a:lnTo>
+                <a:lnTo>
+                  <a:pt x="76200" y="44450"/>
+                </a:lnTo>
+                <a:lnTo>
+                  <a:pt x="76200" y="31750"/>
+                </a:lnTo>
+                <a:close/>
+              </a:path>
+              <a:path w="1758314" h="76200">
+                <a:moveTo>
+                  <a:pt x="1682114" y="31750"/>
+                </a:moveTo>
+                <a:lnTo>
+                  <a:pt x="76200" y="31750"/>
+                </a:lnTo>
+                <a:lnTo>
+                  <a:pt x="76200" y="44450"/>
+                </a:lnTo>
+                <a:lnTo>
+                  <a:pt x="1682114" y="44450"/>
+                </a:lnTo>
+                <a:lnTo>
+                  <a:pt x="1682114" y="31750"/>
+                </a:lnTo>
+                <a:close/>
+              </a:path>
+              <a:path w="1758314" h="76200">
+                <a:moveTo>
+                  <a:pt x="1745614" y="31750"/>
+                </a:moveTo>
+                <a:lnTo>
+                  <a:pt x="1694814" y="31750"/>
+                </a:lnTo>
+                <a:lnTo>
+                  <a:pt x="1694814" y="44450"/>
+                </a:lnTo>
+                <a:lnTo>
+                  <a:pt x="1745614" y="44450"/>
+                </a:lnTo>
+                <a:lnTo>
+                  <a:pt x="1758314" y="38100"/>
+                </a:lnTo>
+                <a:lnTo>
+                  <a:pt x="1745614" y="31750"/>
+                </a:lnTo>
+                <a:close/>
+              </a:path>
+            </a:pathLst>
+          </a:custGeom>
+          <a:solidFill>
+            <a:srgbClr val="000000"/>
+          </a:solidFill>
+        </p:spPr>
+        <p:txBody>
+          <a:bodyPr wrap="square" lIns="0" tIns="0" rIns="0" bIns="0" rtlCol="0"/>
+          <a:lstStyle/>
+          <a:p>
+            <a:endParaRPr/>
+          </a:p>
+        </p:txBody>
+      </p:sp>
+      <p:sp>
+        <p:nvSpPr>
+          <p:cNvPr id="115" name="object 65">
+            <a:extLst>
+              <a:ext uri="{FF2B5EF4-FFF2-40B4-BE49-F238E27FC236}">
+                <a16:creationId xmlns:a16="http://schemas.microsoft.com/office/drawing/2014/main" id="{74A4CAE1-BC33-1BCD-6F24-54F1DFA8AEDB}"/>
+              </a:ext>
+            </a:extLst>
+          </p:cNvPr>
+          <p:cNvSpPr txBox="1"/>
+          <p:nvPr/>
+        </p:nvSpPr>
+        <p:spPr>
+          <a:xfrm>
+            <a:off x="8910954" y="3926878"/>
+            <a:ext cx="733425" cy="228909"/>
+          </a:xfrm>
+          <a:prstGeom prst="rect">
+            <a:avLst/>
+          </a:prstGeom>
+        </p:spPr>
+        <p:txBody>
+          <a:bodyPr vert="horz" wrap="square" lIns="0" tIns="13335" rIns="0" bIns="0" rtlCol="0">
+            <a:spAutoFit/>
+          </a:bodyPr>
+          <a:lstStyle/>
+          <a:p>
+            <a:pPr>
+              <a:lnSpc>
+                <a:spcPct val="100000"/>
+              </a:lnSpc>
+              <a:spcBef>
+                <a:spcPts val="105"/>
+              </a:spcBef>
+            </a:pPr>
+            <a:r>
+              <a:rPr lang="es-ES" sz="1400" spc="5" dirty="0">
+                <a:latin typeface="Calibri"/>
+                <a:cs typeface="Calibri"/>
+              </a:rPr>
+              <a:t>w</a:t>
+            </a:r>
+            <a:r>
+              <a:rPr sz="1400" spc="-65" dirty="0">
+                <a:latin typeface="Calibri"/>
+                <a:cs typeface="Calibri"/>
+              </a:rPr>
+              <a:t> </a:t>
+            </a:r>
+            <a:r>
+              <a:rPr sz="1400" spc="-5" dirty="0">
+                <a:latin typeface="Calibri"/>
+                <a:cs typeface="Calibri"/>
+              </a:rPr>
+              <a:t>(width)</a:t>
+            </a:r>
+            <a:endParaRPr sz="1400" dirty="0">
+              <a:latin typeface="Calibri"/>
+              <a:cs typeface="Calibri"/>
+            </a:endParaRPr>
+          </a:p>
+        </p:txBody>
+      </p:sp>
+      <p:sp>
+        <p:nvSpPr>
+          <p:cNvPr id="116" name="object 73">
+            <a:extLst>
+              <a:ext uri="{FF2B5EF4-FFF2-40B4-BE49-F238E27FC236}">
+                <a16:creationId xmlns:a16="http://schemas.microsoft.com/office/drawing/2014/main" id="{CC9D2269-0CA8-143F-4E45-F3AF594A2ED3}"/>
+              </a:ext>
+            </a:extLst>
+          </p:cNvPr>
+          <p:cNvSpPr txBox="1"/>
+          <p:nvPr/>
+        </p:nvSpPr>
+        <p:spPr>
+          <a:xfrm>
+            <a:off x="7663179" y="4325314"/>
+            <a:ext cx="3165333" cy="610424"/>
+          </a:xfrm>
+          <a:prstGeom prst="rect">
+            <a:avLst/>
+          </a:prstGeom>
+          <a:solidFill>
+            <a:srgbClr val="CCB657"/>
+          </a:solidFill>
+        </p:spPr>
+        <p:txBody>
+          <a:bodyPr vert="horz" wrap="square" lIns="0" tIns="2540" rIns="0" bIns="0" rtlCol="0">
+            <a:spAutoFit/>
+          </a:bodyPr>
+          <a:lstStyle/>
+          <a:p>
+            <a:pPr>
+              <a:lnSpc>
+                <a:spcPct val="100000"/>
+              </a:lnSpc>
+              <a:spcBef>
+                <a:spcPts val="20"/>
+              </a:spcBef>
+            </a:pPr>
+            <a:endParaRPr sz="2350" dirty="0">
+              <a:latin typeface="Times New Roman"/>
+              <a:cs typeface="Times New Roman"/>
+            </a:endParaRPr>
+          </a:p>
+          <a:p>
+            <a:pPr marL="18415" algn="ctr">
+              <a:lnSpc>
+                <a:spcPct val="100000"/>
+              </a:lnSpc>
+            </a:pPr>
+            <a:r>
+              <a:rPr lang="es-ES" sz="1600" b="1" spc="-10" dirty="0">
+                <a:latin typeface="Calibri"/>
+                <a:cs typeface="Calibri"/>
+              </a:rPr>
+              <a:t>MMI </a:t>
+            </a:r>
+            <a:r>
+              <a:rPr lang="es-ES" sz="1600" b="1" spc="-10" dirty="0" err="1">
+                <a:latin typeface="Calibri"/>
+                <a:cs typeface="Calibri"/>
+              </a:rPr>
+              <a:t>Body</a:t>
+            </a:r>
+            <a:endParaRPr sz="1600" dirty="0">
+              <a:latin typeface="Calibri"/>
+              <a:cs typeface="Calibri"/>
+            </a:endParaRPr>
+          </a:p>
+        </p:txBody>
+      </p:sp>
+      <p:sp>
+        <p:nvSpPr>
+          <p:cNvPr id="117" name="object 74">
+            <a:extLst>
+              <a:ext uri="{FF2B5EF4-FFF2-40B4-BE49-F238E27FC236}">
+                <a16:creationId xmlns:a16="http://schemas.microsoft.com/office/drawing/2014/main" id="{8A3332FF-25D4-1955-323F-BBD1D30324AC}"/>
+              </a:ext>
+            </a:extLst>
+          </p:cNvPr>
+          <p:cNvSpPr txBox="1"/>
+          <p:nvPr/>
+        </p:nvSpPr>
+        <p:spPr>
+          <a:xfrm>
+            <a:off x="7284458" y="5303772"/>
+            <a:ext cx="741045" cy="269240"/>
+          </a:xfrm>
+          <a:prstGeom prst="rect">
+            <a:avLst/>
+          </a:prstGeom>
+        </p:spPr>
+        <p:txBody>
+          <a:bodyPr vert="horz" wrap="square" lIns="0" tIns="12065" rIns="0" bIns="0" rtlCol="0">
+            <a:spAutoFit/>
+          </a:bodyPr>
+          <a:lstStyle/>
+          <a:p>
+            <a:pPr>
+              <a:lnSpc>
+                <a:spcPct val="100000"/>
+              </a:lnSpc>
+              <a:spcBef>
+                <a:spcPts val="95"/>
+              </a:spcBef>
+            </a:pPr>
+            <a:r>
+              <a:rPr sz="1600" b="1" spc="-10" dirty="0">
+                <a:latin typeface="Calibri"/>
+                <a:cs typeface="Calibri"/>
+              </a:rPr>
+              <a:t>Cladding</a:t>
+            </a:r>
+            <a:endParaRPr sz="1600" dirty="0">
+              <a:latin typeface="Calibri"/>
+              <a:cs typeface="Calibri"/>
+            </a:endParaRPr>
+          </a:p>
+        </p:txBody>
+      </p:sp>
+      <p:sp>
+        <p:nvSpPr>
+          <p:cNvPr id="2" name="CuadroTexto 1">
+            <a:extLst>
+              <a:ext uri="{FF2B5EF4-FFF2-40B4-BE49-F238E27FC236}">
+                <a16:creationId xmlns:a16="http://schemas.microsoft.com/office/drawing/2014/main" id="{57D9AFBE-EF33-9078-9CE3-5C8B079B0C36}"/>
+              </a:ext>
+            </a:extLst>
+          </p:cNvPr>
+          <p:cNvSpPr txBox="1"/>
+          <p:nvPr/>
+        </p:nvSpPr>
+        <p:spPr>
+          <a:xfrm>
+            <a:off x="7377675" y="5580458"/>
+            <a:ext cx="3954288" cy="369332"/>
+          </a:xfrm>
+          <a:prstGeom prst="rect">
+            <a:avLst/>
+          </a:prstGeom>
+          <a:noFill/>
+        </p:spPr>
+        <p:txBody>
+          <a:bodyPr wrap="none" rtlCol="0">
+            <a:spAutoFit/>
+          </a:bodyPr>
+          <a:lstStyle/>
+          <a:p>
+            <a:pPr algn="r"/>
+            <a:r>
+              <a:rPr lang="en-US" b="1" dirty="0"/>
+              <a:t>Multimode Interference (MMI) </a:t>
+            </a:r>
+            <a:r>
+              <a:rPr lang="en-US" dirty="0"/>
+              <a:t>coupler</a:t>
+            </a:r>
+            <a:r>
+              <a:rPr lang="en-US" b="1" dirty="0"/>
+              <a:t> </a:t>
+            </a:r>
+            <a:endParaRPr lang="en-US" dirty="0"/>
+          </a:p>
+        </p:txBody>
+      </p:sp>
+      <p:sp>
+        <p:nvSpPr>
+          <p:cNvPr id="8" name="CuadroTexto 7">
+            <a:extLst>
+              <a:ext uri="{FF2B5EF4-FFF2-40B4-BE49-F238E27FC236}">
+                <a16:creationId xmlns:a16="http://schemas.microsoft.com/office/drawing/2014/main" id="{7336B5D8-2D70-3E7A-336D-AF55EC49DEB8}"/>
+              </a:ext>
+            </a:extLst>
+          </p:cNvPr>
+          <p:cNvSpPr txBox="1"/>
+          <p:nvPr/>
+        </p:nvSpPr>
+        <p:spPr>
+          <a:xfrm>
+            <a:off x="1168826" y="5579058"/>
+            <a:ext cx="2743199" cy="369332"/>
+          </a:xfrm>
+          <a:prstGeom prst="rect">
+            <a:avLst/>
+          </a:prstGeom>
+          <a:noFill/>
+        </p:spPr>
+        <p:txBody>
+          <a:bodyPr wrap="square">
+            <a:spAutoFit/>
+          </a:bodyPr>
+          <a:lstStyle/>
+          <a:p>
+            <a:r>
+              <a:rPr lang="en-US" b="1" dirty="0"/>
+              <a:t>Directional </a:t>
+            </a:r>
+            <a:r>
+              <a:rPr lang="en-US" dirty="0"/>
+              <a:t>coupler (DC)</a:t>
+            </a:r>
+          </a:p>
+        </p:txBody>
+      </p:sp>
+      <p:sp>
+        <p:nvSpPr>
+          <p:cNvPr id="7" name="object 73">
+            <a:extLst>
+              <a:ext uri="{FF2B5EF4-FFF2-40B4-BE49-F238E27FC236}">
+                <a16:creationId xmlns:a16="http://schemas.microsoft.com/office/drawing/2014/main" id="{9404A65A-9F07-371B-17B4-56EE1381567B}"/>
+              </a:ext>
+            </a:extLst>
+          </p:cNvPr>
+          <p:cNvSpPr txBox="1"/>
+          <p:nvPr/>
+        </p:nvSpPr>
+        <p:spPr>
+          <a:xfrm>
+            <a:off x="1948179" y="4331380"/>
+            <a:ext cx="984979" cy="610424"/>
+          </a:xfrm>
+          <a:prstGeom prst="rect">
+            <a:avLst/>
+          </a:prstGeom>
+          <a:solidFill>
+            <a:srgbClr val="CCB657"/>
+          </a:solidFill>
+        </p:spPr>
+        <p:txBody>
+          <a:bodyPr vert="horz" wrap="square" lIns="0" tIns="2540" rIns="0" bIns="0" rtlCol="0">
+            <a:spAutoFit/>
+          </a:bodyPr>
+          <a:lstStyle/>
+          <a:p>
+            <a:pPr>
+              <a:lnSpc>
+                <a:spcPct val="100000"/>
+              </a:lnSpc>
+              <a:spcBef>
+                <a:spcPts val="20"/>
+              </a:spcBef>
+            </a:pPr>
+            <a:endParaRPr sz="2350" dirty="0">
+              <a:latin typeface="Times New Roman"/>
+              <a:cs typeface="Times New Roman"/>
+            </a:endParaRPr>
+          </a:p>
+          <a:p>
+            <a:pPr marL="18415" algn="ctr">
+              <a:lnSpc>
+                <a:spcPct val="100000"/>
+              </a:lnSpc>
+            </a:pPr>
+            <a:r>
+              <a:rPr sz="1600" b="1" spc="-10" dirty="0">
+                <a:latin typeface="Calibri"/>
+                <a:cs typeface="Calibri"/>
+              </a:rPr>
+              <a:t>Core</a:t>
+            </a:r>
+            <a:endParaRPr sz="1600" dirty="0">
+              <a:latin typeface="Calibri"/>
+              <a:cs typeface="Calibri"/>
+            </a:endParaRPr>
+          </a:p>
+        </p:txBody>
+      </p:sp>
+      <p:sp>
+        <p:nvSpPr>
+          <p:cNvPr id="9" name="object 64">
+            <a:extLst>
+              <a:ext uri="{FF2B5EF4-FFF2-40B4-BE49-F238E27FC236}">
+                <a16:creationId xmlns:a16="http://schemas.microsoft.com/office/drawing/2014/main" id="{B06C28EB-4BF4-A40B-513B-ACC7E468CDC3}"/>
+              </a:ext>
+            </a:extLst>
+          </p:cNvPr>
+          <p:cNvSpPr/>
+          <p:nvPr/>
+        </p:nvSpPr>
+        <p:spPr>
+          <a:xfrm flipV="1">
+            <a:off x="2911079" y="5067632"/>
+            <a:ext cx="590401" cy="45719"/>
+          </a:xfrm>
+          <a:custGeom>
+            <a:avLst/>
+            <a:gdLst/>
+            <a:ahLst/>
+            <a:cxnLst/>
+            <a:rect l="l" t="t" r="r" b="b"/>
+            <a:pathLst>
+              <a:path w="1758314" h="76200">
+                <a:moveTo>
+                  <a:pt x="76200" y="0"/>
+                </a:moveTo>
+                <a:lnTo>
+                  <a:pt x="0" y="38100"/>
+                </a:lnTo>
+                <a:lnTo>
+                  <a:pt x="76200" y="76200"/>
+                </a:lnTo>
+                <a:lnTo>
+                  <a:pt x="76200" y="44450"/>
+                </a:lnTo>
+                <a:lnTo>
+                  <a:pt x="63500" y="44450"/>
+                </a:lnTo>
+                <a:lnTo>
+                  <a:pt x="63500" y="31750"/>
+                </a:lnTo>
+                <a:lnTo>
+                  <a:pt x="76200" y="31750"/>
+                </a:lnTo>
+                <a:lnTo>
+                  <a:pt x="76200" y="0"/>
+                </a:lnTo>
+                <a:close/>
+              </a:path>
+              <a:path w="1758314" h="76200">
+                <a:moveTo>
+                  <a:pt x="1682114" y="0"/>
+                </a:moveTo>
+                <a:lnTo>
+                  <a:pt x="1682114" y="76200"/>
+                </a:lnTo>
+                <a:lnTo>
+                  <a:pt x="1745614" y="44450"/>
+                </a:lnTo>
+                <a:lnTo>
+                  <a:pt x="1694814" y="44450"/>
+                </a:lnTo>
+                <a:lnTo>
+                  <a:pt x="1694814" y="31750"/>
+                </a:lnTo>
+                <a:lnTo>
+                  <a:pt x="1745614" y="31750"/>
+                </a:lnTo>
+                <a:lnTo>
+                  <a:pt x="1682114" y="0"/>
+                </a:lnTo>
+                <a:close/>
+              </a:path>
+              <a:path w="1758314" h="76200">
+                <a:moveTo>
+                  <a:pt x="76200" y="31750"/>
+                </a:moveTo>
+                <a:lnTo>
+                  <a:pt x="63500" y="31750"/>
+                </a:lnTo>
+                <a:lnTo>
+                  <a:pt x="63500" y="44450"/>
+                </a:lnTo>
+                <a:lnTo>
+                  <a:pt x="76200" y="44450"/>
+                </a:lnTo>
+                <a:lnTo>
+                  <a:pt x="76200" y="31750"/>
+                </a:lnTo>
+                <a:close/>
+              </a:path>
+              <a:path w="1758314" h="76200">
+                <a:moveTo>
+                  <a:pt x="1682114" y="31750"/>
+                </a:moveTo>
+                <a:lnTo>
+                  <a:pt x="76200" y="31750"/>
+                </a:lnTo>
+                <a:lnTo>
+                  <a:pt x="76200" y="44450"/>
+                </a:lnTo>
+                <a:lnTo>
+                  <a:pt x="1682114" y="44450"/>
+                </a:lnTo>
+                <a:lnTo>
+                  <a:pt x="1682114" y="31750"/>
+                </a:lnTo>
+                <a:close/>
+              </a:path>
+              <a:path w="1758314" h="76200">
+                <a:moveTo>
+                  <a:pt x="1745614" y="31750"/>
+                </a:moveTo>
+                <a:lnTo>
+                  <a:pt x="1694814" y="31750"/>
+                </a:lnTo>
+                <a:lnTo>
+                  <a:pt x="1694814" y="44450"/>
+                </a:lnTo>
+                <a:lnTo>
+                  <a:pt x="1745614" y="44450"/>
+                </a:lnTo>
+                <a:lnTo>
+                  <a:pt x="1758314" y="38100"/>
+                </a:lnTo>
+                <a:lnTo>
+                  <a:pt x="1745614" y="31750"/>
+                </a:lnTo>
+                <a:close/>
+              </a:path>
+            </a:pathLst>
+          </a:custGeom>
+          <a:solidFill>
+            <a:srgbClr val="000000"/>
+          </a:solidFill>
+        </p:spPr>
+        <p:txBody>
+          <a:bodyPr wrap="square" lIns="0" tIns="0" rIns="0" bIns="0" rtlCol="0"/>
+          <a:lstStyle/>
+          <a:p>
+            <a:endParaRPr/>
+          </a:p>
+        </p:txBody>
+      </p:sp>
+      <p:sp>
+        <p:nvSpPr>
+          <p:cNvPr id="10" name="object 63">
+            <a:extLst>
+              <a:ext uri="{FF2B5EF4-FFF2-40B4-BE49-F238E27FC236}">
+                <a16:creationId xmlns:a16="http://schemas.microsoft.com/office/drawing/2014/main" id="{4601CBDA-CF6C-DA98-1398-C31497498862}"/>
+              </a:ext>
+            </a:extLst>
+          </p:cNvPr>
+          <p:cNvSpPr txBox="1"/>
+          <p:nvPr/>
+        </p:nvSpPr>
+        <p:spPr>
+          <a:xfrm>
+            <a:off x="2939643" y="5090491"/>
+            <a:ext cx="577850" cy="454025"/>
+          </a:xfrm>
+          <a:prstGeom prst="rect">
+            <a:avLst/>
+          </a:prstGeom>
+        </p:spPr>
+        <p:txBody>
+          <a:bodyPr vert="horz" wrap="square" lIns="0" tIns="13335" rIns="0" bIns="0" rtlCol="0">
+            <a:spAutoFit/>
+          </a:bodyPr>
+          <a:lstStyle/>
+          <a:p>
+            <a:pPr marR="3175" algn="ctr">
+              <a:lnSpc>
+                <a:spcPct val="100000"/>
+              </a:lnSpc>
+              <a:spcBef>
+                <a:spcPts val="105"/>
+              </a:spcBef>
+            </a:pPr>
+            <a:r>
+              <a:rPr lang="es-ES" sz="1400" dirty="0">
+                <a:latin typeface="Calibri"/>
+                <a:cs typeface="Calibri"/>
+              </a:rPr>
+              <a:t>g</a:t>
+            </a:r>
+            <a:endParaRPr sz="1400" dirty="0">
+              <a:latin typeface="Calibri"/>
+              <a:cs typeface="Calibri"/>
+            </a:endParaRPr>
+          </a:p>
+          <a:p>
+            <a:pPr marR="5080" algn="ctr">
+              <a:lnSpc>
+                <a:spcPct val="100000"/>
+              </a:lnSpc>
+              <a:spcBef>
+                <a:spcPts val="5"/>
+              </a:spcBef>
+            </a:pPr>
+            <a:r>
+              <a:rPr sz="1400" spc="-10" dirty="0">
+                <a:latin typeface="Calibri"/>
+                <a:cs typeface="Calibri"/>
+              </a:rPr>
+              <a:t>(</a:t>
+            </a:r>
+            <a:r>
+              <a:rPr lang="es-ES" sz="1400" spc="-10" dirty="0">
+                <a:latin typeface="Calibri"/>
+                <a:cs typeface="Calibri"/>
+              </a:rPr>
+              <a:t>gap</a:t>
+            </a:r>
+            <a:r>
+              <a:rPr sz="1400" dirty="0">
+                <a:latin typeface="Calibri"/>
+                <a:cs typeface="Calibri"/>
+              </a:rPr>
+              <a:t>)</a:t>
+            </a:r>
+          </a:p>
+        </p:txBody>
+      </p:sp>
+      <p:sp>
+        <p:nvSpPr>
+          <p:cNvPr id="11" name="object 62">
+            <a:extLst>
+              <a:ext uri="{FF2B5EF4-FFF2-40B4-BE49-F238E27FC236}">
+                <a16:creationId xmlns:a16="http://schemas.microsoft.com/office/drawing/2014/main" id="{F1DAA8E2-74AD-BD39-C248-2324458F6D54}"/>
+              </a:ext>
+            </a:extLst>
+          </p:cNvPr>
+          <p:cNvSpPr/>
+          <p:nvPr/>
+        </p:nvSpPr>
+        <p:spPr>
+          <a:xfrm>
+            <a:off x="7448782" y="4331380"/>
+            <a:ext cx="67949" cy="610424"/>
+          </a:xfrm>
+          <a:custGeom>
+            <a:avLst/>
+            <a:gdLst/>
+            <a:ahLst/>
+            <a:cxnLst/>
+            <a:rect l="l" t="t" r="r" b="b"/>
+            <a:pathLst>
+              <a:path w="76200" h="986155">
+                <a:moveTo>
+                  <a:pt x="31750" y="909827"/>
+                </a:moveTo>
+                <a:lnTo>
+                  <a:pt x="0" y="909827"/>
+                </a:lnTo>
+                <a:lnTo>
+                  <a:pt x="38100" y="986027"/>
+                </a:lnTo>
+                <a:lnTo>
+                  <a:pt x="69850" y="922527"/>
+                </a:lnTo>
+                <a:lnTo>
+                  <a:pt x="31750" y="922527"/>
+                </a:lnTo>
+                <a:lnTo>
+                  <a:pt x="31750" y="909827"/>
+                </a:lnTo>
+                <a:close/>
+              </a:path>
+              <a:path w="76200" h="986155">
+                <a:moveTo>
+                  <a:pt x="44450" y="63500"/>
+                </a:moveTo>
+                <a:lnTo>
+                  <a:pt x="31750" y="63500"/>
+                </a:lnTo>
+                <a:lnTo>
+                  <a:pt x="31750" y="922527"/>
+                </a:lnTo>
+                <a:lnTo>
+                  <a:pt x="44450" y="922527"/>
+                </a:lnTo>
+                <a:lnTo>
+                  <a:pt x="44450" y="63500"/>
+                </a:lnTo>
+                <a:close/>
+              </a:path>
+              <a:path w="76200" h="986155">
+                <a:moveTo>
+                  <a:pt x="76200" y="909827"/>
+                </a:moveTo>
+                <a:lnTo>
+                  <a:pt x="44450" y="909827"/>
+                </a:lnTo>
+                <a:lnTo>
+                  <a:pt x="44450" y="922527"/>
+                </a:lnTo>
+                <a:lnTo>
+                  <a:pt x="69850" y="922527"/>
+                </a:lnTo>
+                <a:lnTo>
+                  <a:pt x="76200" y="909827"/>
+                </a:lnTo>
+                <a:close/>
+              </a:path>
+              <a:path w="76200" h="986155">
+                <a:moveTo>
+                  <a:pt x="38100" y="0"/>
+                </a:moveTo>
+                <a:lnTo>
+                  <a:pt x="0" y="76200"/>
+                </a:lnTo>
+                <a:lnTo>
+                  <a:pt x="31750" y="76200"/>
+                </a:lnTo>
+                <a:lnTo>
+                  <a:pt x="31750" y="63500"/>
+                </a:lnTo>
+                <a:lnTo>
+                  <a:pt x="69850" y="63500"/>
+                </a:lnTo>
+                <a:lnTo>
+                  <a:pt x="38100" y="0"/>
+                </a:lnTo>
+                <a:close/>
+              </a:path>
+              <a:path w="76200" h="986155">
+                <a:moveTo>
+                  <a:pt x="69850" y="63500"/>
+                </a:moveTo>
+                <a:lnTo>
+                  <a:pt x="44450" y="63500"/>
+                </a:lnTo>
+                <a:lnTo>
+                  <a:pt x="44450" y="76200"/>
+                </a:lnTo>
+                <a:lnTo>
+                  <a:pt x="76200" y="76200"/>
+                </a:lnTo>
+                <a:lnTo>
+                  <a:pt x="69850" y="63500"/>
+                </a:lnTo>
+                <a:close/>
+              </a:path>
+            </a:pathLst>
+          </a:custGeom>
+          <a:solidFill>
+            <a:srgbClr val="000000"/>
+          </a:solidFill>
+        </p:spPr>
+        <p:txBody>
+          <a:bodyPr wrap="square" lIns="0" tIns="0" rIns="0" bIns="0" rtlCol="0"/>
+          <a:lstStyle/>
+          <a:p>
+            <a:endParaRPr/>
+          </a:p>
+        </p:txBody>
+      </p:sp>
+      <p:sp>
+        <p:nvSpPr>
+          <p:cNvPr id="12" name="object 63">
+            <a:extLst>
+              <a:ext uri="{FF2B5EF4-FFF2-40B4-BE49-F238E27FC236}">
+                <a16:creationId xmlns:a16="http://schemas.microsoft.com/office/drawing/2014/main" id="{FCE9BE8C-E2F4-7CBE-236B-A2E5451F5C01}"/>
+              </a:ext>
+            </a:extLst>
+          </p:cNvPr>
+          <p:cNvSpPr txBox="1"/>
+          <p:nvPr/>
+        </p:nvSpPr>
+        <p:spPr>
+          <a:xfrm>
+            <a:off x="6882764" y="4389164"/>
+            <a:ext cx="577850" cy="454025"/>
+          </a:xfrm>
+          <a:prstGeom prst="rect">
+            <a:avLst/>
+          </a:prstGeom>
+        </p:spPr>
+        <p:txBody>
+          <a:bodyPr vert="horz" wrap="square" lIns="0" tIns="13335" rIns="0" bIns="0" rtlCol="0">
+            <a:spAutoFit/>
+          </a:bodyPr>
+          <a:lstStyle/>
+          <a:p>
+            <a:pPr marR="3175" algn="ctr">
+              <a:lnSpc>
+                <a:spcPct val="100000"/>
+              </a:lnSpc>
+              <a:spcBef>
+                <a:spcPts val="105"/>
+              </a:spcBef>
+            </a:pPr>
+            <a:r>
+              <a:rPr sz="1400" dirty="0">
+                <a:latin typeface="Calibri"/>
+                <a:cs typeface="Calibri"/>
+              </a:rPr>
+              <a:t>h</a:t>
+            </a:r>
+          </a:p>
+          <a:p>
+            <a:pPr marR="5080" algn="ctr">
+              <a:lnSpc>
+                <a:spcPct val="100000"/>
+              </a:lnSpc>
+              <a:spcBef>
+                <a:spcPts val="5"/>
+              </a:spcBef>
+            </a:pPr>
+            <a:r>
+              <a:rPr sz="1400" spc="-10" dirty="0">
+                <a:latin typeface="Calibri"/>
+                <a:cs typeface="Calibri"/>
+              </a:rPr>
+              <a:t>(h</a:t>
+            </a:r>
+            <a:r>
+              <a:rPr sz="1400" dirty="0">
+                <a:latin typeface="Calibri"/>
+                <a:cs typeface="Calibri"/>
+              </a:rPr>
+              <a:t>eig</a:t>
+            </a:r>
+            <a:r>
+              <a:rPr sz="1400" spc="-25" dirty="0">
+                <a:latin typeface="Calibri"/>
+                <a:cs typeface="Calibri"/>
+              </a:rPr>
+              <a:t>h</a:t>
+            </a:r>
+            <a:r>
+              <a:rPr sz="1400" spc="-5" dirty="0">
+                <a:latin typeface="Calibri"/>
+                <a:cs typeface="Calibri"/>
+              </a:rPr>
+              <a:t>t</a:t>
+            </a:r>
+            <a:r>
+              <a:rPr sz="1400" dirty="0">
+                <a:latin typeface="Calibri"/>
+                <a:cs typeface="Calibri"/>
+              </a:rPr>
+              <a:t>)</a:t>
+            </a:r>
+          </a:p>
+        </p:txBody>
+      </p:sp>
+      <p:sp>
+        <p:nvSpPr>
+          <p:cNvPr id="5" name="CuadroTexto 4">
+            <a:extLst>
+              <a:ext uri="{FF2B5EF4-FFF2-40B4-BE49-F238E27FC236}">
+                <a16:creationId xmlns:a16="http://schemas.microsoft.com/office/drawing/2014/main" id="{43C69CDD-218E-494A-8C3E-1431DB5F9DC7}"/>
+              </a:ext>
+            </a:extLst>
+          </p:cNvPr>
+          <p:cNvSpPr txBox="1"/>
+          <p:nvPr/>
+        </p:nvSpPr>
+        <p:spPr>
+          <a:xfrm>
+            <a:off x="8153400" y="1833699"/>
+            <a:ext cx="3709297" cy="830997"/>
+          </a:xfrm>
+          <a:prstGeom prst="rect">
+            <a:avLst/>
+          </a:prstGeom>
+          <a:noFill/>
+        </p:spPr>
+        <p:txBody>
+          <a:bodyPr wrap="square" rtlCol="0">
+            <a:spAutoFit/>
+          </a:bodyPr>
+          <a:lstStyle/>
+          <a:p>
+            <a:r>
+              <a:rPr lang="es-ES" sz="1200" dirty="0"/>
+              <a:t>Modo de operación:</a:t>
+            </a:r>
+          </a:p>
+          <a:p>
+            <a:r>
+              <a:rPr lang="es-ES" sz="1200" dirty="0" err="1"/>
+              <a:t>Directional</a:t>
+            </a:r>
+            <a:r>
+              <a:rPr lang="es-ES" sz="1200" dirty="0"/>
+              <a:t> </a:t>
+            </a:r>
+            <a:r>
+              <a:rPr lang="es-ES" sz="1200" dirty="0" err="1"/>
+              <a:t>couplers</a:t>
+            </a:r>
+            <a:r>
+              <a:rPr lang="es-ES" sz="1200" dirty="0"/>
+              <a:t> </a:t>
+            </a:r>
+            <a:r>
+              <a:rPr lang="es-ES" sz="1200" dirty="0">
+                <a:sym typeface="Wingdings" panose="05000000000000000000" pitchFamily="2" charset="2"/>
+              </a:rPr>
+              <a:t></a:t>
+            </a:r>
+            <a:r>
+              <a:rPr lang="es-ES" sz="1200" dirty="0"/>
+              <a:t>Transferencia de campo evanescente</a:t>
+            </a:r>
+          </a:p>
+          <a:p>
+            <a:r>
+              <a:rPr lang="es-ES" sz="1200" dirty="0"/>
+              <a:t>MMI </a:t>
+            </a:r>
+            <a:r>
+              <a:rPr lang="es-ES" sz="1200" dirty="0">
+                <a:sym typeface="Wingdings" panose="05000000000000000000" pitchFamily="2" charset="2"/>
+              </a:rPr>
+              <a:t> </a:t>
+            </a:r>
+            <a:r>
+              <a:rPr lang="es-ES" sz="1200" dirty="0"/>
+              <a:t>Interferencia modal</a:t>
+            </a:r>
+          </a:p>
+        </p:txBody>
+      </p:sp>
+      <p:sp>
+        <p:nvSpPr>
+          <p:cNvPr id="6" name="CuadroTexto 5">
+            <a:extLst>
+              <a:ext uri="{FF2B5EF4-FFF2-40B4-BE49-F238E27FC236}">
+                <a16:creationId xmlns:a16="http://schemas.microsoft.com/office/drawing/2014/main" id="{F9FF0642-522B-41B8-BECF-6A66A842FFBA}"/>
+              </a:ext>
+            </a:extLst>
+          </p:cNvPr>
+          <p:cNvSpPr txBox="1"/>
+          <p:nvPr/>
+        </p:nvSpPr>
+        <p:spPr>
+          <a:xfrm>
+            <a:off x="8153400" y="2875625"/>
+            <a:ext cx="3124200" cy="461665"/>
+          </a:xfrm>
+          <a:prstGeom prst="rect">
+            <a:avLst/>
+          </a:prstGeom>
+          <a:noFill/>
+        </p:spPr>
+        <p:txBody>
+          <a:bodyPr wrap="square" rtlCol="0">
+            <a:spAutoFit/>
+          </a:bodyPr>
+          <a:lstStyle/>
+          <a:p>
+            <a:r>
+              <a:rPr lang="es-ES" sz="1200" dirty="0"/>
+              <a:t>En el DC el índice efectivo se usa para hallar la longitud de batido.</a:t>
+            </a:r>
+          </a:p>
+        </p:txBody>
+      </p:sp>
+    </p:spTree>
+    <p:extLst>
+      <p:ext uri="{BB962C8B-B14F-4D97-AF65-F5344CB8AC3E}">
+        <p14:creationId xmlns:p14="http://schemas.microsoft.com/office/powerpoint/2010/main" val="560234623"/>
+      </p:ext>
+    </p:extLst>
+  </p:cSld>
+  <p:clrMapOvr>
+    <a:masterClrMapping/>
+  </p:clrMapOvr>
+</p:sld>
+</file>
+
+<file path=ppt/slides/slide20.xml><?xml version="1.0" encoding="utf-8"?>
 <p:sld xmlns:a="http://schemas.openxmlformats.org/drawingml/2006/main" xmlns:r="http://schemas.openxmlformats.org/officeDocument/2006/relationships" xmlns:p="http://schemas.openxmlformats.org/presentationml/2006/main">
   <p:cSld>
     <p:spTree>
@@ -6853,7 +10795,7 @@
           <a:p>
             <a:fld id="{B6F15528-21DE-4FAA-801E-634DDDAF4B2B}" type="slidenum">
               <a:rPr lang="es-ES" smtClean="0"/>
-              <a:t>15</a:t>
+              <a:t>20</a:t>
             </a:fld>
             <a:endParaRPr lang="es-ES"/>
           </a:p>
@@ -7409,7 +11351,7 @@
 </p:sld>
 </file>
 
-<file path=ppt/slides/slide16.xml><?xml version="1.0" encoding="utf-8"?>
+<file path=ppt/slides/slide21.xml><?xml version="1.0" encoding="utf-8"?>
 <p:sld xmlns:a="http://schemas.openxmlformats.org/drawingml/2006/main" xmlns:r="http://schemas.openxmlformats.org/officeDocument/2006/relationships" xmlns:p="http://schemas.openxmlformats.org/presentationml/2006/main">
   <p:cSld>
     <p:spTree>
@@ -7562,7 +11504,7 @@
           <a:p>
             <a:fld id="{B6F15528-21DE-4FAA-801E-634DDDAF4B2B}" type="slidenum">
               <a:rPr lang="es-ES" smtClean="0"/>
-              <a:t>16</a:t>
+              <a:t>21</a:t>
             </a:fld>
             <a:endParaRPr lang="es-ES"/>
           </a:p>
@@ -8095,7 +12037,7 @@
 </p:sld>
 </file>
 
-<file path=ppt/slides/slide17.xml><?xml version="1.0" encoding="utf-8"?>
+<file path=ppt/slides/slide22.xml><?xml version="1.0" encoding="utf-8"?>
 <p:sld xmlns:a="http://schemas.openxmlformats.org/drawingml/2006/main" xmlns:r="http://schemas.openxmlformats.org/officeDocument/2006/relationships" xmlns:p="http://schemas.openxmlformats.org/presentationml/2006/main">
   <p:cSld>
     <p:spTree>
@@ -8245,7 +12187,7 @@
           <a:p>
             <a:fld id="{B6F15528-21DE-4FAA-801E-634DDDAF4B2B}" type="slidenum">
               <a:rPr lang="es-ES" smtClean="0"/>
-              <a:t>17</a:t>
+              <a:t>22</a:t>
             </a:fld>
             <a:endParaRPr lang="es-ES"/>
           </a:p>
@@ -8801,7 +12743,7 @@
 </p:sld>
 </file>
 
-<file path=ppt/slides/slide18.xml><?xml version="1.0" encoding="utf-8"?>
+<file path=ppt/slides/slide23.xml><?xml version="1.0" encoding="utf-8"?>
 <p:sld xmlns:a="http://schemas.openxmlformats.org/drawingml/2006/main" xmlns:r="http://schemas.openxmlformats.org/officeDocument/2006/relationships" xmlns:p="http://schemas.openxmlformats.org/presentationml/2006/main">
   <p:cSld>
     <p:spTree>
@@ -8951,7 +12893,7 @@
           <a:p>
             <a:fld id="{B6F15528-21DE-4FAA-801E-634DDDAF4B2B}" type="slidenum">
               <a:rPr lang="es-ES" smtClean="0"/>
-              <a:t>18</a:t>
+              <a:t>23</a:t>
             </a:fld>
             <a:endParaRPr lang="es-ES"/>
           </a:p>
@@ -9498,7 +13440,7 @@
 </p:sld>
 </file>
 
-<file path=ppt/slides/slide19.xml><?xml version="1.0" encoding="utf-8"?>
+<file path=ppt/slides/slide24.xml><?xml version="1.0" encoding="utf-8"?>
 <p:sld xmlns:a="http://schemas.openxmlformats.org/drawingml/2006/main" xmlns:r="http://schemas.openxmlformats.org/officeDocument/2006/relationships" xmlns:p="http://schemas.openxmlformats.org/presentationml/2006/main">
   <p:cSld>
     <p:spTree>
@@ -9637,2156 +13579,13 @@
           <a:p>
             <a:fld id="{B6F15528-21DE-4FAA-801E-634DDDAF4B2B}" type="slidenum">
               <a:rPr lang="es-ES" smtClean="0"/>
-              <a:t>19</a:t>
+              <a:t>24</a:t>
             </a:fld>
             <a:endParaRPr lang="es-ES"/>
           </a:p>
         </p:txBody>
       </p:sp>
     </p:spTree>
-  </p:cSld>
-  <p:clrMapOvr>
-    <a:masterClrMapping/>
-  </p:clrMapOvr>
-</p:sld>
-</file>
-
-<file path=ppt/slides/slide2.xml><?xml version="1.0" encoding="utf-8"?>
-<p:sld xmlns:a="http://schemas.openxmlformats.org/drawingml/2006/main" xmlns:r="http://schemas.openxmlformats.org/officeDocument/2006/relationships" xmlns:p="http://schemas.openxmlformats.org/presentationml/2006/main">
-  <p:cSld>
-    <p:spTree>
-      <p:nvGrpSpPr>
-        <p:cNvPr id="1" name="">
-          <a:extLst>
-            <a:ext uri="{FF2B5EF4-FFF2-40B4-BE49-F238E27FC236}">
-              <a16:creationId xmlns:a16="http://schemas.microsoft.com/office/drawing/2014/main" id="{4848A4D4-C3C4-085B-A7AD-EA04D83F480F}"/>
-            </a:ext>
-          </a:extLst>
-        </p:cNvPr>
-        <p:cNvGrpSpPr/>
-        <p:nvPr/>
-      </p:nvGrpSpPr>
-      <p:grpSpPr>
-        <a:xfrm>
-          <a:off x="0" y="0"/>
-          <a:ext cx="0" cy="0"/>
-          <a:chOff x="0" y="0"/>
-          <a:chExt cx="0" cy="0"/>
-        </a:xfrm>
-      </p:grpSpPr>
-      <p:sp>
-        <p:nvSpPr>
-          <p:cNvPr id="16" name="object 16">
-            <a:extLst>
-              <a:ext uri="{FF2B5EF4-FFF2-40B4-BE49-F238E27FC236}">
-                <a16:creationId xmlns:a16="http://schemas.microsoft.com/office/drawing/2014/main" id="{1B7433F1-7A0E-D925-6140-7305139D053A}"/>
-              </a:ext>
-            </a:extLst>
-          </p:cNvPr>
-          <p:cNvSpPr txBox="1">
-            <a:spLocks noGrp="1"/>
-          </p:cNvSpPr>
-          <p:nvPr>
-            <p:ph type="title"/>
-          </p:nvPr>
-        </p:nvSpPr>
-        <p:spPr>
-          <a:xfrm>
-            <a:off x="685800" y="408883"/>
-            <a:ext cx="6153785" cy="705321"/>
-          </a:xfrm>
-          <a:prstGeom prst="rect">
-            <a:avLst/>
-          </a:prstGeom>
-        </p:spPr>
-        <p:txBody>
-          <a:bodyPr vert="horz" wrap="square" lIns="0" tIns="12700" rIns="0" bIns="0" rtlCol="0">
-            <a:spAutoFit/>
-          </a:bodyPr>
-          <a:lstStyle/>
-          <a:p>
-            <a:pPr marL="12700">
-              <a:lnSpc>
-                <a:spcPct val="100000"/>
-              </a:lnSpc>
-              <a:spcBef>
-                <a:spcPts val="100"/>
-              </a:spcBef>
-            </a:pPr>
-            <a:r>
-              <a:rPr lang="es-ES" sz="2500" u="sng" spc="-5" dirty="0" err="1">
-                <a:latin typeface="+mj-lt"/>
-                <a:cs typeface="Lucida Sans"/>
-              </a:rPr>
-              <a:t>Instructions</a:t>
-            </a:r>
-            <a:br>
-              <a:rPr lang="es-ES" sz="2400" spc="-5" dirty="0">
-                <a:latin typeface="+mj-lt"/>
-                <a:cs typeface="Lucida Sans"/>
-              </a:rPr>
-            </a:br>
-            <a:r>
-              <a:rPr lang="es-ES" b="0" spc="-5" dirty="0">
-                <a:latin typeface="+mj-lt"/>
-                <a:cs typeface="Lucida Sans"/>
-              </a:rPr>
-              <a:t>General</a:t>
-            </a:r>
-            <a:endParaRPr sz="2400" b="0" dirty="0">
-              <a:latin typeface="+mj-lt"/>
-              <a:cs typeface="Lucida Sans"/>
-            </a:endParaRPr>
-          </a:p>
-        </p:txBody>
-      </p:sp>
-      <p:pic>
-        <p:nvPicPr>
-          <p:cNvPr id="83" name="Gráfico 82">
-            <a:extLst>
-              <a:ext uri="{FF2B5EF4-FFF2-40B4-BE49-F238E27FC236}">
-                <a16:creationId xmlns:a16="http://schemas.microsoft.com/office/drawing/2014/main" id="{E518E73B-CE22-A00C-9C86-634FB762EE69}"/>
-              </a:ext>
-            </a:extLst>
-          </p:cNvPr>
-          <p:cNvPicPr>
-            <a:picLocks noChangeAspect="1"/>
-          </p:cNvPicPr>
-          <p:nvPr/>
-        </p:nvPicPr>
-        <p:blipFill>
-          <a:blip r:embed="rId2">
-            <a:extLst>
-              <a:ext uri="{96DAC541-7B7A-43D3-8B79-37D633B846F1}">
-                <asvg:svgBlip xmlns:asvg="http://schemas.microsoft.com/office/drawing/2016/SVG/main" r:embed="rId3"/>
-              </a:ext>
-            </a:extLst>
-          </a:blip>
-          <a:stretch>
-            <a:fillRect/>
-          </a:stretch>
-        </p:blipFill>
-        <p:spPr>
-          <a:xfrm>
-            <a:off x="5045006" y="6356057"/>
-            <a:ext cx="6409575" cy="363174"/>
-          </a:xfrm>
-          <a:prstGeom prst="rect">
-            <a:avLst/>
-          </a:prstGeom>
-        </p:spPr>
-      </p:pic>
-      <p:sp>
-        <p:nvSpPr>
-          <p:cNvPr id="84" name="Marcador de número de diapositiva 83">
-            <a:extLst>
-              <a:ext uri="{FF2B5EF4-FFF2-40B4-BE49-F238E27FC236}">
-                <a16:creationId xmlns:a16="http://schemas.microsoft.com/office/drawing/2014/main" id="{1E163A6B-DFE4-C67D-5F3E-A56ACEF2EA4C}"/>
-              </a:ext>
-            </a:extLst>
-          </p:cNvPr>
-          <p:cNvSpPr>
-            <a:spLocks noGrp="1"/>
-          </p:cNvSpPr>
-          <p:nvPr>
-            <p:ph type="sldNum" sz="quarter" idx="7"/>
-          </p:nvPr>
-        </p:nvSpPr>
-        <p:spPr/>
-        <p:txBody>
-          <a:bodyPr/>
-          <a:lstStyle/>
-          <a:p>
-            <a:fld id="{B6F15528-21DE-4FAA-801E-634DDDAF4B2B}" type="slidenum">
-              <a:rPr lang="es-ES" smtClean="0"/>
-              <a:t>2</a:t>
-            </a:fld>
-            <a:endParaRPr lang="es-ES"/>
-          </a:p>
-        </p:txBody>
-      </p:sp>
-      <p:sp>
-        <p:nvSpPr>
-          <p:cNvPr id="3" name="Marcador de pie de página 2">
-            <a:extLst>
-              <a:ext uri="{FF2B5EF4-FFF2-40B4-BE49-F238E27FC236}">
-                <a16:creationId xmlns:a16="http://schemas.microsoft.com/office/drawing/2014/main" id="{95FC84FF-30D3-FDAB-0A5A-0F07F8EE1161}"/>
-              </a:ext>
-            </a:extLst>
-          </p:cNvPr>
-          <p:cNvSpPr>
-            <a:spLocks noGrp="1"/>
-          </p:cNvSpPr>
-          <p:nvPr>
-            <p:ph type="ftr" sz="quarter" idx="5"/>
-          </p:nvPr>
-        </p:nvSpPr>
-        <p:spPr/>
-        <p:txBody>
-          <a:bodyPr/>
-          <a:lstStyle/>
-          <a:p>
-            <a:pPr marL="12700">
-              <a:spcBef>
-                <a:spcPts val="15"/>
-              </a:spcBef>
-            </a:pPr>
-            <a:r>
-              <a:rPr lang="es-ES" spc="-5"/>
-              <a:t>LAB 2.0. COUPLERS</a:t>
-            </a:r>
-            <a:endParaRPr lang="es-ES" spc="-5" dirty="0"/>
-          </a:p>
-        </p:txBody>
-      </p:sp>
-      <p:sp>
-        <p:nvSpPr>
-          <p:cNvPr id="4" name="Marcador de texto 2">
-            <a:extLst>
-              <a:ext uri="{FF2B5EF4-FFF2-40B4-BE49-F238E27FC236}">
-                <a16:creationId xmlns:a16="http://schemas.microsoft.com/office/drawing/2014/main" id="{9F7BC140-B3D8-C3CB-55AD-9064C7CDE9CA}"/>
-              </a:ext>
-            </a:extLst>
-          </p:cNvPr>
-          <p:cNvSpPr txBox="1">
-            <a:spLocks/>
-          </p:cNvSpPr>
-          <p:nvPr/>
-        </p:nvSpPr>
-        <p:spPr>
-          <a:xfrm>
-            <a:off x="608011" y="1163263"/>
-            <a:ext cx="11048999" cy="4958137"/>
-          </a:xfrm>
-          <a:prstGeom prst="rect">
-            <a:avLst/>
-          </a:prstGeom>
-        </p:spPr>
-        <p:txBody>
-          <a:bodyPr>
-            <a:normAutofit/>
-          </a:bodyPr>
-          <a:lstStyle>
-            <a:lvl1pPr marL="0">
-              <a:defRPr>
-                <a:latin typeface="+mn-lt"/>
-                <a:ea typeface="+mn-ea"/>
-                <a:cs typeface="+mn-cs"/>
-              </a:defRPr>
-            </a:lvl1pPr>
-            <a:lvl2pPr marL="457200">
-              <a:defRPr>
-                <a:latin typeface="+mn-lt"/>
-                <a:ea typeface="+mn-ea"/>
-                <a:cs typeface="+mn-cs"/>
-              </a:defRPr>
-            </a:lvl2pPr>
-            <a:lvl3pPr marL="914400">
-              <a:defRPr>
-                <a:latin typeface="+mn-lt"/>
-                <a:ea typeface="+mn-ea"/>
-                <a:cs typeface="+mn-cs"/>
-              </a:defRPr>
-            </a:lvl3pPr>
-            <a:lvl4pPr marL="1371600">
-              <a:defRPr>
-                <a:latin typeface="+mn-lt"/>
-                <a:ea typeface="+mn-ea"/>
-                <a:cs typeface="+mn-cs"/>
-              </a:defRPr>
-            </a:lvl4pPr>
-            <a:lvl5pPr marL="1828800">
-              <a:defRPr>
-                <a:latin typeface="+mn-lt"/>
-                <a:ea typeface="+mn-ea"/>
-                <a:cs typeface="+mn-cs"/>
-              </a:defRPr>
-            </a:lvl5pPr>
-            <a:lvl6pPr marL="2286000">
-              <a:defRPr>
-                <a:latin typeface="+mn-lt"/>
-                <a:ea typeface="+mn-ea"/>
-                <a:cs typeface="+mn-cs"/>
-              </a:defRPr>
-            </a:lvl6pPr>
-            <a:lvl7pPr marL="2743200">
-              <a:defRPr>
-                <a:latin typeface="+mn-lt"/>
-                <a:ea typeface="+mn-ea"/>
-                <a:cs typeface="+mn-cs"/>
-              </a:defRPr>
-            </a:lvl7pPr>
-            <a:lvl8pPr marL="3200400">
-              <a:defRPr>
-                <a:latin typeface="+mn-lt"/>
-                <a:ea typeface="+mn-ea"/>
-                <a:cs typeface="+mn-cs"/>
-              </a:defRPr>
-            </a:lvl8pPr>
-            <a:lvl9pPr marL="3657600">
-              <a:defRPr>
-                <a:latin typeface="+mn-lt"/>
-                <a:ea typeface="+mn-ea"/>
-                <a:cs typeface="+mn-cs"/>
-              </a:defRPr>
-            </a:lvl9pPr>
-          </a:lstStyle>
-          <a:p>
-            <a:pPr algn="just"/>
-            <a:r>
-              <a:rPr lang="en-US" sz="2000" b="1" kern="0" dirty="0">
-                <a:solidFill>
-                  <a:sysClr val="windowText" lastClr="000000"/>
-                </a:solidFill>
-                <a:sym typeface="Wingdings" pitchFamily="2" charset="2"/>
-              </a:rPr>
-              <a:t>SCRIPTS</a:t>
-            </a:r>
-          </a:p>
-          <a:p>
-            <a:pPr marL="342900" indent="-342900" algn="just">
-              <a:buFont typeface="Arial" panose="020B0604020202020204" pitchFamily="34" charset="0"/>
-              <a:buChar char="•"/>
-            </a:pPr>
-            <a:r>
-              <a:rPr lang="en-US" kern="0" dirty="0">
-                <a:solidFill>
-                  <a:sysClr val="windowText" lastClr="000000"/>
-                </a:solidFill>
-                <a:sym typeface="Wingdings" pitchFamily="2" charset="2"/>
-              </a:rPr>
-              <a:t>From 	GitHub  </a:t>
-            </a:r>
-          </a:p>
-          <a:p>
-            <a:pPr marL="800100" lvl="1" indent="-342900" algn="just">
-              <a:buFont typeface="Arial" panose="020B0604020202020204" pitchFamily="34" charset="0"/>
-              <a:buChar char="•"/>
-            </a:pPr>
-            <a:r>
-              <a:rPr lang="en-US" kern="0" dirty="0">
-                <a:solidFill>
-                  <a:sysClr val="windowText" lastClr="000000"/>
-                </a:solidFill>
-                <a:sym typeface="Wingdings" pitchFamily="2" charset="2"/>
-              </a:rPr>
-              <a:t>Fork the repo: https://github.com/cccanvas-upv/pic-upv-lab2.git</a:t>
-            </a:r>
-          </a:p>
-          <a:p>
-            <a:pPr marL="800100" lvl="1" indent="-342900" algn="just">
-              <a:buFont typeface="Arial" panose="020B0604020202020204" pitchFamily="34" charset="0"/>
-              <a:buChar char="•"/>
-            </a:pPr>
-            <a:r>
-              <a:rPr lang="en-US" kern="0" dirty="0">
-                <a:solidFill>
-                  <a:sysClr val="windowText" lastClr="000000"/>
-                </a:solidFill>
-                <a:sym typeface="Wingdings" pitchFamily="2" charset="2"/>
-              </a:rPr>
-              <a:t>Clone the repo using </a:t>
-            </a:r>
-            <a:r>
-              <a:rPr lang="en-US" kern="0" dirty="0" err="1">
-                <a:solidFill>
-                  <a:sysClr val="windowText" lastClr="000000"/>
-                </a:solidFill>
-                <a:sym typeface="Wingdings" pitchFamily="2" charset="2"/>
-              </a:rPr>
-              <a:t>VSCode</a:t>
-            </a:r>
-            <a:endParaRPr lang="en-US" kern="0" dirty="0">
-              <a:solidFill>
-                <a:sysClr val="windowText" lastClr="000000"/>
-              </a:solidFill>
-              <a:sym typeface="Wingdings" pitchFamily="2" charset="2"/>
-            </a:endParaRPr>
-          </a:p>
-          <a:p>
-            <a:pPr marL="342900" indent="-342900" algn="just">
-              <a:buFont typeface="Arial" panose="020B0604020202020204" pitchFamily="34" charset="0"/>
-              <a:buChar char="•"/>
-            </a:pPr>
-            <a:r>
-              <a:rPr lang="en-US" kern="0" dirty="0">
-                <a:solidFill>
-                  <a:sysClr val="windowText" lastClr="000000"/>
-                </a:solidFill>
-              </a:rPr>
-              <a:t>Run the </a:t>
-            </a:r>
-            <a:r>
-              <a:rPr lang="en-US" kern="0" dirty="0" err="1">
-                <a:solidFill>
-                  <a:sysClr val="windowText" lastClr="000000"/>
-                </a:solidFill>
-              </a:rPr>
-              <a:t>Jupyter</a:t>
-            </a:r>
-            <a:r>
-              <a:rPr lang="en-US" kern="0" dirty="0">
-                <a:solidFill>
-                  <a:sysClr val="windowText" lastClr="000000"/>
-                </a:solidFill>
-              </a:rPr>
-              <a:t> Notebook: </a:t>
-            </a:r>
-          </a:p>
-          <a:p>
-            <a:pPr marL="800100" lvl="1" indent="-342900" algn="just">
-              <a:buFont typeface="Arial" panose="020B0604020202020204" pitchFamily="34" charset="0"/>
-              <a:buChar char="•"/>
-            </a:pPr>
-            <a:r>
-              <a:rPr lang="en-US" kern="0" dirty="0" err="1">
-                <a:solidFill>
-                  <a:sysClr val="windowText" lastClr="000000"/>
-                </a:solidFill>
-              </a:rPr>
-              <a:t>COUPLERS_Student.ipynb</a:t>
-            </a:r>
-            <a:r>
-              <a:rPr lang="en-US" kern="0" dirty="0">
-                <a:solidFill>
-                  <a:sysClr val="windowText" lastClr="000000"/>
-                </a:solidFill>
-              </a:rPr>
-              <a:t> </a:t>
-            </a:r>
-          </a:p>
-          <a:p>
-            <a:pPr algn="just"/>
-            <a:endParaRPr lang="en-US" b="1" i="1" dirty="0"/>
-          </a:p>
-          <a:p>
-            <a:pPr algn="just"/>
-            <a:r>
-              <a:rPr lang="en-US" b="1" i="1" dirty="0"/>
-              <a:t>Cross-Sections </a:t>
-            </a:r>
-            <a:r>
-              <a:rPr lang="en-US" i="1" dirty="0"/>
-              <a:t>to be studied:</a:t>
-            </a:r>
-            <a:endParaRPr lang="en-US" b="1" i="1" dirty="0"/>
-          </a:p>
-          <a:p>
-            <a:pPr algn="just"/>
-            <a:endParaRPr lang="en-US" sz="2000" b="1" i="1" dirty="0"/>
-          </a:p>
-          <a:p>
-            <a:pPr algn="just"/>
-            <a:endParaRPr lang="en-US" sz="2000" kern="0" dirty="0">
-              <a:solidFill>
-                <a:sysClr val="windowText" lastClr="000000"/>
-              </a:solidFill>
-            </a:endParaRPr>
-          </a:p>
-        </p:txBody>
-      </p:sp>
-      <p:sp>
-        <p:nvSpPr>
-          <p:cNvPr id="96" name="object 7">
-            <a:extLst>
-              <a:ext uri="{FF2B5EF4-FFF2-40B4-BE49-F238E27FC236}">
-                <a16:creationId xmlns:a16="http://schemas.microsoft.com/office/drawing/2014/main" id="{BB459788-0671-D4BA-B6DB-A3544D24EA92}"/>
-              </a:ext>
-            </a:extLst>
-          </p:cNvPr>
-          <p:cNvSpPr/>
-          <p:nvPr/>
-        </p:nvSpPr>
-        <p:spPr>
-          <a:xfrm>
-            <a:off x="1241591" y="3685362"/>
-            <a:ext cx="3929379" cy="1902460"/>
-          </a:xfrm>
-          <a:custGeom>
-            <a:avLst/>
-            <a:gdLst/>
-            <a:ahLst/>
-            <a:cxnLst/>
-            <a:rect l="l" t="t" r="r" b="b"/>
-            <a:pathLst>
-              <a:path w="3929379" h="1902460">
-                <a:moveTo>
-                  <a:pt x="0" y="1901952"/>
-                </a:moveTo>
-                <a:lnTo>
-                  <a:pt x="3928872" y="1901952"/>
-                </a:lnTo>
-                <a:lnTo>
-                  <a:pt x="3928872" y="0"/>
-                </a:lnTo>
-                <a:lnTo>
-                  <a:pt x="0" y="0"/>
-                </a:lnTo>
-                <a:lnTo>
-                  <a:pt x="0" y="1901952"/>
-                </a:lnTo>
-                <a:close/>
-              </a:path>
-            </a:pathLst>
-          </a:custGeom>
-          <a:solidFill>
-            <a:srgbClr val="F1F1F1"/>
-          </a:solidFill>
-        </p:spPr>
-        <p:txBody>
-          <a:bodyPr wrap="square" lIns="0" tIns="0" rIns="0" bIns="0" rtlCol="0"/>
-          <a:lstStyle/>
-          <a:p>
-            <a:endParaRPr dirty="0"/>
-          </a:p>
-        </p:txBody>
-      </p:sp>
-      <p:sp>
-        <p:nvSpPr>
-          <p:cNvPr id="97" name="object 62">
-            <a:extLst>
-              <a:ext uri="{FF2B5EF4-FFF2-40B4-BE49-F238E27FC236}">
-                <a16:creationId xmlns:a16="http://schemas.microsoft.com/office/drawing/2014/main" id="{13E0425E-CEDF-CBC4-B34B-0CC3951920EA}"/>
-              </a:ext>
-            </a:extLst>
-          </p:cNvPr>
-          <p:cNvSpPr/>
-          <p:nvPr/>
-        </p:nvSpPr>
-        <p:spPr>
-          <a:xfrm>
-            <a:off x="1795778" y="4331380"/>
-            <a:ext cx="67949" cy="610424"/>
-          </a:xfrm>
-          <a:custGeom>
-            <a:avLst/>
-            <a:gdLst/>
-            <a:ahLst/>
-            <a:cxnLst/>
-            <a:rect l="l" t="t" r="r" b="b"/>
-            <a:pathLst>
-              <a:path w="76200" h="986155">
-                <a:moveTo>
-                  <a:pt x="31750" y="909827"/>
-                </a:moveTo>
-                <a:lnTo>
-                  <a:pt x="0" y="909827"/>
-                </a:lnTo>
-                <a:lnTo>
-                  <a:pt x="38100" y="986027"/>
-                </a:lnTo>
-                <a:lnTo>
-                  <a:pt x="69850" y="922527"/>
-                </a:lnTo>
-                <a:lnTo>
-                  <a:pt x="31750" y="922527"/>
-                </a:lnTo>
-                <a:lnTo>
-                  <a:pt x="31750" y="909827"/>
-                </a:lnTo>
-                <a:close/>
-              </a:path>
-              <a:path w="76200" h="986155">
-                <a:moveTo>
-                  <a:pt x="44450" y="63500"/>
-                </a:moveTo>
-                <a:lnTo>
-                  <a:pt x="31750" y="63500"/>
-                </a:lnTo>
-                <a:lnTo>
-                  <a:pt x="31750" y="922527"/>
-                </a:lnTo>
-                <a:lnTo>
-                  <a:pt x="44450" y="922527"/>
-                </a:lnTo>
-                <a:lnTo>
-                  <a:pt x="44450" y="63500"/>
-                </a:lnTo>
-                <a:close/>
-              </a:path>
-              <a:path w="76200" h="986155">
-                <a:moveTo>
-                  <a:pt x="76200" y="909827"/>
-                </a:moveTo>
-                <a:lnTo>
-                  <a:pt x="44450" y="909827"/>
-                </a:lnTo>
-                <a:lnTo>
-                  <a:pt x="44450" y="922527"/>
-                </a:lnTo>
-                <a:lnTo>
-                  <a:pt x="69850" y="922527"/>
-                </a:lnTo>
-                <a:lnTo>
-                  <a:pt x="76200" y="909827"/>
-                </a:lnTo>
-                <a:close/>
-              </a:path>
-              <a:path w="76200" h="986155">
-                <a:moveTo>
-                  <a:pt x="38100" y="0"/>
-                </a:moveTo>
-                <a:lnTo>
-                  <a:pt x="0" y="76200"/>
-                </a:lnTo>
-                <a:lnTo>
-                  <a:pt x="31750" y="76200"/>
-                </a:lnTo>
-                <a:lnTo>
-                  <a:pt x="31750" y="63500"/>
-                </a:lnTo>
-                <a:lnTo>
-                  <a:pt x="69850" y="63500"/>
-                </a:lnTo>
-                <a:lnTo>
-                  <a:pt x="38100" y="0"/>
-                </a:lnTo>
-                <a:close/>
-              </a:path>
-              <a:path w="76200" h="986155">
-                <a:moveTo>
-                  <a:pt x="69850" y="63500"/>
-                </a:moveTo>
-                <a:lnTo>
-                  <a:pt x="44450" y="63500"/>
-                </a:lnTo>
-                <a:lnTo>
-                  <a:pt x="44450" y="76200"/>
-                </a:lnTo>
-                <a:lnTo>
-                  <a:pt x="76200" y="76200"/>
-                </a:lnTo>
-                <a:lnTo>
-                  <a:pt x="69850" y="63500"/>
-                </a:lnTo>
-                <a:close/>
-              </a:path>
-            </a:pathLst>
-          </a:custGeom>
-          <a:solidFill>
-            <a:srgbClr val="000000"/>
-          </a:solidFill>
-        </p:spPr>
-        <p:txBody>
-          <a:bodyPr wrap="square" lIns="0" tIns="0" rIns="0" bIns="0" rtlCol="0"/>
-          <a:lstStyle/>
-          <a:p>
-            <a:endParaRPr/>
-          </a:p>
-        </p:txBody>
-      </p:sp>
-      <p:sp>
-        <p:nvSpPr>
-          <p:cNvPr id="98" name="object 63">
-            <a:extLst>
-              <a:ext uri="{FF2B5EF4-FFF2-40B4-BE49-F238E27FC236}">
-                <a16:creationId xmlns:a16="http://schemas.microsoft.com/office/drawing/2014/main" id="{FDE45797-C0E3-ACE0-F66B-057BDEDB9070}"/>
-              </a:ext>
-            </a:extLst>
-          </p:cNvPr>
-          <p:cNvSpPr txBox="1"/>
-          <p:nvPr/>
-        </p:nvSpPr>
-        <p:spPr>
-          <a:xfrm>
-            <a:off x="1229760" y="4389164"/>
-            <a:ext cx="577850" cy="454025"/>
-          </a:xfrm>
-          <a:prstGeom prst="rect">
-            <a:avLst/>
-          </a:prstGeom>
-        </p:spPr>
-        <p:txBody>
-          <a:bodyPr vert="horz" wrap="square" lIns="0" tIns="13335" rIns="0" bIns="0" rtlCol="0">
-            <a:spAutoFit/>
-          </a:bodyPr>
-          <a:lstStyle/>
-          <a:p>
-            <a:pPr marR="3175" algn="ctr">
-              <a:lnSpc>
-                <a:spcPct val="100000"/>
-              </a:lnSpc>
-              <a:spcBef>
-                <a:spcPts val="105"/>
-              </a:spcBef>
-            </a:pPr>
-            <a:r>
-              <a:rPr sz="1400" dirty="0">
-                <a:latin typeface="Calibri"/>
-                <a:cs typeface="Calibri"/>
-              </a:rPr>
-              <a:t>h</a:t>
-            </a:r>
-          </a:p>
-          <a:p>
-            <a:pPr marR="5080" algn="ctr">
-              <a:lnSpc>
-                <a:spcPct val="100000"/>
-              </a:lnSpc>
-              <a:spcBef>
-                <a:spcPts val="5"/>
-              </a:spcBef>
-            </a:pPr>
-            <a:r>
-              <a:rPr sz="1400" spc="-10" dirty="0">
-                <a:latin typeface="Calibri"/>
-                <a:cs typeface="Calibri"/>
-              </a:rPr>
-              <a:t>(h</a:t>
-            </a:r>
-            <a:r>
-              <a:rPr sz="1400" dirty="0">
-                <a:latin typeface="Calibri"/>
-                <a:cs typeface="Calibri"/>
-              </a:rPr>
-              <a:t>eig</a:t>
-            </a:r>
-            <a:r>
-              <a:rPr sz="1400" spc="-25" dirty="0">
-                <a:latin typeface="Calibri"/>
-                <a:cs typeface="Calibri"/>
-              </a:rPr>
-              <a:t>h</a:t>
-            </a:r>
-            <a:r>
-              <a:rPr sz="1400" spc="-5" dirty="0">
-                <a:latin typeface="Calibri"/>
-                <a:cs typeface="Calibri"/>
-              </a:rPr>
-              <a:t>t</a:t>
-            </a:r>
-            <a:r>
-              <a:rPr sz="1400" dirty="0">
-                <a:latin typeface="Calibri"/>
-                <a:cs typeface="Calibri"/>
-              </a:rPr>
-              <a:t>)</a:t>
-            </a:r>
-          </a:p>
-        </p:txBody>
-      </p:sp>
-      <p:sp>
-        <p:nvSpPr>
-          <p:cNvPr id="99" name="object 64">
-            <a:extLst>
-              <a:ext uri="{FF2B5EF4-FFF2-40B4-BE49-F238E27FC236}">
-                <a16:creationId xmlns:a16="http://schemas.microsoft.com/office/drawing/2014/main" id="{ABAAA5DD-56CA-BF94-2180-F0866658B6B3}"/>
-              </a:ext>
-            </a:extLst>
-          </p:cNvPr>
-          <p:cNvSpPr/>
-          <p:nvPr/>
-        </p:nvSpPr>
-        <p:spPr>
-          <a:xfrm>
-            <a:off x="1948179" y="4155787"/>
-            <a:ext cx="914400" cy="89266"/>
-          </a:xfrm>
-          <a:custGeom>
-            <a:avLst/>
-            <a:gdLst/>
-            <a:ahLst/>
-            <a:cxnLst/>
-            <a:rect l="l" t="t" r="r" b="b"/>
-            <a:pathLst>
-              <a:path w="1758314" h="76200">
-                <a:moveTo>
-                  <a:pt x="76200" y="0"/>
-                </a:moveTo>
-                <a:lnTo>
-                  <a:pt x="0" y="38100"/>
-                </a:lnTo>
-                <a:lnTo>
-                  <a:pt x="76200" y="76200"/>
-                </a:lnTo>
-                <a:lnTo>
-                  <a:pt x="76200" y="44450"/>
-                </a:lnTo>
-                <a:lnTo>
-                  <a:pt x="63500" y="44450"/>
-                </a:lnTo>
-                <a:lnTo>
-                  <a:pt x="63500" y="31750"/>
-                </a:lnTo>
-                <a:lnTo>
-                  <a:pt x="76200" y="31750"/>
-                </a:lnTo>
-                <a:lnTo>
-                  <a:pt x="76200" y="0"/>
-                </a:lnTo>
-                <a:close/>
-              </a:path>
-              <a:path w="1758314" h="76200">
-                <a:moveTo>
-                  <a:pt x="1682114" y="0"/>
-                </a:moveTo>
-                <a:lnTo>
-                  <a:pt x="1682114" y="76200"/>
-                </a:lnTo>
-                <a:lnTo>
-                  <a:pt x="1745614" y="44450"/>
-                </a:lnTo>
-                <a:lnTo>
-                  <a:pt x="1694814" y="44450"/>
-                </a:lnTo>
-                <a:lnTo>
-                  <a:pt x="1694814" y="31750"/>
-                </a:lnTo>
-                <a:lnTo>
-                  <a:pt x="1745614" y="31750"/>
-                </a:lnTo>
-                <a:lnTo>
-                  <a:pt x="1682114" y="0"/>
-                </a:lnTo>
-                <a:close/>
-              </a:path>
-              <a:path w="1758314" h="76200">
-                <a:moveTo>
-                  <a:pt x="76200" y="31750"/>
-                </a:moveTo>
-                <a:lnTo>
-                  <a:pt x="63500" y="31750"/>
-                </a:lnTo>
-                <a:lnTo>
-                  <a:pt x="63500" y="44450"/>
-                </a:lnTo>
-                <a:lnTo>
-                  <a:pt x="76200" y="44450"/>
-                </a:lnTo>
-                <a:lnTo>
-                  <a:pt x="76200" y="31750"/>
-                </a:lnTo>
-                <a:close/>
-              </a:path>
-              <a:path w="1758314" h="76200">
-                <a:moveTo>
-                  <a:pt x="1682114" y="31750"/>
-                </a:moveTo>
-                <a:lnTo>
-                  <a:pt x="76200" y="31750"/>
-                </a:lnTo>
-                <a:lnTo>
-                  <a:pt x="76200" y="44450"/>
-                </a:lnTo>
-                <a:lnTo>
-                  <a:pt x="1682114" y="44450"/>
-                </a:lnTo>
-                <a:lnTo>
-                  <a:pt x="1682114" y="31750"/>
-                </a:lnTo>
-                <a:close/>
-              </a:path>
-              <a:path w="1758314" h="76200">
-                <a:moveTo>
-                  <a:pt x="1745614" y="31750"/>
-                </a:moveTo>
-                <a:lnTo>
-                  <a:pt x="1694814" y="31750"/>
-                </a:lnTo>
-                <a:lnTo>
-                  <a:pt x="1694814" y="44450"/>
-                </a:lnTo>
-                <a:lnTo>
-                  <a:pt x="1745614" y="44450"/>
-                </a:lnTo>
-                <a:lnTo>
-                  <a:pt x="1758314" y="38100"/>
-                </a:lnTo>
-                <a:lnTo>
-                  <a:pt x="1745614" y="31750"/>
-                </a:lnTo>
-                <a:close/>
-              </a:path>
-            </a:pathLst>
-          </a:custGeom>
-          <a:solidFill>
-            <a:srgbClr val="000000"/>
-          </a:solidFill>
-        </p:spPr>
-        <p:txBody>
-          <a:bodyPr wrap="square" lIns="0" tIns="0" rIns="0" bIns="0" rtlCol="0"/>
-          <a:lstStyle/>
-          <a:p>
-            <a:endParaRPr/>
-          </a:p>
-        </p:txBody>
-      </p:sp>
-      <p:sp>
-        <p:nvSpPr>
-          <p:cNvPr id="100" name="object 65">
-            <a:extLst>
-              <a:ext uri="{FF2B5EF4-FFF2-40B4-BE49-F238E27FC236}">
-                <a16:creationId xmlns:a16="http://schemas.microsoft.com/office/drawing/2014/main" id="{A1EF013C-5123-D9A7-DC76-FEFD731E96E2}"/>
-              </a:ext>
-            </a:extLst>
-          </p:cNvPr>
-          <p:cNvSpPr txBox="1"/>
-          <p:nvPr/>
-        </p:nvSpPr>
-        <p:spPr>
-          <a:xfrm>
-            <a:off x="2073955" y="3856694"/>
-            <a:ext cx="733425" cy="228909"/>
-          </a:xfrm>
-          <a:prstGeom prst="rect">
-            <a:avLst/>
-          </a:prstGeom>
-        </p:spPr>
-        <p:txBody>
-          <a:bodyPr vert="horz" wrap="square" lIns="0" tIns="13335" rIns="0" bIns="0" rtlCol="0">
-            <a:spAutoFit/>
-          </a:bodyPr>
-          <a:lstStyle/>
-          <a:p>
-            <a:pPr>
-              <a:lnSpc>
-                <a:spcPct val="100000"/>
-              </a:lnSpc>
-              <a:spcBef>
-                <a:spcPts val="105"/>
-              </a:spcBef>
-            </a:pPr>
-            <a:r>
-              <a:rPr lang="es-ES" sz="1400" spc="5" dirty="0">
-                <a:latin typeface="Calibri"/>
-                <a:cs typeface="Calibri"/>
-              </a:rPr>
-              <a:t>w</a:t>
-            </a:r>
-            <a:r>
-              <a:rPr sz="1400" spc="-65" dirty="0">
-                <a:latin typeface="Calibri"/>
-                <a:cs typeface="Calibri"/>
-              </a:rPr>
-              <a:t> </a:t>
-            </a:r>
-            <a:r>
-              <a:rPr sz="1400" spc="-5" dirty="0">
-                <a:latin typeface="Calibri"/>
-                <a:cs typeface="Calibri"/>
-              </a:rPr>
-              <a:t>(width)</a:t>
-            </a:r>
-            <a:endParaRPr sz="1400" dirty="0">
-              <a:latin typeface="Calibri"/>
-              <a:cs typeface="Calibri"/>
-            </a:endParaRPr>
-          </a:p>
-        </p:txBody>
-      </p:sp>
-      <p:sp>
-        <p:nvSpPr>
-          <p:cNvPr id="101" name="object 73">
-            <a:extLst>
-              <a:ext uri="{FF2B5EF4-FFF2-40B4-BE49-F238E27FC236}">
-                <a16:creationId xmlns:a16="http://schemas.microsoft.com/office/drawing/2014/main" id="{4C5C0871-D9B5-E642-7661-FFBCAD75720B}"/>
-              </a:ext>
-            </a:extLst>
-          </p:cNvPr>
-          <p:cNvSpPr txBox="1"/>
-          <p:nvPr/>
-        </p:nvSpPr>
-        <p:spPr>
-          <a:xfrm>
-            <a:off x="3523559" y="4331380"/>
-            <a:ext cx="984979" cy="610424"/>
-          </a:xfrm>
-          <a:prstGeom prst="rect">
-            <a:avLst/>
-          </a:prstGeom>
-          <a:solidFill>
-            <a:srgbClr val="CCB657"/>
-          </a:solidFill>
-        </p:spPr>
-        <p:txBody>
-          <a:bodyPr vert="horz" wrap="square" lIns="0" tIns="2540" rIns="0" bIns="0" rtlCol="0">
-            <a:spAutoFit/>
-          </a:bodyPr>
-          <a:lstStyle/>
-          <a:p>
-            <a:pPr>
-              <a:lnSpc>
-                <a:spcPct val="100000"/>
-              </a:lnSpc>
-              <a:spcBef>
-                <a:spcPts val="20"/>
-              </a:spcBef>
-            </a:pPr>
-            <a:endParaRPr sz="2350" dirty="0">
-              <a:latin typeface="Times New Roman"/>
-              <a:cs typeface="Times New Roman"/>
-            </a:endParaRPr>
-          </a:p>
-          <a:p>
-            <a:pPr marL="18415" algn="ctr">
-              <a:lnSpc>
-                <a:spcPct val="100000"/>
-              </a:lnSpc>
-            </a:pPr>
-            <a:r>
-              <a:rPr sz="1600" b="1" spc="-10" dirty="0">
-                <a:latin typeface="Calibri"/>
-                <a:cs typeface="Calibri"/>
-              </a:rPr>
-              <a:t>Core</a:t>
-            </a:r>
-            <a:endParaRPr sz="1600" dirty="0">
-              <a:latin typeface="Calibri"/>
-              <a:cs typeface="Calibri"/>
-            </a:endParaRPr>
-          </a:p>
-        </p:txBody>
-      </p:sp>
-      <p:sp>
-        <p:nvSpPr>
-          <p:cNvPr id="102" name="object 74">
-            <a:extLst>
-              <a:ext uri="{FF2B5EF4-FFF2-40B4-BE49-F238E27FC236}">
-                <a16:creationId xmlns:a16="http://schemas.microsoft.com/office/drawing/2014/main" id="{10CC4DBA-05F4-4CDC-BA0E-6200AF622CA9}"/>
-              </a:ext>
-            </a:extLst>
-          </p:cNvPr>
-          <p:cNvSpPr txBox="1"/>
-          <p:nvPr/>
-        </p:nvSpPr>
-        <p:spPr>
-          <a:xfrm>
-            <a:off x="4421819" y="5309818"/>
-            <a:ext cx="741045" cy="269240"/>
-          </a:xfrm>
-          <a:prstGeom prst="rect">
-            <a:avLst/>
-          </a:prstGeom>
-        </p:spPr>
-        <p:txBody>
-          <a:bodyPr vert="horz" wrap="square" lIns="0" tIns="12065" rIns="0" bIns="0" rtlCol="0">
-            <a:spAutoFit/>
-          </a:bodyPr>
-          <a:lstStyle/>
-          <a:p>
-            <a:pPr>
-              <a:lnSpc>
-                <a:spcPct val="100000"/>
-              </a:lnSpc>
-              <a:spcBef>
-                <a:spcPts val="95"/>
-              </a:spcBef>
-            </a:pPr>
-            <a:r>
-              <a:rPr sz="1600" b="1" spc="-10" dirty="0">
-                <a:latin typeface="Calibri"/>
-                <a:cs typeface="Calibri"/>
-              </a:rPr>
-              <a:t>Cladding</a:t>
-            </a:r>
-            <a:endParaRPr sz="1600" dirty="0">
-              <a:latin typeface="Calibri"/>
-              <a:cs typeface="Calibri"/>
-            </a:endParaRPr>
-          </a:p>
-        </p:txBody>
-      </p:sp>
-      <p:sp>
-        <p:nvSpPr>
-          <p:cNvPr id="111" name="object 7">
-            <a:extLst>
-              <a:ext uri="{FF2B5EF4-FFF2-40B4-BE49-F238E27FC236}">
-                <a16:creationId xmlns:a16="http://schemas.microsoft.com/office/drawing/2014/main" id="{06801468-6F27-A16A-64E3-D7AD4B6B6B96}"/>
-              </a:ext>
-            </a:extLst>
-          </p:cNvPr>
-          <p:cNvSpPr/>
-          <p:nvPr/>
-        </p:nvSpPr>
-        <p:spPr>
-          <a:xfrm>
-            <a:off x="7239000" y="3685362"/>
-            <a:ext cx="3929379" cy="1902460"/>
-          </a:xfrm>
-          <a:custGeom>
-            <a:avLst/>
-            <a:gdLst/>
-            <a:ahLst/>
-            <a:cxnLst/>
-            <a:rect l="l" t="t" r="r" b="b"/>
-            <a:pathLst>
-              <a:path w="3929379" h="1902460">
-                <a:moveTo>
-                  <a:pt x="0" y="1901952"/>
-                </a:moveTo>
-                <a:lnTo>
-                  <a:pt x="3928872" y="1901952"/>
-                </a:lnTo>
-                <a:lnTo>
-                  <a:pt x="3928872" y="0"/>
-                </a:lnTo>
-                <a:lnTo>
-                  <a:pt x="0" y="0"/>
-                </a:lnTo>
-                <a:lnTo>
-                  <a:pt x="0" y="1901952"/>
-                </a:lnTo>
-                <a:close/>
-              </a:path>
-            </a:pathLst>
-          </a:custGeom>
-          <a:solidFill>
-            <a:srgbClr val="F1F1F1"/>
-          </a:solidFill>
-        </p:spPr>
-        <p:txBody>
-          <a:bodyPr wrap="square" lIns="0" tIns="0" rIns="0" bIns="0" rtlCol="0"/>
-          <a:lstStyle/>
-          <a:p>
-            <a:endParaRPr dirty="0"/>
-          </a:p>
-        </p:txBody>
-      </p:sp>
-      <p:sp>
-        <p:nvSpPr>
-          <p:cNvPr id="114" name="object 64">
-            <a:extLst>
-              <a:ext uri="{FF2B5EF4-FFF2-40B4-BE49-F238E27FC236}">
-                <a16:creationId xmlns:a16="http://schemas.microsoft.com/office/drawing/2014/main" id="{D9E5D738-CA47-1898-E0D8-DFBC514F5A50}"/>
-              </a:ext>
-            </a:extLst>
-          </p:cNvPr>
-          <p:cNvSpPr/>
-          <p:nvPr/>
-        </p:nvSpPr>
-        <p:spPr>
-          <a:xfrm>
-            <a:off x="7663179" y="4163346"/>
-            <a:ext cx="3165333" cy="48374"/>
-          </a:xfrm>
-          <a:custGeom>
-            <a:avLst/>
-            <a:gdLst/>
-            <a:ahLst/>
-            <a:cxnLst/>
-            <a:rect l="l" t="t" r="r" b="b"/>
-            <a:pathLst>
-              <a:path w="1758314" h="76200">
-                <a:moveTo>
-                  <a:pt x="76200" y="0"/>
-                </a:moveTo>
-                <a:lnTo>
-                  <a:pt x="0" y="38100"/>
-                </a:lnTo>
-                <a:lnTo>
-                  <a:pt x="76200" y="76200"/>
-                </a:lnTo>
-                <a:lnTo>
-                  <a:pt x="76200" y="44450"/>
-                </a:lnTo>
-                <a:lnTo>
-                  <a:pt x="63500" y="44450"/>
-                </a:lnTo>
-                <a:lnTo>
-                  <a:pt x="63500" y="31750"/>
-                </a:lnTo>
-                <a:lnTo>
-                  <a:pt x="76200" y="31750"/>
-                </a:lnTo>
-                <a:lnTo>
-                  <a:pt x="76200" y="0"/>
-                </a:lnTo>
-                <a:close/>
-              </a:path>
-              <a:path w="1758314" h="76200">
-                <a:moveTo>
-                  <a:pt x="1682114" y="0"/>
-                </a:moveTo>
-                <a:lnTo>
-                  <a:pt x="1682114" y="76200"/>
-                </a:lnTo>
-                <a:lnTo>
-                  <a:pt x="1745614" y="44450"/>
-                </a:lnTo>
-                <a:lnTo>
-                  <a:pt x="1694814" y="44450"/>
-                </a:lnTo>
-                <a:lnTo>
-                  <a:pt x="1694814" y="31750"/>
-                </a:lnTo>
-                <a:lnTo>
-                  <a:pt x="1745614" y="31750"/>
-                </a:lnTo>
-                <a:lnTo>
-                  <a:pt x="1682114" y="0"/>
-                </a:lnTo>
-                <a:close/>
-              </a:path>
-              <a:path w="1758314" h="76200">
-                <a:moveTo>
-                  <a:pt x="76200" y="31750"/>
-                </a:moveTo>
-                <a:lnTo>
-                  <a:pt x="63500" y="31750"/>
-                </a:lnTo>
-                <a:lnTo>
-                  <a:pt x="63500" y="44450"/>
-                </a:lnTo>
-                <a:lnTo>
-                  <a:pt x="76200" y="44450"/>
-                </a:lnTo>
-                <a:lnTo>
-                  <a:pt x="76200" y="31750"/>
-                </a:lnTo>
-                <a:close/>
-              </a:path>
-              <a:path w="1758314" h="76200">
-                <a:moveTo>
-                  <a:pt x="1682114" y="31750"/>
-                </a:moveTo>
-                <a:lnTo>
-                  <a:pt x="76200" y="31750"/>
-                </a:lnTo>
-                <a:lnTo>
-                  <a:pt x="76200" y="44450"/>
-                </a:lnTo>
-                <a:lnTo>
-                  <a:pt x="1682114" y="44450"/>
-                </a:lnTo>
-                <a:lnTo>
-                  <a:pt x="1682114" y="31750"/>
-                </a:lnTo>
-                <a:close/>
-              </a:path>
-              <a:path w="1758314" h="76200">
-                <a:moveTo>
-                  <a:pt x="1745614" y="31750"/>
-                </a:moveTo>
-                <a:lnTo>
-                  <a:pt x="1694814" y="31750"/>
-                </a:lnTo>
-                <a:lnTo>
-                  <a:pt x="1694814" y="44450"/>
-                </a:lnTo>
-                <a:lnTo>
-                  <a:pt x="1745614" y="44450"/>
-                </a:lnTo>
-                <a:lnTo>
-                  <a:pt x="1758314" y="38100"/>
-                </a:lnTo>
-                <a:lnTo>
-                  <a:pt x="1745614" y="31750"/>
-                </a:lnTo>
-                <a:close/>
-              </a:path>
-            </a:pathLst>
-          </a:custGeom>
-          <a:solidFill>
-            <a:srgbClr val="000000"/>
-          </a:solidFill>
-        </p:spPr>
-        <p:txBody>
-          <a:bodyPr wrap="square" lIns="0" tIns="0" rIns="0" bIns="0" rtlCol="0"/>
-          <a:lstStyle/>
-          <a:p>
-            <a:endParaRPr/>
-          </a:p>
-        </p:txBody>
-      </p:sp>
-      <p:sp>
-        <p:nvSpPr>
-          <p:cNvPr id="115" name="object 65">
-            <a:extLst>
-              <a:ext uri="{FF2B5EF4-FFF2-40B4-BE49-F238E27FC236}">
-                <a16:creationId xmlns:a16="http://schemas.microsoft.com/office/drawing/2014/main" id="{74A4CAE1-BC33-1BCD-6F24-54F1DFA8AEDB}"/>
-              </a:ext>
-            </a:extLst>
-          </p:cNvPr>
-          <p:cNvSpPr txBox="1"/>
-          <p:nvPr/>
-        </p:nvSpPr>
-        <p:spPr>
-          <a:xfrm>
-            <a:off x="8910954" y="3926878"/>
-            <a:ext cx="733425" cy="228909"/>
-          </a:xfrm>
-          <a:prstGeom prst="rect">
-            <a:avLst/>
-          </a:prstGeom>
-        </p:spPr>
-        <p:txBody>
-          <a:bodyPr vert="horz" wrap="square" lIns="0" tIns="13335" rIns="0" bIns="0" rtlCol="0">
-            <a:spAutoFit/>
-          </a:bodyPr>
-          <a:lstStyle/>
-          <a:p>
-            <a:pPr>
-              <a:lnSpc>
-                <a:spcPct val="100000"/>
-              </a:lnSpc>
-              <a:spcBef>
-                <a:spcPts val="105"/>
-              </a:spcBef>
-            </a:pPr>
-            <a:r>
-              <a:rPr lang="es-ES" sz="1400" spc="5" dirty="0">
-                <a:latin typeface="Calibri"/>
-                <a:cs typeface="Calibri"/>
-              </a:rPr>
-              <a:t>w</a:t>
-            </a:r>
-            <a:r>
-              <a:rPr sz="1400" spc="-65" dirty="0">
-                <a:latin typeface="Calibri"/>
-                <a:cs typeface="Calibri"/>
-              </a:rPr>
-              <a:t> </a:t>
-            </a:r>
-            <a:r>
-              <a:rPr sz="1400" spc="-5" dirty="0">
-                <a:latin typeface="Calibri"/>
-                <a:cs typeface="Calibri"/>
-              </a:rPr>
-              <a:t>(width)</a:t>
-            </a:r>
-            <a:endParaRPr sz="1400" dirty="0">
-              <a:latin typeface="Calibri"/>
-              <a:cs typeface="Calibri"/>
-            </a:endParaRPr>
-          </a:p>
-        </p:txBody>
-      </p:sp>
-      <p:sp>
-        <p:nvSpPr>
-          <p:cNvPr id="116" name="object 73">
-            <a:extLst>
-              <a:ext uri="{FF2B5EF4-FFF2-40B4-BE49-F238E27FC236}">
-                <a16:creationId xmlns:a16="http://schemas.microsoft.com/office/drawing/2014/main" id="{CC9D2269-0CA8-143F-4E45-F3AF594A2ED3}"/>
-              </a:ext>
-            </a:extLst>
-          </p:cNvPr>
-          <p:cNvSpPr txBox="1"/>
-          <p:nvPr/>
-        </p:nvSpPr>
-        <p:spPr>
-          <a:xfrm>
-            <a:off x="7663179" y="4325314"/>
-            <a:ext cx="3165333" cy="610424"/>
-          </a:xfrm>
-          <a:prstGeom prst="rect">
-            <a:avLst/>
-          </a:prstGeom>
-          <a:solidFill>
-            <a:srgbClr val="CCB657"/>
-          </a:solidFill>
-        </p:spPr>
-        <p:txBody>
-          <a:bodyPr vert="horz" wrap="square" lIns="0" tIns="2540" rIns="0" bIns="0" rtlCol="0">
-            <a:spAutoFit/>
-          </a:bodyPr>
-          <a:lstStyle/>
-          <a:p>
-            <a:pPr>
-              <a:lnSpc>
-                <a:spcPct val="100000"/>
-              </a:lnSpc>
-              <a:spcBef>
-                <a:spcPts val="20"/>
-              </a:spcBef>
-            </a:pPr>
-            <a:endParaRPr sz="2350" dirty="0">
-              <a:latin typeface="Times New Roman"/>
-              <a:cs typeface="Times New Roman"/>
-            </a:endParaRPr>
-          </a:p>
-          <a:p>
-            <a:pPr marL="18415" algn="ctr">
-              <a:lnSpc>
-                <a:spcPct val="100000"/>
-              </a:lnSpc>
-            </a:pPr>
-            <a:r>
-              <a:rPr lang="es-ES" sz="1600" b="1" spc="-10" dirty="0">
-                <a:latin typeface="Calibri"/>
-                <a:cs typeface="Calibri"/>
-              </a:rPr>
-              <a:t>MMI </a:t>
-            </a:r>
-            <a:r>
-              <a:rPr lang="es-ES" sz="1600" b="1" spc="-10" dirty="0" err="1">
-                <a:latin typeface="Calibri"/>
-                <a:cs typeface="Calibri"/>
-              </a:rPr>
-              <a:t>Body</a:t>
-            </a:r>
-            <a:endParaRPr sz="1600" dirty="0">
-              <a:latin typeface="Calibri"/>
-              <a:cs typeface="Calibri"/>
-            </a:endParaRPr>
-          </a:p>
-        </p:txBody>
-      </p:sp>
-      <p:sp>
-        <p:nvSpPr>
-          <p:cNvPr id="117" name="object 74">
-            <a:extLst>
-              <a:ext uri="{FF2B5EF4-FFF2-40B4-BE49-F238E27FC236}">
-                <a16:creationId xmlns:a16="http://schemas.microsoft.com/office/drawing/2014/main" id="{8A3332FF-25D4-1955-323F-BBD1D30324AC}"/>
-              </a:ext>
-            </a:extLst>
-          </p:cNvPr>
-          <p:cNvSpPr txBox="1"/>
-          <p:nvPr/>
-        </p:nvSpPr>
-        <p:spPr>
-          <a:xfrm>
-            <a:off x="7284458" y="5303772"/>
-            <a:ext cx="741045" cy="269240"/>
-          </a:xfrm>
-          <a:prstGeom prst="rect">
-            <a:avLst/>
-          </a:prstGeom>
-        </p:spPr>
-        <p:txBody>
-          <a:bodyPr vert="horz" wrap="square" lIns="0" tIns="12065" rIns="0" bIns="0" rtlCol="0">
-            <a:spAutoFit/>
-          </a:bodyPr>
-          <a:lstStyle/>
-          <a:p>
-            <a:pPr>
-              <a:lnSpc>
-                <a:spcPct val="100000"/>
-              </a:lnSpc>
-              <a:spcBef>
-                <a:spcPts val="95"/>
-              </a:spcBef>
-            </a:pPr>
-            <a:r>
-              <a:rPr sz="1600" b="1" spc="-10" dirty="0">
-                <a:latin typeface="Calibri"/>
-                <a:cs typeface="Calibri"/>
-              </a:rPr>
-              <a:t>Cladding</a:t>
-            </a:r>
-            <a:endParaRPr sz="1600" dirty="0">
-              <a:latin typeface="Calibri"/>
-              <a:cs typeface="Calibri"/>
-            </a:endParaRPr>
-          </a:p>
-        </p:txBody>
-      </p:sp>
-      <p:sp>
-        <p:nvSpPr>
-          <p:cNvPr id="2" name="CuadroTexto 1">
-            <a:extLst>
-              <a:ext uri="{FF2B5EF4-FFF2-40B4-BE49-F238E27FC236}">
-                <a16:creationId xmlns:a16="http://schemas.microsoft.com/office/drawing/2014/main" id="{57D9AFBE-EF33-9078-9CE3-5C8B079B0C36}"/>
-              </a:ext>
-            </a:extLst>
-          </p:cNvPr>
-          <p:cNvSpPr txBox="1"/>
-          <p:nvPr/>
-        </p:nvSpPr>
-        <p:spPr>
-          <a:xfrm>
-            <a:off x="7377675" y="5580458"/>
-            <a:ext cx="3954288" cy="369332"/>
-          </a:xfrm>
-          <a:prstGeom prst="rect">
-            <a:avLst/>
-          </a:prstGeom>
-          <a:noFill/>
-        </p:spPr>
-        <p:txBody>
-          <a:bodyPr wrap="none" rtlCol="0">
-            <a:spAutoFit/>
-          </a:bodyPr>
-          <a:lstStyle/>
-          <a:p>
-            <a:pPr algn="r"/>
-            <a:r>
-              <a:rPr lang="en-US" b="1" dirty="0"/>
-              <a:t>Multimode Interference (MMI) </a:t>
-            </a:r>
-            <a:r>
-              <a:rPr lang="en-US" dirty="0"/>
-              <a:t>coupler</a:t>
-            </a:r>
-            <a:r>
-              <a:rPr lang="en-US" b="1" dirty="0"/>
-              <a:t> </a:t>
-            </a:r>
-            <a:endParaRPr lang="en-US" dirty="0"/>
-          </a:p>
-        </p:txBody>
-      </p:sp>
-      <p:sp>
-        <p:nvSpPr>
-          <p:cNvPr id="8" name="CuadroTexto 7">
-            <a:extLst>
-              <a:ext uri="{FF2B5EF4-FFF2-40B4-BE49-F238E27FC236}">
-                <a16:creationId xmlns:a16="http://schemas.microsoft.com/office/drawing/2014/main" id="{7336B5D8-2D70-3E7A-336D-AF55EC49DEB8}"/>
-              </a:ext>
-            </a:extLst>
-          </p:cNvPr>
-          <p:cNvSpPr txBox="1"/>
-          <p:nvPr/>
-        </p:nvSpPr>
-        <p:spPr>
-          <a:xfrm>
-            <a:off x="1168826" y="5579058"/>
-            <a:ext cx="2743199" cy="369332"/>
-          </a:xfrm>
-          <a:prstGeom prst="rect">
-            <a:avLst/>
-          </a:prstGeom>
-          <a:noFill/>
-        </p:spPr>
-        <p:txBody>
-          <a:bodyPr wrap="square">
-            <a:spAutoFit/>
-          </a:bodyPr>
-          <a:lstStyle/>
-          <a:p>
-            <a:r>
-              <a:rPr lang="en-US" b="1" dirty="0"/>
-              <a:t>Directional </a:t>
-            </a:r>
-            <a:r>
-              <a:rPr lang="en-US" dirty="0"/>
-              <a:t>coupler (DC)</a:t>
-            </a:r>
-          </a:p>
-        </p:txBody>
-      </p:sp>
-      <p:sp>
-        <p:nvSpPr>
-          <p:cNvPr id="7" name="object 73">
-            <a:extLst>
-              <a:ext uri="{FF2B5EF4-FFF2-40B4-BE49-F238E27FC236}">
-                <a16:creationId xmlns:a16="http://schemas.microsoft.com/office/drawing/2014/main" id="{9404A65A-9F07-371B-17B4-56EE1381567B}"/>
-              </a:ext>
-            </a:extLst>
-          </p:cNvPr>
-          <p:cNvSpPr txBox="1"/>
-          <p:nvPr/>
-        </p:nvSpPr>
-        <p:spPr>
-          <a:xfrm>
-            <a:off x="1948179" y="4331380"/>
-            <a:ext cx="984979" cy="610424"/>
-          </a:xfrm>
-          <a:prstGeom prst="rect">
-            <a:avLst/>
-          </a:prstGeom>
-          <a:solidFill>
-            <a:srgbClr val="CCB657"/>
-          </a:solidFill>
-        </p:spPr>
-        <p:txBody>
-          <a:bodyPr vert="horz" wrap="square" lIns="0" tIns="2540" rIns="0" bIns="0" rtlCol="0">
-            <a:spAutoFit/>
-          </a:bodyPr>
-          <a:lstStyle/>
-          <a:p>
-            <a:pPr>
-              <a:lnSpc>
-                <a:spcPct val="100000"/>
-              </a:lnSpc>
-              <a:spcBef>
-                <a:spcPts val="20"/>
-              </a:spcBef>
-            </a:pPr>
-            <a:endParaRPr sz="2350" dirty="0">
-              <a:latin typeface="Times New Roman"/>
-              <a:cs typeface="Times New Roman"/>
-            </a:endParaRPr>
-          </a:p>
-          <a:p>
-            <a:pPr marL="18415" algn="ctr">
-              <a:lnSpc>
-                <a:spcPct val="100000"/>
-              </a:lnSpc>
-            </a:pPr>
-            <a:r>
-              <a:rPr sz="1600" b="1" spc="-10" dirty="0">
-                <a:latin typeface="Calibri"/>
-                <a:cs typeface="Calibri"/>
-              </a:rPr>
-              <a:t>Core</a:t>
-            </a:r>
-            <a:endParaRPr sz="1600" dirty="0">
-              <a:latin typeface="Calibri"/>
-              <a:cs typeface="Calibri"/>
-            </a:endParaRPr>
-          </a:p>
-        </p:txBody>
-      </p:sp>
-      <p:sp>
-        <p:nvSpPr>
-          <p:cNvPr id="9" name="object 64">
-            <a:extLst>
-              <a:ext uri="{FF2B5EF4-FFF2-40B4-BE49-F238E27FC236}">
-                <a16:creationId xmlns:a16="http://schemas.microsoft.com/office/drawing/2014/main" id="{B06C28EB-4BF4-A40B-513B-ACC7E468CDC3}"/>
-              </a:ext>
-            </a:extLst>
-          </p:cNvPr>
-          <p:cNvSpPr/>
-          <p:nvPr/>
-        </p:nvSpPr>
-        <p:spPr>
-          <a:xfrm flipV="1">
-            <a:off x="2911079" y="5067632"/>
-            <a:ext cx="590401" cy="45719"/>
-          </a:xfrm>
-          <a:custGeom>
-            <a:avLst/>
-            <a:gdLst/>
-            <a:ahLst/>
-            <a:cxnLst/>
-            <a:rect l="l" t="t" r="r" b="b"/>
-            <a:pathLst>
-              <a:path w="1758314" h="76200">
-                <a:moveTo>
-                  <a:pt x="76200" y="0"/>
-                </a:moveTo>
-                <a:lnTo>
-                  <a:pt x="0" y="38100"/>
-                </a:lnTo>
-                <a:lnTo>
-                  <a:pt x="76200" y="76200"/>
-                </a:lnTo>
-                <a:lnTo>
-                  <a:pt x="76200" y="44450"/>
-                </a:lnTo>
-                <a:lnTo>
-                  <a:pt x="63500" y="44450"/>
-                </a:lnTo>
-                <a:lnTo>
-                  <a:pt x="63500" y="31750"/>
-                </a:lnTo>
-                <a:lnTo>
-                  <a:pt x="76200" y="31750"/>
-                </a:lnTo>
-                <a:lnTo>
-                  <a:pt x="76200" y="0"/>
-                </a:lnTo>
-                <a:close/>
-              </a:path>
-              <a:path w="1758314" h="76200">
-                <a:moveTo>
-                  <a:pt x="1682114" y="0"/>
-                </a:moveTo>
-                <a:lnTo>
-                  <a:pt x="1682114" y="76200"/>
-                </a:lnTo>
-                <a:lnTo>
-                  <a:pt x="1745614" y="44450"/>
-                </a:lnTo>
-                <a:lnTo>
-                  <a:pt x="1694814" y="44450"/>
-                </a:lnTo>
-                <a:lnTo>
-                  <a:pt x="1694814" y="31750"/>
-                </a:lnTo>
-                <a:lnTo>
-                  <a:pt x="1745614" y="31750"/>
-                </a:lnTo>
-                <a:lnTo>
-                  <a:pt x="1682114" y="0"/>
-                </a:lnTo>
-                <a:close/>
-              </a:path>
-              <a:path w="1758314" h="76200">
-                <a:moveTo>
-                  <a:pt x="76200" y="31750"/>
-                </a:moveTo>
-                <a:lnTo>
-                  <a:pt x="63500" y="31750"/>
-                </a:lnTo>
-                <a:lnTo>
-                  <a:pt x="63500" y="44450"/>
-                </a:lnTo>
-                <a:lnTo>
-                  <a:pt x="76200" y="44450"/>
-                </a:lnTo>
-                <a:lnTo>
-                  <a:pt x="76200" y="31750"/>
-                </a:lnTo>
-                <a:close/>
-              </a:path>
-              <a:path w="1758314" h="76200">
-                <a:moveTo>
-                  <a:pt x="1682114" y="31750"/>
-                </a:moveTo>
-                <a:lnTo>
-                  <a:pt x="76200" y="31750"/>
-                </a:lnTo>
-                <a:lnTo>
-                  <a:pt x="76200" y="44450"/>
-                </a:lnTo>
-                <a:lnTo>
-                  <a:pt x="1682114" y="44450"/>
-                </a:lnTo>
-                <a:lnTo>
-                  <a:pt x="1682114" y="31750"/>
-                </a:lnTo>
-                <a:close/>
-              </a:path>
-              <a:path w="1758314" h="76200">
-                <a:moveTo>
-                  <a:pt x="1745614" y="31750"/>
-                </a:moveTo>
-                <a:lnTo>
-                  <a:pt x="1694814" y="31750"/>
-                </a:lnTo>
-                <a:lnTo>
-                  <a:pt x="1694814" y="44450"/>
-                </a:lnTo>
-                <a:lnTo>
-                  <a:pt x="1745614" y="44450"/>
-                </a:lnTo>
-                <a:lnTo>
-                  <a:pt x="1758314" y="38100"/>
-                </a:lnTo>
-                <a:lnTo>
-                  <a:pt x="1745614" y="31750"/>
-                </a:lnTo>
-                <a:close/>
-              </a:path>
-            </a:pathLst>
-          </a:custGeom>
-          <a:solidFill>
-            <a:srgbClr val="000000"/>
-          </a:solidFill>
-        </p:spPr>
-        <p:txBody>
-          <a:bodyPr wrap="square" lIns="0" tIns="0" rIns="0" bIns="0" rtlCol="0"/>
-          <a:lstStyle/>
-          <a:p>
-            <a:endParaRPr/>
-          </a:p>
-        </p:txBody>
-      </p:sp>
-      <p:sp>
-        <p:nvSpPr>
-          <p:cNvPr id="10" name="object 63">
-            <a:extLst>
-              <a:ext uri="{FF2B5EF4-FFF2-40B4-BE49-F238E27FC236}">
-                <a16:creationId xmlns:a16="http://schemas.microsoft.com/office/drawing/2014/main" id="{4601CBDA-CF6C-DA98-1398-C31497498862}"/>
-              </a:ext>
-            </a:extLst>
-          </p:cNvPr>
-          <p:cNvSpPr txBox="1"/>
-          <p:nvPr/>
-        </p:nvSpPr>
-        <p:spPr>
-          <a:xfrm>
-            <a:off x="2939643" y="5090491"/>
-            <a:ext cx="577850" cy="454025"/>
-          </a:xfrm>
-          <a:prstGeom prst="rect">
-            <a:avLst/>
-          </a:prstGeom>
-        </p:spPr>
-        <p:txBody>
-          <a:bodyPr vert="horz" wrap="square" lIns="0" tIns="13335" rIns="0" bIns="0" rtlCol="0">
-            <a:spAutoFit/>
-          </a:bodyPr>
-          <a:lstStyle/>
-          <a:p>
-            <a:pPr marR="3175" algn="ctr">
-              <a:lnSpc>
-                <a:spcPct val="100000"/>
-              </a:lnSpc>
-              <a:spcBef>
-                <a:spcPts val="105"/>
-              </a:spcBef>
-            </a:pPr>
-            <a:r>
-              <a:rPr lang="es-ES" sz="1400" dirty="0">
-                <a:latin typeface="Calibri"/>
-                <a:cs typeface="Calibri"/>
-              </a:rPr>
-              <a:t>g</a:t>
-            </a:r>
-            <a:endParaRPr sz="1400" dirty="0">
-              <a:latin typeface="Calibri"/>
-              <a:cs typeface="Calibri"/>
-            </a:endParaRPr>
-          </a:p>
-          <a:p>
-            <a:pPr marR="5080" algn="ctr">
-              <a:lnSpc>
-                <a:spcPct val="100000"/>
-              </a:lnSpc>
-              <a:spcBef>
-                <a:spcPts val="5"/>
-              </a:spcBef>
-            </a:pPr>
-            <a:r>
-              <a:rPr sz="1400" spc="-10" dirty="0">
-                <a:latin typeface="Calibri"/>
-                <a:cs typeface="Calibri"/>
-              </a:rPr>
-              <a:t>(</a:t>
-            </a:r>
-            <a:r>
-              <a:rPr lang="es-ES" sz="1400" spc="-10" dirty="0">
-                <a:latin typeface="Calibri"/>
-                <a:cs typeface="Calibri"/>
-              </a:rPr>
-              <a:t>gap</a:t>
-            </a:r>
-            <a:r>
-              <a:rPr sz="1400" dirty="0">
-                <a:latin typeface="Calibri"/>
-                <a:cs typeface="Calibri"/>
-              </a:rPr>
-              <a:t>)</a:t>
-            </a:r>
-          </a:p>
-        </p:txBody>
-      </p:sp>
-      <p:sp>
-        <p:nvSpPr>
-          <p:cNvPr id="11" name="object 62">
-            <a:extLst>
-              <a:ext uri="{FF2B5EF4-FFF2-40B4-BE49-F238E27FC236}">
-                <a16:creationId xmlns:a16="http://schemas.microsoft.com/office/drawing/2014/main" id="{F1DAA8E2-74AD-BD39-C248-2324458F6D54}"/>
-              </a:ext>
-            </a:extLst>
-          </p:cNvPr>
-          <p:cNvSpPr/>
-          <p:nvPr/>
-        </p:nvSpPr>
-        <p:spPr>
-          <a:xfrm>
-            <a:off x="7448782" y="4331380"/>
-            <a:ext cx="67949" cy="610424"/>
-          </a:xfrm>
-          <a:custGeom>
-            <a:avLst/>
-            <a:gdLst/>
-            <a:ahLst/>
-            <a:cxnLst/>
-            <a:rect l="l" t="t" r="r" b="b"/>
-            <a:pathLst>
-              <a:path w="76200" h="986155">
-                <a:moveTo>
-                  <a:pt x="31750" y="909827"/>
-                </a:moveTo>
-                <a:lnTo>
-                  <a:pt x="0" y="909827"/>
-                </a:lnTo>
-                <a:lnTo>
-                  <a:pt x="38100" y="986027"/>
-                </a:lnTo>
-                <a:lnTo>
-                  <a:pt x="69850" y="922527"/>
-                </a:lnTo>
-                <a:lnTo>
-                  <a:pt x="31750" y="922527"/>
-                </a:lnTo>
-                <a:lnTo>
-                  <a:pt x="31750" y="909827"/>
-                </a:lnTo>
-                <a:close/>
-              </a:path>
-              <a:path w="76200" h="986155">
-                <a:moveTo>
-                  <a:pt x="44450" y="63500"/>
-                </a:moveTo>
-                <a:lnTo>
-                  <a:pt x="31750" y="63500"/>
-                </a:lnTo>
-                <a:lnTo>
-                  <a:pt x="31750" y="922527"/>
-                </a:lnTo>
-                <a:lnTo>
-                  <a:pt x="44450" y="922527"/>
-                </a:lnTo>
-                <a:lnTo>
-                  <a:pt x="44450" y="63500"/>
-                </a:lnTo>
-                <a:close/>
-              </a:path>
-              <a:path w="76200" h="986155">
-                <a:moveTo>
-                  <a:pt x="76200" y="909827"/>
-                </a:moveTo>
-                <a:lnTo>
-                  <a:pt x="44450" y="909827"/>
-                </a:lnTo>
-                <a:lnTo>
-                  <a:pt x="44450" y="922527"/>
-                </a:lnTo>
-                <a:lnTo>
-                  <a:pt x="69850" y="922527"/>
-                </a:lnTo>
-                <a:lnTo>
-                  <a:pt x="76200" y="909827"/>
-                </a:lnTo>
-                <a:close/>
-              </a:path>
-              <a:path w="76200" h="986155">
-                <a:moveTo>
-                  <a:pt x="38100" y="0"/>
-                </a:moveTo>
-                <a:lnTo>
-                  <a:pt x="0" y="76200"/>
-                </a:lnTo>
-                <a:lnTo>
-                  <a:pt x="31750" y="76200"/>
-                </a:lnTo>
-                <a:lnTo>
-                  <a:pt x="31750" y="63500"/>
-                </a:lnTo>
-                <a:lnTo>
-                  <a:pt x="69850" y="63500"/>
-                </a:lnTo>
-                <a:lnTo>
-                  <a:pt x="38100" y="0"/>
-                </a:lnTo>
-                <a:close/>
-              </a:path>
-              <a:path w="76200" h="986155">
-                <a:moveTo>
-                  <a:pt x="69850" y="63500"/>
-                </a:moveTo>
-                <a:lnTo>
-                  <a:pt x="44450" y="63500"/>
-                </a:lnTo>
-                <a:lnTo>
-                  <a:pt x="44450" y="76200"/>
-                </a:lnTo>
-                <a:lnTo>
-                  <a:pt x="76200" y="76200"/>
-                </a:lnTo>
-                <a:lnTo>
-                  <a:pt x="69850" y="63500"/>
-                </a:lnTo>
-                <a:close/>
-              </a:path>
-            </a:pathLst>
-          </a:custGeom>
-          <a:solidFill>
-            <a:srgbClr val="000000"/>
-          </a:solidFill>
-        </p:spPr>
-        <p:txBody>
-          <a:bodyPr wrap="square" lIns="0" tIns="0" rIns="0" bIns="0" rtlCol="0"/>
-          <a:lstStyle/>
-          <a:p>
-            <a:endParaRPr/>
-          </a:p>
-        </p:txBody>
-      </p:sp>
-      <p:sp>
-        <p:nvSpPr>
-          <p:cNvPr id="12" name="object 63">
-            <a:extLst>
-              <a:ext uri="{FF2B5EF4-FFF2-40B4-BE49-F238E27FC236}">
-                <a16:creationId xmlns:a16="http://schemas.microsoft.com/office/drawing/2014/main" id="{FCE9BE8C-E2F4-7CBE-236B-A2E5451F5C01}"/>
-              </a:ext>
-            </a:extLst>
-          </p:cNvPr>
-          <p:cNvSpPr txBox="1"/>
-          <p:nvPr/>
-        </p:nvSpPr>
-        <p:spPr>
-          <a:xfrm>
-            <a:off x="6882764" y="4389164"/>
-            <a:ext cx="577850" cy="454025"/>
-          </a:xfrm>
-          <a:prstGeom prst="rect">
-            <a:avLst/>
-          </a:prstGeom>
-        </p:spPr>
-        <p:txBody>
-          <a:bodyPr vert="horz" wrap="square" lIns="0" tIns="13335" rIns="0" bIns="0" rtlCol="0">
-            <a:spAutoFit/>
-          </a:bodyPr>
-          <a:lstStyle/>
-          <a:p>
-            <a:pPr marR="3175" algn="ctr">
-              <a:lnSpc>
-                <a:spcPct val="100000"/>
-              </a:lnSpc>
-              <a:spcBef>
-                <a:spcPts val="105"/>
-              </a:spcBef>
-            </a:pPr>
-            <a:r>
-              <a:rPr sz="1400" dirty="0">
-                <a:latin typeface="Calibri"/>
-                <a:cs typeface="Calibri"/>
-              </a:rPr>
-              <a:t>h</a:t>
-            </a:r>
-          </a:p>
-          <a:p>
-            <a:pPr marR="5080" algn="ctr">
-              <a:lnSpc>
-                <a:spcPct val="100000"/>
-              </a:lnSpc>
-              <a:spcBef>
-                <a:spcPts val="5"/>
-              </a:spcBef>
-            </a:pPr>
-            <a:r>
-              <a:rPr sz="1400" spc="-10" dirty="0">
-                <a:latin typeface="Calibri"/>
-                <a:cs typeface="Calibri"/>
-              </a:rPr>
-              <a:t>(h</a:t>
-            </a:r>
-            <a:r>
-              <a:rPr sz="1400" dirty="0">
-                <a:latin typeface="Calibri"/>
-                <a:cs typeface="Calibri"/>
-              </a:rPr>
-              <a:t>eig</a:t>
-            </a:r>
-            <a:r>
-              <a:rPr sz="1400" spc="-25" dirty="0">
-                <a:latin typeface="Calibri"/>
-                <a:cs typeface="Calibri"/>
-              </a:rPr>
-              <a:t>h</a:t>
-            </a:r>
-            <a:r>
-              <a:rPr sz="1400" spc="-5" dirty="0">
-                <a:latin typeface="Calibri"/>
-                <a:cs typeface="Calibri"/>
-              </a:rPr>
-              <a:t>t</a:t>
-            </a:r>
-            <a:r>
-              <a:rPr sz="1400" dirty="0">
-                <a:latin typeface="Calibri"/>
-                <a:cs typeface="Calibri"/>
-              </a:rPr>
-              <a:t>)</a:t>
-            </a:r>
-          </a:p>
-        </p:txBody>
-      </p:sp>
-      <p:sp>
-        <p:nvSpPr>
-          <p:cNvPr id="5" name="CuadroTexto 4">
-            <a:extLst>
-              <a:ext uri="{FF2B5EF4-FFF2-40B4-BE49-F238E27FC236}">
-                <a16:creationId xmlns:a16="http://schemas.microsoft.com/office/drawing/2014/main" id="{43C69CDD-218E-494A-8C3E-1431DB5F9DC7}"/>
-              </a:ext>
-            </a:extLst>
-          </p:cNvPr>
-          <p:cNvSpPr txBox="1"/>
-          <p:nvPr/>
-        </p:nvSpPr>
-        <p:spPr>
-          <a:xfrm>
-            <a:off x="8153400" y="1833699"/>
-            <a:ext cx="3709297" cy="830997"/>
-          </a:xfrm>
-          <a:prstGeom prst="rect">
-            <a:avLst/>
-          </a:prstGeom>
-          <a:noFill/>
-        </p:spPr>
-        <p:txBody>
-          <a:bodyPr wrap="square" rtlCol="0">
-            <a:spAutoFit/>
-          </a:bodyPr>
-          <a:lstStyle/>
-          <a:p>
-            <a:r>
-              <a:rPr lang="es-ES" sz="1200" dirty="0"/>
-              <a:t>Modo de operación:</a:t>
-            </a:r>
-          </a:p>
-          <a:p>
-            <a:r>
-              <a:rPr lang="es-ES" sz="1200" dirty="0" err="1"/>
-              <a:t>Directional</a:t>
-            </a:r>
-            <a:r>
-              <a:rPr lang="es-ES" sz="1200" dirty="0"/>
-              <a:t> </a:t>
-            </a:r>
-            <a:r>
-              <a:rPr lang="es-ES" sz="1200" dirty="0" err="1"/>
-              <a:t>couplers</a:t>
-            </a:r>
-            <a:r>
-              <a:rPr lang="es-ES" sz="1200" dirty="0"/>
-              <a:t> </a:t>
-            </a:r>
-            <a:r>
-              <a:rPr lang="es-ES" sz="1200" dirty="0">
-                <a:sym typeface="Wingdings" panose="05000000000000000000" pitchFamily="2" charset="2"/>
-              </a:rPr>
-              <a:t></a:t>
-            </a:r>
-            <a:r>
-              <a:rPr lang="es-ES" sz="1200" dirty="0"/>
-              <a:t>Transferencia de campo evanescente</a:t>
-            </a:r>
-          </a:p>
-          <a:p>
-            <a:r>
-              <a:rPr lang="es-ES" sz="1200" dirty="0"/>
-              <a:t>MMI </a:t>
-            </a:r>
-            <a:r>
-              <a:rPr lang="es-ES" sz="1200" dirty="0">
-                <a:sym typeface="Wingdings" panose="05000000000000000000" pitchFamily="2" charset="2"/>
-              </a:rPr>
-              <a:t> </a:t>
-            </a:r>
-            <a:r>
-              <a:rPr lang="es-ES" sz="1200" dirty="0"/>
-              <a:t>Interferencia modal</a:t>
-            </a:r>
-          </a:p>
-        </p:txBody>
-      </p:sp>
-      <p:sp>
-        <p:nvSpPr>
-          <p:cNvPr id="6" name="CuadroTexto 5">
-            <a:extLst>
-              <a:ext uri="{FF2B5EF4-FFF2-40B4-BE49-F238E27FC236}">
-                <a16:creationId xmlns:a16="http://schemas.microsoft.com/office/drawing/2014/main" id="{F9FF0642-522B-41B8-BECF-6A66A842FFBA}"/>
-              </a:ext>
-            </a:extLst>
-          </p:cNvPr>
-          <p:cNvSpPr txBox="1"/>
-          <p:nvPr/>
-        </p:nvSpPr>
-        <p:spPr>
-          <a:xfrm>
-            <a:off x="8153400" y="2875625"/>
-            <a:ext cx="3124200" cy="461665"/>
-          </a:xfrm>
-          <a:prstGeom prst="rect">
-            <a:avLst/>
-          </a:prstGeom>
-          <a:noFill/>
-        </p:spPr>
-        <p:txBody>
-          <a:bodyPr wrap="square" rtlCol="0">
-            <a:spAutoFit/>
-          </a:bodyPr>
-          <a:lstStyle/>
-          <a:p>
-            <a:r>
-              <a:rPr lang="es-ES" sz="1200" dirty="0"/>
-              <a:t>En el DC el índice efectivo se usa para hallar la longitud de batido.</a:t>
-            </a:r>
-          </a:p>
-        </p:txBody>
-      </p:sp>
-    </p:spTree>
-    <p:extLst>
-      <p:ext uri="{BB962C8B-B14F-4D97-AF65-F5344CB8AC3E}">
-        <p14:creationId xmlns:p14="http://schemas.microsoft.com/office/powerpoint/2010/main" val="560234623"/>
-      </p:ext>
-    </p:extLst>
   </p:cSld>
   <p:clrMapOvr>
     <a:masterClrMapping/>
@@ -14257,7 +16056,7 @@
         <p:spPr>
           <a:xfrm>
             <a:off x="609441" y="4627196"/>
-            <a:ext cx="11199971" cy="1754326"/>
+            <a:ext cx="11199971" cy="1569660"/>
           </a:xfrm>
           <a:prstGeom prst="rect">
             <a:avLst/>
@@ -14325,142 +16124,6 @@
               <a:latin typeface="Arial" panose="020B0604020202020204" pitchFamily="34" charset="0"/>
               <a:cs typeface="Arial" panose="020B0604020202020204" pitchFamily="34" charset="0"/>
             </a:endParaRPr>
-          </a:p>
-          <a:p>
-            <a:pPr algn="just"/>
-            <a:r>
-              <a:rPr lang="en-US" sz="1200" dirty="0">
-                <a:latin typeface="Arial" panose="020B0604020202020204" pitchFamily="34" charset="0"/>
-                <a:cs typeface="Arial" panose="020B0604020202020204" pitchFamily="34" charset="0"/>
-              </a:rPr>
-              <a:t>La </a:t>
-            </a:r>
-            <a:r>
-              <a:rPr lang="en-US" sz="1200" dirty="0" err="1">
-                <a:latin typeface="Arial" panose="020B0604020202020204" pitchFamily="34" charset="0"/>
-                <a:cs typeface="Arial" panose="020B0604020202020204" pitchFamily="34" charset="0"/>
-              </a:rPr>
-              <a:t>distancia</a:t>
-            </a:r>
-            <a:r>
-              <a:rPr lang="en-US" sz="1200" dirty="0">
-                <a:latin typeface="Arial" panose="020B0604020202020204" pitchFamily="34" charset="0"/>
-                <a:cs typeface="Arial" panose="020B0604020202020204" pitchFamily="34" charset="0"/>
-              </a:rPr>
-              <a:t> para la </a:t>
-            </a:r>
-            <a:r>
-              <a:rPr lang="en-US" sz="1200" dirty="0" err="1">
-                <a:latin typeface="Arial" panose="020B0604020202020204" pitchFamily="34" charset="0"/>
-                <a:cs typeface="Arial" panose="020B0604020202020204" pitchFamily="34" charset="0"/>
-              </a:rPr>
-              <a:t>cual</a:t>
-            </a:r>
-            <a:r>
-              <a:rPr lang="en-US" sz="1200" dirty="0">
-                <a:latin typeface="Arial" panose="020B0604020202020204" pitchFamily="34" charset="0"/>
-                <a:cs typeface="Arial" panose="020B0604020202020204" pitchFamily="34" charset="0"/>
-              </a:rPr>
-              <a:t> no </a:t>
-            </a:r>
-            <a:r>
-              <a:rPr lang="en-US" sz="1200" dirty="0" err="1">
-                <a:latin typeface="Arial" panose="020B0604020202020204" pitchFamily="34" charset="0"/>
-                <a:cs typeface="Arial" panose="020B0604020202020204" pitchFamily="34" charset="0"/>
-              </a:rPr>
-              <a:t>sufre</a:t>
-            </a:r>
-            <a:r>
-              <a:rPr lang="en-US" sz="1200" dirty="0">
-                <a:latin typeface="Arial" panose="020B0604020202020204" pitchFamily="34" charset="0"/>
-                <a:cs typeface="Arial" panose="020B0604020202020204" pitchFamily="34" charset="0"/>
-              </a:rPr>
-              <a:t> </a:t>
-            </a:r>
-            <a:r>
-              <a:rPr lang="en-US" sz="1200" dirty="0" err="1">
-                <a:latin typeface="Arial" panose="020B0604020202020204" pitchFamily="34" charset="0"/>
-                <a:cs typeface="Arial" panose="020B0604020202020204" pitchFamily="34" charset="0"/>
-              </a:rPr>
-              <a:t>acoplamiento</a:t>
-            </a:r>
-            <a:r>
-              <a:rPr lang="en-US" sz="1200" dirty="0">
-                <a:latin typeface="Arial" panose="020B0604020202020204" pitchFamily="34" charset="0"/>
-                <a:cs typeface="Arial" panose="020B0604020202020204" pitchFamily="34" charset="0"/>
-              </a:rPr>
-              <a:t> de una </a:t>
-            </a:r>
-            <a:r>
-              <a:rPr lang="en-US" sz="1200" dirty="0" err="1">
-                <a:latin typeface="Arial" panose="020B0604020202020204" pitchFamily="34" charset="0"/>
-                <a:cs typeface="Arial" panose="020B0604020202020204" pitchFamily="34" charset="0"/>
-              </a:rPr>
-              <a:t>guía</a:t>
-            </a:r>
-            <a:r>
-              <a:rPr lang="en-US" sz="1200" dirty="0">
-                <a:latin typeface="Arial" panose="020B0604020202020204" pitchFamily="34" charset="0"/>
-                <a:cs typeface="Arial" panose="020B0604020202020204" pitchFamily="34" charset="0"/>
-              </a:rPr>
-              <a:t> de </a:t>
-            </a:r>
-            <a:r>
-              <a:rPr lang="en-US" sz="1200" dirty="0" err="1">
-                <a:latin typeface="Arial" panose="020B0604020202020204" pitchFamily="34" charset="0"/>
-                <a:cs typeface="Arial" panose="020B0604020202020204" pitchFamily="34" charset="0"/>
-              </a:rPr>
-              <a:t>onda</a:t>
-            </a:r>
-            <a:r>
-              <a:rPr lang="en-US" sz="1200" dirty="0">
-                <a:latin typeface="Arial" panose="020B0604020202020204" pitchFamily="34" charset="0"/>
-                <a:cs typeface="Arial" panose="020B0604020202020204" pitchFamily="34" charset="0"/>
-              </a:rPr>
-              <a:t> a </a:t>
-            </a:r>
-            <a:r>
-              <a:rPr lang="en-US" sz="1200" dirty="0" err="1">
-                <a:latin typeface="Arial" panose="020B0604020202020204" pitchFamily="34" charset="0"/>
-                <a:cs typeface="Arial" panose="020B0604020202020204" pitchFamily="34" charset="0"/>
-              </a:rPr>
-              <a:t>otra</a:t>
-            </a:r>
-            <a:r>
-              <a:rPr lang="en-US" sz="1200" dirty="0">
-                <a:latin typeface="Arial" panose="020B0604020202020204" pitchFamily="34" charset="0"/>
-                <a:cs typeface="Arial" panose="020B0604020202020204" pitchFamily="34" charset="0"/>
-              </a:rPr>
-              <a:t> con un </a:t>
-            </a:r>
-            <a:r>
-              <a:rPr lang="en-US" sz="1200" dirty="0" err="1">
-                <a:latin typeface="Arial" panose="020B0604020202020204" pitchFamily="34" charset="0"/>
-                <a:cs typeface="Arial" panose="020B0604020202020204" pitchFamily="34" charset="0"/>
-              </a:rPr>
-              <a:t>coeficiente</a:t>
-            </a:r>
-            <a:r>
-              <a:rPr lang="en-US" sz="1200" dirty="0">
-                <a:latin typeface="Arial" panose="020B0604020202020204" pitchFamily="34" charset="0"/>
-                <a:cs typeface="Arial" panose="020B0604020202020204" pitchFamily="34" charset="0"/>
-              </a:rPr>
-              <a:t> de </a:t>
-            </a:r>
-            <a:r>
-              <a:rPr lang="en-US" sz="1200" dirty="0" err="1">
-                <a:latin typeface="Arial" panose="020B0604020202020204" pitchFamily="34" charset="0"/>
-                <a:cs typeface="Arial" panose="020B0604020202020204" pitchFamily="34" charset="0"/>
-              </a:rPr>
-              <a:t>acoplamiento</a:t>
-            </a:r>
-            <a:r>
-              <a:rPr lang="en-US" sz="1200" dirty="0">
-                <a:latin typeface="Arial" panose="020B0604020202020204" pitchFamily="34" charset="0"/>
-                <a:cs typeface="Arial" panose="020B0604020202020204" pitchFamily="34" charset="0"/>
-              </a:rPr>
-              <a:t> K=0.1</a:t>
-            </a:r>
           </a:p>
           <a:p>
             <a:pPr algn="just"/>
@@ -14846,6 +16509,284 @@
   <p:cSld>
     <p:spTree>
       <p:nvGrpSpPr>
+        <p:cNvPr id="1" name=""/>
+        <p:cNvGrpSpPr/>
+        <p:nvPr/>
+      </p:nvGrpSpPr>
+      <p:grpSpPr>
+        <a:xfrm>
+          <a:off x="0" y="0"/>
+          <a:ext cx="0" cy="0"/>
+          <a:chOff x="0" y="0"/>
+          <a:chExt cx="0" cy="0"/>
+        </a:xfrm>
+      </p:grpSpPr>
+      <mc:AlternateContent xmlns:mc="http://schemas.openxmlformats.org/markup-compatibility/2006">
+        <mc:Choice xmlns:a14="http://schemas.microsoft.com/office/drawing/2010/main" Requires="a14">
+          <p:sp>
+            <p:nvSpPr>
+              <p:cNvPr id="3" name="Marcador de texto 2">
+                <a:extLst>
+                  <a:ext uri="{FF2B5EF4-FFF2-40B4-BE49-F238E27FC236}">
+                    <a16:creationId xmlns:a16="http://schemas.microsoft.com/office/drawing/2014/main" id="{CD487952-61B3-4138-AE5F-0D2D4DE512AA}"/>
+                  </a:ext>
+                </a:extLst>
+              </p:cNvPr>
+              <p:cNvSpPr>
+                <a:spLocks noGrp="1"/>
+              </p:cNvSpPr>
+              <p:nvPr>
+                <p:ph type="body" idx="1"/>
+              </p:nvPr>
+            </p:nvSpPr>
+            <p:spPr>
+              <a:xfrm>
+                <a:off x="5486400" y="2209800"/>
+                <a:ext cx="6096000" cy="1938992"/>
+              </a:xfrm>
+            </p:spPr>
+            <p:txBody>
+              <a:bodyPr/>
+              <a:lstStyle/>
+              <a:p>
+                <a:r>
+                  <a:rPr lang="es-ES" sz="1400" dirty="0"/>
+                  <a:t>Para determinar la separación mínima que garantiza un comportamiento de guías desacopladas, se ha evaluado el coeficiente de acoplamiento (K) en función del gap para una longitud de propagación paralela de 10 mm (típica de un chip). La gráfica muestra un comportamiento oscilatorio, lo cual es de esperar, ya que al variar el gap se modifica exponencialmente la longitud de batido (</a:t>
+                </a:r>
+                <a14:m>
+                  <m:oMath xmlns:m="http://schemas.openxmlformats.org/officeDocument/2006/math">
+                    <m:sSub>
+                      <m:sSubPr>
+                        <m:ctrlPr>
+                          <a:rPr lang="es-ES" sz="1400" i="1" dirty="0" smtClean="0">
+                            <a:latin typeface="Cambria Math" panose="02040503050406030204" pitchFamily="18" charset="0"/>
+                          </a:rPr>
+                        </m:ctrlPr>
+                      </m:sSubPr>
+                      <m:e>
+                        <m:r>
+                          <a:rPr lang="es-ES" sz="1400" i="1" dirty="0" smtClean="0">
+                            <a:latin typeface="Cambria Math" panose="02040503050406030204" pitchFamily="18" charset="0"/>
+                          </a:rPr>
+                          <m:t>𝐿</m:t>
+                        </m:r>
+                      </m:e>
+                      <m:sub>
+                        <m:r>
+                          <a:rPr lang="es-ES" sz="1400" i="1" dirty="0" smtClean="0">
+                            <a:latin typeface="Cambria Math" panose="02040503050406030204" pitchFamily="18" charset="0"/>
+                          </a:rPr>
+                          <m:t>𝜋</m:t>
+                        </m:r>
+                      </m:sub>
+                    </m:sSub>
+                  </m:oMath>
+                </a14:m>
+                <a:r>
+                  <a:rPr lang="es-ES" sz="1400" dirty="0"/>
+                  <a:t>) y, con ello, los ciclos de transferencia de potencia en esa distancia fija. De acuerdo con el criterio de diseño establecido (K &lt; 0.01), el barrido revela que un gap de 1.4 µm es el valor mínimo donde la transferencia de potencia cruzada se anula prácticamente por completo.</a:t>
+                </a:r>
+              </a:p>
+            </p:txBody>
+          </p:sp>
+        </mc:Choice>
+        <mc:Fallback>
+          <p:sp>
+            <p:nvSpPr>
+              <p:cNvPr id="3" name="Marcador de texto 2">
+                <a:extLst>
+                  <a:ext uri="{FF2B5EF4-FFF2-40B4-BE49-F238E27FC236}">
+                    <a16:creationId xmlns:a16="http://schemas.microsoft.com/office/drawing/2014/main" id="{CD487952-61B3-4138-AE5F-0D2D4DE512AA}"/>
+                  </a:ext>
+                </a:extLst>
+              </p:cNvPr>
+              <p:cNvSpPr>
+                <a:spLocks noGrp="1" noRot="1" noChangeAspect="1" noMove="1" noResize="1" noEditPoints="1" noAdjustHandles="1" noChangeArrowheads="1" noChangeShapeType="1" noTextEdit="1"/>
+              </p:cNvSpPr>
+              <p:nvPr>
+                <p:ph type="body" idx="1"/>
+              </p:nvPr>
+            </p:nvSpPr>
+            <p:spPr>
+              <a:xfrm>
+                <a:off x="5486400" y="2209800"/>
+                <a:ext cx="6096000" cy="1938992"/>
+              </a:xfrm>
+              <a:blipFill>
+                <a:blip r:embed="rId2"/>
+                <a:stretch>
+                  <a:fillRect l="-1800" t="-3145" r="-1200" b="-4403"/>
+                </a:stretch>
+              </a:blipFill>
+            </p:spPr>
+            <p:txBody>
+              <a:bodyPr/>
+              <a:lstStyle/>
+              <a:p>
+                <a:r>
+                  <a:rPr lang="es-ES">
+                    <a:noFill/>
+                  </a:rPr>
+                  <a:t> </a:t>
+                </a:r>
+              </a:p>
+            </p:txBody>
+          </p:sp>
+        </mc:Fallback>
+      </mc:AlternateContent>
+      <p:sp>
+        <p:nvSpPr>
+          <p:cNvPr id="4" name="Marcador de pie de página 3">
+            <a:extLst>
+              <a:ext uri="{FF2B5EF4-FFF2-40B4-BE49-F238E27FC236}">
+                <a16:creationId xmlns:a16="http://schemas.microsoft.com/office/drawing/2014/main" id="{5E1CA6BD-B57D-4AD6-8336-D629B327A579}"/>
+              </a:ext>
+            </a:extLst>
+          </p:cNvPr>
+          <p:cNvSpPr>
+            <a:spLocks noGrp="1"/>
+          </p:cNvSpPr>
+          <p:nvPr>
+            <p:ph type="ftr" sz="quarter" idx="5"/>
+          </p:nvPr>
+        </p:nvSpPr>
+        <p:spPr/>
+        <p:txBody>
+          <a:bodyPr/>
+          <a:lstStyle/>
+          <a:p>
+            <a:pPr marL="12700">
+              <a:spcBef>
+                <a:spcPts val="15"/>
+              </a:spcBef>
+            </a:pPr>
+            <a:r>
+              <a:rPr lang="es-ES" spc="-5"/>
+              <a:t>LAB 2.0. COUPLERS</a:t>
+            </a:r>
+            <a:endParaRPr lang="es-ES" spc="-5" dirty="0"/>
+          </a:p>
+        </p:txBody>
+      </p:sp>
+      <p:sp>
+        <p:nvSpPr>
+          <p:cNvPr id="5" name="Marcador de número de diapositiva 4">
+            <a:extLst>
+              <a:ext uri="{FF2B5EF4-FFF2-40B4-BE49-F238E27FC236}">
+                <a16:creationId xmlns:a16="http://schemas.microsoft.com/office/drawing/2014/main" id="{D9ACEB1E-457F-4EA2-91AF-EBB4680E00B3}"/>
+              </a:ext>
+            </a:extLst>
+          </p:cNvPr>
+          <p:cNvSpPr>
+            <a:spLocks noGrp="1"/>
+          </p:cNvSpPr>
+          <p:nvPr>
+            <p:ph type="sldNum" sz="quarter" idx="7"/>
+          </p:nvPr>
+        </p:nvSpPr>
+        <p:spPr/>
+        <p:txBody>
+          <a:bodyPr/>
+          <a:lstStyle/>
+          <a:p>
+            <a:fld id="{B6F15528-21DE-4FAA-801E-634DDDAF4B2B}" type="slidenum">
+              <a:rPr lang="es-ES" smtClean="0"/>
+              <a:t>8</a:t>
+            </a:fld>
+            <a:endParaRPr lang="es-ES"/>
+          </a:p>
+        </p:txBody>
+      </p:sp>
+      <p:pic>
+        <p:nvPicPr>
+          <p:cNvPr id="7" name="Imagen 6">
+            <a:extLst>
+              <a:ext uri="{FF2B5EF4-FFF2-40B4-BE49-F238E27FC236}">
+                <a16:creationId xmlns:a16="http://schemas.microsoft.com/office/drawing/2014/main" id="{18A6A17D-5754-424B-B56F-8190906AB1D5}"/>
+              </a:ext>
+            </a:extLst>
+          </p:cNvPr>
+          <p:cNvPicPr>
+            <a:picLocks noChangeAspect="1"/>
+          </p:cNvPicPr>
+          <p:nvPr/>
+        </p:nvPicPr>
+        <p:blipFill>
+          <a:blip r:embed="rId3"/>
+          <a:stretch>
+            <a:fillRect/>
+          </a:stretch>
+        </p:blipFill>
+        <p:spPr>
+          <a:xfrm>
+            <a:off x="304800" y="1371600"/>
+            <a:ext cx="4681538" cy="3756790"/>
+          </a:xfrm>
+          <a:prstGeom prst="rect">
+            <a:avLst/>
+          </a:prstGeom>
+        </p:spPr>
+      </p:pic>
+      <p:sp>
+        <p:nvSpPr>
+          <p:cNvPr id="8" name="Título 1">
+            <a:extLst>
+              <a:ext uri="{FF2B5EF4-FFF2-40B4-BE49-F238E27FC236}">
+                <a16:creationId xmlns:a16="http://schemas.microsoft.com/office/drawing/2014/main" id="{720815DB-2A59-4C2F-A98A-6A79ED96FF03}"/>
+              </a:ext>
+            </a:extLst>
+          </p:cNvPr>
+          <p:cNvSpPr>
+            <a:spLocks noGrp="1"/>
+          </p:cNvSpPr>
+          <p:nvPr>
+            <p:ph type="title"/>
+          </p:nvPr>
+        </p:nvSpPr>
+        <p:spPr>
+          <a:xfrm>
+            <a:off x="590550" y="206375"/>
+            <a:ext cx="10991850" cy="307975"/>
+          </a:xfrm>
+        </p:spPr>
+        <p:txBody>
+          <a:bodyPr/>
+          <a:lstStyle/>
+          <a:p>
+            <a:r>
+              <a:rPr lang="es-ES" dirty="0"/>
+              <a:t>Resolución </a:t>
+            </a:r>
+            <a:r>
+              <a:rPr lang="en-US" sz="2000" dirty="0"/>
+              <a:t>Learning outcome #</a:t>
+            </a:r>
+            <a:r>
+              <a:rPr lang="en-US" dirty="0"/>
+              <a:t>3</a:t>
+            </a:r>
+            <a:endParaRPr lang="es-ES" dirty="0"/>
+          </a:p>
+        </p:txBody>
+      </p:sp>
+    </p:spTree>
+    <p:extLst>
+      <p:ext uri="{BB962C8B-B14F-4D97-AF65-F5344CB8AC3E}">
+        <p14:creationId xmlns:p14="http://schemas.microsoft.com/office/powerpoint/2010/main" val="971830008"/>
+      </p:ext>
+    </p:extLst>
+  </p:cSld>
+  <p:clrMapOvr>
+    <a:masterClrMapping/>
+  </p:clrMapOvr>
+</p:sld>
+</file>
+
+<file path=ppt/slides/slide9.xml><?xml version="1.0" encoding="utf-8"?>
+<p:sld xmlns:a="http://schemas.openxmlformats.org/drawingml/2006/main" xmlns:r="http://schemas.openxmlformats.org/officeDocument/2006/relationships" xmlns:p="http://schemas.openxmlformats.org/presentationml/2006/main">
+  <p:cSld>
+    <p:spTree>
+      <p:nvGrpSpPr>
         <p:cNvPr id="1" name="">
           <a:extLst>
             <a:ext uri="{FF2B5EF4-FFF2-40B4-BE49-F238E27FC236}">
@@ -14921,7 +16862,7 @@
           <a:p>
             <a:fld id="{B6F15528-21DE-4FAA-801E-634DDDAF4B2B}" type="slidenum">
               <a:rPr lang="es-ES" smtClean="0"/>
-              <a:t>8</a:t>
+              <a:t>9</a:t>
             </a:fld>
             <a:endParaRPr lang="es-ES"/>
           </a:p>
@@ -14973,467 +16914,6 @@
     <p:extLst>
       <p:ext uri="{BB962C8B-B14F-4D97-AF65-F5344CB8AC3E}">
         <p14:creationId xmlns:p14="http://schemas.microsoft.com/office/powerpoint/2010/main" val="3873318961"/>
-      </p:ext>
-    </p:extLst>
-  </p:cSld>
-  <p:clrMapOvr>
-    <a:masterClrMapping/>
-  </p:clrMapOvr>
-</p:sld>
-</file>
-
-<file path=ppt/slides/slide9.xml><?xml version="1.0" encoding="utf-8"?>
-<p:sld xmlns:a="http://schemas.openxmlformats.org/drawingml/2006/main" xmlns:r="http://schemas.openxmlformats.org/officeDocument/2006/relationships" xmlns:p="http://schemas.openxmlformats.org/presentationml/2006/main">
-  <p:cSld>
-    <p:spTree>
-      <p:nvGrpSpPr>
-        <p:cNvPr id="1" name="">
-          <a:extLst>
-            <a:ext uri="{FF2B5EF4-FFF2-40B4-BE49-F238E27FC236}">
-              <a16:creationId xmlns:a16="http://schemas.microsoft.com/office/drawing/2014/main" id="{91BF7C0E-2677-BADF-D636-6F9B71E665FA}"/>
-            </a:ext>
-          </a:extLst>
-        </p:cNvPr>
-        <p:cNvGrpSpPr/>
-        <p:nvPr/>
-      </p:nvGrpSpPr>
-      <p:grpSpPr>
-        <a:xfrm>
-          <a:off x="0" y="0"/>
-          <a:ext cx="0" cy="0"/>
-          <a:chOff x="0" y="0"/>
-          <a:chExt cx="0" cy="0"/>
-        </a:xfrm>
-      </p:grpSpPr>
-      <p:sp>
-        <p:nvSpPr>
-          <p:cNvPr id="16" name="object 16">
-            <a:extLst>
-              <a:ext uri="{FF2B5EF4-FFF2-40B4-BE49-F238E27FC236}">
-                <a16:creationId xmlns:a16="http://schemas.microsoft.com/office/drawing/2014/main" id="{2B8D44BF-A3B5-6BED-C39C-FA8260E83536}"/>
-              </a:ext>
-            </a:extLst>
-          </p:cNvPr>
-          <p:cNvSpPr txBox="1">
-            <a:spLocks noGrp="1"/>
-          </p:cNvSpPr>
-          <p:nvPr>
-            <p:ph type="title"/>
-          </p:nvPr>
-        </p:nvSpPr>
-        <p:spPr>
-          <a:xfrm>
-            <a:off x="685800" y="408883"/>
-            <a:ext cx="10994410" cy="705321"/>
-          </a:xfrm>
-          <a:prstGeom prst="rect">
-            <a:avLst/>
-          </a:prstGeom>
-        </p:spPr>
-        <p:txBody>
-          <a:bodyPr vert="horz" wrap="square" lIns="0" tIns="12700" rIns="0" bIns="0" rtlCol="0">
-            <a:spAutoFit/>
-          </a:bodyPr>
-          <a:lstStyle/>
-          <a:p>
-            <a:pPr marL="12700">
-              <a:lnSpc>
-                <a:spcPct val="100000"/>
-              </a:lnSpc>
-              <a:spcBef>
-                <a:spcPts val="100"/>
-              </a:spcBef>
-            </a:pPr>
-            <a:r>
-              <a:rPr lang="en-US" sz="2500" dirty="0"/>
-              <a:t>Learning outcome #4 – 4.1 2x2 Multimode Interference Coupler </a:t>
-            </a:r>
-            <a:br>
-              <a:rPr lang="en-US" sz="2500" dirty="0"/>
-            </a:br>
-            <a:r>
-              <a:rPr lang="en-US" b="0" dirty="0"/>
-              <a:t>Wavelength 1.55 µm, </a:t>
-            </a:r>
-            <a:r>
-              <a:rPr lang="en-US" b="0" dirty="0" err="1"/>
-              <a:t>wMMI</a:t>
-            </a:r>
-            <a:r>
-              <a:rPr lang="en-US" b="0" dirty="0"/>
-              <a:t> = 6.6 µm</a:t>
-            </a:r>
-            <a:endParaRPr lang="en-US" sz="2500" b="0" dirty="0">
-              <a:latin typeface="+mj-lt"/>
-              <a:cs typeface="Lucida Sans"/>
-            </a:endParaRPr>
-          </a:p>
-        </p:txBody>
-      </p:sp>
-      <p:pic>
-        <p:nvPicPr>
-          <p:cNvPr id="83" name="Gráfico 82">
-            <a:extLst>
-              <a:ext uri="{FF2B5EF4-FFF2-40B4-BE49-F238E27FC236}">
-                <a16:creationId xmlns:a16="http://schemas.microsoft.com/office/drawing/2014/main" id="{5DFCF1AD-6B06-F914-AC0B-80F0ED838EF9}"/>
-              </a:ext>
-            </a:extLst>
-          </p:cNvPr>
-          <p:cNvPicPr>
-            <a:picLocks noChangeAspect="1"/>
-          </p:cNvPicPr>
-          <p:nvPr/>
-        </p:nvPicPr>
-        <p:blipFill>
-          <a:blip r:embed="rId3">
-            <a:extLst>
-              <a:ext uri="{96DAC541-7B7A-43D3-8B79-37D633B846F1}">
-                <asvg:svgBlip xmlns:asvg="http://schemas.microsoft.com/office/drawing/2016/SVG/main" r:embed="rId4"/>
-              </a:ext>
-            </a:extLst>
-          </a:blip>
-          <a:stretch>
-            <a:fillRect/>
-          </a:stretch>
-        </p:blipFill>
-        <p:spPr>
-          <a:xfrm>
-            <a:off x="5045006" y="6356057"/>
-            <a:ext cx="6409575" cy="363174"/>
-          </a:xfrm>
-          <a:prstGeom prst="rect">
-            <a:avLst/>
-          </a:prstGeom>
-        </p:spPr>
-      </p:pic>
-      <p:sp>
-        <p:nvSpPr>
-          <p:cNvPr id="84" name="Marcador de número de diapositiva 83">
-            <a:extLst>
-              <a:ext uri="{FF2B5EF4-FFF2-40B4-BE49-F238E27FC236}">
-                <a16:creationId xmlns:a16="http://schemas.microsoft.com/office/drawing/2014/main" id="{4A656CCE-66E0-EAE0-5C63-DF1315DF6299}"/>
-              </a:ext>
-            </a:extLst>
-          </p:cNvPr>
-          <p:cNvSpPr>
-            <a:spLocks noGrp="1"/>
-          </p:cNvSpPr>
-          <p:nvPr>
-            <p:ph type="sldNum" sz="quarter" idx="7"/>
-          </p:nvPr>
-        </p:nvSpPr>
-        <p:spPr/>
-        <p:txBody>
-          <a:bodyPr/>
-          <a:lstStyle/>
-          <a:p>
-            <a:fld id="{B6F15528-21DE-4FAA-801E-634DDDAF4B2B}" type="slidenum">
-              <a:rPr lang="es-ES" smtClean="0"/>
-              <a:t>9</a:t>
-            </a:fld>
-            <a:endParaRPr lang="es-ES"/>
-          </a:p>
-        </p:txBody>
-      </p:sp>
-      <p:sp>
-        <p:nvSpPr>
-          <p:cNvPr id="3" name="Marcador de pie de página 2">
-            <a:extLst>
-              <a:ext uri="{FF2B5EF4-FFF2-40B4-BE49-F238E27FC236}">
-                <a16:creationId xmlns:a16="http://schemas.microsoft.com/office/drawing/2014/main" id="{D3AB6581-C493-80EB-A67F-5289454DAA28}"/>
-              </a:ext>
-            </a:extLst>
-          </p:cNvPr>
-          <p:cNvSpPr>
-            <a:spLocks noGrp="1"/>
-          </p:cNvSpPr>
-          <p:nvPr>
-            <p:ph type="ftr" sz="quarter" idx="5"/>
-          </p:nvPr>
-        </p:nvSpPr>
-        <p:spPr/>
-        <p:txBody>
-          <a:bodyPr/>
-          <a:lstStyle/>
-          <a:p>
-            <a:pPr marL="12700">
-              <a:spcBef>
-                <a:spcPts val="15"/>
-              </a:spcBef>
-            </a:pPr>
-            <a:r>
-              <a:rPr lang="es-ES" spc="-5"/>
-              <a:t>LAB 2.0. COUPLERS</a:t>
-            </a:r>
-            <a:endParaRPr lang="es-ES" spc="-5" dirty="0"/>
-          </a:p>
-        </p:txBody>
-      </p:sp>
-      <p:sp>
-        <p:nvSpPr>
-          <p:cNvPr id="2" name="CuadroTexto 1">
-            <a:extLst>
-              <a:ext uri="{FF2B5EF4-FFF2-40B4-BE49-F238E27FC236}">
-                <a16:creationId xmlns:a16="http://schemas.microsoft.com/office/drawing/2014/main" id="{B5029729-ADF3-3B30-4FF9-83BE1DB82BD7}"/>
-              </a:ext>
-            </a:extLst>
-          </p:cNvPr>
-          <p:cNvSpPr txBox="1"/>
-          <p:nvPr/>
-        </p:nvSpPr>
-        <p:spPr>
-          <a:xfrm>
-            <a:off x="609441" y="4819471"/>
-            <a:ext cx="11199971" cy="1200329"/>
-          </a:xfrm>
-          <a:prstGeom prst="rect">
-            <a:avLst/>
-          </a:prstGeom>
-          <a:solidFill>
-            <a:schemeClr val="bg1">
-              <a:lumMod val="95000"/>
-            </a:schemeClr>
-          </a:solidFill>
-          <a:ln w="28575">
-            <a:solidFill>
-              <a:srgbClr val="E0700D"/>
-            </a:solidFill>
-          </a:ln>
-        </p:spPr>
-        <p:txBody>
-          <a:bodyPr wrap="square" rtlCol="0">
-            <a:spAutoFit/>
-          </a:bodyPr>
-          <a:lstStyle/>
-          <a:p>
-            <a:pPr algn="just"/>
-            <a:r>
-              <a:rPr lang="en-US" sz="1200" dirty="0">
-                <a:latin typeface="Arial" panose="020B0604020202020204" pitchFamily="34" charset="0"/>
-                <a:cs typeface="Arial" panose="020B0604020202020204" pitchFamily="34" charset="0"/>
-              </a:rPr>
-              <a:t>Comment results (Coupling relationship, </a:t>
-            </a:r>
-            <a:r>
-              <a:rPr lang="en-US" sz="1200" dirty="0" err="1">
-                <a:latin typeface="Arial" panose="020B0604020202020204" pitchFamily="34" charset="0"/>
-                <a:cs typeface="Arial" panose="020B0604020202020204" pitchFamily="34" charset="0"/>
-              </a:rPr>
-              <a:t>Lpi</a:t>
-            </a:r>
-            <a:r>
-              <a:rPr lang="en-US" sz="1200" dirty="0">
-                <a:latin typeface="Arial" panose="020B0604020202020204" pitchFamily="34" charset="0"/>
-                <a:cs typeface="Arial" panose="020B0604020202020204" pitchFamily="34" charset="0"/>
-              </a:rPr>
-              <a:t>,  losses, comparison with Directional Coupler… )</a:t>
-            </a:r>
-          </a:p>
-          <a:p>
-            <a:pPr algn="just"/>
-            <a:endParaRPr lang="en-US" sz="1200" dirty="0">
-              <a:latin typeface="Arial" panose="020B0604020202020204" pitchFamily="34" charset="0"/>
-              <a:cs typeface="Arial" panose="020B0604020202020204" pitchFamily="34" charset="0"/>
-            </a:endParaRPr>
-          </a:p>
-          <a:p>
-            <a:pPr algn="just"/>
-            <a:r>
-              <a:rPr lang="en-US" sz="1200" dirty="0" err="1">
-                <a:latin typeface="Arial" panose="020B0604020202020204" pitchFamily="34" charset="0"/>
-                <a:cs typeface="Arial" panose="020B0604020202020204" pitchFamily="34" charset="0"/>
-              </a:rPr>
-              <a:t>L_pi</a:t>
-            </a:r>
-            <a:r>
-              <a:rPr lang="en-US" sz="1200" dirty="0">
-                <a:latin typeface="Arial" panose="020B0604020202020204" pitchFamily="34" charset="0"/>
-                <a:cs typeface="Arial" panose="020B0604020202020204" pitchFamily="34" charset="0"/>
-              </a:rPr>
-              <a:t> =  69.03598607255049  µm</a:t>
-            </a:r>
-          </a:p>
-          <a:p>
-            <a:pPr algn="just"/>
-            <a:endParaRPr lang="en-US" sz="1200" dirty="0">
-              <a:latin typeface="Arial" panose="020B0604020202020204" pitchFamily="34" charset="0"/>
-              <a:cs typeface="Arial" panose="020B0604020202020204" pitchFamily="34" charset="0"/>
-            </a:endParaRPr>
-          </a:p>
-          <a:p>
-            <a:pPr algn="just"/>
-            <a:r>
-              <a:rPr lang="es-ES" sz="1200" dirty="0">
-                <a:latin typeface="Arial" panose="020B0604020202020204" pitchFamily="34" charset="0"/>
-                <a:cs typeface="Arial" panose="020B0604020202020204" pitchFamily="34" charset="0"/>
-              </a:rPr>
-              <a:t>Distancia para obtener una imagen con dos salidas = </a:t>
-            </a:r>
-            <a:r>
-              <a:rPr lang="es-ES" sz="1200" dirty="0" err="1">
-                <a:latin typeface="Arial" panose="020B0604020202020204" pitchFamily="34" charset="0"/>
-                <a:cs typeface="Arial" panose="020B0604020202020204" pitchFamily="34" charset="0"/>
-              </a:rPr>
-              <a:t>L_pi</a:t>
-            </a:r>
-            <a:r>
-              <a:rPr lang="es-ES" sz="1200" dirty="0">
-                <a:latin typeface="Arial" panose="020B0604020202020204" pitchFamily="34" charset="0"/>
-                <a:cs typeface="Arial" panose="020B0604020202020204" pitchFamily="34" charset="0"/>
-              </a:rPr>
-              <a:t>/2 = 34.52 µm</a:t>
-            </a:r>
-            <a:endParaRPr lang="en-US" sz="1200" dirty="0">
-              <a:latin typeface="Arial" panose="020B0604020202020204" pitchFamily="34" charset="0"/>
-              <a:cs typeface="Arial" panose="020B0604020202020204" pitchFamily="34" charset="0"/>
-            </a:endParaRPr>
-          </a:p>
-          <a:p>
-            <a:pPr algn="just"/>
-            <a:endParaRPr lang="en-US" sz="1200" dirty="0">
-              <a:latin typeface="Arial" panose="020B0604020202020204" pitchFamily="34" charset="0"/>
-              <a:cs typeface="Arial" panose="020B0604020202020204" pitchFamily="34" charset="0"/>
-            </a:endParaRPr>
-          </a:p>
-        </p:txBody>
-      </p:sp>
-      <p:sp>
-        <p:nvSpPr>
-          <p:cNvPr id="7" name="Rectángulo 6">
-            <a:extLst>
-              <a:ext uri="{FF2B5EF4-FFF2-40B4-BE49-F238E27FC236}">
-                <a16:creationId xmlns:a16="http://schemas.microsoft.com/office/drawing/2014/main" id="{98DE5FDA-4E91-E843-E84A-1467BFAA9986}"/>
-              </a:ext>
-            </a:extLst>
-          </p:cNvPr>
-          <p:cNvSpPr/>
-          <p:nvPr/>
-        </p:nvSpPr>
-        <p:spPr>
-          <a:xfrm>
-            <a:off x="609441" y="1377510"/>
-            <a:ext cx="11199971" cy="3306028"/>
-          </a:xfrm>
-          <a:prstGeom prst="rect">
-            <a:avLst/>
-          </a:prstGeom>
-          <a:noFill/>
-          <a:ln w="28575">
-            <a:solidFill>
-              <a:srgbClr val="E0700D"/>
-            </a:solidFill>
-          </a:ln>
-        </p:spPr>
-        <p:style>
-          <a:lnRef idx="2">
-            <a:schemeClr val="accent1">
-              <a:shade val="15000"/>
-            </a:schemeClr>
-          </a:lnRef>
-          <a:fillRef idx="1">
-            <a:schemeClr val="accent1"/>
-          </a:fillRef>
-          <a:effectRef idx="0">
-            <a:schemeClr val="accent1"/>
-          </a:effectRef>
-          <a:fontRef idx="minor">
-            <a:schemeClr val="lt1"/>
-          </a:fontRef>
-        </p:style>
-        <p:txBody>
-          <a:bodyPr rtlCol="0" anchor="ctr"/>
-          <a:lstStyle/>
-          <a:p>
-            <a:pPr algn="ctr"/>
-            <a:endParaRPr lang="en-US"/>
-          </a:p>
-        </p:txBody>
-      </p:sp>
-      <p:sp>
-        <p:nvSpPr>
-          <p:cNvPr id="8" name="CuadroTexto 7">
-            <a:extLst>
-              <a:ext uri="{FF2B5EF4-FFF2-40B4-BE49-F238E27FC236}">
-                <a16:creationId xmlns:a16="http://schemas.microsoft.com/office/drawing/2014/main" id="{0DA14DBA-172E-DA2C-0573-6A00BF18F4A5}"/>
-              </a:ext>
-            </a:extLst>
-          </p:cNvPr>
-          <p:cNvSpPr txBox="1"/>
-          <p:nvPr/>
-        </p:nvSpPr>
-        <p:spPr>
-          <a:xfrm>
-            <a:off x="2286000" y="2630415"/>
-            <a:ext cx="7718580" cy="923330"/>
-          </a:xfrm>
-          <a:prstGeom prst="rect">
-            <a:avLst/>
-          </a:prstGeom>
-          <a:noFill/>
-        </p:spPr>
-        <p:txBody>
-          <a:bodyPr wrap="square" rtlCol="0">
-            <a:spAutoFit/>
-          </a:bodyPr>
-          <a:lstStyle/>
-          <a:p>
-            <a:pPr algn="ctr"/>
-            <a:r>
-              <a:rPr lang="en-US" b="1" dirty="0"/>
-              <a:t>deep</a:t>
-            </a:r>
-            <a:r>
-              <a:rPr lang="en-US" dirty="0"/>
-              <a:t> waveguide</a:t>
-            </a:r>
-          </a:p>
-          <a:p>
-            <a:pPr algn="ctr"/>
-            <a:endParaRPr lang="en-US" dirty="0"/>
-          </a:p>
-          <a:p>
-            <a:pPr algn="ctr"/>
-            <a:r>
-              <a:rPr lang="en-US" dirty="0"/>
-              <a:t>Paste propagation plots and console results</a:t>
-            </a:r>
-          </a:p>
-        </p:txBody>
-      </p:sp>
-      <p:pic>
-        <p:nvPicPr>
-          <p:cNvPr id="9" name="Imagen 8">
-            <a:extLst>
-              <a:ext uri="{FF2B5EF4-FFF2-40B4-BE49-F238E27FC236}">
-                <a16:creationId xmlns:a16="http://schemas.microsoft.com/office/drawing/2014/main" id="{9BCE17F0-A639-467B-9595-2BDBCFE50D4D}"/>
-              </a:ext>
-            </a:extLst>
-          </p:cNvPr>
-          <p:cNvPicPr>
-            <a:picLocks noChangeAspect="1"/>
-          </p:cNvPicPr>
-          <p:nvPr/>
-        </p:nvPicPr>
-        <p:blipFill>
-          <a:blip r:embed="rId5"/>
-          <a:stretch>
-            <a:fillRect/>
-          </a:stretch>
-        </p:blipFill>
-        <p:spPr>
-          <a:xfrm>
-            <a:off x="4098056" y="1387610"/>
-            <a:ext cx="3995888" cy="3295928"/>
-          </a:xfrm>
-          <a:prstGeom prst="rect">
-            <a:avLst/>
-          </a:prstGeom>
-        </p:spPr>
-      </p:pic>
-    </p:spTree>
-    <p:extLst>
-      <p:ext uri="{BB962C8B-B14F-4D97-AF65-F5344CB8AC3E}">
-        <p14:creationId xmlns:p14="http://schemas.microsoft.com/office/powerpoint/2010/main" val="2815679427"/>
       </p:ext>
     </p:extLst>
   </p:cSld>
